--- a/zajecia/robo/robo_w3.pptx
+++ b/zajecia/robo/robo_w3.pptx
@@ -3528,9 +3528,9 @@
             <a:avLst/>
           </a:prstGeom>
           <a:solidFill>
-            <a:srgbClr val="1A3550"/>
+            <a:schemeClr val="bg1"/>
           </a:solidFill>
-          <a:ln w="38100">
+          <a:ln w="57150">
             <a:solidFill>
               <a:srgbClr val="00B4D8"/>
             </a:solidFill>
@@ -3554,8 +3554,8 @@
         </p:blipFill>
         <p:spPr>
           <a:xfrm>
-            <a:off x="6720840" y="1234440"/>
-            <a:ext cx="1554480" cy="1554480"/>
+            <a:off x="6848587" y="1327896"/>
+            <a:ext cx="1262679" cy="1262679"/>
           </a:xfrm>
           <a:prstGeom prst="rect">
             <a:avLst/>
@@ -3626,7 +3626,7 @@
               <a:buNone/>
             </a:pPr>
             <a:r>
-              <a:rPr lang="en-US" sz="4000" b="1" dirty="0">
+              <a:rPr lang="en-US" sz="4400" b="1" dirty="0">
                 <a:solidFill>
                   <a:srgbClr val="FFFFFF"/>
                 </a:solidFill>
@@ -3636,7 +3636,7 @@
               </a:rPr>
               <a:t>WYKŁAD 3</a:t>
             </a:r>
-            <a:endParaRPr lang="en-US" sz="4000" dirty="0"/>
+            <a:endParaRPr lang="en-US" sz="4400" dirty="0"/>
           </a:p>
         </p:txBody>
       </p:sp>
@@ -4143,11 +4143,8 @@
           <a:bodyPr wrap="square" lIns="0" tIns="0" rIns="0" bIns="0" rtlCol="0" anchor="ctr"/>
           <a:lstStyle/>
           <a:p>
-            <a:pPr marL="0" indent="0">
-              <a:buNone/>
-            </a:pPr>
-            <a:r>
-              <a:rPr lang="en-US" sz="2800" b="1" dirty="0">
+            <a:r>
+              <a:rPr lang="pl-PL" sz="2400" b="1" dirty="0" smtClean="0">
                 <a:solidFill>
                   <a:srgbClr val="FFFFFF"/>
                 </a:solidFill>
@@ -4155,9 +4152,97 @@
                 <a:ea typeface="Trebuchet MS" pitchFamily="34" charset="-122"/>
                 <a:cs typeface="Trebuchet MS" pitchFamily="34" charset="-120"/>
               </a:rPr>
-              <a:t>Heurystyki w A* – właściwości i zastosowanie</a:t>
-            </a:r>
-            <a:endParaRPr lang="en-US" sz="2800" dirty="0"/>
+              <a:t>W</a:t>
+            </a:r>
+            <a:r>
+              <a:rPr lang="en-US" sz="2400" b="1" dirty="0" err="1" smtClean="0">
+                <a:solidFill>
+                  <a:srgbClr val="FFFFFF"/>
+                </a:solidFill>
+                <a:latin typeface="Trebuchet MS" pitchFamily="34" charset="0"/>
+                <a:ea typeface="Trebuchet MS" pitchFamily="34" charset="-122"/>
+                <a:cs typeface="Trebuchet MS" pitchFamily="34" charset="-120"/>
+              </a:rPr>
+              <a:t>łaściwości</a:t>
+            </a:r>
+            <a:r>
+              <a:rPr lang="en-US" sz="2400" b="1" dirty="0" smtClean="0">
+                <a:solidFill>
+                  <a:srgbClr val="FFFFFF"/>
+                </a:solidFill>
+                <a:latin typeface="Trebuchet MS" pitchFamily="34" charset="0"/>
+                <a:ea typeface="Trebuchet MS" pitchFamily="34" charset="-122"/>
+                <a:cs typeface="Trebuchet MS" pitchFamily="34" charset="-120"/>
+              </a:rPr>
+              <a:t> </a:t>
+            </a:r>
+            <a:r>
+              <a:rPr lang="en-US" sz="2400" b="1" dirty="0" err="1">
+                <a:solidFill>
+                  <a:srgbClr val="FFFFFF"/>
+                </a:solidFill>
+                <a:latin typeface="Trebuchet MS" pitchFamily="34" charset="0"/>
+                <a:ea typeface="Trebuchet MS" pitchFamily="34" charset="-122"/>
+                <a:cs typeface="Trebuchet MS" pitchFamily="34" charset="-120"/>
+              </a:rPr>
+              <a:t>i</a:t>
+            </a:r>
+            <a:r>
+              <a:rPr lang="en-US" sz="2400" b="1" dirty="0">
+                <a:solidFill>
+                  <a:srgbClr val="FFFFFF"/>
+                </a:solidFill>
+                <a:latin typeface="Trebuchet MS" pitchFamily="34" charset="0"/>
+                <a:ea typeface="Trebuchet MS" pitchFamily="34" charset="-122"/>
+                <a:cs typeface="Trebuchet MS" pitchFamily="34" charset="-120"/>
+              </a:rPr>
+              <a:t> </a:t>
+            </a:r>
+            <a:r>
+              <a:rPr lang="en-US" sz="2400" b="1" dirty="0" err="1" smtClean="0">
+                <a:solidFill>
+                  <a:srgbClr val="FFFFFF"/>
+                </a:solidFill>
+                <a:latin typeface="Trebuchet MS" pitchFamily="34" charset="0"/>
+                <a:ea typeface="Trebuchet MS" pitchFamily="34" charset="-122"/>
+                <a:cs typeface="Trebuchet MS" pitchFamily="34" charset="-120"/>
+              </a:rPr>
+              <a:t>zastosowanie</a:t>
+            </a:r>
+            <a:r>
+              <a:rPr lang="pl-PL" sz="2400" b="1" dirty="0" smtClean="0">
+                <a:solidFill>
+                  <a:srgbClr val="FFFFFF"/>
+                </a:solidFill>
+                <a:latin typeface="Trebuchet MS" pitchFamily="34" charset="0"/>
+                <a:ea typeface="Trebuchet MS" pitchFamily="34" charset="-122"/>
+                <a:cs typeface="Trebuchet MS" pitchFamily="34" charset="-120"/>
+              </a:rPr>
+              <a:t> </a:t>
+            </a:r>
+            <a:r>
+              <a:rPr lang="en-US" sz="2400" b="1" dirty="0" err="1">
+                <a:solidFill>
+                  <a:srgbClr val="FFFFFF"/>
+                </a:solidFill>
+                <a:latin typeface="Trebuchet MS" pitchFamily="34" charset="0"/>
+                <a:ea typeface="Trebuchet MS" pitchFamily="34" charset="-122"/>
+                <a:cs typeface="Trebuchet MS" pitchFamily="34" charset="-120"/>
+              </a:rPr>
+              <a:t>Heurystyki</a:t>
+            </a:r>
+            <a:r>
+              <a:rPr lang="en-US" sz="2400" b="1" dirty="0">
+                <a:solidFill>
+                  <a:srgbClr val="FFFFFF"/>
+                </a:solidFill>
+                <a:latin typeface="Trebuchet MS" pitchFamily="34" charset="0"/>
+                <a:ea typeface="Trebuchet MS" pitchFamily="34" charset="-122"/>
+                <a:cs typeface="Trebuchet MS" pitchFamily="34" charset="-120"/>
+              </a:rPr>
+              <a:t> w A* </a:t>
+            </a:r>
+            <a:endParaRPr lang="en-US" sz="2400" dirty="0"/>
           </a:p>
         </p:txBody>
       </p:sp>
@@ -4170,7 +4255,7 @@
         <p:spPr>
           <a:xfrm>
             <a:off x="274320" y="1097280"/>
-            <a:ext cx="4160520" cy="3749040"/>
+            <a:ext cx="4160520" cy="2969198"/>
           </a:xfrm>
           <a:prstGeom prst="rect">
             <a:avLst/>
@@ -4202,7 +4287,7 @@
         <p:spPr>
           <a:xfrm>
             <a:off x="4709160" y="1097280"/>
-            <a:ext cx="4160520" cy="3749040"/>
+            <a:ext cx="4160520" cy="2969198"/>
           </a:xfrm>
           <a:prstGeom prst="rect">
             <a:avLst/>
@@ -4754,7 +4839,7 @@
               <a:buNone/>
             </a:pPr>
             <a:r>
-              <a:rPr lang="en-US" sz="2800" b="1" dirty="0">
+              <a:rPr lang="en-US" sz="2400" b="1" dirty="0">
                 <a:solidFill>
                   <a:srgbClr val="FFFFFF"/>
                 </a:solidFill>
@@ -4764,7 +4849,7 @@
               </a:rPr>
               <a:t>Planowanie z uwzględnieniem kosztów terenu</a:t>
             </a:r>
-            <a:endParaRPr lang="en-US" sz="2800" dirty="0"/>
+            <a:endParaRPr lang="en-US" sz="2400" dirty="0"/>
           </a:p>
         </p:txBody>
       </p:sp>
@@ -4776,8 +4861,8 @@
         </p:nvSpPr>
         <p:spPr>
           <a:xfrm>
-            <a:off x="274320" y="1097280"/>
-            <a:ext cx="8595360" cy="3749040"/>
+            <a:off x="274320" y="1097281"/>
+            <a:ext cx="8595360" cy="2679266"/>
           </a:xfrm>
           <a:prstGeom prst="rect">
             <a:avLst/>
@@ -4808,8 +4893,8 @@
         </p:nvSpPr>
         <p:spPr>
           <a:xfrm>
-            <a:off x="457200" y="1188720"/>
-            <a:ext cx="8229600" cy="3520440"/>
+            <a:off x="457200" y="1181996"/>
+            <a:ext cx="8229600" cy="2467786"/>
           </a:xfrm>
           <a:prstGeom prst="rect">
             <a:avLst/>
@@ -4818,7 +4903,9 @@
           <a:ln/>
         </p:spPr>
         <p:txBody>
-          <a:bodyPr wrap="square" lIns="127000" tIns="127000" rIns="127000" bIns="127000" rtlCol="0" anchor="t"/>
+          <a:bodyPr wrap="square" lIns="127000" tIns="36000" rIns="127000" bIns="0" rtlCol="0" anchor="t">
+            <a:spAutoFit/>
+          </a:bodyPr>
           <a:lstStyle/>
           <a:p>
             <a:pPr marL="144000" indent="-144000">
@@ -5193,7 +5280,7 @@
               <a:buNone/>
             </a:pPr>
             <a:r>
-              <a:rPr lang="en-US" sz="2800" b="1" dirty="0">
+              <a:rPr lang="en-US" sz="2400" b="1" dirty="0">
                 <a:solidFill>
                   <a:srgbClr val="FFFFFF"/>
                 </a:solidFill>
@@ -5203,7 +5290,7 @@
               </a:rPr>
               <a:t>A* z mapą kosztów terenu</a:t>
             </a:r>
-            <a:endParaRPr lang="en-US" sz="2800" dirty="0"/>
+            <a:endParaRPr lang="en-US" sz="2400" dirty="0"/>
           </a:p>
         </p:txBody>
       </p:sp>
@@ -8806,7 +8893,7 @@
               <a:buNone/>
             </a:pPr>
             <a:r>
-              <a:rPr lang="en-US" sz="2800" b="1" dirty="0">
+              <a:rPr lang="en-US" sz="2400" b="1" dirty="0">
                 <a:solidFill>
                   <a:srgbClr val="FFFFFF"/>
                 </a:solidFill>
@@ -8816,7 +8903,7 @@
               </a:rPr>
               <a:t>Wygładzanie ścieżki globalnej</a:t>
             </a:r>
-            <a:endParaRPr lang="en-US" sz="2800" dirty="0"/>
+            <a:endParaRPr lang="en-US" sz="2400" dirty="0"/>
           </a:p>
         </p:txBody>
       </p:sp>
@@ -8829,7 +8916,7 @@
         <p:spPr>
           <a:xfrm>
             <a:off x="274320" y="1097280"/>
-            <a:ext cx="8595360" cy="3749040"/>
+            <a:ext cx="8595360" cy="2553596"/>
           </a:xfrm>
           <a:prstGeom prst="rect">
             <a:avLst/>
@@ -8860,8 +8947,8 @@
         </p:nvSpPr>
         <p:spPr>
           <a:xfrm>
-            <a:off x="457200" y="1188720"/>
-            <a:ext cx="8229600" cy="3520440"/>
+            <a:off x="342892" y="1158984"/>
+            <a:ext cx="8404419" cy="2290815"/>
           </a:xfrm>
           <a:prstGeom prst="rect">
             <a:avLst/>
@@ -8870,10 +8957,12 @@
           <a:ln/>
         </p:spPr>
         <p:txBody>
-          <a:bodyPr wrap="square" lIns="127000" tIns="127000" rIns="127000" bIns="127000" rtlCol="0" anchor="t"/>
+          <a:bodyPr wrap="square" lIns="127000" tIns="36000" rIns="127000" bIns="0" rtlCol="0" anchor="t">
+            <a:spAutoFit/>
+          </a:bodyPr>
           <a:lstStyle/>
           <a:p>
-            <a:pPr marL="342900" indent="-342900">
+            <a:pPr marL="180000" indent="-180000">
               <a:spcAft>
                 <a:spcPts val="900"/>
               </a:spcAft>
@@ -8894,7 +8983,7 @@
             <a:endParaRPr lang="en-US" sz="1450" dirty="0"/>
           </a:p>
           <a:p>
-            <a:pPr marL="342900" indent="-342900">
+            <a:pPr marL="180000" indent="-180000">
               <a:spcAft>
                 <a:spcPts val="900"/>
               </a:spcAft>
@@ -8902,7 +8991,7 @@
               <a:buChar char="•"/>
             </a:pPr>
             <a:r>
-              <a:rPr lang="en-US" sz="1450" dirty="0">
+              <a:rPr lang="en-US" sz="1450" b="1" dirty="0">
                 <a:solidFill>
                   <a:srgbClr val="0D1B2A"/>
                 </a:solidFill>
@@ -8910,12 +8999,23 @@
                 <a:ea typeface="Calibri" pitchFamily="34" charset="-122"/>
                 <a:cs typeface="Calibri" pitchFamily="34" charset="-120"/>
               </a:rPr>
-              <a:t>Wygładzanie: konieczne przed przekazaniem ścieżki do generatora kroków lub MPC</a:t>
+              <a:t>Wygładzanie</a:t>
+            </a:r>
+            <a:r>
+              <a:rPr lang="en-US" sz="1450" dirty="0">
+                <a:solidFill>
+                  <a:srgbClr val="0D1B2A"/>
+                </a:solidFill>
+                <a:latin typeface="Calibri" pitchFamily="34" charset="0"/>
+                <a:ea typeface="Calibri" pitchFamily="34" charset="-122"/>
+                <a:cs typeface="Calibri" pitchFamily="34" charset="-120"/>
+              </a:rPr>
+              <a:t>: konieczne przed przekazaniem ścieżki do generatora kroków lub MPC</a:t>
             </a:r>
             <a:endParaRPr lang="en-US" sz="1450" dirty="0"/>
           </a:p>
           <a:p>
-            <a:pPr marL="342900" indent="-342900">
+            <a:pPr marL="180000" indent="-180000">
               <a:spcAft>
                 <a:spcPts val="900"/>
               </a:spcAft>
@@ -8923,7 +9023,7 @@
               <a:buChar char="•"/>
             </a:pPr>
             <a:r>
-              <a:rPr lang="en-US" sz="1450" dirty="0">
+              <a:rPr lang="en-US" sz="1450" b="1" spc="-40" dirty="0" err="1">
                 <a:solidFill>
                   <a:srgbClr val="0D1B2A"/>
                 </a:solidFill>
@@ -8931,12 +9031,78 @@
                 <a:ea typeface="Calibri" pitchFamily="34" charset="-122"/>
                 <a:cs typeface="Calibri" pitchFamily="34" charset="-120"/>
               </a:rPr>
-              <a:t>Metoda 1 – interpolacja B-spline: krzywa przechodzi blisko punktów kontrolnych, zachowuje ciągłość krzywizny</a:t>
-            </a:r>
-            <a:endParaRPr lang="en-US" sz="1450" dirty="0"/>
-          </a:p>
-          <a:p>
-            <a:pPr marL="342900" indent="-342900">
+              <a:t>Metoda</a:t>
+            </a:r>
+            <a:r>
+              <a:rPr lang="en-US" sz="1450" b="1" spc="-40" dirty="0">
+                <a:solidFill>
+                  <a:srgbClr val="0D1B2A"/>
+                </a:solidFill>
+                <a:latin typeface="Calibri" pitchFamily="34" charset="0"/>
+                <a:ea typeface="Calibri" pitchFamily="34" charset="-122"/>
+                <a:cs typeface="Calibri" pitchFamily="34" charset="-120"/>
+              </a:rPr>
+              <a:t> </a:t>
+            </a:r>
+            <a:r>
+              <a:rPr lang="en-US" sz="1450" b="1" spc="-40" dirty="0" smtClean="0">
+                <a:solidFill>
+                  <a:srgbClr val="0D1B2A"/>
+                </a:solidFill>
+                <a:latin typeface="Calibri" pitchFamily="34" charset="0"/>
+                <a:ea typeface="Calibri" pitchFamily="34" charset="-122"/>
+                <a:cs typeface="Calibri" pitchFamily="34" charset="-120"/>
+              </a:rPr>
+              <a:t>1</a:t>
+            </a:r>
+            <a:r>
+              <a:rPr lang="pl-PL" sz="1450" b="1" spc="-40" dirty="0">
+                <a:solidFill>
+                  <a:srgbClr val="0D1B2A"/>
+                </a:solidFill>
+                <a:latin typeface="Calibri" pitchFamily="34" charset="0"/>
+                <a:ea typeface="Calibri" pitchFamily="34" charset="-122"/>
+                <a:cs typeface="Calibri" pitchFamily="34" charset="-120"/>
+              </a:rPr>
+              <a:t>,</a:t>
+            </a:r>
+            <a:r>
+              <a:rPr lang="en-US" sz="1450" spc="-40" dirty="0" smtClean="0">
+                <a:solidFill>
+                  <a:srgbClr val="0D1B2A"/>
+                </a:solidFill>
+                <a:latin typeface="Calibri" pitchFamily="34" charset="0"/>
+                <a:ea typeface="Calibri" pitchFamily="34" charset="-122"/>
+                <a:cs typeface="Calibri" pitchFamily="34" charset="-120"/>
+              </a:rPr>
+              <a:t> </a:t>
+            </a:r>
+            <a:r>
+              <a:rPr lang="en-US" sz="1450" b="1" spc="-40" dirty="0">
+                <a:solidFill>
+                  <a:srgbClr val="0D1B2A"/>
+                </a:solidFill>
+                <a:latin typeface="Calibri" pitchFamily="34" charset="0"/>
+                <a:ea typeface="Calibri" pitchFamily="34" charset="-122"/>
+                <a:cs typeface="Calibri" pitchFamily="34" charset="-120"/>
+              </a:rPr>
+              <a:t>interpolacja B-spline</a:t>
+            </a:r>
+            <a:r>
+              <a:rPr lang="en-US" sz="1450" spc="-40" dirty="0">
+                <a:solidFill>
+                  <a:srgbClr val="0D1B2A"/>
+                </a:solidFill>
+                <a:latin typeface="Calibri" pitchFamily="34" charset="0"/>
+                <a:ea typeface="Calibri" pitchFamily="34" charset="-122"/>
+                <a:cs typeface="Calibri" pitchFamily="34" charset="-120"/>
+              </a:rPr>
+              <a:t>: krzywa przechodzi blisko punktów kontrolnych, zachowuje ciągłość krzywizny</a:t>
+            </a:r>
+            <a:endParaRPr lang="en-US" sz="1450" spc="-40" dirty="0"/>
+          </a:p>
+          <a:p>
+            <a:pPr marL="180000" indent="-180000">
               <a:spcAft>
                 <a:spcPts val="900"/>
               </a:spcAft>
@@ -8944,7 +9110,7 @@
               <a:buChar char="•"/>
             </a:pPr>
             <a:r>
-              <a:rPr lang="en-US" sz="1450" dirty="0">
+              <a:rPr lang="en-US" sz="1450" b="1" spc="-40" dirty="0" err="1">
                 <a:solidFill>
                   <a:srgbClr val="0D1B2A"/>
                 </a:solidFill>
@@ -8952,12 +9118,111 @@
                 <a:ea typeface="Calibri" pitchFamily="34" charset="-122"/>
                 <a:cs typeface="Calibri" pitchFamily="34" charset="-120"/>
               </a:rPr>
-              <a:t>Metoda 2 – skrótów (shortcutting): iteracyjne usuwanie pośrednich punktów, jeśli prosta jest wolna od przeszkód</a:t>
-            </a:r>
-            <a:endParaRPr lang="en-US" sz="1450" dirty="0"/>
-          </a:p>
-          <a:p>
-            <a:pPr marL="342900" indent="-342900">
+              <a:t>Metoda</a:t>
+            </a:r>
+            <a:r>
+              <a:rPr lang="en-US" sz="1450" b="1" spc="-40" dirty="0">
+                <a:solidFill>
+                  <a:srgbClr val="0D1B2A"/>
+                </a:solidFill>
+                <a:latin typeface="Calibri" pitchFamily="34" charset="0"/>
+                <a:ea typeface="Calibri" pitchFamily="34" charset="-122"/>
+                <a:cs typeface="Calibri" pitchFamily="34" charset="-120"/>
+              </a:rPr>
+              <a:t> </a:t>
+            </a:r>
+            <a:r>
+              <a:rPr lang="en-US" sz="1450" b="1" spc="-40" dirty="0" smtClean="0">
+                <a:solidFill>
+                  <a:srgbClr val="0D1B2A"/>
+                </a:solidFill>
+                <a:latin typeface="Calibri" pitchFamily="34" charset="0"/>
+                <a:ea typeface="Calibri" pitchFamily="34" charset="-122"/>
+                <a:cs typeface="Calibri" pitchFamily="34" charset="-120"/>
+              </a:rPr>
+              <a:t>2</a:t>
+            </a:r>
+            <a:r>
+              <a:rPr lang="pl-PL" sz="1450" b="1" spc="-40" dirty="0" smtClean="0">
+                <a:solidFill>
+                  <a:srgbClr val="0D1B2A"/>
+                </a:solidFill>
+                <a:latin typeface="Calibri" pitchFamily="34" charset="0"/>
+                <a:ea typeface="Calibri" pitchFamily="34" charset="-122"/>
+                <a:cs typeface="Calibri" pitchFamily="34" charset="-120"/>
+              </a:rPr>
+              <a:t>,</a:t>
+            </a:r>
+            <a:r>
+              <a:rPr lang="en-US" sz="1450" spc="-40" dirty="0" smtClean="0">
+                <a:solidFill>
+                  <a:srgbClr val="0D1B2A"/>
+                </a:solidFill>
+                <a:latin typeface="Calibri" pitchFamily="34" charset="0"/>
+                <a:ea typeface="Calibri" pitchFamily="34" charset="-122"/>
+                <a:cs typeface="Calibri" pitchFamily="34" charset="-120"/>
+              </a:rPr>
+              <a:t> </a:t>
+            </a:r>
+            <a:r>
+              <a:rPr lang="en-US" sz="1450" b="1" spc="-40" dirty="0" err="1" smtClean="0">
+                <a:solidFill>
+                  <a:srgbClr val="0D1B2A"/>
+                </a:solidFill>
+                <a:latin typeface="Calibri" pitchFamily="34" charset="0"/>
+                <a:ea typeface="Calibri" pitchFamily="34" charset="-122"/>
+                <a:cs typeface="Calibri" pitchFamily="34" charset="-120"/>
+              </a:rPr>
+              <a:t>skr</a:t>
+            </a:r>
+            <a:r>
+              <a:rPr lang="pl-PL" sz="1450" b="1" spc="-40" dirty="0" smtClean="0">
+                <a:solidFill>
+                  <a:srgbClr val="0D1B2A"/>
+                </a:solidFill>
+                <a:latin typeface="Calibri" pitchFamily="34" charset="0"/>
+                <a:ea typeface="Calibri" pitchFamily="34" charset="-122"/>
+                <a:cs typeface="Calibri" pitchFamily="34" charset="-120"/>
+              </a:rPr>
+              <a:t>acanie</a:t>
+            </a:r>
+            <a:r>
+              <a:rPr lang="en-US" sz="1450" b="1" spc="-40" dirty="0" smtClean="0">
+                <a:solidFill>
+                  <a:srgbClr val="0D1B2A"/>
+                </a:solidFill>
+                <a:latin typeface="Calibri" pitchFamily="34" charset="0"/>
+                <a:ea typeface="Calibri" pitchFamily="34" charset="-122"/>
+                <a:cs typeface="Calibri" pitchFamily="34" charset="-120"/>
+              </a:rPr>
+              <a:t> </a:t>
+            </a:r>
+            <a:r>
+              <a:rPr lang="en-US" sz="1450" b="1" spc="-40" dirty="0">
+                <a:solidFill>
+                  <a:srgbClr val="0D1B2A"/>
+                </a:solidFill>
+                <a:latin typeface="Calibri" pitchFamily="34" charset="0"/>
+                <a:ea typeface="Calibri" pitchFamily="34" charset="-122"/>
+                <a:cs typeface="Calibri" pitchFamily="34" charset="-120"/>
+              </a:rPr>
+              <a:t>(shortcutting): </a:t>
+            </a:r>
+            <a:r>
+              <a:rPr lang="en-US" sz="1450" spc="-40" dirty="0">
+                <a:solidFill>
+                  <a:srgbClr val="0D1B2A"/>
+                </a:solidFill>
+                <a:latin typeface="Calibri" pitchFamily="34" charset="0"/>
+                <a:ea typeface="Calibri" pitchFamily="34" charset="-122"/>
+                <a:cs typeface="Calibri" pitchFamily="34" charset="-120"/>
+              </a:rPr>
+              <a:t>iteracyjne usuwanie pośrednich punktów, jeśli prosta jest wolna od przeszkód</a:t>
+            </a:r>
+            <a:endParaRPr lang="en-US" sz="1450" spc="-40" dirty="0"/>
+          </a:p>
+          <a:p>
+            <a:pPr marL="180000" indent="-180000">
               <a:spcAft>
                 <a:spcPts val="900"/>
               </a:spcAft>
@@ -8965,7 +9230,7 @@
               <a:buChar char="•"/>
             </a:pPr>
             <a:r>
-              <a:rPr lang="en-US" sz="1450" dirty="0">
+              <a:rPr lang="en-US" sz="1450" b="1" dirty="0" err="1">
                 <a:solidFill>
                   <a:srgbClr val="0D1B2A"/>
                 </a:solidFill>
@@ -8973,12 +9238,78 @@
                 <a:ea typeface="Calibri" pitchFamily="34" charset="-122"/>
                 <a:cs typeface="Calibri" pitchFamily="34" charset="-120"/>
               </a:rPr>
-              <a:t>Metoda 3 – filtr Gaussa 1D: ważona średnia po sąsiednich punktach wzdłuż ścieżki</a:t>
+              <a:t>Metoda</a:t>
+            </a:r>
+            <a:r>
+              <a:rPr lang="en-US" sz="1450" b="1" dirty="0">
+                <a:solidFill>
+                  <a:srgbClr val="0D1B2A"/>
+                </a:solidFill>
+                <a:latin typeface="Calibri" pitchFamily="34" charset="0"/>
+                <a:ea typeface="Calibri" pitchFamily="34" charset="-122"/>
+                <a:cs typeface="Calibri" pitchFamily="34" charset="-120"/>
+              </a:rPr>
+              <a:t> </a:t>
+            </a:r>
+            <a:r>
+              <a:rPr lang="en-US" sz="1450" b="1" dirty="0" smtClean="0">
+                <a:solidFill>
+                  <a:srgbClr val="0D1B2A"/>
+                </a:solidFill>
+                <a:latin typeface="Calibri" pitchFamily="34" charset="0"/>
+                <a:ea typeface="Calibri" pitchFamily="34" charset="-122"/>
+                <a:cs typeface="Calibri" pitchFamily="34" charset="-120"/>
+              </a:rPr>
+              <a:t>3</a:t>
+            </a:r>
+            <a:r>
+              <a:rPr lang="pl-PL" sz="1450" b="1" dirty="0">
+                <a:solidFill>
+                  <a:srgbClr val="0D1B2A"/>
+                </a:solidFill>
+                <a:latin typeface="Calibri" pitchFamily="34" charset="0"/>
+                <a:ea typeface="Calibri" pitchFamily="34" charset="-122"/>
+                <a:cs typeface="Calibri" pitchFamily="34" charset="-120"/>
+              </a:rPr>
+              <a:t>,</a:t>
+            </a:r>
+            <a:r>
+              <a:rPr lang="en-US" sz="1450" dirty="0" smtClean="0">
+                <a:solidFill>
+                  <a:srgbClr val="0D1B2A"/>
+                </a:solidFill>
+                <a:latin typeface="Calibri" pitchFamily="34" charset="0"/>
+                <a:ea typeface="Calibri" pitchFamily="34" charset="-122"/>
+                <a:cs typeface="Calibri" pitchFamily="34" charset="-120"/>
+              </a:rPr>
+              <a:t> </a:t>
+            </a:r>
+            <a:r>
+              <a:rPr lang="en-US" sz="1450" b="1" dirty="0">
+                <a:solidFill>
+                  <a:srgbClr val="0D1B2A"/>
+                </a:solidFill>
+                <a:latin typeface="Calibri" pitchFamily="34" charset="0"/>
+                <a:ea typeface="Calibri" pitchFamily="34" charset="-122"/>
+                <a:cs typeface="Calibri" pitchFamily="34" charset="-120"/>
+              </a:rPr>
+              <a:t>filtr Gaussa 1D</a:t>
+            </a:r>
+            <a:r>
+              <a:rPr lang="en-US" sz="1450" dirty="0">
+                <a:solidFill>
+                  <a:srgbClr val="0D1B2A"/>
+                </a:solidFill>
+                <a:latin typeface="Calibri" pitchFamily="34" charset="0"/>
+                <a:ea typeface="Calibri" pitchFamily="34" charset="-122"/>
+                <a:cs typeface="Calibri" pitchFamily="34" charset="-120"/>
+              </a:rPr>
+              <a:t>: ważona średnia po sąsiednich punktach wzdłuż ścieżki</a:t>
             </a:r>
             <a:endParaRPr lang="en-US" sz="1450" dirty="0"/>
           </a:p>
           <a:p>
-            <a:pPr marL="342900" indent="-342900">
+            <a:pPr marL="180000" indent="-180000">
               <a:spcAft>
                 <a:spcPts val="900"/>
               </a:spcAft>
@@ -8986,7 +9317,7 @@
               <a:buChar char="•"/>
             </a:pPr>
             <a:r>
-              <a:rPr lang="en-US" sz="1450" dirty="0">
+              <a:rPr lang="en-US" sz="1450" b="1" dirty="0">
                 <a:solidFill>
                   <a:srgbClr val="0D1B2A"/>
                 </a:solidFill>
@@ -8994,12 +9325,23 @@
                 <a:ea typeface="Calibri" pitchFamily="34" charset="-122"/>
                 <a:cs typeface="Calibri" pitchFamily="34" charset="-120"/>
               </a:rPr>
-              <a:t>Metryka: kąt ugięcia &lt; 15° między kolejnymi odcinkami jako warunek akceptacji</a:t>
+              <a:t>Metryka</a:t>
+            </a:r>
+            <a:r>
+              <a:rPr lang="en-US" sz="1450" dirty="0">
+                <a:solidFill>
+                  <a:srgbClr val="0D1B2A"/>
+                </a:solidFill>
+                <a:latin typeface="Calibri" pitchFamily="34" charset="0"/>
+                <a:ea typeface="Calibri" pitchFamily="34" charset="-122"/>
+                <a:cs typeface="Calibri" pitchFamily="34" charset="-120"/>
+              </a:rPr>
+              <a:t>: kąt ugięcia &lt; 15° między kolejnymi odcinkami jako warunek akceptacji</a:t>
             </a:r>
             <a:endParaRPr lang="en-US" sz="1450" dirty="0"/>
           </a:p>
           <a:p>
-            <a:pPr marL="342900" indent="-342900">
+            <a:pPr marL="180000" indent="-180000">
               <a:spcAft>
                 <a:spcPts val="900"/>
               </a:spcAft>
@@ -9007,7 +9349,7 @@
               <a:buChar char="•"/>
             </a:pPr>
             <a:r>
-              <a:rPr lang="en-US" sz="1450" dirty="0">
+              <a:rPr lang="en-US" sz="1450" b="1" dirty="0">
                 <a:solidFill>
                   <a:srgbClr val="0D1B2A"/>
                 </a:solidFill>
@@ -9015,7 +9357,18 @@
                 <a:ea typeface="Calibri" pitchFamily="34" charset="-122"/>
                 <a:cs typeface="Calibri" pitchFamily="34" charset="-120"/>
               </a:rPr>
-              <a:t>Ważne: wygładzona ścieżka musi pozostawać w wolnej przestrzeni – weryfikacja kolizji po wygładzeniu</a:t>
+              <a:t>Ważne</a:t>
+            </a:r>
+            <a:r>
+              <a:rPr lang="en-US" sz="1450" dirty="0">
+                <a:solidFill>
+                  <a:srgbClr val="0D1B2A"/>
+                </a:solidFill>
+                <a:latin typeface="Calibri" pitchFamily="34" charset="0"/>
+                <a:ea typeface="Calibri" pitchFamily="34" charset="-122"/>
+                <a:cs typeface="Calibri" pitchFamily="34" charset="-120"/>
+              </a:rPr>
+              <a:t>: wygładzona ścieżka musi pozostawać w wolnej przestrzeni – weryfikacja kolizji po wygładzeniu</a:t>
             </a:r>
             <a:endParaRPr lang="en-US" sz="1450" dirty="0"/>
           </a:p>
@@ -9120,6 +9473,13 @@
           </a:prstGeom>
           <a:noFill/>
           <a:ln/>
+          <a:effectLst>
+            <a:outerShdw blurRad="50800" dist="38100" dir="2700000" algn="tl" rotWithShape="0">
+              <a:prstClr val="black">
+                <a:alpha val="40000"/>
+              </a:prstClr>
+            </a:outerShdw>
+          </a:effectLst>
         </p:spPr>
         <p:txBody>
           <a:bodyPr wrap="square" lIns="0" tIns="0" rIns="0" bIns="0" rtlCol="0" anchor="ctr"/>
@@ -9160,14 +9520,21 @@
             <a:avLst/>
           </a:prstGeom>
           <a:solidFill>
-            <a:srgbClr val="0D1B2A"/>
+            <a:schemeClr val="bg1"/>
           </a:solidFill>
-          <a:ln w="25400">
+          <a:ln w="57150">
             <a:solidFill>
               <a:srgbClr val="FB923C"/>
             </a:solidFill>
             <a:prstDash val="solid"/>
           </a:ln>
+          <a:effectLst>
+            <a:outerShdw blurRad="50800" dist="38100" dir="2700000" algn="tl" rotWithShape="0">
+              <a:prstClr val="black">
+                <a:alpha val="40000"/>
+              </a:prstClr>
+            </a:outerShdw>
+          </a:effectLst>
         </p:spPr>
       </p:sp>
       <p:pic>
@@ -9186,8 +9553,8 @@
         </p:blipFill>
         <p:spPr>
           <a:xfrm>
-            <a:off x="7406640" y="1645920"/>
-            <a:ext cx="1097280" cy="1097280"/>
+            <a:off x="7463140" y="1702420"/>
+            <a:ext cx="984280" cy="984280"/>
           </a:xfrm>
           <a:prstGeom prst="rect">
             <a:avLst/>
@@ -9312,6 +9679,13 @@
             </a:solidFill>
             <a:prstDash val="solid"/>
           </a:ln>
+          <a:effectLst>
+            <a:outerShdw blurRad="50800" dist="38100" dir="2700000" algn="tl" rotWithShape="0">
+              <a:prstClr val="black">
+                <a:alpha val="40000"/>
+              </a:prstClr>
+            </a:outerShdw>
+          </a:effectLst>
         </p:spPr>
       </p:sp>
       <p:sp>
@@ -9522,8 +9896,8 @@
         </p:nvSpPr>
         <p:spPr>
           <a:xfrm>
-            <a:off x="274320" y="1143000"/>
-            <a:ext cx="4160520" cy="1691640"/>
+            <a:off x="274320" y="1143001"/>
+            <a:ext cx="4160520" cy="1262854"/>
           </a:xfrm>
           <a:prstGeom prst="rect">
             <a:avLst/>
@@ -9580,7 +9954,7 @@
         <p:spPr>
           <a:xfrm>
             <a:off x="384048" y="1234440"/>
-            <a:ext cx="3941064" cy="642823"/>
+            <a:ext cx="3941064" cy="520017"/>
           </a:xfrm>
           <a:prstGeom prst="rect">
             <a:avLst/>
@@ -9596,7 +9970,7 @@
               <a:buNone/>
             </a:pPr>
             <a:r>
-              <a:rPr lang="en-US" b="1" dirty="0">
+              <a:rPr lang="en-US" sz="2000" b="1" dirty="0">
                 <a:solidFill>
                   <a:srgbClr val="0D1B2A"/>
                 </a:solidFill>
@@ -9606,7 +9980,7 @@
               </a:rPr>
               <a:t>Świat dynamiczny</a:t>
             </a:r>
-            <a:endParaRPr lang="en-US" dirty="0"/>
+            <a:endParaRPr lang="en-US" sz="2000" dirty="0"/>
           </a:p>
         </p:txBody>
       </p:sp>
@@ -9618,8 +9992,8 @@
         </p:nvSpPr>
         <p:spPr>
           <a:xfrm>
-            <a:off x="384048" y="1853489"/>
-            <a:ext cx="3941064" cy="930402"/>
+            <a:off x="384048" y="1764281"/>
+            <a:ext cx="4050792" cy="599779"/>
           </a:xfrm>
           <a:prstGeom prst="rect">
             <a:avLst/>
@@ -9635,7 +10009,7 @@
               <a:buNone/>
             </a:pPr>
             <a:r>
-              <a:rPr lang="en-US" sz="1400" dirty="0">
+              <a:rPr lang="en-US" sz="1400" spc="-20" dirty="0">
                 <a:solidFill>
                   <a:srgbClr val="475569"/>
                 </a:solidFill>
@@ -9643,9 +10017,108 @@
                 <a:ea typeface="Calibri" pitchFamily="34" charset="-122"/>
                 <a:cs typeface="Calibri" pitchFamily="34" charset="-120"/>
               </a:rPr>
-              <a:t>Mapa globalna nie uwzględnia ludzi, wózków, otwieranych drzwi – planista lokalny reaguje na bieżąco</a:t>
-            </a:r>
-            <a:endParaRPr lang="en-US" sz="1400" dirty="0"/>
+              <a:t>Mapa globalna nie uwzględnia ludzi, wózków, </a:t>
+            </a:r>
+            <a:r>
+              <a:rPr lang="en-US" sz="1400" spc="-20" dirty="0" err="1">
+                <a:solidFill>
+                  <a:srgbClr val="475569"/>
+                </a:solidFill>
+                <a:latin typeface="Calibri" pitchFamily="34" charset="0"/>
+                <a:ea typeface="Calibri" pitchFamily="34" charset="-122"/>
+                <a:cs typeface="Calibri" pitchFamily="34" charset="-120"/>
+              </a:rPr>
+              <a:t>otwieranych</a:t>
+            </a:r>
+            <a:r>
+              <a:rPr lang="en-US" sz="1400" spc="-20" dirty="0">
+                <a:solidFill>
+                  <a:srgbClr val="475569"/>
+                </a:solidFill>
+                <a:latin typeface="Calibri" pitchFamily="34" charset="0"/>
+                <a:ea typeface="Calibri" pitchFamily="34" charset="-122"/>
+                <a:cs typeface="Calibri" pitchFamily="34" charset="-120"/>
+              </a:rPr>
+              <a:t> </a:t>
+            </a:r>
+            <a:r>
+              <a:rPr lang="en-US" sz="1400" spc="-20" dirty="0" err="1" smtClean="0">
+                <a:solidFill>
+                  <a:srgbClr val="475569"/>
+                </a:solidFill>
+                <a:latin typeface="Calibri" pitchFamily="34" charset="0"/>
+                <a:ea typeface="Calibri" pitchFamily="34" charset="-122"/>
+                <a:cs typeface="Calibri" pitchFamily="34" charset="-120"/>
+              </a:rPr>
+              <a:t>drzwi</a:t>
+            </a:r>
+            <a:r>
+              <a:rPr lang="pl-PL" sz="1400" spc="-20" dirty="0">
+                <a:solidFill>
+                  <a:srgbClr val="475569"/>
+                </a:solidFill>
+                <a:latin typeface="Calibri" pitchFamily="34" charset="0"/>
+                <a:ea typeface="Calibri" pitchFamily="34" charset="-122"/>
+                <a:cs typeface="Calibri" pitchFamily="34" charset="-120"/>
+              </a:rPr>
+              <a:t>.</a:t>
+            </a:r>
+            <a:r>
+              <a:rPr lang="en-US" sz="1400" spc="-20" dirty="0" smtClean="0">
+                <a:solidFill>
+                  <a:srgbClr val="475569"/>
+                </a:solidFill>
+                <a:latin typeface="Calibri" pitchFamily="34" charset="0"/>
+                <a:ea typeface="Calibri" pitchFamily="34" charset="-122"/>
+                <a:cs typeface="Calibri" pitchFamily="34" charset="-120"/>
+              </a:rPr>
+              <a:t> </a:t>
+            </a:r>
+            <a:r>
+              <a:rPr lang="pl-PL" sz="1400" spc="-20" dirty="0">
+                <a:solidFill>
+                  <a:srgbClr val="475569"/>
+                </a:solidFill>
+                <a:latin typeface="Calibri" pitchFamily="34" charset="0"/>
+                <a:ea typeface="Calibri" pitchFamily="34" charset="-122"/>
+                <a:cs typeface="Calibri" pitchFamily="34" charset="-120"/>
+              </a:rPr>
+              <a:t>P</a:t>
+            </a:r>
+            <a:r>
+              <a:rPr lang="en-US" sz="1400" spc="-20" dirty="0" err="1" smtClean="0">
+                <a:solidFill>
+                  <a:srgbClr val="475569"/>
+                </a:solidFill>
+                <a:latin typeface="Calibri" pitchFamily="34" charset="0"/>
+                <a:ea typeface="Calibri" pitchFamily="34" charset="-122"/>
+                <a:cs typeface="Calibri" pitchFamily="34" charset="-120"/>
+              </a:rPr>
+              <a:t>lanista</a:t>
+            </a:r>
+            <a:r>
+              <a:rPr lang="en-US" sz="1400" spc="-20" dirty="0" smtClean="0">
+                <a:solidFill>
+                  <a:srgbClr val="475569"/>
+                </a:solidFill>
+                <a:latin typeface="Calibri" pitchFamily="34" charset="0"/>
+                <a:ea typeface="Calibri" pitchFamily="34" charset="-122"/>
+                <a:cs typeface="Calibri" pitchFamily="34" charset="-120"/>
+              </a:rPr>
+              <a:t> </a:t>
+            </a:r>
+            <a:r>
+              <a:rPr lang="en-US" sz="1400" spc="-20" dirty="0">
+                <a:solidFill>
+                  <a:srgbClr val="475569"/>
+                </a:solidFill>
+                <a:latin typeface="Calibri" pitchFamily="34" charset="0"/>
+                <a:ea typeface="Calibri" pitchFamily="34" charset="-122"/>
+                <a:cs typeface="Calibri" pitchFamily="34" charset="-120"/>
+              </a:rPr>
+              <a:t>lokalny reaguje na bieżąco</a:t>
+            </a:r>
+            <a:endParaRPr lang="en-US" sz="1400" spc="-20" dirty="0"/>
           </a:p>
         </p:txBody>
       </p:sp>
@@ -9657,8 +10130,8 @@
         </p:nvSpPr>
         <p:spPr>
           <a:xfrm>
-            <a:off x="4709160" y="1143000"/>
-            <a:ext cx="4160520" cy="1691640"/>
+            <a:off x="4709160" y="1143001"/>
+            <a:ext cx="4160520" cy="1262854"/>
           </a:xfrm>
           <a:prstGeom prst="rect">
             <a:avLst/>
@@ -9715,7 +10188,7 @@
         <p:spPr>
           <a:xfrm>
             <a:off x="4818888" y="1234440"/>
-            <a:ext cx="3941064" cy="642823"/>
+            <a:ext cx="3941064" cy="520017"/>
           </a:xfrm>
           <a:prstGeom prst="rect">
             <a:avLst/>
@@ -9731,7 +10204,7 @@
               <a:buNone/>
             </a:pPr>
             <a:r>
-              <a:rPr lang="en-US" b="1" dirty="0">
+              <a:rPr lang="en-US" sz="2000" b="1" dirty="0">
                 <a:solidFill>
                   <a:srgbClr val="0D1B2A"/>
                 </a:solidFill>
@@ -9741,7 +10214,7 @@
               </a:rPr>
               <a:t>Niedoskonała mapa</a:t>
             </a:r>
-            <a:endParaRPr lang="en-US" dirty="0"/>
+            <a:endParaRPr lang="en-US" sz="2000" dirty="0"/>
           </a:p>
         </p:txBody>
       </p:sp>
@@ -9753,8 +10226,8 @@
         </p:nvSpPr>
         <p:spPr>
           <a:xfrm>
-            <a:off x="4818888" y="1853489"/>
-            <a:ext cx="3941064" cy="930402"/>
+            <a:off x="4818888" y="1764281"/>
+            <a:ext cx="3941064" cy="599779"/>
           </a:xfrm>
           <a:prstGeom prst="rect">
             <a:avLst/>
@@ -9792,8 +10265,8 @@
         </p:nvSpPr>
         <p:spPr>
           <a:xfrm>
-            <a:off x="274320" y="2971800"/>
-            <a:ext cx="4160520" cy="1691640"/>
+            <a:off x="274320" y="2614965"/>
+            <a:ext cx="4160520" cy="1354871"/>
           </a:xfrm>
           <a:prstGeom prst="rect">
             <a:avLst/>
@@ -9824,7 +10297,7 @@
         </p:nvSpPr>
         <p:spPr>
           <a:xfrm>
-            <a:off x="274320" y="2971800"/>
+            <a:off x="274320" y="2614965"/>
             <a:ext cx="4160520" cy="54864"/>
           </a:xfrm>
           <a:prstGeom prst="rect">
@@ -9849,8 +10322,8 @@
         </p:nvSpPr>
         <p:spPr>
           <a:xfrm>
-            <a:off x="384048" y="3063240"/>
-            <a:ext cx="3941064" cy="642823"/>
+            <a:off x="384048" y="2706405"/>
+            <a:ext cx="3941064" cy="520017"/>
           </a:xfrm>
           <a:prstGeom prst="rect">
             <a:avLst/>
@@ -9866,7 +10339,7 @@
               <a:buNone/>
             </a:pPr>
             <a:r>
-              <a:rPr lang="en-US" b="1" dirty="0">
+              <a:rPr lang="en-US" sz="2000" b="1" dirty="0">
                 <a:solidFill>
                   <a:srgbClr val="0D1B2A"/>
                 </a:solidFill>
@@ -9876,7 +10349,7 @@
               </a:rPr>
               <a:t>Ograniczenia dynamiki</a:t>
             </a:r>
-            <a:endParaRPr lang="en-US" dirty="0"/>
+            <a:endParaRPr lang="en-US" sz="2000" dirty="0"/>
           </a:p>
         </p:txBody>
       </p:sp>
@@ -9888,8 +10361,8 @@
         </p:nvSpPr>
         <p:spPr>
           <a:xfrm>
-            <a:off x="384048" y="3682289"/>
-            <a:ext cx="3941064" cy="930402"/>
+            <a:off x="384048" y="3236246"/>
+            <a:ext cx="3941064" cy="599779"/>
           </a:xfrm>
           <a:prstGeom prst="rect">
             <a:avLst/>
@@ -9927,8 +10400,8 @@
         </p:nvSpPr>
         <p:spPr>
           <a:xfrm>
-            <a:off x="4709160" y="2971800"/>
-            <a:ext cx="4160520" cy="1691640"/>
+            <a:off x="4709160" y="2614965"/>
+            <a:ext cx="4160520" cy="1354871"/>
           </a:xfrm>
           <a:prstGeom prst="rect">
             <a:avLst/>
@@ -9959,7 +10432,7 @@
         </p:nvSpPr>
         <p:spPr>
           <a:xfrm>
-            <a:off x="4709160" y="2971800"/>
+            <a:off x="4709160" y="2614965"/>
             <a:ext cx="4160520" cy="54864"/>
           </a:xfrm>
           <a:prstGeom prst="rect">
@@ -9984,8 +10457,8 @@
         </p:nvSpPr>
         <p:spPr>
           <a:xfrm>
-            <a:off x="4818888" y="3063240"/>
-            <a:ext cx="3941064" cy="642823"/>
+            <a:off x="4818888" y="2706405"/>
+            <a:ext cx="3941064" cy="520017"/>
           </a:xfrm>
           <a:prstGeom prst="rect">
             <a:avLst/>
@@ -10001,7 +10474,7 @@
               <a:buNone/>
             </a:pPr>
             <a:r>
-              <a:rPr lang="en-US" b="1" dirty="0">
+              <a:rPr lang="en-US" sz="2000" b="1" dirty="0">
                 <a:solidFill>
                   <a:srgbClr val="0D1B2A"/>
                 </a:solidFill>
@@ -10011,7 +10484,7 @@
               </a:rPr>
               <a:t>Horyzont predykcji</a:t>
             </a:r>
-            <a:endParaRPr lang="en-US" dirty="0"/>
+            <a:endParaRPr lang="en-US" sz="2000" dirty="0"/>
           </a:p>
         </p:txBody>
       </p:sp>
@@ -10023,8 +10496,8 @@
         </p:nvSpPr>
         <p:spPr>
           <a:xfrm>
-            <a:off x="4818888" y="3682289"/>
-            <a:ext cx="3941064" cy="930402"/>
+            <a:off x="4818888" y="3236246"/>
+            <a:ext cx="3941064" cy="599779"/>
           </a:xfrm>
           <a:prstGeom prst="rect">
             <a:avLst/>
@@ -10201,7 +10674,7 @@
               <a:buNone/>
             </a:pPr>
             <a:r>
-              <a:rPr lang="en-US" sz="2800" b="1" dirty="0">
+              <a:rPr lang="en-US" sz="2400" b="1" dirty="0">
                 <a:solidFill>
                   <a:srgbClr val="FFFFFF"/>
                 </a:solidFill>
@@ -10209,9 +10682,20 @@
                 <a:ea typeface="Trebuchet MS" pitchFamily="34" charset="-122"/>
                 <a:cs typeface="Trebuchet MS" pitchFamily="34" charset="-120"/>
               </a:rPr>
-              <a:t>Pola potencjału (Potential Fields)</a:t>
-            </a:r>
-            <a:endParaRPr lang="en-US" sz="2800" dirty="0"/>
+              <a:t>Pola potencjału </a:t>
+            </a:r>
+            <a:r>
+              <a:rPr lang="en-US" sz="2400" dirty="0">
+                <a:solidFill>
+                  <a:srgbClr val="FFFFFF"/>
+                </a:solidFill>
+                <a:latin typeface="Trebuchet MS" pitchFamily="34" charset="0"/>
+                <a:ea typeface="Trebuchet MS" pitchFamily="34" charset="-122"/>
+                <a:cs typeface="Trebuchet MS" pitchFamily="34" charset="-120"/>
+              </a:rPr>
+              <a:t>(Potential Fields)</a:t>
+            </a:r>
+            <a:endParaRPr lang="en-US" sz="2400" dirty="0"/>
           </a:p>
         </p:txBody>
       </p:sp>
@@ -10223,8 +10707,8 @@
         </p:nvSpPr>
         <p:spPr>
           <a:xfrm>
-            <a:off x="274320" y="1097280"/>
-            <a:ext cx="5394960" cy="3749040"/>
+            <a:off x="274320" y="1097281"/>
+            <a:ext cx="5394960" cy="2679266"/>
           </a:xfrm>
           <a:prstGeom prst="rect">
             <a:avLst/>
@@ -10256,7 +10740,7 @@
         <p:spPr>
           <a:xfrm>
             <a:off x="274320" y="1097280"/>
-            <a:ext cx="5394960" cy="384048"/>
+            <a:ext cx="5394960" cy="298125"/>
           </a:xfrm>
           <a:prstGeom prst="rect">
             <a:avLst/>
@@ -10281,7 +10765,7 @@
         <p:spPr>
           <a:xfrm>
             <a:off x="457200" y="1115568"/>
-            <a:ext cx="5029200" cy="347472"/>
+            <a:ext cx="5029200" cy="269732"/>
           </a:xfrm>
           <a:prstGeom prst="rect">
             <a:avLst/>
@@ -10297,7 +10781,7 @@
               <a:buNone/>
             </a:pPr>
             <a:r>
-              <a:rPr lang="en-US" sz="1400" b="1" dirty="0">
+              <a:rPr lang="en-US" sz="1600" b="1" dirty="0">
                 <a:solidFill>
                   <a:srgbClr val="FFFFFF"/>
                 </a:solidFill>
@@ -10307,7 +10791,7 @@
               </a:rPr>
               <a:t>Wzory sił</a:t>
             </a:r>
-            <a:endParaRPr lang="en-US" sz="1400" dirty="0"/>
+            <a:endParaRPr lang="en-US" sz="1600" dirty="0"/>
           </a:p>
         </p:txBody>
       </p:sp>
@@ -10319,8 +10803,8 @@
         </p:nvSpPr>
         <p:spPr>
           <a:xfrm>
-            <a:off x="411480" y="1536192"/>
-            <a:ext cx="5166360" cy="2967479"/>
+            <a:off x="411480" y="1475677"/>
+            <a:ext cx="5166360" cy="2190788"/>
           </a:xfrm>
           <a:prstGeom prst="rect">
             <a:avLst/>
@@ -10329,31 +10813,54 @@
           <a:ln/>
         </p:spPr>
         <p:txBody>
-          <a:bodyPr wrap="square" lIns="63500" tIns="101600" rIns="101600" bIns="63500" rtlCol="0" anchor="t">
+          <a:bodyPr wrap="square" lIns="63500" tIns="36000" rIns="101600" bIns="0" rtlCol="0" anchor="t">
             <a:spAutoFit/>
           </a:bodyPr>
           <a:lstStyle/>
           <a:p>
-            <a:r>
-              <a:rPr lang="pl-PL" sz="1400" dirty="0" err="1">
-                <a:solidFill>
-                  <a:srgbClr val="CCCCCC"/>
-                </a:solidFill>
-                <a:latin typeface="Consolas" panose="020B0609020204030204" pitchFamily="49" charset="0"/>
-              </a:rPr>
-              <a:t>U_attr</a:t>
-            </a:r>
-            <a:r>
-              <a:rPr lang="pl-PL" sz="1400" dirty="0">
-                <a:solidFill>
-                  <a:srgbClr val="CCCCCC"/>
-                </a:solidFill>
-                <a:latin typeface="Consolas" panose="020B0609020204030204" pitchFamily="49" charset="0"/>
-              </a:rPr>
-              <a:t>(q) </a:t>
-            </a:r>
-            <a:r>
-              <a:rPr lang="pl-PL" sz="1400" dirty="0">
+            <a:pPr>
+              <a:lnSpc>
+                <a:spcPts val="1400"/>
+              </a:lnSpc>
+            </a:pPr>
+            <a:r>
+              <a:rPr lang="pl-PL" sz="1200" b="1" dirty="0" err="1" smtClean="0">
+                <a:solidFill>
+                  <a:srgbClr val="CCCCCC"/>
+                </a:solidFill>
+                <a:latin typeface="Consolas" panose="020B0609020204030204" pitchFamily="49" charset="0"/>
+              </a:rPr>
+              <a:t>U</a:t>
+            </a:r>
+            <a:r>
+              <a:rPr lang="pl-PL" sz="1200" b="1" baseline="-25000" dirty="0" err="1" smtClean="0">
+                <a:solidFill>
+                  <a:srgbClr val="CCCCCC"/>
+                </a:solidFill>
+                <a:latin typeface="Consolas" panose="020B0609020204030204" pitchFamily="49" charset="0"/>
+              </a:rPr>
+              <a:t>attr</a:t>
+            </a:r>
+            <a:r>
+              <a:rPr lang="pl-PL" sz="1200" b="1" dirty="0" smtClean="0">
+                <a:solidFill>
+                  <a:srgbClr val="CCCCCC"/>
+                </a:solidFill>
+                <a:latin typeface="Consolas" panose="020B0609020204030204" pitchFamily="49" charset="0"/>
+              </a:rPr>
+              <a:t>(q</a:t>
+            </a:r>
+            <a:r>
+              <a:rPr lang="pl-PL" sz="1200" b="1" dirty="0">
+                <a:solidFill>
+                  <a:srgbClr val="CCCCCC"/>
+                </a:solidFill>
+                <a:latin typeface="Consolas" panose="020B0609020204030204" pitchFamily="49" charset="0"/>
+              </a:rPr>
+              <a:t>) </a:t>
+            </a:r>
+            <a:r>
+              <a:rPr lang="pl-PL" sz="1200" b="1" dirty="0">
                 <a:solidFill>
                   <a:srgbClr val="D4D4D4"/>
                 </a:solidFill>
@@ -10362,7 +10869,7 @@
               <a:t>=</a:t>
             </a:r>
             <a:r>
-              <a:rPr lang="pl-PL" sz="1400" dirty="0">
+              <a:rPr lang="pl-PL" sz="1200" b="1" dirty="0">
                 <a:solidFill>
                   <a:srgbClr val="CCCCCC"/>
                 </a:solidFill>
@@ -10371,34 +10878,61 @@
               <a:t> ½ · </a:t>
             </a:r>
             <a:r>
-              <a:rPr lang="pl-PL" sz="1400" dirty="0" err="1">
-                <a:solidFill>
-                  <a:srgbClr val="CCCCCC"/>
-                </a:solidFill>
-                <a:latin typeface="Consolas" panose="020B0609020204030204" pitchFamily="49" charset="0"/>
-              </a:rPr>
-              <a:t>k_att</a:t>
-            </a:r>
-            <a:r>
-              <a:rPr lang="pl-PL" sz="1400" dirty="0">
-                <a:solidFill>
-                  <a:srgbClr val="CCCCCC"/>
-                </a:solidFill>
-                <a:latin typeface="Consolas" panose="020B0609020204030204" pitchFamily="49" charset="0"/>
-              </a:rPr>
-              <a:t> · d²(q, </a:t>
-            </a:r>
-            <a:r>
-              <a:rPr lang="pl-PL" sz="1400" dirty="0" err="1">
-                <a:solidFill>
-                  <a:srgbClr val="CCCCCC"/>
-                </a:solidFill>
-                <a:latin typeface="Consolas" panose="020B0609020204030204" pitchFamily="49" charset="0"/>
-              </a:rPr>
-              <a:t>q_goal</a:t>
-            </a:r>
-            <a:r>
-              <a:rPr lang="pl-PL" sz="1400" dirty="0">
+              <a:rPr lang="pl-PL" sz="1200" b="1" dirty="0" smtClean="0">
+                <a:solidFill>
+                  <a:srgbClr val="CCCCCC"/>
+                </a:solidFill>
+                <a:latin typeface="Consolas" panose="020B0609020204030204" pitchFamily="49" charset="0"/>
+              </a:rPr>
+              <a:t>k</a:t>
+            </a:r>
+            <a:r>
+              <a:rPr lang="pl-PL" sz="1200" b="1" baseline="-25000" dirty="0" smtClean="0">
+                <a:solidFill>
+                  <a:srgbClr val="CCCCCC"/>
+                </a:solidFill>
+                <a:latin typeface="Consolas" panose="020B0609020204030204" pitchFamily="49" charset="0"/>
+              </a:rPr>
+              <a:t>att</a:t>
+            </a:r>
+            <a:r>
+              <a:rPr lang="pl-PL" sz="1200" b="1" dirty="0" smtClean="0">
+                <a:solidFill>
+                  <a:srgbClr val="CCCCCC"/>
+                </a:solidFill>
+                <a:latin typeface="Consolas" panose="020B0609020204030204" pitchFamily="49" charset="0"/>
+              </a:rPr>
+              <a:t> </a:t>
+            </a:r>
+            <a:r>
+              <a:rPr lang="pl-PL" sz="1200" b="1" dirty="0">
+                <a:solidFill>
+                  <a:srgbClr val="CCCCCC"/>
+                </a:solidFill>
+                <a:latin typeface="Consolas" panose="020B0609020204030204" pitchFamily="49" charset="0"/>
+              </a:rPr>
+              <a:t>· d²(q, </a:t>
+            </a:r>
+            <a:r>
+              <a:rPr lang="pl-PL" sz="1200" b="1" dirty="0" err="1" smtClean="0">
+                <a:solidFill>
+                  <a:srgbClr val="CCCCCC"/>
+                </a:solidFill>
+                <a:latin typeface="Consolas" panose="020B0609020204030204" pitchFamily="49" charset="0"/>
+              </a:rPr>
+              <a:t>q</a:t>
+            </a:r>
+            <a:r>
+              <a:rPr lang="pl-PL" sz="1200" b="1" baseline="-25000" dirty="0" err="1" smtClean="0">
+                <a:solidFill>
+                  <a:srgbClr val="CCCCCC"/>
+                </a:solidFill>
+                <a:latin typeface="Consolas" panose="020B0609020204030204" pitchFamily="49" charset="0"/>
+              </a:rPr>
+              <a:t>goal</a:t>
+            </a:r>
+            <a:r>
+              <a:rPr lang="pl-PL" sz="1200" b="1" dirty="0">
                 <a:solidFill>
                   <a:srgbClr val="CCCCCC"/>
                 </a:solidFill>
@@ -10408,8 +10942,13 @@
             </a:r>
           </a:p>
           <a:p>
-            <a:r>
-              <a:rPr lang="pl-PL" sz="1400" dirty="0">
+            <a:pPr>
+              <a:lnSpc>
+                <a:spcPts val="1400"/>
+              </a:lnSpc>
+            </a:pPr>
+            <a:r>
+              <a:rPr lang="pl-PL" sz="1200" dirty="0">
                 <a:solidFill>
                   <a:srgbClr val="CCCCCC"/>
                 </a:solidFill>
@@ -10418,7 +10957,7 @@
               <a:t>  – </a:t>
             </a:r>
             <a:r>
-              <a:rPr lang="pl-PL" sz="1400" dirty="0" err="1">
+              <a:rPr lang="pl-PL" sz="1200" dirty="0" err="1">
                 <a:solidFill>
                   <a:srgbClr val="CCCCCC"/>
                 </a:solidFill>
@@ -10427,7 +10966,7 @@
               <a:t>attrakcja</a:t>
             </a:r>
             <a:r>
-              <a:rPr lang="pl-PL" sz="1400" dirty="0">
+              <a:rPr lang="pl-PL" sz="1200" dirty="0">
                 <a:solidFill>
                   <a:srgbClr val="CCCCCC"/>
                 </a:solidFill>
@@ -10437,8 +10976,13 @@
             </a:r>
           </a:p>
           <a:p>
-            <a:r>
-              <a:rPr lang="pl-PL" sz="1400" dirty="0">
+            <a:pPr>
+              <a:lnSpc>
+                <a:spcPts val="1400"/>
+              </a:lnSpc>
+            </a:pPr>
+            <a:r>
+              <a:rPr lang="pl-PL" sz="1200" dirty="0">
                 <a:solidFill>
                   <a:srgbClr val="CCCCCC"/>
                 </a:solidFill>
@@ -10447,7 +10991,7 @@
               <a:t/>
             </a:r>
             <a:br>
-              <a:rPr lang="pl-PL" sz="1400" dirty="0">
+              <a:rPr lang="pl-PL" sz="1200" dirty="0">
                 <a:solidFill>
                   <a:srgbClr val="CCCCCC"/>
                 </a:solidFill>
@@ -10455,25 +10999,43 @@
               </a:rPr>
             </a:br>
             <a:r>
-              <a:rPr lang="pl-PL" sz="1400" dirty="0" err="1">
-                <a:solidFill>
-                  <a:srgbClr val="CCCCCC"/>
-                </a:solidFill>
-                <a:latin typeface="Consolas" panose="020B0609020204030204" pitchFamily="49" charset="0"/>
-              </a:rPr>
-              <a:t>U_rep</a:t>
-            </a:r>
-            <a:r>
-              <a:rPr lang="pl-PL" sz="1400" dirty="0">
-                <a:solidFill>
-                  <a:srgbClr val="CCCCCC"/>
-                </a:solidFill>
-                <a:latin typeface="Consolas" panose="020B0609020204030204" pitchFamily="49" charset="0"/>
-              </a:rPr>
-              <a:t>(q) </a:t>
-            </a:r>
-            <a:r>
-              <a:rPr lang="pl-PL" sz="1400" dirty="0">
+              <a:rPr lang="pl-PL" sz="1200" b="1" dirty="0" err="1" smtClean="0">
+                <a:solidFill>
+                  <a:srgbClr val="CCCCCC"/>
+                </a:solidFill>
+                <a:latin typeface="Consolas" panose="020B0609020204030204" pitchFamily="49" charset="0"/>
+              </a:rPr>
+              <a:t>U</a:t>
+            </a:r>
+            <a:r>
+              <a:rPr lang="pl-PL" sz="1200" b="1" baseline="-25000" dirty="0" err="1" smtClean="0">
+                <a:solidFill>
+                  <a:srgbClr val="CCCCCC"/>
+                </a:solidFill>
+                <a:latin typeface="Consolas" panose="020B0609020204030204" pitchFamily="49" charset="0"/>
+              </a:rPr>
+              <a:t>rep</a:t>
+            </a:r>
+            <a:r>
+              <a:rPr lang="pl-PL" sz="1200" b="1" dirty="0" smtClean="0">
+                <a:solidFill>
+                  <a:srgbClr val="CCCCCC"/>
+                </a:solidFill>
+                <a:latin typeface="Consolas" panose="020B0609020204030204" pitchFamily="49" charset="0"/>
+              </a:rPr>
+              <a:t>(q</a:t>
+            </a:r>
+            <a:r>
+              <a:rPr lang="pl-PL" sz="1200" b="1" dirty="0">
+                <a:solidFill>
+                  <a:srgbClr val="CCCCCC"/>
+                </a:solidFill>
+                <a:latin typeface="Consolas" panose="020B0609020204030204" pitchFamily="49" charset="0"/>
+              </a:rPr>
+              <a:t>) </a:t>
+            </a:r>
+            <a:r>
+              <a:rPr lang="pl-PL" sz="1200" b="1" dirty="0">
                 <a:solidFill>
                   <a:srgbClr val="D4D4D4"/>
                 </a:solidFill>
@@ -10482,7 +11044,7 @@
               <a:t>=</a:t>
             </a:r>
             <a:r>
-              <a:rPr lang="pl-PL" sz="1400" dirty="0">
+              <a:rPr lang="pl-PL" sz="1200" b="1" dirty="0">
                 <a:solidFill>
                   <a:srgbClr val="CCCCCC"/>
                 </a:solidFill>
@@ -10491,7 +11053,7 @@
               <a:t> ½ · </a:t>
             </a:r>
             <a:r>
-              <a:rPr lang="pl-PL" sz="1400" dirty="0" err="1">
+              <a:rPr lang="pl-PL" sz="1200" b="1" dirty="0" err="1">
                 <a:solidFill>
                   <a:srgbClr val="CCCCCC"/>
                 </a:solidFill>
@@ -10500,7 +11062,7 @@
               <a:t>k_rep</a:t>
             </a:r>
             <a:r>
-              <a:rPr lang="pl-PL" sz="1400" dirty="0">
+              <a:rPr lang="pl-PL" sz="1200" b="1" dirty="0">
                 <a:solidFill>
                   <a:srgbClr val="CCCCCC"/>
                 </a:solidFill>
@@ -10509,7 +11071,7 @@
               <a:t> · (</a:t>
             </a:r>
             <a:r>
-              <a:rPr lang="pl-PL" sz="1400" dirty="0">
+              <a:rPr lang="pl-PL" sz="1200" b="1" dirty="0">
                 <a:solidFill>
                   <a:srgbClr val="B5CEA8"/>
                 </a:solidFill>
@@ -10518,7 +11080,7 @@
               <a:t>1</a:t>
             </a:r>
             <a:r>
-              <a:rPr lang="pl-PL" sz="1400" dirty="0">
+              <a:rPr lang="pl-PL" sz="1200" b="1" dirty="0">
                 <a:solidFill>
                   <a:srgbClr val="D4D4D4"/>
                 </a:solidFill>
@@ -10527,7 +11089,7 @@
               <a:t>/</a:t>
             </a:r>
             <a:r>
-              <a:rPr lang="pl-PL" sz="1400" dirty="0">
+              <a:rPr lang="pl-PL" sz="1200" b="1" dirty="0">
                 <a:solidFill>
                   <a:srgbClr val="CCCCCC"/>
                 </a:solidFill>
@@ -10536,7 +11098,7 @@
               <a:t>d </a:t>
             </a:r>
             <a:r>
-              <a:rPr lang="pl-PL" sz="1400" dirty="0">
+              <a:rPr lang="pl-PL" sz="1200" b="1" dirty="0">
                 <a:solidFill>
                   <a:srgbClr val="D4D4D4"/>
                 </a:solidFill>
@@ -10545,7 +11107,7 @@
               <a:t>-</a:t>
             </a:r>
             <a:r>
-              <a:rPr lang="pl-PL" sz="1400" dirty="0">
+              <a:rPr lang="pl-PL" sz="1200" b="1" dirty="0">
                 <a:solidFill>
                   <a:srgbClr val="CCCCCC"/>
                 </a:solidFill>
@@ -10554,7 +11116,7 @@
               <a:t> </a:t>
             </a:r>
             <a:r>
-              <a:rPr lang="pl-PL" sz="1400" dirty="0">
+              <a:rPr lang="pl-PL" sz="1200" b="1" dirty="0">
                 <a:solidFill>
                   <a:srgbClr val="B5CEA8"/>
                 </a:solidFill>
@@ -10563,7 +11125,7 @@
               <a:t>1</a:t>
             </a:r>
             <a:r>
-              <a:rPr lang="pl-PL" sz="1400" dirty="0">
+              <a:rPr lang="pl-PL" sz="1200" b="1" dirty="0">
                 <a:solidFill>
                   <a:srgbClr val="D4D4D4"/>
                 </a:solidFill>
@@ -10572,7 +11134,7 @@
               <a:t>/</a:t>
             </a:r>
             <a:r>
-              <a:rPr lang="pl-PL" sz="1400" dirty="0">
+              <a:rPr lang="pl-PL" sz="1200" b="1" dirty="0">
                 <a:solidFill>
                   <a:srgbClr val="CCCCCC"/>
                 </a:solidFill>
@@ -10582,17 +11144,40 @@
             </a:r>
           </a:p>
           <a:p>
-            <a:r>
-              <a:rPr lang="pl-PL" sz="1400" dirty="0">
-                <a:solidFill>
-                  <a:srgbClr val="CCCCCC"/>
-                </a:solidFill>
-                <a:latin typeface="Consolas" panose="020B0609020204030204" pitchFamily="49" charset="0"/>
-              </a:rPr>
-              <a:t>            gdy d </a:t>
-            </a:r>
-            <a:r>
-              <a:rPr lang="pl-PL" sz="1400" dirty="0">
+            <a:pPr>
+              <a:lnSpc>
+                <a:spcPts val="1400"/>
+              </a:lnSpc>
+            </a:pPr>
+            <a:r>
+              <a:rPr lang="pl-PL" sz="1200" dirty="0">
+                <a:solidFill>
+                  <a:srgbClr val="CCCCCC"/>
+                </a:solidFill>
+                <a:latin typeface="Consolas" panose="020B0609020204030204" pitchFamily="49" charset="0"/>
+              </a:rPr>
+              <a:t>        </a:t>
+            </a:r>
+            <a:r>
+              <a:rPr lang="pl-PL" sz="1200" dirty="0" smtClean="0">
+                <a:solidFill>
+                  <a:srgbClr val="CCCCCC"/>
+                </a:solidFill>
+                <a:latin typeface="Consolas" panose="020B0609020204030204" pitchFamily="49" charset="0"/>
+              </a:rPr>
+              <a:t>gdy </a:t>
+            </a:r>
+            <a:r>
+              <a:rPr lang="pl-PL" sz="1200" dirty="0">
+                <a:solidFill>
+                  <a:srgbClr val="CCCCCC"/>
+                </a:solidFill>
+                <a:latin typeface="Consolas" panose="020B0609020204030204" pitchFamily="49" charset="0"/>
+              </a:rPr>
+              <a:t>d </a:t>
+            </a:r>
+            <a:r>
+              <a:rPr lang="pl-PL" sz="1200" dirty="0">
                 <a:solidFill>
                   <a:srgbClr val="D4D4D4"/>
                 </a:solidFill>
@@ -10601,7 +11186,7 @@
               <a:t>&lt;</a:t>
             </a:r>
             <a:r>
-              <a:rPr lang="pl-PL" sz="1400" dirty="0">
+              <a:rPr lang="pl-PL" sz="1200" dirty="0">
                 <a:solidFill>
                   <a:srgbClr val="CCCCCC"/>
                 </a:solidFill>
@@ -10610,15 +11195,215 @@
               <a:t> d₀, inaczej </a:t>
             </a:r>
             <a:r>
-              <a:rPr lang="pl-PL" sz="1400" dirty="0">
+              <a:rPr lang="pl-PL" sz="1200" dirty="0" smtClean="0">
                 <a:solidFill>
                   <a:srgbClr val="B5CEA8"/>
                 </a:solidFill>
                 <a:latin typeface="Consolas" panose="020B0609020204030204" pitchFamily="49" charset="0"/>
               </a:rPr>
-              <a:t>0</a:t>
-            </a:r>
-            <a:endParaRPr lang="pl-PL" sz="1400" dirty="0">
+              <a:t>0 </a:t>
+            </a:r>
+            <a:r>
+              <a:rPr lang="pl-PL" sz="1200" dirty="0" smtClean="0">
+                <a:solidFill>
+                  <a:srgbClr val="CCCCCC"/>
+                </a:solidFill>
+                <a:latin typeface="Consolas" panose="020B0609020204030204" pitchFamily="49" charset="0"/>
+              </a:rPr>
+              <a:t>– </a:t>
+            </a:r>
+            <a:r>
+              <a:rPr lang="pl-PL" sz="1200" dirty="0">
+                <a:solidFill>
+                  <a:srgbClr val="CCCCCC"/>
+                </a:solidFill>
+                <a:latin typeface="Consolas" panose="020B0609020204030204" pitchFamily="49" charset="0"/>
+              </a:rPr>
+              <a:t>odpychanie od przeszkód</a:t>
+            </a:r>
+          </a:p>
+          <a:p>
+            <a:pPr>
+              <a:lnSpc>
+                <a:spcPts val="1400"/>
+              </a:lnSpc>
+            </a:pPr>
+            <a:r>
+              <a:rPr lang="pl-PL" sz="1200" dirty="0">
+                <a:solidFill>
+                  <a:srgbClr val="CCCCCC"/>
+                </a:solidFill>
+                <a:latin typeface="Consolas" panose="020B0609020204030204" pitchFamily="49" charset="0"/>
+              </a:rPr>
+              <a:t>  </a:t>
+            </a:r>
+            <a:r>
+              <a:rPr lang="pl-PL" sz="1200" dirty="0" smtClean="0">
+                <a:solidFill>
+                  <a:srgbClr val="CCCCCC"/>
+                </a:solidFill>
+                <a:latin typeface="Consolas" panose="020B0609020204030204" pitchFamily="49" charset="0"/>
+              </a:rPr>
+              <a:t>	     d</a:t>
+            </a:r>
+            <a:r>
+              <a:rPr lang="pl-PL" sz="1200" dirty="0">
+                <a:solidFill>
+                  <a:srgbClr val="CCCCCC"/>
+                </a:solidFill>
+                <a:latin typeface="Consolas" panose="020B0609020204030204" pitchFamily="49" charset="0"/>
+              </a:rPr>
+              <a:t>₀ – promień wpływu przeszkody</a:t>
+            </a:r>
+          </a:p>
+          <a:p>
+            <a:pPr>
+              <a:lnSpc>
+                <a:spcPts val="1400"/>
+              </a:lnSpc>
+            </a:pPr>
+            <a:r>
+              <a:rPr lang="pl-PL" sz="1200" dirty="0">
+                <a:solidFill>
+                  <a:srgbClr val="CCCCCC"/>
+                </a:solidFill>
+                <a:latin typeface="Consolas" panose="020B0609020204030204" pitchFamily="49" charset="0"/>
+              </a:rPr>
+              <a:t/>
+            </a:r>
+            <a:br>
+              <a:rPr lang="pl-PL" sz="1200" dirty="0">
+                <a:solidFill>
+                  <a:srgbClr val="CCCCCC"/>
+                </a:solidFill>
+                <a:latin typeface="Consolas" panose="020B0609020204030204" pitchFamily="49" charset="0"/>
+              </a:rPr>
+            </a:br>
+            <a:r>
+              <a:rPr lang="pl-PL" sz="1200" b="1" dirty="0">
+                <a:solidFill>
+                  <a:srgbClr val="CCCCCC"/>
+                </a:solidFill>
+                <a:latin typeface="Consolas" panose="020B0609020204030204" pitchFamily="49" charset="0"/>
+              </a:rPr>
+              <a:t>F(q) </a:t>
+            </a:r>
+            <a:r>
+              <a:rPr lang="pl-PL" sz="1200" b="1" dirty="0">
+                <a:solidFill>
+                  <a:srgbClr val="D4D4D4"/>
+                </a:solidFill>
+                <a:latin typeface="Consolas" panose="020B0609020204030204" pitchFamily="49" charset="0"/>
+              </a:rPr>
+              <a:t>=</a:t>
+            </a:r>
+            <a:r>
+              <a:rPr lang="pl-PL" sz="1200" b="1" dirty="0">
+                <a:solidFill>
+                  <a:srgbClr val="CCCCCC"/>
+                </a:solidFill>
+                <a:latin typeface="Consolas" panose="020B0609020204030204" pitchFamily="49" charset="0"/>
+              </a:rPr>
+              <a:t> –∇U(q)</a:t>
+            </a:r>
+          </a:p>
+          <a:p>
+            <a:pPr>
+              <a:lnSpc>
+                <a:spcPts val="1400"/>
+              </a:lnSpc>
+            </a:pPr>
+            <a:r>
+              <a:rPr lang="pl-PL" sz="1200" b="1" dirty="0">
+                <a:solidFill>
+                  <a:srgbClr val="CCCCCC"/>
+                </a:solidFill>
+                <a:latin typeface="Consolas" panose="020B0609020204030204" pitchFamily="49" charset="0"/>
+              </a:rPr>
+              <a:t>     </a:t>
+            </a:r>
+            <a:r>
+              <a:rPr lang="pl-PL" sz="1200" b="1" dirty="0">
+                <a:solidFill>
+                  <a:srgbClr val="D4D4D4"/>
+                </a:solidFill>
+                <a:latin typeface="Consolas" panose="020B0609020204030204" pitchFamily="49" charset="0"/>
+              </a:rPr>
+              <a:t>=</a:t>
+            </a:r>
+            <a:r>
+              <a:rPr lang="pl-PL" sz="1200" b="1" dirty="0">
+                <a:solidFill>
+                  <a:srgbClr val="CCCCCC"/>
+                </a:solidFill>
+                <a:latin typeface="Consolas" panose="020B0609020204030204" pitchFamily="49" charset="0"/>
+              </a:rPr>
+              <a:t> </a:t>
+            </a:r>
+            <a:r>
+              <a:rPr lang="pl-PL" sz="1200" b="1" dirty="0" err="1" smtClean="0">
+                <a:solidFill>
+                  <a:srgbClr val="CCCCCC"/>
+                </a:solidFill>
+                <a:latin typeface="Consolas" panose="020B0609020204030204" pitchFamily="49" charset="0"/>
+              </a:rPr>
+              <a:t>F</a:t>
+            </a:r>
+            <a:r>
+              <a:rPr lang="pl-PL" sz="1200" b="1" baseline="-25000" dirty="0" err="1" smtClean="0">
+                <a:solidFill>
+                  <a:srgbClr val="CCCCCC"/>
+                </a:solidFill>
+                <a:latin typeface="Consolas" panose="020B0609020204030204" pitchFamily="49" charset="0"/>
+              </a:rPr>
+              <a:t>attr</a:t>
+            </a:r>
+            <a:r>
+              <a:rPr lang="pl-PL" sz="1200" b="1" dirty="0" smtClean="0">
+                <a:solidFill>
+                  <a:srgbClr val="CCCCCC"/>
+                </a:solidFill>
+                <a:latin typeface="Consolas" panose="020B0609020204030204" pitchFamily="49" charset="0"/>
+              </a:rPr>
+              <a:t> </a:t>
+            </a:r>
+            <a:r>
+              <a:rPr lang="pl-PL" sz="1200" b="1" dirty="0">
+                <a:solidFill>
+                  <a:srgbClr val="D4D4D4"/>
+                </a:solidFill>
+                <a:latin typeface="Consolas" panose="020B0609020204030204" pitchFamily="49" charset="0"/>
+              </a:rPr>
+              <a:t>+</a:t>
+            </a:r>
+            <a:r>
+              <a:rPr lang="pl-PL" sz="1200" b="1" dirty="0">
+                <a:solidFill>
+                  <a:srgbClr val="CCCCCC"/>
+                </a:solidFill>
+                <a:latin typeface="Consolas" panose="020B0609020204030204" pitchFamily="49" charset="0"/>
+              </a:rPr>
+              <a:t> </a:t>
+            </a:r>
+            <a:r>
+              <a:rPr lang="pl-PL" sz="1200" b="1" dirty="0" err="1" smtClean="0">
+                <a:solidFill>
+                  <a:srgbClr val="CCCCCC"/>
+                </a:solidFill>
+                <a:latin typeface="Consolas" panose="020B0609020204030204" pitchFamily="49" charset="0"/>
+              </a:rPr>
+              <a:t>F</a:t>
+            </a:r>
+            <a:r>
+              <a:rPr lang="pl-PL" sz="1200" b="1" baseline="-25000" dirty="0" err="1" smtClean="0">
+                <a:solidFill>
+                  <a:srgbClr val="CCCCCC"/>
+                </a:solidFill>
+                <a:latin typeface="Consolas" panose="020B0609020204030204" pitchFamily="49" charset="0"/>
+              </a:rPr>
+              <a:t>rep</a:t>
+            </a:r>
+            <a:endParaRPr lang="pl-PL" sz="1200" b="1" baseline="-25000" dirty="0">
               <a:solidFill>
                 <a:srgbClr val="CCCCCC"/>
               </a:solidFill>
@@ -10626,30 +11411,13 @@
             </a:endParaRPr>
           </a:p>
           <a:p>
-            <a:r>
-              <a:rPr lang="pl-PL" sz="1400" dirty="0">
-                <a:solidFill>
-                  <a:srgbClr val="CCCCCC"/>
-                </a:solidFill>
-                <a:latin typeface="Consolas" panose="020B0609020204030204" pitchFamily="49" charset="0"/>
-              </a:rPr>
-              <a:t>  – odpychanie od przeszkód</a:t>
-            </a:r>
-          </a:p>
-          <a:p>
-            <a:r>
-              <a:rPr lang="pl-PL" sz="1400" dirty="0">
-                <a:solidFill>
-                  <a:srgbClr val="CCCCCC"/>
-                </a:solidFill>
-                <a:latin typeface="Consolas" panose="020B0609020204030204" pitchFamily="49" charset="0"/>
-              </a:rPr>
-              <a:t>  d₀ – promień wpływu przeszkody</a:t>
-            </a:r>
-          </a:p>
-          <a:p>
-            <a:r>
-              <a:rPr lang="pl-PL" sz="1400" dirty="0">
+            <a:pPr>
+              <a:lnSpc>
+                <a:spcPts val="1400"/>
+              </a:lnSpc>
+            </a:pPr>
+            <a:r>
+              <a:rPr lang="pl-PL" sz="1200" dirty="0">
                 <a:solidFill>
                   <a:srgbClr val="CCCCCC"/>
                 </a:solidFill>
@@ -10658,7 +11426,7 @@
               <a:t/>
             </a:r>
             <a:br>
-              <a:rPr lang="pl-PL" sz="1400" dirty="0">
+              <a:rPr lang="pl-PL" sz="1200" dirty="0">
                 <a:solidFill>
                   <a:srgbClr val="CCCCCC"/>
                 </a:solidFill>
@@ -10666,16 +11434,43 @@
               </a:rPr>
             </a:br>
             <a:r>
-              <a:rPr lang="pl-PL" sz="1400" dirty="0">
-                <a:solidFill>
-                  <a:srgbClr val="CCCCCC"/>
-                </a:solidFill>
-                <a:latin typeface="Consolas" panose="020B0609020204030204" pitchFamily="49" charset="0"/>
-              </a:rPr>
-              <a:t>F(q) </a:t>
-            </a:r>
-            <a:r>
-              <a:rPr lang="pl-PL" sz="1400" dirty="0">
+              <a:rPr lang="pl-PL" sz="1200" dirty="0">
+                <a:solidFill>
+                  <a:srgbClr val="CCCCCC"/>
+                </a:solidFill>
+                <a:latin typeface="Consolas" panose="020B0609020204030204" pitchFamily="49" charset="0"/>
+              </a:rPr>
+              <a:t>Ruch: </a:t>
+            </a:r>
+            <a:r>
+              <a:rPr lang="pl-PL" sz="1200" b="1" dirty="0" err="1" smtClean="0">
+                <a:solidFill>
+                  <a:srgbClr val="CCCCCC"/>
+                </a:solidFill>
+                <a:latin typeface="Consolas" panose="020B0609020204030204" pitchFamily="49" charset="0"/>
+              </a:rPr>
+              <a:t>q</a:t>
+            </a:r>
+            <a:r>
+              <a:rPr lang="pl-PL" sz="1200" b="1" baseline="-25000" dirty="0" err="1" smtClean="0">
+                <a:solidFill>
+                  <a:srgbClr val="CCCCCC"/>
+                </a:solidFill>
+                <a:latin typeface="Consolas" panose="020B0609020204030204" pitchFamily="49" charset="0"/>
+              </a:rPr>
+              <a:t>new</a:t>
+            </a:r>
+            <a:r>
+              <a:rPr lang="pl-PL" sz="1200" b="1" dirty="0" smtClean="0">
+                <a:solidFill>
+                  <a:srgbClr val="CCCCCC"/>
+                </a:solidFill>
+                <a:latin typeface="Consolas" panose="020B0609020204030204" pitchFamily="49" charset="0"/>
+              </a:rPr>
+              <a:t> </a:t>
+            </a:r>
+            <a:r>
+              <a:rPr lang="pl-PL" sz="1200" b="1" dirty="0">
                 <a:solidFill>
                   <a:srgbClr val="D4D4D4"/>
                 </a:solidFill>
@@ -10684,36 +11479,25 @@
               <a:t>=</a:t>
             </a:r>
             <a:r>
-              <a:rPr lang="pl-PL" sz="1400" dirty="0">
-                <a:solidFill>
-                  <a:srgbClr val="CCCCCC"/>
-                </a:solidFill>
-                <a:latin typeface="Consolas" panose="020B0609020204030204" pitchFamily="49" charset="0"/>
-              </a:rPr>
-              <a:t> –∇U(q)</a:t>
-            </a:r>
-          </a:p>
-          <a:p>
-            <a:r>
-              <a:rPr lang="pl-PL" sz="1400" dirty="0">
-                <a:solidFill>
-                  <a:srgbClr val="CCCCCC"/>
-                </a:solidFill>
-                <a:latin typeface="Consolas" panose="020B0609020204030204" pitchFamily="49" charset="0"/>
-              </a:rPr>
-              <a:t>     </a:t>
-            </a:r>
-            <a:r>
-              <a:rPr lang="pl-PL" sz="1400" dirty="0">
+              <a:rPr lang="pl-PL" sz="1200" b="1" dirty="0">
+                <a:solidFill>
+                  <a:srgbClr val="CCCCCC"/>
+                </a:solidFill>
+                <a:latin typeface="Consolas" panose="020B0609020204030204" pitchFamily="49" charset="0"/>
+              </a:rPr>
+              <a:t> q </a:t>
+            </a:r>
+            <a:r>
+              <a:rPr lang="pl-PL" sz="1200" b="1" dirty="0">
                 <a:solidFill>
                   <a:srgbClr val="D4D4D4"/>
                 </a:solidFill>
                 <a:latin typeface="Consolas" panose="020B0609020204030204" pitchFamily="49" charset="0"/>
               </a:rPr>
-              <a:t>=</a:t>
-            </a:r>
-            <a:r>
-              <a:rPr lang="pl-PL" sz="1400" dirty="0">
+              <a:t>+</a:t>
+            </a:r>
+            <a:r>
+              <a:rPr lang="pl-PL" sz="1200" b="1" dirty="0">
                 <a:solidFill>
                   <a:srgbClr val="CCCCCC"/>
                 </a:solidFill>
@@ -10722,201 +11506,82 @@
               <a:t> </a:t>
             </a:r>
             <a:r>
-              <a:rPr lang="pl-PL" sz="1400" dirty="0" err="1">
-                <a:solidFill>
-                  <a:srgbClr val="CCCCCC"/>
-                </a:solidFill>
-                <a:latin typeface="Consolas" panose="020B0609020204030204" pitchFamily="49" charset="0"/>
-              </a:rPr>
-              <a:t>F_attr</a:t>
-            </a:r>
-            <a:r>
-              <a:rPr lang="pl-PL" sz="1400" dirty="0">
-                <a:solidFill>
-                  <a:srgbClr val="CCCCCC"/>
-                </a:solidFill>
-                <a:latin typeface="Consolas" panose="020B0609020204030204" pitchFamily="49" charset="0"/>
-              </a:rPr>
-              <a:t> </a:t>
-            </a:r>
-            <a:r>
-              <a:rPr lang="pl-PL" sz="1400" dirty="0">
-                <a:solidFill>
-                  <a:srgbClr val="D4D4D4"/>
-                </a:solidFill>
-                <a:latin typeface="Consolas" panose="020B0609020204030204" pitchFamily="49" charset="0"/>
-              </a:rPr>
-              <a:t>+</a:t>
-            </a:r>
-            <a:r>
-              <a:rPr lang="pl-PL" sz="1400" dirty="0">
-                <a:solidFill>
-                  <a:srgbClr val="CCCCCC"/>
-                </a:solidFill>
-                <a:latin typeface="Consolas" panose="020B0609020204030204" pitchFamily="49" charset="0"/>
-              </a:rPr>
-              <a:t> </a:t>
-            </a:r>
-            <a:r>
-              <a:rPr lang="pl-PL" sz="1400" dirty="0" err="1">
-                <a:solidFill>
-                  <a:srgbClr val="CCCCCC"/>
-                </a:solidFill>
-                <a:latin typeface="Consolas" panose="020B0609020204030204" pitchFamily="49" charset="0"/>
-              </a:rPr>
-              <a:t>F_rep</a:t>
-            </a:r>
-            <a:endParaRPr lang="pl-PL" sz="1400" dirty="0">
+              <a:rPr lang="el-GR" sz="1200" b="1" dirty="0">
+                <a:solidFill>
+                  <a:srgbClr val="CCCCCC"/>
+                </a:solidFill>
+                <a:latin typeface="Consolas" panose="020B0609020204030204" pitchFamily="49" charset="0"/>
+              </a:rPr>
+              <a:t>α · </a:t>
+            </a:r>
+            <a:r>
+              <a:rPr lang="pl-PL" sz="1200" b="1" dirty="0">
+                <a:solidFill>
+                  <a:srgbClr val="CCCCCC"/>
+                </a:solidFill>
+                <a:latin typeface="Consolas" panose="020B0609020204030204" pitchFamily="49" charset="0"/>
+              </a:rPr>
+              <a:t>F(q)</a:t>
+            </a:r>
+          </a:p>
+          <a:p>
+            <a:pPr>
+              <a:lnSpc>
+                <a:spcPts val="1400"/>
+              </a:lnSpc>
+            </a:pPr>
+            <a:r>
+              <a:rPr lang="pl-PL" sz="1200" dirty="0">
+                <a:solidFill>
+                  <a:srgbClr val="CCCCCC"/>
+                </a:solidFill>
+                <a:latin typeface="Consolas" panose="020B0609020204030204" pitchFamily="49" charset="0"/>
+              </a:rPr>
+              <a:t>  </a:t>
+            </a:r>
+            <a:r>
+              <a:rPr lang="el-GR" sz="1200" dirty="0">
+                <a:solidFill>
+                  <a:srgbClr val="CCCCCC"/>
+                </a:solidFill>
+                <a:latin typeface="Consolas" panose="020B0609020204030204" pitchFamily="49" charset="0"/>
+              </a:rPr>
+              <a:t>α </a:t>
+            </a:r>
+            <a:r>
+              <a:rPr lang="el-GR" sz="1200" dirty="0" smtClean="0">
+                <a:solidFill>
+                  <a:srgbClr val="CCCCCC"/>
+                </a:solidFill>
+                <a:latin typeface="Consolas" panose="020B0609020204030204" pitchFamily="49" charset="0"/>
+              </a:rPr>
+              <a:t>– </a:t>
+            </a:r>
+            <a:r>
+              <a:rPr lang="pl-PL" sz="1200" dirty="0">
+                <a:solidFill>
+                  <a:srgbClr val="CCCCCC"/>
+                </a:solidFill>
+                <a:latin typeface="Consolas" panose="020B0609020204030204" pitchFamily="49" charset="0"/>
+              </a:rPr>
+              <a:t>krok </a:t>
+            </a:r>
+            <a:r>
+              <a:rPr lang="pl-PL" sz="1200" dirty="0" smtClean="0">
+                <a:solidFill>
+                  <a:srgbClr val="CCCCCC"/>
+                </a:solidFill>
+                <a:latin typeface="Consolas" panose="020B0609020204030204" pitchFamily="49" charset="0"/>
+              </a:rPr>
+              <a:t>iteracji</a:t>
+            </a:r>
+            <a:endParaRPr lang="pl-PL" sz="1200" dirty="0">
               <a:solidFill>
                 <a:srgbClr val="CCCCCC"/>
               </a:solidFill>
               <a:latin typeface="Consolas" panose="020B0609020204030204" pitchFamily="49" charset="0"/>
             </a:endParaRPr>
           </a:p>
-          <a:p>
-            <a:r>
-              <a:rPr lang="pl-PL" sz="1400" dirty="0">
-                <a:solidFill>
-                  <a:srgbClr val="CCCCCC"/>
-                </a:solidFill>
-                <a:latin typeface="Consolas" panose="020B0609020204030204" pitchFamily="49" charset="0"/>
-              </a:rPr>
-              <a:t/>
-            </a:r>
-            <a:br>
-              <a:rPr lang="pl-PL" sz="1400" dirty="0">
-                <a:solidFill>
-                  <a:srgbClr val="CCCCCC"/>
-                </a:solidFill>
-                <a:latin typeface="Consolas" panose="020B0609020204030204" pitchFamily="49" charset="0"/>
-              </a:rPr>
-            </a:br>
-            <a:r>
-              <a:rPr lang="pl-PL" sz="1400" dirty="0">
-                <a:solidFill>
-                  <a:srgbClr val="CCCCCC"/>
-                </a:solidFill>
-                <a:latin typeface="Consolas" panose="020B0609020204030204" pitchFamily="49" charset="0"/>
-              </a:rPr>
-              <a:t>Ruch: </a:t>
-            </a:r>
-            <a:r>
-              <a:rPr lang="pl-PL" sz="1400" dirty="0" err="1">
-                <a:solidFill>
-                  <a:srgbClr val="CCCCCC"/>
-                </a:solidFill>
-                <a:latin typeface="Consolas" panose="020B0609020204030204" pitchFamily="49" charset="0"/>
-              </a:rPr>
-              <a:t>q_new</a:t>
-            </a:r>
-            <a:r>
-              <a:rPr lang="pl-PL" sz="1400" dirty="0">
-                <a:solidFill>
-                  <a:srgbClr val="CCCCCC"/>
-                </a:solidFill>
-                <a:latin typeface="Consolas" panose="020B0609020204030204" pitchFamily="49" charset="0"/>
-              </a:rPr>
-              <a:t> </a:t>
-            </a:r>
-            <a:r>
-              <a:rPr lang="pl-PL" sz="1400" dirty="0">
-                <a:solidFill>
-                  <a:srgbClr val="D4D4D4"/>
-                </a:solidFill>
-                <a:latin typeface="Consolas" panose="020B0609020204030204" pitchFamily="49" charset="0"/>
-              </a:rPr>
-              <a:t>=</a:t>
-            </a:r>
-            <a:r>
-              <a:rPr lang="pl-PL" sz="1400" dirty="0">
-                <a:solidFill>
-                  <a:srgbClr val="CCCCCC"/>
-                </a:solidFill>
-                <a:latin typeface="Consolas" panose="020B0609020204030204" pitchFamily="49" charset="0"/>
-              </a:rPr>
-              <a:t> q </a:t>
-            </a:r>
-            <a:r>
-              <a:rPr lang="pl-PL" sz="1400" dirty="0">
-                <a:solidFill>
-                  <a:srgbClr val="D4D4D4"/>
-                </a:solidFill>
-                <a:latin typeface="Consolas" panose="020B0609020204030204" pitchFamily="49" charset="0"/>
-              </a:rPr>
-              <a:t>+</a:t>
-            </a:r>
-            <a:r>
-              <a:rPr lang="pl-PL" sz="1400" dirty="0">
-                <a:solidFill>
-                  <a:srgbClr val="CCCCCC"/>
-                </a:solidFill>
-                <a:latin typeface="Consolas" panose="020B0609020204030204" pitchFamily="49" charset="0"/>
-              </a:rPr>
-              <a:t> </a:t>
-            </a:r>
-            <a:r>
-              <a:rPr lang="el-GR" sz="1400" dirty="0">
-                <a:solidFill>
-                  <a:srgbClr val="CCCCCC"/>
-                </a:solidFill>
-                <a:latin typeface="Consolas" panose="020B0609020204030204" pitchFamily="49" charset="0"/>
-              </a:rPr>
-              <a:t>α · </a:t>
-            </a:r>
-            <a:r>
-              <a:rPr lang="pl-PL" sz="1400" dirty="0">
-                <a:solidFill>
-                  <a:srgbClr val="CCCCCC"/>
-                </a:solidFill>
-                <a:latin typeface="Consolas" panose="020B0609020204030204" pitchFamily="49" charset="0"/>
-              </a:rPr>
-              <a:t>F(q)</a:t>
-            </a:r>
-          </a:p>
-          <a:p>
-            <a:r>
-              <a:rPr lang="pl-PL" sz="1400" dirty="0">
-                <a:solidFill>
-                  <a:srgbClr val="CCCCCC"/>
-                </a:solidFill>
-                <a:latin typeface="Consolas" panose="020B0609020204030204" pitchFamily="49" charset="0"/>
-              </a:rPr>
-              <a:t>  </a:t>
-            </a:r>
-            <a:r>
-              <a:rPr lang="el-GR" sz="1400" dirty="0">
-                <a:solidFill>
-                  <a:srgbClr val="CCCCCC"/>
-                </a:solidFill>
-                <a:latin typeface="Consolas" panose="020B0609020204030204" pitchFamily="49" charset="0"/>
-              </a:rPr>
-              <a:t>α – </a:t>
-            </a:r>
-            <a:r>
-              <a:rPr lang="pl-PL" sz="1400" dirty="0">
-                <a:solidFill>
-                  <a:srgbClr val="CCCCCC"/>
-                </a:solidFill>
-                <a:latin typeface="Consolas" panose="020B0609020204030204" pitchFamily="49" charset="0"/>
-              </a:rPr>
-              <a:t>krok </a:t>
-            </a:r>
-            <a:r>
-              <a:rPr lang="pl-PL" sz="1400" dirty="0" smtClean="0">
-                <a:solidFill>
-                  <a:srgbClr val="CCCCCC"/>
-                </a:solidFill>
-                <a:latin typeface="Consolas" panose="020B0609020204030204" pitchFamily="49" charset="0"/>
-              </a:rPr>
-              <a:t>iteracji</a:t>
-            </a:r>
-            <a:endParaRPr lang="pl-PL" sz="1400" dirty="0">
-              <a:solidFill>
-                <a:srgbClr val="CCCCCC"/>
-              </a:solidFill>
-              <a:latin typeface="Consolas" panose="020B0609020204030204" pitchFamily="49" charset="0"/>
-            </a:endParaRPr>
-          </a:p>
         </p:txBody>
       </p:sp>
       <p:sp>
@@ -10927,8 +11592,8 @@
         </p:nvSpPr>
         <p:spPr>
           <a:xfrm>
-            <a:off x="5943600" y="1097280"/>
-            <a:ext cx="2926080" cy="3749040"/>
+            <a:off x="5943600" y="1097281"/>
+            <a:ext cx="2926080" cy="2679266"/>
           </a:xfrm>
           <a:prstGeom prst="rect">
             <a:avLst/>
@@ -10960,7 +11625,7 @@
         <p:spPr>
           <a:xfrm>
             <a:off x="5943600" y="1097280"/>
-            <a:ext cx="2926080" cy="384048"/>
+            <a:ext cx="2926080" cy="298125"/>
           </a:xfrm>
           <a:prstGeom prst="rect">
             <a:avLst/>
@@ -10985,7 +11650,7 @@
         <p:spPr>
           <a:xfrm>
             <a:off x="6080760" y="1115568"/>
-            <a:ext cx="2651760" cy="347472"/>
+            <a:ext cx="2651760" cy="269732"/>
           </a:xfrm>
           <a:prstGeom prst="rect">
             <a:avLst/>
@@ -11001,7 +11666,7 @@
               <a:buNone/>
             </a:pPr>
             <a:r>
-              <a:rPr lang="en-US" sz="1300" b="1" dirty="0">
+              <a:rPr lang="en-US" sz="1600" b="1" dirty="0">
                 <a:solidFill>
                   <a:srgbClr val="FFFFFF"/>
                 </a:solidFill>
@@ -11011,7 +11676,7 @@
               </a:rPr>
               <a:t>Właściwości</a:t>
             </a:r>
-            <a:endParaRPr lang="en-US" sz="1300" dirty="0"/>
+            <a:endParaRPr lang="en-US" sz="1600" dirty="0"/>
           </a:p>
         </p:txBody>
       </p:sp>
@@ -11024,7 +11689,7 @@
         <p:spPr>
           <a:xfrm>
             <a:off x="6080760" y="1554480"/>
-            <a:ext cx="2651760" cy="3200400"/>
+            <a:ext cx="2651760" cy="1841974"/>
           </a:xfrm>
           <a:prstGeom prst="rect">
             <a:avLst/>
@@ -11033,10 +11698,12 @@
           <a:ln/>
         </p:spPr>
         <p:txBody>
-          <a:bodyPr wrap="square" lIns="63500" tIns="101600" rIns="63500" bIns="63500" rtlCol="0" anchor="t"/>
+          <a:bodyPr wrap="square" lIns="63500" tIns="36000" rIns="63500" bIns="0" rtlCol="0" anchor="t">
+            <a:spAutoFit/>
+          </a:bodyPr>
           <a:lstStyle/>
           <a:p>
-            <a:pPr marL="342900" indent="-342900">
+            <a:pPr marL="180000" indent="-180000">
               <a:spcAft>
                 <a:spcPts val="800"/>
               </a:spcAft>
@@ -11057,7 +11724,7 @@
             <a:endParaRPr lang="en-US" sz="1200" dirty="0"/>
           </a:p>
           <a:p>
-            <a:pPr marL="342900" indent="-342900">
+            <a:pPr marL="180000" indent="-180000">
               <a:spcAft>
                 <a:spcPts val="800"/>
               </a:spcAft>
@@ -11078,7 +11745,7 @@
             <a:endParaRPr lang="en-US" sz="1200" dirty="0"/>
           </a:p>
           <a:p>
-            <a:pPr marL="342900" indent="-342900">
+            <a:pPr marL="180000" indent="-180000">
               <a:spcAft>
                 <a:spcPts val="800"/>
               </a:spcAft>
@@ -11099,7 +11766,7 @@
             <a:endParaRPr lang="en-US" sz="1200" dirty="0"/>
           </a:p>
           <a:p>
-            <a:pPr marL="342900" indent="-342900">
+            <a:pPr marL="180000" indent="-180000">
               <a:spcAft>
                 <a:spcPts val="800"/>
               </a:spcAft>
@@ -11120,7 +11787,7 @@
             <a:endParaRPr lang="en-US" sz="1200" dirty="0"/>
           </a:p>
           <a:p>
-            <a:pPr marL="342900" indent="-342900">
+            <a:pPr marL="180000" indent="-180000">
               <a:spcAft>
                 <a:spcPts val="800"/>
               </a:spcAft>
@@ -11136,12 +11803,89 @@
                 <a:ea typeface="Calibri" pitchFamily="34" charset="-122"/>
                 <a:cs typeface="Calibri" pitchFamily="34" charset="-120"/>
               </a:rPr>
-              <a:t>Trudna parametryzacja k_att, k_rep</a:t>
-            </a:r>
-            <a:endParaRPr lang="en-US" sz="1200" dirty="0"/>
-          </a:p>
-          <a:p>
-            <a:pPr marL="342900" indent="-342900">
+              <a:t>Trudna </a:t>
+            </a:r>
+            <a:r>
+              <a:rPr lang="en-US" sz="1200" dirty="0" err="1">
+                <a:solidFill>
+                  <a:srgbClr val="90E0EF"/>
+                </a:solidFill>
+                <a:latin typeface="Calibri" pitchFamily="34" charset="0"/>
+                <a:ea typeface="Calibri" pitchFamily="34" charset="-122"/>
+                <a:cs typeface="Calibri" pitchFamily="34" charset="-120"/>
+              </a:rPr>
+              <a:t>parametryzacja</a:t>
+            </a:r>
+            <a:r>
+              <a:rPr lang="en-US" sz="1200" dirty="0">
+                <a:solidFill>
+                  <a:srgbClr val="90E0EF"/>
+                </a:solidFill>
+                <a:latin typeface="Calibri" pitchFamily="34" charset="0"/>
+                <a:ea typeface="Calibri" pitchFamily="34" charset="-122"/>
+                <a:cs typeface="Calibri" pitchFamily="34" charset="-120"/>
+              </a:rPr>
+              <a:t> </a:t>
+            </a:r>
+            <a:r>
+              <a:rPr lang="en-US" sz="1200" dirty="0" err="1" smtClean="0">
+                <a:solidFill>
+                  <a:srgbClr val="90E0EF"/>
+                </a:solidFill>
+                <a:latin typeface="Calibri" pitchFamily="34" charset="0"/>
+                <a:ea typeface="Calibri" pitchFamily="34" charset="-122"/>
+                <a:cs typeface="Calibri" pitchFamily="34" charset="-120"/>
+              </a:rPr>
+              <a:t>k</a:t>
+            </a:r>
+            <a:r>
+              <a:rPr lang="en-US" sz="1200" baseline="-25000" dirty="0" err="1" smtClean="0">
+                <a:solidFill>
+                  <a:srgbClr val="90E0EF"/>
+                </a:solidFill>
+                <a:latin typeface="Calibri" pitchFamily="34" charset="0"/>
+                <a:ea typeface="Calibri" pitchFamily="34" charset="-122"/>
+                <a:cs typeface="Calibri" pitchFamily="34" charset="-120"/>
+              </a:rPr>
+              <a:t>att</a:t>
+            </a:r>
+            <a:r>
+              <a:rPr lang="en-US" sz="1200" dirty="0">
+                <a:solidFill>
+                  <a:srgbClr val="90E0EF"/>
+                </a:solidFill>
+                <a:latin typeface="Calibri" pitchFamily="34" charset="0"/>
+                <a:ea typeface="Calibri" pitchFamily="34" charset="-122"/>
+                <a:cs typeface="Calibri" pitchFamily="34" charset="-120"/>
+              </a:rPr>
+              <a:t>, </a:t>
+            </a:r>
+            <a:r>
+              <a:rPr lang="en-US" sz="1200" dirty="0" err="1" smtClean="0">
+                <a:solidFill>
+                  <a:srgbClr val="90E0EF"/>
+                </a:solidFill>
+                <a:latin typeface="Calibri" pitchFamily="34" charset="0"/>
+                <a:ea typeface="Calibri" pitchFamily="34" charset="-122"/>
+                <a:cs typeface="Calibri" pitchFamily="34" charset="-120"/>
+              </a:rPr>
+              <a:t>k</a:t>
+            </a:r>
+            <a:r>
+              <a:rPr lang="en-US" sz="1200" baseline="-25000" dirty="0" err="1" smtClean="0">
+                <a:solidFill>
+                  <a:srgbClr val="90E0EF"/>
+                </a:solidFill>
+                <a:latin typeface="Calibri" pitchFamily="34" charset="0"/>
+                <a:ea typeface="Calibri" pitchFamily="34" charset="-122"/>
+                <a:cs typeface="Calibri" pitchFamily="34" charset="-120"/>
+              </a:rPr>
+              <a:t>rep</a:t>
+            </a:r>
+            <a:endParaRPr lang="en-US" sz="1200" baseline="-25000" dirty="0"/>
+          </a:p>
+          <a:p>
+            <a:pPr marL="180000" indent="-180000">
               <a:spcAft>
                 <a:spcPts val="800"/>
               </a:spcAft>
@@ -11310,7 +12054,7 @@
               <a:buNone/>
             </a:pPr>
             <a:r>
-              <a:rPr lang="en-US" sz="2800" b="1" dirty="0">
+              <a:rPr lang="pl-PL" sz="2400" b="1" dirty="0" smtClean="0">
                 <a:solidFill>
                   <a:srgbClr val="FFFFFF"/>
                 </a:solidFill>
@@ -11318,9 +12062,53 @@
                 <a:ea typeface="Trebuchet MS" pitchFamily="34" charset="-122"/>
                 <a:cs typeface="Trebuchet MS" pitchFamily="34" charset="-120"/>
               </a:rPr>
-              <a:t>Dynamic Window Approach (DWA) – idea</a:t>
-            </a:r>
-            <a:endParaRPr lang="en-US" sz="2800" dirty="0"/>
+              <a:t>Idea </a:t>
+            </a:r>
+            <a:r>
+              <a:rPr lang="en-US" sz="2400" b="1" dirty="0" smtClean="0">
+                <a:solidFill>
+                  <a:srgbClr val="FFFFFF"/>
+                </a:solidFill>
+                <a:latin typeface="Trebuchet MS" pitchFamily="34" charset="0"/>
+                <a:ea typeface="Trebuchet MS" pitchFamily="34" charset="-122"/>
+                <a:cs typeface="Trebuchet MS" pitchFamily="34" charset="-120"/>
+              </a:rPr>
+              <a:t>Dynamic </a:t>
+            </a:r>
+            <a:r>
+              <a:rPr lang="en-US" sz="2400" b="1" dirty="0">
+                <a:solidFill>
+                  <a:srgbClr val="FFFFFF"/>
+                </a:solidFill>
+                <a:latin typeface="Trebuchet MS" pitchFamily="34" charset="0"/>
+                <a:ea typeface="Trebuchet MS" pitchFamily="34" charset="-122"/>
+                <a:cs typeface="Trebuchet MS" pitchFamily="34" charset="-120"/>
+              </a:rPr>
+              <a:t>Window Approach </a:t>
+            </a:r>
+            <a:r>
+              <a:rPr lang="en-US" sz="2400" dirty="0">
+                <a:solidFill>
+                  <a:srgbClr val="FFFFFF"/>
+                </a:solidFill>
+                <a:latin typeface="Trebuchet MS" pitchFamily="34" charset="0"/>
+                <a:ea typeface="Trebuchet MS" pitchFamily="34" charset="-122"/>
+                <a:cs typeface="Trebuchet MS" pitchFamily="34" charset="-120"/>
+              </a:rPr>
+              <a:t>(DWA</a:t>
+            </a:r>
+            <a:r>
+              <a:rPr lang="en-US" sz="2400" dirty="0" smtClean="0">
+                <a:solidFill>
+                  <a:srgbClr val="FFFFFF"/>
+                </a:solidFill>
+                <a:latin typeface="Trebuchet MS" pitchFamily="34" charset="0"/>
+                <a:ea typeface="Trebuchet MS" pitchFamily="34" charset="-122"/>
+                <a:cs typeface="Trebuchet MS" pitchFamily="34" charset="-120"/>
+              </a:rPr>
+              <a:t>)</a:t>
+            </a:r>
+            <a:endParaRPr lang="en-US" sz="2400" dirty="0"/>
           </a:p>
         </p:txBody>
       </p:sp>
@@ -11332,8 +12120,8 @@
         </p:nvSpPr>
         <p:spPr>
           <a:xfrm>
-            <a:off x="274320" y="1097280"/>
-            <a:ext cx="8595360" cy="3749040"/>
+            <a:off x="274320" y="1097281"/>
+            <a:ext cx="8595360" cy="2728408"/>
           </a:xfrm>
           <a:prstGeom prst="rect">
             <a:avLst/>
@@ -11364,8 +12152,8 @@
         </p:nvSpPr>
         <p:spPr>
           <a:xfrm>
-            <a:off x="457200" y="1188720"/>
-            <a:ext cx="8229600" cy="3520440"/>
+            <a:off x="410132" y="1128204"/>
+            <a:ext cx="8229600" cy="2604165"/>
           </a:xfrm>
           <a:prstGeom prst="rect">
             <a:avLst/>
@@ -11374,18 +12162,20 @@
           <a:ln/>
         </p:spPr>
         <p:txBody>
-          <a:bodyPr wrap="square" lIns="127000" tIns="127000" rIns="127000" bIns="127000" rtlCol="0" anchor="t"/>
+          <a:bodyPr wrap="square" lIns="127000" tIns="36000" rIns="127000" bIns="36000" rtlCol="0" anchor="t">
+            <a:spAutoFit/>
+          </a:bodyPr>
           <a:lstStyle/>
           <a:p>
             <a:pPr marL="144000" indent="-144000">
               <a:spcAft>
-                <a:spcPts val="1200"/>
+                <a:spcPts val="900"/>
               </a:spcAft>
               <a:buSzPct val="100000"/>
               <a:buChar char="•"/>
             </a:pPr>
             <a:r>
-              <a:rPr lang="en-US" sz="1450" b="1" dirty="0">
+              <a:rPr lang="en-US" sz="1400" b="1" dirty="0">
                 <a:solidFill>
                   <a:srgbClr val="0D1B2A"/>
                 </a:solidFill>
@@ -11396,7 +12186,7 @@
               <a:t>Idea</a:t>
             </a:r>
             <a:r>
-              <a:rPr lang="en-US" sz="1450" dirty="0">
+              <a:rPr lang="en-US" sz="1400" dirty="0">
                 <a:solidFill>
                   <a:srgbClr val="0D1B2A"/>
                 </a:solidFill>
@@ -11406,18 +12196,18 @@
               </a:rPr>
               <a:t>: w każdym kroku czasowym szukaj najlepszej pary prędkości (v, ω) z okna osiągalnego</a:t>
             </a:r>
-            <a:endParaRPr lang="en-US" sz="1450" dirty="0"/>
+            <a:endParaRPr lang="en-US" sz="1400" dirty="0"/>
           </a:p>
           <a:p>
             <a:pPr marL="144000" indent="-144000">
               <a:spcAft>
-                <a:spcPts val="1200"/>
+                <a:spcPts val="900"/>
               </a:spcAft>
               <a:buSzPct val="100000"/>
               <a:buChar char="•"/>
             </a:pPr>
             <a:r>
-              <a:rPr lang="en-US" sz="1450" b="1" dirty="0">
+              <a:rPr lang="en-US" sz="1400" b="1" dirty="0">
                 <a:solidFill>
                   <a:srgbClr val="0D1B2A"/>
                 </a:solidFill>
@@ -11428,7 +12218,7 @@
               <a:t>Okno dynamiczne</a:t>
             </a:r>
             <a:r>
-              <a:rPr lang="en-US" sz="1450" dirty="0">
+              <a:rPr lang="en-US" sz="1400" dirty="0">
                 <a:solidFill>
                   <a:srgbClr val="0D1B2A"/>
                 </a:solidFill>
@@ -11438,18 +12228,18 @@
               </a:rPr>
               <a:t>: {(v, ω) | v ∈ [v-a_max·dt, v+a_max·dt], ω analogicznie}</a:t>
             </a:r>
-            <a:endParaRPr lang="en-US" sz="1450" dirty="0"/>
+            <a:endParaRPr lang="en-US" sz="1400" dirty="0"/>
           </a:p>
           <a:p>
             <a:pPr marL="144000" indent="-144000">
               <a:spcAft>
-                <a:spcPts val="1200"/>
+                <a:spcPts val="900"/>
               </a:spcAft>
               <a:buSzPct val="100000"/>
               <a:buChar char="•"/>
             </a:pPr>
             <a:r>
-              <a:rPr lang="en-US" sz="1450" b="1" dirty="0">
+              <a:rPr lang="en-US" sz="1400" b="1" dirty="0">
                 <a:solidFill>
                   <a:srgbClr val="0D1B2A"/>
                 </a:solidFill>
@@ -11460,7 +12250,7 @@
               <a:t>Ocena trajektorii</a:t>
             </a:r>
             <a:r>
-              <a:rPr lang="en-US" sz="1450" dirty="0">
+              <a:rPr lang="en-US" sz="1400" dirty="0">
                 <a:solidFill>
                   <a:srgbClr val="0D1B2A"/>
                 </a:solidFill>
@@ -11470,18 +12260,18 @@
               </a:rPr>
               <a:t>: dla każdego kandydata (v, ω) symuluj ruch przez T sekund (np. T=2 s)</a:t>
             </a:r>
-            <a:endParaRPr lang="en-US" sz="1450" dirty="0"/>
+            <a:endParaRPr lang="en-US" sz="1400" dirty="0"/>
           </a:p>
           <a:p>
             <a:pPr marL="144000" indent="-144000">
               <a:spcAft>
-                <a:spcPts val="1200"/>
+                <a:spcPts val="900"/>
               </a:spcAft>
               <a:buSzPct val="100000"/>
               <a:buChar char="•"/>
             </a:pPr>
             <a:r>
-              <a:rPr lang="en-US" sz="1450" b="1" dirty="0">
+              <a:rPr lang="en-US" sz="1400" b="1" dirty="0">
                 <a:solidFill>
                   <a:srgbClr val="0D1B2A"/>
                 </a:solidFill>
@@ -11492,7 +12282,7 @@
               <a:t>Funkcja celu</a:t>
             </a:r>
             <a:r>
-              <a:rPr lang="en-US" sz="1450" dirty="0">
+              <a:rPr lang="en-US" sz="1400" dirty="0">
                 <a:solidFill>
                   <a:srgbClr val="0D1B2A"/>
                 </a:solidFill>
@@ -11502,18 +12292,18 @@
               </a:rPr>
               <a:t>: G(v,ω) = α·heading + β·clearance + γ·velocity</a:t>
             </a:r>
-            <a:endParaRPr lang="en-US" sz="1450" dirty="0"/>
+            <a:endParaRPr lang="en-US" sz="1400" dirty="0"/>
           </a:p>
           <a:p>
             <a:pPr marL="144000" indent="-144000">
               <a:spcAft>
-                <a:spcPts val="1200"/>
+                <a:spcPts val="900"/>
               </a:spcAft>
               <a:buSzPct val="100000"/>
               <a:buChar char="•"/>
             </a:pPr>
             <a:r>
-              <a:rPr lang="en-US" sz="1450" b="1" dirty="0">
+              <a:rPr lang="en-US" sz="1400" b="1" dirty="0">
                 <a:solidFill>
                   <a:srgbClr val="0D1B2A"/>
                 </a:solidFill>
@@ -11524,7 +12314,7 @@
               <a:t>heading</a:t>
             </a:r>
             <a:r>
-              <a:rPr lang="en-US" sz="1450" dirty="0">
+              <a:rPr lang="en-US" sz="1400" dirty="0">
                 <a:solidFill>
                   <a:srgbClr val="0D1B2A"/>
                 </a:solidFill>
@@ -11534,18 +12324,18 @@
               </a:rPr>
               <a:t>:   wyrównanie kierunku ruchu z celem globalnym</a:t>
             </a:r>
-            <a:endParaRPr lang="en-US" sz="1450" dirty="0"/>
+            <a:endParaRPr lang="en-US" sz="1400" dirty="0"/>
           </a:p>
           <a:p>
             <a:pPr marL="144000" indent="-144000">
               <a:spcAft>
-                <a:spcPts val="1200"/>
+                <a:spcPts val="900"/>
               </a:spcAft>
               <a:buSzPct val="100000"/>
               <a:buChar char="•"/>
             </a:pPr>
             <a:r>
-              <a:rPr lang="en-US" sz="1450" b="1" dirty="0">
+              <a:rPr lang="en-US" sz="1400" b="1" dirty="0">
                 <a:solidFill>
                   <a:srgbClr val="0D1B2A"/>
                 </a:solidFill>
@@ -11556,7 +12346,7 @@
               <a:t>clearance</a:t>
             </a:r>
             <a:r>
-              <a:rPr lang="en-US" sz="1450" dirty="0">
+              <a:rPr lang="en-US" sz="1400" dirty="0">
                 <a:solidFill>
                   <a:srgbClr val="0D1B2A"/>
                 </a:solidFill>
@@ -11566,18 +12356,18 @@
               </a:rPr>
               <a:t>: odległość od najbliższej przeszkody wzdłuż trajektorii</a:t>
             </a:r>
-            <a:endParaRPr lang="en-US" sz="1450" dirty="0"/>
+            <a:endParaRPr lang="en-US" sz="1400" dirty="0"/>
           </a:p>
           <a:p>
             <a:pPr marL="144000" indent="-144000">
               <a:spcAft>
-                <a:spcPts val="1200"/>
+                <a:spcPts val="900"/>
               </a:spcAft>
               <a:buSzPct val="100000"/>
               <a:buChar char="•"/>
             </a:pPr>
             <a:r>
-              <a:rPr lang="en-US" sz="1450" b="1" dirty="0">
+              <a:rPr lang="en-US" sz="1400" b="1" dirty="0">
                 <a:solidFill>
                   <a:srgbClr val="0D1B2A"/>
                 </a:solidFill>
@@ -11588,7 +12378,7 @@
               <a:t>velocity</a:t>
             </a:r>
             <a:r>
-              <a:rPr lang="en-US" sz="1450" dirty="0">
+              <a:rPr lang="en-US" sz="1400" dirty="0">
                 <a:solidFill>
                   <a:srgbClr val="0D1B2A"/>
                 </a:solidFill>
@@ -11598,18 +12388,18 @@
               </a:rPr>
               <a:t>:  nagroda za wyższą prędkość do przodu</a:t>
             </a:r>
-            <a:endParaRPr lang="en-US" sz="1450" dirty="0"/>
+            <a:endParaRPr lang="en-US" sz="1400" dirty="0"/>
           </a:p>
           <a:p>
             <a:pPr marL="144000" indent="-144000">
               <a:spcAft>
-                <a:spcPts val="1200"/>
+                <a:spcPts val="900"/>
               </a:spcAft>
               <a:buSzPct val="100000"/>
               <a:buChar char="•"/>
             </a:pPr>
             <a:r>
-              <a:rPr lang="en-US" sz="1450" b="1" dirty="0">
+              <a:rPr lang="pl-PL" sz="1400" b="1" dirty="0" smtClean="0">
                 <a:solidFill>
                   <a:srgbClr val="0D1B2A"/>
                 </a:solidFill>
@@ -11617,10 +12407,10 @@
                 <a:ea typeface="Calibri" pitchFamily="34" charset="-122"/>
                 <a:cs typeface="Calibri" pitchFamily="34" charset="-120"/>
               </a:rPr>
-              <a:t>Wybierz</a:t>
-            </a:r>
-            <a:r>
-              <a:rPr lang="en-US" sz="1450" dirty="0">
+              <a:t>w</a:t>
+            </a:r>
+            <a:r>
+              <a:rPr lang="en-US" sz="1400" b="1" dirty="0" err="1" smtClean="0">
                 <a:solidFill>
                   <a:srgbClr val="0D1B2A"/>
                 </a:solidFill>
@@ -11628,9 +12418,42 @@
                 <a:ea typeface="Calibri" pitchFamily="34" charset="-122"/>
                 <a:cs typeface="Calibri" pitchFamily="34" charset="-120"/>
               </a:rPr>
-              <a:t> (v*, ω*) = argmax G – wykonaj jeden krok, przelicz w kolejnym cyklu</a:t>
-            </a:r>
-            <a:endParaRPr lang="en-US" sz="1450" dirty="0"/>
+              <a:t>ybierz</a:t>
+            </a:r>
+            <a:r>
+              <a:rPr lang="en-US" sz="1400" b="1" dirty="0" smtClean="0">
+                <a:solidFill>
+                  <a:srgbClr val="0D1B2A"/>
+                </a:solidFill>
+                <a:latin typeface="Calibri" pitchFamily="34" charset="0"/>
+                <a:ea typeface="Calibri" pitchFamily="34" charset="-122"/>
+                <a:cs typeface="Calibri" pitchFamily="34" charset="-120"/>
+              </a:rPr>
+              <a:t> </a:t>
+            </a:r>
+            <a:r>
+              <a:rPr lang="en-US" sz="1400" b="1" dirty="0">
+                <a:solidFill>
+                  <a:srgbClr val="0D1B2A"/>
+                </a:solidFill>
+                <a:latin typeface="Calibri" pitchFamily="34" charset="0"/>
+                <a:ea typeface="Calibri" pitchFamily="34" charset="-122"/>
+                <a:cs typeface="Calibri" pitchFamily="34" charset="-120"/>
+              </a:rPr>
+              <a:t>(v*, ω*) = argmax G </a:t>
+            </a:r>
+            <a:r>
+              <a:rPr lang="en-US" sz="1400" dirty="0">
+                <a:solidFill>
+                  <a:srgbClr val="0D1B2A"/>
+                </a:solidFill>
+                <a:latin typeface="Calibri" pitchFamily="34" charset="0"/>
+                <a:ea typeface="Calibri" pitchFamily="34" charset="-122"/>
+                <a:cs typeface="Calibri" pitchFamily="34" charset="-120"/>
+              </a:rPr>
+              <a:t>– wykonaj jeden krok, przelicz w kolejnym cyklu</a:t>
+            </a:r>
+            <a:endParaRPr lang="en-US" sz="1400" dirty="0"/>
           </a:p>
         </p:txBody>
       </p:sp>
@@ -11789,7 +12612,73 @@
                 <a:ea typeface="Trebuchet MS" pitchFamily="34" charset="-122"/>
                 <a:cs typeface="Trebuchet MS" pitchFamily="34" charset="-120"/>
               </a:rPr>
-              <a:t>Model Predictive Control – intuicja</a:t>
+              <a:t>Model Predictive </a:t>
+            </a:r>
+            <a:r>
+              <a:rPr lang="en-US" sz="2400" b="1" dirty="0" smtClean="0">
+                <a:solidFill>
+                  <a:srgbClr val="FFFFFF"/>
+                </a:solidFill>
+                <a:latin typeface="Trebuchet MS" pitchFamily="34" charset="0"/>
+                <a:ea typeface="Trebuchet MS" pitchFamily="34" charset="-122"/>
+                <a:cs typeface="Trebuchet MS" pitchFamily="34" charset="-120"/>
+              </a:rPr>
+              <a:t>Control</a:t>
+            </a:r>
+            <a:r>
+              <a:rPr lang="pl-PL" sz="2400" b="1" dirty="0" smtClean="0">
+                <a:solidFill>
+                  <a:srgbClr val="FFFFFF"/>
+                </a:solidFill>
+                <a:latin typeface="Trebuchet MS" pitchFamily="34" charset="0"/>
+                <a:ea typeface="Trebuchet MS" pitchFamily="34" charset="-122"/>
+                <a:cs typeface="Trebuchet MS" pitchFamily="34" charset="-120"/>
+              </a:rPr>
+              <a:t>, czyli taka</a:t>
+            </a:r>
+            <a:r>
+              <a:rPr lang="en-US" sz="2400" b="1" dirty="0" smtClean="0">
+                <a:solidFill>
+                  <a:srgbClr val="FFFFFF"/>
+                </a:solidFill>
+                <a:latin typeface="Trebuchet MS" pitchFamily="34" charset="0"/>
+                <a:ea typeface="Trebuchet MS" pitchFamily="34" charset="-122"/>
+                <a:cs typeface="Trebuchet MS" pitchFamily="34" charset="-120"/>
+              </a:rPr>
+              <a:t> </a:t>
+            </a:r>
+            <a:r>
+              <a:rPr lang="pl-PL" sz="2400" b="1" dirty="0" smtClean="0">
+                <a:solidFill>
+                  <a:srgbClr val="FFFFFF"/>
+                </a:solidFill>
+                <a:latin typeface="Trebuchet MS" pitchFamily="34" charset="0"/>
+                <a:ea typeface="Trebuchet MS" pitchFamily="34" charset="-122"/>
+                <a:cs typeface="Trebuchet MS" pitchFamily="34" charset="-120"/>
+              </a:rPr>
+              <a:t>„</a:t>
+            </a:r>
+            <a:r>
+              <a:rPr lang="en-US" sz="2400" b="1" dirty="0" err="1" smtClean="0">
+                <a:solidFill>
+                  <a:srgbClr val="FFFFFF"/>
+                </a:solidFill>
+                <a:latin typeface="Trebuchet MS" pitchFamily="34" charset="0"/>
+                <a:ea typeface="Trebuchet MS" pitchFamily="34" charset="-122"/>
+                <a:cs typeface="Trebuchet MS" pitchFamily="34" charset="-120"/>
+              </a:rPr>
+              <a:t>intuicja</a:t>
+            </a:r>
+            <a:r>
+              <a:rPr lang="pl-PL" sz="2400" b="1" dirty="0" smtClean="0">
+                <a:solidFill>
+                  <a:srgbClr val="FFFFFF"/>
+                </a:solidFill>
+                <a:latin typeface="Trebuchet MS" pitchFamily="34" charset="0"/>
+                <a:ea typeface="Trebuchet MS" pitchFamily="34" charset="-122"/>
+                <a:cs typeface="Trebuchet MS" pitchFamily="34" charset="-120"/>
+              </a:rPr>
+              <a:t>”</a:t>
             </a:r>
             <a:endParaRPr lang="en-US" sz="2400" dirty="0"/>
           </a:p>
@@ -11804,7 +12693,7 @@
         <p:spPr>
           <a:xfrm>
             <a:off x="274320" y="1097280"/>
-            <a:ext cx="8595360" cy="3749040"/>
+            <a:ext cx="8595360" cy="2709003"/>
           </a:xfrm>
           <a:prstGeom prst="rect">
             <a:avLst/>
@@ -11835,8 +12724,8 @@
         </p:nvSpPr>
         <p:spPr>
           <a:xfrm>
-            <a:off x="457200" y="1188720"/>
-            <a:ext cx="8229600" cy="3520440"/>
+            <a:off x="457200" y="1155100"/>
+            <a:ext cx="8229600" cy="2467786"/>
           </a:xfrm>
           <a:prstGeom prst="rect">
             <a:avLst/>
@@ -11845,7 +12734,9 @@
           <a:ln/>
         </p:spPr>
         <p:txBody>
-          <a:bodyPr wrap="square" lIns="127000" tIns="127000" rIns="127000" bIns="127000" rtlCol="0" anchor="t"/>
+          <a:bodyPr wrap="square" lIns="127000" tIns="36000" rIns="127000" bIns="0" rtlCol="0" anchor="t">
+            <a:spAutoFit/>
+          </a:bodyPr>
           <a:lstStyle/>
           <a:p>
             <a:pPr marL="144000" indent="-144000">
@@ -13181,13 +14072,13 @@
               <a:t># Suma sil odpychania od </a:t>
             </a:r>
             <a:r>
-              <a:rPr lang="pl-PL" sz="1100" dirty="0" err="1">
+              <a:rPr lang="pl-PL" sz="1100" dirty="0" smtClean="0">
                 <a:solidFill>
                   <a:srgbClr val="6A9955"/>
                 </a:solidFill>
                 <a:latin typeface="Consolas" panose="020B0609020204030204" pitchFamily="49" charset="0"/>
               </a:rPr>
-              <a:t>przeszkod</a:t>
+              <a:t>przeszkód</a:t>
             </a:r>
             <a:endParaRPr lang="pl-PL" sz="1100" dirty="0">
               <a:solidFill>
@@ -14564,7 +15455,7 @@
               <a:buNone/>
             </a:pPr>
             <a:r>
-              <a:rPr lang="en-US" sz="2800" b="1" dirty="0">
+              <a:rPr lang="en-US" sz="2400" b="1" dirty="0">
                 <a:solidFill>
                   <a:srgbClr val="FFFFFF"/>
                 </a:solidFill>
@@ -14574,7 +15465,7 @@
               </a:rPr>
               <a:t>Plan wykładu</a:t>
             </a:r>
-            <a:endParaRPr lang="en-US" sz="2800" dirty="0"/>
+            <a:endParaRPr lang="en-US" sz="2400" dirty="0"/>
           </a:p>
         </p:txBody>
       </p:sp>
@@ -14587,7 +15478,7 @@
         <p:spPr>
           <a:xfrm>
             <a:off x="274320" y="1143000"/>
-            <a:ext cx="4160520" cy="1691640"/>
+            <a:ext cx="4160520" cy="1287648"/>
           </a:xfrm>
           <a:prstGeom prst="rect">
             <a:avLst/>
@@ -14619,7 +15510,7 @@
         <p:spPr>
           <a:xfrm>
             <a:off x="274320" y="1143000"/>
-            <a:ext cx="4160520" cy="54864"/>
+            <a:ext cx="4160520" cy="41762"/>
           </a:xfrm>
           <a:prstGeom prst="rect">
             <a:avLst/>
@@ -14643,8 +15534,8 @@
         </p:nvSpPr>
         <p:spPr>
           <a:xfrm>
-            <a:off x="384048" y="1234440"/>
-            <a:ext cx="3941064" cy="642823"/>
+            <a:off x="428652" y="1212603"/>
+            <a:ext cx="3941064" cy="489306"/>
           </a:xfrm>
           <a:prstGeom prst="rect">
             <a:avLst/>
@@ -14660,7 +15551,7 @@
               <a:buNone/>
             </a:pPr>
             <a:r>
-              <a:rPr lang="en-US" b="1" dirty="0">
+              <a:rPr lang="en-US" sz="2000" b="1" dirty="0">
                 <a:solidFill>
                   <a:srgbClr val="0D1B2A"/>
                 </a:solidFill>
@@ -14670,7 +15561,7 @@
               </a:rPr>
               <a:t>Sekcja 1</a:t>
             </a:r>
-            <a:endParaRPr lang="en-US" dirty="0"/>
+            <a:endParaRPr lang="en-US" sz="2000" dirty="0"/>
           </a:p>
         </p:txBody>
       </p:sp>
@@ -14682,8 +15573,8 @@
         </p:nvSpPr>
         <p:spPr>
           <a:xfrm>
-            <a:off x="384048" y="1853489"/>
-            <a:ext cx="3941064" cy="930402"/>
+            <a:off x="428652" y="1683812"/>
+            <a:ext cx="3941064" cy="708206"/>
           </a:xfrm>
           <a:prstGeom prst="rect">
             <a:avLst/>
@@ -14722,7 +15613,7 @@
         <p:spPr>
           <a:xfrm>
             <a:off x="4709160" y="1143000"/>
-            <a:ext cx="4160520" cy="1691640"/>
+            <a:ext cx="4160520" cy="1287648"/>
           </a:xfrm>
           <a:prstGeom prst="rect">
             <a:avLst/>
@@ -14754,7 +15645,7 @@
         <p:spPr>
           <a:xfrm>
             <a:off x="4709160" y="1143000"/>
-            <a:ext cx="4160520" cy="54864"/>
+            <a:ext cx="4160520" cy="41762"/>
           </a:xfrm>
           <a:prstGeom prst="rect">
             <a:avLst/>
@@ -14778,8 +15669,8 @@
         </p:nvSpPr>
         <p:spPr>
           <a:xfrm>
-            <a:off x="4818888" y="1234440"/>
-            <a:ext cx="3941064" cy="642823"/>
+            <a:off x="4863492" y="1212603"/>
+            <a:ext cx="3941064" cy="489306"/>
           </a:xfrm>
           <a:prstGeom prst="rect">
             <a:avLst/>
@@ -14795,7 +15686,7 @@
               <a:buNone/>
             </a:pPr>
             <a:r>
-              <a:rPr lang="en-US" b="1" dirty="0">
+              <a:rPr lang="en-US" sz="2000" b="1" dirty="0">
                 <a:solidFill>
                   <a:srgbClr val="0D1B2A"/>
                 </a:solidFill>
@@ -14805,7 +15696,7 @@
               </a:rPr>
               <a:t>Sekcja 2</a:t>
             </a:r>
-            <a:endParaRPr lang="en-US" dirty="0"/>
+            <a:endParaRPr lang="en-US" sz="2000" dirty="0"/>
           </a:p>
         </p:txBody>
       </p:sp>
@@ -14817,8 +15708,8 @@
         </p:nvSpPr>
         <p:spPr>
           <a:xfrm>
-            <a:off x="4818888" y="1853489"/>
-            <a:ext cx="3941064" cy="930402"/>
+            <a:off x="4863492" y="1683812"/>
+            <a:ext cx="3941064" cy="708206"/>
           </a:xfrm>
           <a:prstGeom prst="rect">
             <a:avLst/>
@@ -14856,8 +15747,8 @@
         </p:nvSpPr>
         <p:spPr>
           <a:xfrm>
-            <a:off x="274320" y="2971800"/>
-            <a:ext cx="4160520" cy="1691640"/>
+            <a:off x="274320" y="2535052"/>
+            <a:ext cx="4160520" cy="1287648"/>
           </a:xfrm>
           <a:prstGeom prst="rect">
             <a:avLst/>
@@ -14888,8 +15779,8 @@
         </p:nvSpPr>
         <p:spPr>
           <a:xfrm>
-            <a:off x="274320" y="2971800"/>
-            <a:ext cx="4160520" cy="54864"/>
+            <a:off x="274320" y="2535052"/>
+            <a:ext cx="4160520" cy="41762"/>
           </a:xfrm>
           <a:prstGeom prst="rect">
             <a:avLst/>
@@ -14913,8 +15804,8 @@
         </p:nvSpPr>
         <p:spPr>
           <a:xfrm>
-            <a:off x="384048" y="3063240"/>
-            <a:ext cx="3941064" cy="642823"/>
+            <a:off x="428652" y="2604655"/>
+            <a:ext cx="3941064" cy="489306"/>
           </a:xfrm>
           <a:prstGeom prst="rect">
             <a:avLst/>
@@ -14930,7 +15821,7 @@
               <a:buNone/>
             </a:pPr>
             <a:r>
-              <a:rPr lang="en-US" b="1" dirty="0">
+              <a:rPr lang="en-US" sz="2000" b="1" dirty="0">
                 <a:solidFill>
                   <a:srgbClr val="0D1B2A"/>
                 </a:solidFill>
@@ -14940,7 +15831,7 @@
               </a:rPr>
               <a:t>Sekcja 3</a:t>
             </a:r>
-            <a:endParaRPr lang="en-US" dirty="0"/>
+            <a:endParaRPr lang="en-US" sz="2000" dirty="0"/>
           </a:p>
         </p:txBody>
       </p:sp>
@@ -14952,8 +15843,8 @@
         </p:nvSpPr>
         <p:spPr>
           <a:xfrm>
-            <a:off x="384048" y="3682289"/>
-            <a:ext cx="3941064" cy="930402"/>
+            <a:off x="382932" y="3075864"/>
+            <a:ext cx="3986784" cy="708206"/>
           </a:xfrm>
           <a:prstGeom prst="rect">
             <a:avLst/>
@@ -14991,8 +15882,8 @@
         </p:nvSpPr>
         <p:spPr>
           <a:xfrm>
-            <a:off x="4709160" y="2971800"/>
-            <a:ext cx="4160520" cy="1691640"/>
+            <a:off x="4709160" y="2535052"/>
+            <a:ext cx="4160520" cy="1287648"/>
           </a:xfrm>
           <a:prstGeom prst="rect">
             <a:avLst/>
@@ -15023,8 +15914,8 @@
         </p:nvSpPr>
         <p:spPr>
           <a:xfrm>
-            <a:off x="4709160" y="2971800"/>
-            <a:ext cx="4160520" cy="54864"/>
+            <a:off x="4709160" y="2535052"/>
+            <a:ext cx="4160520" cy="41762"/>
           </a:xfrm>
           <a:prstGeom prst="rect">
             <a:avLst/>
@@ -15048,8 +15939,8 @@
         </p:nvSpPr>
         <p:spPr>
           <a:xfrm>
-            <a:off x="4818888" y="3063240"/>
-            <a:ext cx="3941064" cy="642823"/>
+            <a:off x="4863492" y="2604655"/>
+            <a:ext cx="3941064" cy="489306"/>
           </a:xfrm>
           <a:prstGeom prst="rect">
             <a:avLst/>
@@ -15065,7 +15956,7 @@
               <a:buNone/>
             </a:pPr>
             <a:r>
-              <a:rPr lang="en-US" b="1" dirty="0">
+              <a:rPr lang="en-US" sz="2000" b="1" dirty="0">
                 <a:solidFill>
                   <a:srgbClr val="0D1B2A"/>
                 </a:solidFill>
@@ -15075,7 +15966,7 @@
               </a:rPr>
               <a:t>Kody Python</a:t>
             </a:r>
-            <a:endParaRPr lang="en-US" dirty="0"/>
+            <a:endParaRPr lang="en-US" sz="2000" dirty="0"/>
           </a:p>
         </p:txBody>
       </p:sp>
@@ -15087,8 +15978,8 @@
         </p:nvSpPr>
         <p:spPr>
           <a:xfrm>
-            <a:off x="4818888" y="3682289"/>
-            <a:ext cx="3941064" cy="930402"/>
+            <a:off x="4863492" y="3075864"/>
+            <a:ext cx="3941064" cy="708206"/>
           </a:xfrm>
           <a:prstGeom prst="rect">
             <a:avLst/>
@@ -15265,7 +16156,7 @@
               <a:buNone/>
             </a:pPr>
             <a:r>
-              <a:rPr lang="en-US" sz="2800" b="1" dirty="0">
+              <a:rPr lang="en-US" sz="2400" b="1" dirty="0">
                 <a:solidFill>
                   <a:srgbClr val="FFFFFF"/>
                 </a:solidFill>
@@ -15273,9 +16164,20 @@
                 <a:ea typeface="Trebuchet MS" pitchFamily="34" charset="-122"/>
                 <a:cs typeface="Trebuchet MS" pitchFamily="34" charset="-120"/>
               </a:rPr>
-              <a:t>Ocena kandydatów trajektorii (uproszczone DWA)</a:t>
-            </a:r>
-            <a:endParaRPr lang="en-US" sz="2800" dirty="0"/>
+              <a:t>Ocena kandydatów trajektorii </a:t>
+            </a:r>
+            <a:r>
+              <a:rPr lang="en-US" sz="2400" dirty="0">
+                <a:solidFill>
+                  <a:srgbClr val="FFFFFF"/>
+                </a:solidFill>
+                <a:latin typeface="Trebuchet MS" pitchFamily="34" charset="0"/>
+                <a:ea typeface="Trebuchet MS" pitchFamily="34" charset="-122"/>
+                <a:cs typeface="Trebuchet MS" pitchFamily="34" charset="-120"/>
+              </a:rPr>
+              <a:t>(uproszczone DWA)</a:t>
+            </a:r>
+            <a:endParaRPr lang="en-US" sz="2400" dirty="0"/>
           </a:p>
         </p:txBody>
       </p:sp>
@@ -17654,7 +18556,7 @@
               <a:buNone/>
             </a:pPr>
             <a:r>
-              <a:rPr lang="en-US" sz="2800" b="1" dirty="0">
+              <a:rPr lang="en-US" sz="2400" b="1" dirty="0">
                 <a:solidFill>
                   <a:srgbClr val="FFFFFF"/>
                 </a:solidFill>
@@ -17664,7 +18566,7 @@
               </a:rPr>
               <a:t>Unikanie ludzi i przeszkód dynamicznych</a:t>
             </a:r>
-            <a:endParaRPr lang="en-US" sz="2800" dirty="0"/>
+            <a:endParaRPr lang="en-US" sz="2400" dirty="0"/>
           </a:p>
         </p:txBody>
       </p:sp>
@@ -17677,7 +18579,7 @@
         <p:spPr>
           <a:xfrm>
             <a:off x="274320" y="1097280"/>
-            <a:ext cx="4160520" cy="3749040"/>
+            <a:ext cx="4160520" cy="2344730"/>
           </a:xfrm>
           <a:prstGeom prst="rect">
             <a:avLst/>
@@ -17709,7 +18611,7 @@
         <p:spPr>
           <a:xfrm>
             <a:off x="4709160" y="1097280"/>
-            <a:ext cx="4160520" cy="3749040"/>
+            <a:ext cx="4160520" cy="2344730"/>
           </a:xfrm>
           <a:prstGeom prst="rect">
             <a:avLst/>
@@ -17868,8 +18770,8 @@
         </p:nvSpPr>
         <p:spPr>
           <a:xfrm>
-            <a:off x="457200" y="1600200"/>
-            <a:ext cx="3794760" cy="3108960"/>
+            <a:off x="367991" y="1600200"/>
+            <a:ext cx="3976895" cy="1765474"/>
           </a:xfrm>
           <a:prstGeom prst="rect">
             <a:avLst/>
@@ -17878,7 +18780,9 @@
           <a:ln/>
         </p:spPr>
         <p:txBody>
-          <a:bodyPr wrap="square" lIns="63500" tIns="101600" rIns="63500" bIns="63500" rtlCol="0" anchor="t"/>
+          <a:bodyPr wrap="square" lIns="63500" tIns="36000" rIns="63500" bIns="0" rtlCol="0" anchor="t">
+            <a:spAutoFit/>
+          </a:bodyPr>
           <a:lstStyle/>
           <a:p>
             <a:pPr marL="144000" indent="-144000">
@@ -18050,8 +18954,8 @@
         </p:nvSpPr>
         <p:spPr>
           <a:xfrm>
-            <a:off x="4892040" y="1600200"/>
-            <a:ext cx="3794760" cy="3108960"/>
+            <a:off x="4780529" y="1540728"/>
+            <a:ext cx="4006632" cy="1729123"/>
           </a:xfrm>
           <a:prstGeom prst="rect">
             <a:avLst/>
@@ -18060,7 +18964,9 @@
           <a:ln/>
         </p:spPr>
         <p:txBody>
-          <a:bodyPr wrap="square" lIns="63500" tIns="101600" rIns="63500" bIns="63500" rtlCol="0" anchor="t"/>
+          <a:bodyPr wrap="square" lIns="63500" tIns="36000" rIns="63500" bIns="0" rtlCol="0" anchor="t">
+            <a:spAutoFit/>
+          </a:bodyPr>
           <a:lstStyle/>
           <a:p>
             <a:pPr marL="144000" indent="-144000">
@@ -18071,7 +18977,7 @@
               <a:buChar char="•"/>
             </a:pPr>
             <a:r>
-              <a:rPr lang="en-US" sz="1400" b="1" dirty="0">
+              <a:rPr lang="en-US" sz="1400" b="1" spc="-60" dirty="0">
                 <a:solidFill>
                   <a:srgbClr val="0D1B2A"/>
                 </a:solidFill>
@@ -18082,7 +18988,7 @@
               <a:t>Strefa bezpieczeństwa</a:t>
             </a:r>
             <a:r>
-              <a:rPr lang="en-US" sz="1400" dirty="0">
+              <a:rPr lang="en-US" sz="1400" spc="-60" dirty="0">
                 <a:solidFill>
                   <a:srgbClr val="0D1B2A"/>
                 </a:solidFill>
@@ -18092,7 +18998,7 @@
               </a:rPr>
               <a:t>: okrąg lub elipsa wokół człowieka</a:t>
             </a:r>
-            <a:endParaRPr lang="en-US" sz="1400" dirty="0"/>
+            <a:endParaRPr lang="en-US" sz="1400" spc="-60" dirty="0"/>
           </a:p>
           <a:p>
             <a:pPr marL="144000" indent="-144000">
@@ -18360,7 +19266,7 @@
               <a:buNone/>
             </a:pPr>
             <a:r>
-              <a:rPr lang="en-US" sz="2800" b="1" dirty="0">
+              <a:rPr lang="pl-PL" sz="2400" b="1" dirty="0" smtClean="0">
                 <a:solidFill>
                   <a:srgbClr val="FFFFFF"/>
                 </a:solidFill>
@@ -18368,9 +19274,97 @@
                 <a:ea typeface="Trebuchet MS" pitchFamily="34" charset="-122"/>
                 <a:cs typeface="Trebuchet MS" pitchFamily="34" charset="-120"/>
               </a:rPr>
-              <a:t>Replanowanie online – kiedy i jak</a:t>
-            </a:r>
-            <a:endParaRPr lang="en-US" sz="2800" dirty="0"/>
+              <a:t>K</a:t>
+            </a:r>
+            <a:r>
+              <a:rPr lang="en-US" sz="2400" b="1" dirty="0" err="1" smtClean="0">
+                <a:solidFill>
+                  <a:srgbClr val="FFFFFF"/>
+                </a:solidFill>
+                <a:latin typeface="Trebuchet MS" pitchFamily="34" charset="0"/>
+                <a:ea typeface="Trebuchet MS" pitchFamily="34" charset="-122"/>
+                <a:cs typeface="Trebuchet MS" pitchFamily="34" charset="-120"/>
+              </a:rPr>
+              <a:t>iedy</a:t>
+            </a:r>
+            <a:r>
+              <a:rPr lang="en-US" sz="2400" b="1" dirty="0" smtClean="0">
+                <a:solidFill>
+                  <a:srgbClr val="FFFFFF"/>
+                </a:solidFill>
+                <a:latin typeface="Trebuchet MS" pitchFamily="34" charset="0"/>
+                <a:ea typeface="Trebuchet MS" pitchFamily="34" charset="-122"/>
+                <a:cs typeface="Trebuchet MS" pitchFamily="34" charset="-120"/>
+              </a:rPr>
+              <a:t> </a:t>
+            </a:r>
+            <a:r>
+              <a:rPr lang="en-US" sz="2400" b="1" dirty="0" err="1">
+                <a:solidFill>
+                  <a:srgbClr val="FFFFFF"/>
+                </a:solidFill>
+                <a:latin typeface="Trebuchet MS" pitchFamily="34" charset="0"/>
+                <a:ea typeface="Trebuchet MS" pitchFamily="34" charset="-122"/>
+                <a:cs typeface="Trebuchet MS" pitchFamily="34" charset="-120"/>
+              </a:rPr>
+              <a:t>i</a:t>
+            </a:r>
+            <a:r>
+              <a:rPr lang="en-US" sz="2400" b="1" dirty="0">
+                <a:solidFill>
+                  <a:srgbClr val="FFFFFF"/>
+                </a:solidFill>
+                <a:latin typeface="Trebuchet MS" pitchFamily="34" charset="0"/>
+                <a:ea typeface="Trebuchet MS" pitchFamily="34" charset="-122"/>
+                <a:cs typeface="Trebuchet MS" pitchFamily="34" charset="-120"/>
+              </a:rPr>
+              <a:t> </a:t>
+            </a:r>
+            <a:r>
+              <a:rPr lang="en-US" sz="2400" b="1" dirty="0" err="1" smtClean="0">
+                <a:solidFill>
+                  <a:srgbClr val="FFFFFF"/>
+                </a:solidFill>
+                <a:latin typeface="Trebuchet MS" pitchFamily="34" charset="0"/>
+                <a:ea typeface="Trebuchet MS" pitchFamily="34" charset="-122"/>
+                <a:cs typeface="Trebuchet MS" pitchFamily="34" charset="-120"/>
+              </a:rPr>
+              <a:t>jak</a:t>
+            </a:r>
+            <a:r>
+              <a:rPr lang="pl-PL" sz="2400" b="1" dirty="0" smtClean="0">
+                <a:solidFill>
+                  <a:srgbClr val="FFFFFF"/>
+                </a:solidFill>
+                <a:latin typeface="Trebuchet MS" pitchFamily="34" charset="0"/>
+                <a:ea typeface="Trebuchet MS" pitchFamily="34" charset="-122"/>
+                <a:cs typeface="Trebuchet MS" pitchFamily="34" charset="-120"/>
+              </a:rPr>
+              <a:t> </a:t>
+            </a:r>
+            <a:r>
+              <a:rPr lang="pl-PL" sz="2400" b="1" dirty="0" err="1" smtClean="0">
+                <a:solidFill>
+                  <a:srgbClr val="FFFFFF"/>
+                </a:solidFill>
+                <a:latin typeface="Trebuchet MS" pitchFamily="34" charset="0"/>
+                <a:ea typeface="Trebuchet MS" pitchFamily="34" charset="-122"/>
+                <a:cs typeface="Trebuchet MS" pitchFamily="34" charset="-120"/>
+              </a:rPr>
+              <a:t>przeplanowywać</a:t>
+            </a:r>
+            <a:r>
+              <a:rPr lang="pl-PL" sz="2400" b="1" dirty="0" smtClean="0">
+                <a:solidFill>
+                  <a:srgbClr val="FFFFFF"/>
+                </a:solidFill>
+                <a:latin typeface="Trebuchet MS" pitchFamily="34" charset="0"/>
+                <a:ea typeface="Trebuchet MS" pitchFamily="34" charset="-122"/>
+                <a:cs typeface="Trebuchet MS" pitchFamily="34" charset="-120"/>
+              </a:rPr>
+              <a:t> online</a:t>
+            </a:r>
+            <a:endParaRPr lang="en-US" sz="2400" dirty="0"/>
           </a:p>
         </p:txBody>
       </p:sp>
@@ -18383,7 +19377,7 @@
         <p:spPr>
           <a:xfrm>
             <a:off x="274320" y="1097280"/>
-            <a:ext cx="4160520" cy="3749040"/>
+            <a:ext cx="4160520" cy="2560320"/>
           </a:xfrm>
           <a:prstGeom prst="rect">
             <a:avLst/>
@@ -18415,7 +19409,7 @@
         <p:spPr>
           <a:xfrm>
             <a:off x="4709160" y="1097280"/>
-            <a:ext cx="4160520" cy="3749040"/>
+            <a:ext cx="4160520" cy="2560320"/>
           </a:xfrm>
           <a:prstGeom prst="rect">
             <a:avLst/>
@@ -18496,7 +19490,18 @@
                 <a:ea typeface="Trebuchet MS" pitchFamily="34" charset="-122"/>
                 <a:cs typeface="Trebuchet MS" pitchFamily="34" charset="-120"/>
               </a:rPr>
-              <a:t>Replan globalny (rzadki)</a:t>
+              <a:t>Replan globalny </a:t>
+            </a:r>
+            <a:r>
+              <a:rPr lang="en-US" sz="1600" dirty="0">
+                <a:solidFill>
+                  <a:srgbClr val="FFFFFF"/>
+                </a:solidFill>
+                <a:latin typeface="Trebuchet MS" pitchFamily="34" charset="0"/>
+                <a:ea typeface="Trebuchet MS" pitchFamily="34" charset="-122"/>
+                <a:cs typeface="Trebuchet MS" pitchFamily="34" charset="-120"/>
+              </a:rPr>
+              <a:t>(rzadki)</a:t>
             </a:r>
             <a:endParaRPr lang="en-US" sz="1600" dirty="0"/>
           </a:p>
@@ -18560,7 +19565,18 @@
                 <a:ea typeface="Trebuchet MS" pitchFamily="34" charset="-122"/>
                 <a:cs typeface="Trebuchet MS" pitchFamily="34" charset="-120"/>
               </a:rPr>
-              <a:t>Replan lokalny (częsty)</a:t>
+              <a:t>Replan lokalny </a:t>
+            </a:r>
+            <a:r>
+              <a:rPr lang="en-US" sz="1600" dirty="0">
+                <a:solidFill>
+                  <a:srgbClr val="FFFFFF"/>
+                </a:solidFill>
+                <a:latin typeface="Trebuchet MS" pitchFamily="34" charset="0"/>
+                <a:ea typeface="Trebuchet MS" pitchFamily="34" charset="-122"/>
+                <a:cs typeface="Trebuchet MS" pitchFamily="34" charset="-120"/>
+              </a:rPr>
+              <a:t>(częsty)</a:t>
             </a:r>
             <a:endParaRPr lang="en-US" sz="1600" dirty="0"/>
           </a:p>
@@ -18574,8 +19590,8 @@
         </p:nvSpPr>
         <p:spPr>
           <a:xfrm>
-            <a:off x="457200" y="1600200"/>
-            <a:ext cx="3794760" cy="3108960"/>
+            <a:off x="367991" y="1615068"/>
+            <a:ext cx="4006631" cy="1729123"/>
           </a:xfrm>
           <a:prstGeom prst="rect">
             <a:avLst/>
@@ -18584,7 +19600,9 @@
           <a:ln/>
         </p:spPr>
         <p:txBody>
-          <a:bodyPr wrap="square" lIns="63500" tIns="101600" rIns="101600" bIns="63500" rtlCol="0" anchor="t"/>
+          <a:bodyPr wrap="square" lIns="63500" tIns="36000" rIns="101600" bIns="0" rtlCol="0" anchor="t">
+            <a:spAutoFit/>
+          </a:bodyPr>
           <a:lstStyle/>
           <a:p>
             <a:pPr marL="144000" indent="-144000">
@@ -18616,7 +19634,7 @@
               <a:buChar char="•"/>
             </a:pPr>
             <a:r>
-              <a:rPr lang="en-US" sz="1400" dirty="0">
+              <a:rPr lang="en-US" sz="1400" spc="-40" dirty="0">
                 <a:solidFill>
                   <a:srgbClr val="0D1B2A"/>
                 </a:solidFill>
@@ -18627,7 +19645,7 @@
               <a:t>Gdy mapa zasadniczo się zmienia </a:t>
             </a:r>
             <a:r>
-              <a:rPr lang="en-US" sz="1400" i="1" dirty="0">
+              <a:rPr lang="en-US" sz="1400" i="1" spc="-40" dirty="0">
                 <a:solidFill>
                   <a:srgbClr val="0D1B2A"/>
                 </a:solidFill>
@@ -18637,7 +19655,7 @@
               </a:rPr>
               <a:t>(zamknięte przejście)</a:t>
             </a:r>
-            <a:endParaRPr lang="en-US" sz="1400" i="1" dirty="0"/>
+            <a:endParaRPr lang="en-US" sz="1400" i="1" spc="-40" dirty="0"/>
           </a:p>
           <a:p>
             <a:pPr marL="144000" indent="-144000">
@@ -18723,8 +19741,8 @@
         </p:nvSpPr>
         <p:spPr>
           <a:xfrm>
-            <a:off x="4892040" y="1600200"/>
-            <a:ext cx="3794760" cy="3108960"/>
+            <a:off x="4862304" y="1600200"/>
+            <a:ext cx="3724136" cy="1765474"/>
           </a:xfrm>
           <a:prstGeom prst="rect">
             <a:avLst/>
@@ -18733,7 +19751,9 @@
           <a:ln/>
         </p:spPr>
         <p:txBody>
-          <a:bodyPr wrap="square" lIns="63500" tIns="101600" rIns="101600" bIns="63500" rtlCol="0" anchor="t"/>
+          <a:bodyPr wrap="square" lIns="63500" tIns="36000" rIns="101600" bIns="0" rtlCol="0" anchor="t">
+            <a:spAutoFit/>
+          </a:bodyPr>
           <a:lstStyle/>
           <a:p>
             <a:pPr marL="144000" indent="-144000">
@@ -18989,7 +20009,7 @@
               <a:buNone/>
             </a:pPr>
             <a:r>
-              <a:rPr lang="en-US" sz="2800" b="1" dirty="0">
+              <a:rPr lang="en-US" sz="2400" b="1" dirty="0">
                 <a:solidFill>
                   <a:srgbClr val="FFFFFF"/>
                 </a:solidFill>
@@ -18997,9 +20017,75 @@
                 <a:ea typeface="Trebuchet MS" pitchFamily="34" charset="-122"/>
                 <a:cs typeface="Trebuchet MS" pitchFamily="34" charset="-120"/>
               </a:rPr>
-              <a:t>Konflikt między planem a stabilnością</a:t>
-            </a:r>
-            <a:endParaRPr lang="en-US" sz="2800" dirty="0"/>
+              <a:t>Konflikt </a:t>
+            </a:r>
+            <a:r>
+              <a:rPr lang="en-US" sz="2400" b="1" dirty="0" err="1">
+                <a:solidFill>
+                  <a:srgbClr val="FFFFFF"/>
+                </a:solidFill>
+                <a:latin typeface="Trebuchet MS" pitchFamily="34" charset="0"/>
+                <a:ea typeface="Trebuchet MS" pitchFamily="34" charset="-122"/>
+                <a:cs typeface="Trebuchet MS" pitchFamily="34" charset="-120"/>
+              </a:rPr>
+              <a:t>między</a:t>
+            </a:r>
+            <a:r>
+              <a:rPr lang="en-US" sz="2400" b="1" dirty="0">
+                <a:solidFill>
+                  <a:srgbClr val="FFFFFF"/>
+                </a:solidFill>
+                <a:latin typeface="Trebuchet MS" pitchFamily="34" charset="0"/>
+                <a:ea typeface="Trebuchet MS" pitchFamily="34" charset="-122"/>
+                <a:cs typeface="Trebuchet MS" pitchFamily="34" charset="-120"/>
+              </a:rPr>
+              <a:t> </a:t>
+            </a:r>
+            <a:r>
+              <a:rPr lang="en-US" sz="2400" b="1" dirty="0" err="1" smtClean="0">
+                <a:solidFill>
+                  <a:srgbClr val="FFFFFF"/>
+                </a:solidFill>
+                <a:latin typeface="Trebuchet MS" pitchFamily="34" charset="0"/>
+                <a:ea typeface="Trebuchet MS" pitchFamily="34" charset="-122"/>
+                <a:cs typeface="Trebuchet MS" pitchFamily="34" charset="-120"/>
+              </a:rPr>
+              <a:t>planem</a:t>
+            </a:r>
+            <a:r>
+              <a:rPr lang="pl-PL" sz="2400" b="1" dirty="0" smtClean="0">
+                <a:solidFill>
+                  <a:srgbClr val="FFFFFF"/>
+                </a:solidFill>
+                <a:latin typeface="Trebuchet MS" pitchFamily="34" charset="0"/>
+                <a:ea typeface="Trebuchet MS" pitchFamily="34" charset="-122"/>
+                <a:cs typeface="Trebuchet MS" pitchFamily="34" charset="-120"/>
+              </a:rPr>
+              <a:t>,</a:t>
+            </a:r>
+            <a:r>
+              <a:rPr lang="en-US" sz="2400" b="1" dirty="0" smtClean="0">
+                <a:solidFill>
+                  <a:srgbClr val="FFFFFF"/>
+                </a:solidFill>
+                <a:latin typeface="Trebuchet MS" pitchFamily="34" charset="0"/>
+                <a:ea typeface="Trebuchet MS" pitchFamily="34" charset="-122"/>
+                <a:cs typeface="Trebuchet MS" pitchFamily="34" charset="-120"/>
+              </a:rPr>
+              <a:t> </a:t>
+            </a:r>
+            <a:r>
+              <a:rPr lang="en-US" sz="2400" b="1" dirty="0">
+                <a:solidFill>
+                  <a:srgbClr val="FFFFFF"/>
+                </a:solidFill>
+                <a:latin typeface="Trebuchet MS" pitchFamily="34" charset="0"/>
+                <a:ea typeface="Trebuchet MS" pitchFamily="34" charset="-122"/>
+                <a:cs typeface="Trebuchet MS" pitchFamily="34" charset="-120"/>
+              </a:rPr>
+              <a:t>a stabilnością</a:t>
+            </a:r>
+            <a:endParaRPr lang="en-US" sz="2400" dirty="0"/>
           </a:p>
         </p:txBody>
       </p:sp>
@@ -19012,7 +20098,7 @@
         <p:spPr>
           <a:xfrm>
             <a:off x="274320" y="1097280"/>
-            <a:ext cx="8595360" cy="3749040"/>
+            <a:ext cx="8595360" cy="2746174"/>
           </a:xfrm>
           <a:prstGeom prst="rect">
             <a:avLst/>
@@ -19043,8 +20129,8 @@
         </p:nvSpPr>
         <p:spPr>
           <a:xfrm>
-            <a:off x="457200" y="1188720"/>
-            <a:ext cx="8229600" cy="3520440"/>
+            <a:off x="329444" y="1141652"/>
+            <a:ext cx="8585956" cy="2575508"/>
           </a:xfrm>
           <a:prstGeom prst="rect">
             <a:avLst/>
@@ -19053,7 +20139,9 @@
           <a:ln/>
         </p:spPr>
         <p:txBody>
-          <a:bodyPr wrap="square" lIns="127000" tIns="127000" rIns="127000" bIns="127000" rtlCol="0" anchor="t"/>
+          <a:bodyPr wrap="square" lIns="127000" tIns="36000" rIns="127000" bIns="0" rtlCol="0" anchor="t">
+            <a:spAutoFit/>
+          </a:bodyPr>
           <a:lstStyle/>
           <a:p>
             <a:pPr marL="144000" indent="-144000">
@@ -19064,7 +20152,7 @@
               <a:buChar char="•"/>
             </a:pPr>
             <a:r>
-              <a:rPr lang="en-US" sz="1400" b="1" dirty="0">
+              <a:rPr lang="en-US" sz="1500" b="1" dirty="0">
                 <a:solidFill>
                   <a:srgbClr val="0D1B2A"/>
                 </a:solidFill>
@@ -19075,7 +20163,7 @@
               <a:t>Problem</a:t>
             </a:r>
             <a:r>
-              <a:rPr lang="en-US" sz="1400" dirty="0">
+              <a:rPr lang="en-US" sz="1500" dirty="0">
                 <a:solidFill>
                   <a:srgbClr val="0D1B2A"/>
                 </a:solidFill>
@@ -19085,7 +20173,7 @@
               </a:rPr>
               <a:t>: optymalny manewr unikania może wymagać szybkiego skrętu lub dużej prędkości bocznej</a:t>
             </a:r>
-            <a:endParaRPr lang="en-US" sz="1400" dirty="0"/>
+            <a:endParaRPr lang="en-US" sz="1500" dirty="0"/>
           </a:p>
           <a:p>
             <a:pPr marL="144000" indent="-144000">
@@ -19096,7 +20184,7 @@
               <a:buChar char="•"/>
             </a:pPr>
             <a:r>
-              <a:rPr lang="en-US" sz="1400" b="1" dirty="0">
+              <a:rPr lang="en-US" sz="1500" b="1" dirty="0">
                 <a:solidFill>
                   <a:srgbClr val="0D1B2A"/>
                 </a:solidFill>
@@ -19107,7 +20195,7 @@
               <a:t>Konsekwencja</a:t>
             </a:r>
             <a:r>
-              <a:rPr lang="en-US" sz="1400" dirty="0">
+              <a:rPr lang="en-US" sz="1500" dirty="0">
                 <a:solidFill>
                   <a:srgbClr val="0D1B2A"/>
                 </a:solidFill>
@@ -19117,7 +20205,7 @@
               </a:rPr>
               <a:t>: środek masy wychodzi poza wielobok podparcia → utrata równowagi</a:t>
             </a:r>
-            <a:endParaRPr lang="en-US" sz="1400" dirty="0"/>
+            <a:endParaRPr lang="en-US" sz="1500" dirty="0"/>
           </a:p>
           <a:p>
             <a:pPr marL="144000" indent="-144000">
@@ -19128,7 +20216,7 @@
               <a:buChar char="•"/>
             </a:pPr>
             <a:r>
-              <a:rPr lang="en-US" sz="1400" b="1" dirty="0">
+              <a:rPr lang="en-US" sz="1500" b="1" dirty="0">
                 <a:solidFill>
                   <a:srgbClr val="0D1B2A"/>
                 </a:solidFill>
@@ -19139,7 +20227,7 @@
               <a:t>Reguła nadrzędna</a:t>
             </a:r>
             <a:r>
-              <a:rPr lang="en-US" sz="1400" dirty="0">
+              <a:rPr lang="en-US" sz="1500" dirty="0">
                 <a:solidFill>
                   <a:srgbClr val="0D1B2A"/>
                 </a:solidFill>
@@ -19149,7 +20237,7 @@
               </a:rPr>
               <a:t>: stabilność &gt; unikanie kolizji &gt; optymalizacja trasy</a:t>
             </a:r>
-            <a:endParaRPr lang="en-US" sz="1400" dirty="0"/>
+            <a:endParaRPr lang="en-US" sz="1500" dirty="0"/>
           </a:p>
           <a:p>
             <a:pPr marL="144000" indent="-144000">
@@ -19160,7 +20248,7 @@
               <a:buChar char="•"/>
             </a:pPr>
             <a:r>
-              <a:rPr lang="en-US" sz="1400" b="1" dirty="0">
+              <a:rPr lang="en-US" sz="1500" b="1" dirty="0">
                 <a:solidFill>
                   <a:srgbClr val="0D1B2A"/>
                 </a:solidFill>
@@ -19171,7 +20259,7 @@
               <a:t>Implementacja</a:t>
             </a:r>
             <a:r>
-              <a:rPr lang="en-US" sz="1400" dirty="0">
+              <a:rPr lang="en-US" sz="1500" dirty="0">
                 <a:solidFill>
                   <a:srgbClr val="0D1B2A"/>
                 </a:solidFill>
@@ -19181,7 +20269,7 @@
               </a:rPr>
               <a:t>: każda kandydatka trajektoria lokalnej jest filtrowana przez weryfikator ZMP</a:t>
             </a:r>
-            <a:endParaRPr lang="en-US" sz="1400" dirty="0"/>
+            <a:endParaRPr lang="en-US" sz="1500" dirty="0"/>
           </a:p>
           <a:p>
             <a:pPr marL="144000" indent="-144000">
@@ -19192,7 +20280,7 @@
               <a:buChar char="•"/>
             </a:pPr>
             <a:r>
-              <a:rPr lang="en-US" sz="1400" b="1" dirty="0">
+              <a:rPr lang="en-US" sz="1500" b="1" dirty="0">
                 <a:solidFill>
                   <a:srgbClr val="0D1B2A"/>
                 </a:solidFill>
@@ -19203,7 +20291,7 @@
               <a:t>Weryfikator ZMP</a:t>
             </a:r>
             <a:r>
-              <a:rPr lang="en-US" sz="1400" dirty="0">
+              <a:rPr lang="en-US" sz="1500" dirty="0">
                 <a:solidFill>
                   <a:srgbClr val="0D1B2A"/>
                 </a:solidFill>
@@ -19213,7 +20301,7 @@
               </a:rPr>
               <a:t>: odrzuca trajektorie, gdzie przewidywany ZMP wychodzi poza margines bezpieczeństwa</a:t>
             </a:r>
-            <a:endParaRPr lang="en-US" sz="1400" dirty="0"/>
+            <a:endParaRPr lang="en-US" sz="1500" dirty="0"/>
           </a:p>
           <a:p>
             <a:pPr marL="144000" indent="-144000">
@@ -19224,7 +20312,7 @@
               <a:buChar char="•"/>
             </a:pPr>
             <a:r>
-              <a:rPr lang="en-US" sz="1400" b="1" dirty="0">
+              <a:rPr lang="en-US" sz="1500" b="1" dirty="0">
                 <a:solidFill>
                   <a:srgbClr val="0D1B2A"/>
                 </a:solidFill>
@@ -19235,7 +20323,7 @@
               <a:t>Efekt</a:t>
             </a:r>
             <a:r>
-              <a:rPr lang="en-US" sz="1400" dirty="0">
+              <a:rPr lang="en-US" sz="1500" dirty="0">
                 <a:solidFill>
                   <a:srgbClr val="0D1B2A"/>
                 </a:solidFill>
@@ -19245,7 +20333,7 @@
               </a:rPr>
               <a:t>: planista lokalny preferuje wolniejsze, bardziej konserwatywne manewry w trudnym terenie</a:t>
             </a:r>
-            <a:endParaRPr lang="en-US" sz="1400" dirty="0"/>
+            <a:endParaRPr lang="en-US" sz="1500" dirty="0"/>
           </a:p>
           <a:p>
             <a:pPr marL="144000" indent="-144000">
@@ -19256,7 +20344,7 @@
               <a:buChar char="•"/>
             </a:pPr>
             <a:r>
-              <a:rPr lang="en-US" sz="1400" b="1" dirty="0">
+              <a:rPr lang="en-US" sz="1500" b="1" dirty="0">
                 <a:solidFill>
                   <a:srgbClr val="0D1B2A"/>
                 </a:solidFill>
@@ -19267,7 +20355,7 @@
               <a:t>Parametr</a:t>
             </a:r>
             <a:r>
-              <a:rPr lang="en-US" sz="1400" dirty="0">
+              <a:rPr lang="en-US" sz="1500" dirty="0">
                 <a:solidFill>
                   <a:srgbClr val="0D1B2A"/>
                 </a:solidFill>
@@ -19277,7 +20365,7 @@
               </a:rPr>
               <a:t>: safety_margin_zmp = 2–4 cm; dla schodów i pochyłości zwiększony do 5–8 cm</a:t>
             </a:r>
-            <a:endParaRPr lang="en-US" sz="1400" dirty="0"/>
+            <a:endParaRPr lang="en-US" sz="1500" dirty="0"/>
           </a:p>
         </p:txBody>
       </p:sp>
@@ -19380,6 +20468,13 @@
           </a:prstGeom>
           <a:noFill/>
           <a:ln/>
+          <a:effectLst>
+            <a:outerShdw blurRad="50800" dist="38100" dir="2700000" algn="tl" rotWithShape="0">
+              <a:prstClr val="black">
+                <a:alpha val="40000"/>
+              </a:prstClr>
+            </a:outerShdw>
+          </a:effectLst>
         </p:spPr>
         <p:txBody>
           <a:bodyPr wrap="square" lIns="0" tIns="0" rIns="0" bIns="0" rtlCol="0" anchor="ctr"/>
@@ -19420,9 +20515,9 @@
             <a:avLst/>
           </a:prstGeom>
           <a:solidFill>
-            <a:srgbClr val="0D1B2A"/>
+            <a:schemeClr val="bg1"/>
           </a:solidFill>
-          <a:ln w="25400">
+          <a:ln w="57150">
             <a:solidFill>
               <a:srgbClr val="22C55E"/>
             </a:solidFill>
@@ -19446,8 +20541,8 @@
         </p:blipFill>
         <p:spPr>
           <a:xfrm>
-            <a:off x="7406640" y="1645920"/>
-            <a:ext cx="1097280" cy="1097280"/>
+            <a:off x="7463140" y="1702420"/>
+            <a:ext cx="984280" cy="984280"/>
           </a:xfrm>
           <a:prstGeom prst="rect">
             <a:avLst/>
@@ -19583,7 +20678,7 @@
         <p:spPr>
           <a:xfrm>
             <a:off x="2926080" y="2834640"/>
-            <a:ext cx="3931920" cy="822960"/>
+            <a:ext cx="4133626" cy="379207"/>
           </a:xfrm>
           <a:prstGeom prst="rect">
             <a:avLst/>
@@ -19760,7 +20855,7 @@
               <a:buNone/>
             </a:pPr>
             <a:r>
-              <a:rPr lang="en-US" sz="2800" b="1" dirty="0">
+              <a:rPr lang="en-US" sz="2400" b="1" dirty="0">
                 <a:solidFill>
                   <a:srgbClr val="FFFFFF"/>
                 </a:solidFill>
@@ -19770,7 +20865,7 @@
               </a:rPr>
               <a:t>Od ścieżki geometrycznej do sekwencji kroków</a:t>
             </a:r>
-            <a:endParaRPr lang="en-US" sz="2800" dirty="0"/>
+            <a:endParaRPr lang="en-US" sz="2400" dirty="0"/>
           </a:p>
         </p:txBody>
       </p:sp>
@@ -19783,7 +20878,7 @@
         <p:spPr>
           <a:xfrm>
             <a:off x="274320" y="1097280"/>
-            <a:ext cx="2011680" cy="3383280"/>
+            <a:ext cx="2011680" cy="2575188"/>
           </a:xfrm>
           <a:prstGeom prst="rect">
             <a:avLst/>
@@ -19918,7 +21013,7 @@
         <p:spPr>
           <a:xfrm>
             <a:off x="365760" y="2423160"/>
-            <a:ext cx="1828800" cy="1965960"/>
+            <a:ext cx="1828800" cy="1115494"/>
           </a:xfrm>
           <a:prstGeom prst="rect">
             <a:avLst/>
@@ -19957,7 +21052,7 @@
         <p:spPr>
           <a:xfrm>
             <a:off x="2423160" y="1097280"/>
-            <a:ext cx="2011680" cy="3383280"/>
+            <a:ext cx="2011680" cy="2575188"/>
           </a:xfrm>
           <a:prstGeom prst="rect">
             <a:avLst/>
@@ -20092,7 +21187,7 @@
         <p:spPr>
           <a:xfrm>
             <a:off x="2514600" y="2423160"/>
-            <a:ext cx="1828800" cy="1965960"/>
+            <a:ext cx="1828800" cy="1115494"/>
           </a:xfrm>
           <a:prstGeom prst="rect">
             <a:avLst/>
@@ -20131,7 +21226,7 @@
         <p:spPr>
           <a:xfrm>
             <a:off x="4572000" y="1097280"/>
-            <a:ext cx="2011680" cy="3383280"/>
+            <a:ext cx="2011680" cy="2575188"/>
           </a:xfrm>
           <a:prstGeom prst="rect">
             <a:avLst/>
@@ -20266,7 +21361,7 @@
         <p:spPr>
           <a:xfrm>
             <a:off x="4663440" y="2423160"/>
-            <a:ext cx="1828800" cy="1965960"/>
+            <a:ext cx="1828800" cy="1115494"/>
           </a:xfrm>
           <a:prstGeom prst="rect">
             <a:avLst/>
@@ -20305,7 +21400,7 @@
         <p:spPr>
           <a:xfrm>
             <a:off x="6720840" y="1097280"/>
-            <a:ext cx="2011680" cy="3383280"/>
+            <a:ext cx="2011680" cy="2575188"/>
           </a:xfrm>
           <a:prstGeom prst="rect">
             <a:avLst/>
@@ -20440,7 +21535,7 @@
         <p:spPr>
           <a:xfrm>
             <a:off x="6812280" y="2423160"/>
-            <a:ext cx="1828800" cy="1965960"/>
+            <a:ext cx="1828800" cy="1115494"/>
           </a:xfrm>
           <a:prstGeom prst="rect">
             <a:avLst/>
@@ -20743,11 +21838,8 @@
           <a:bodyPr wrap="square" lIns="0" tIns="0" rIns="0" bIns="0" rtlCol="0" anchor="ctr"/>
           <a:lstStyle/>
           <a:p>
-            <a:pPr marL="0" indent="0">
-              <a:buNone/>
-            </a:pPr>
-            <a:r>
-              <a:rPr lang="en-US" sz="2800" b="1" dirty="0">
+            <a:r>
+              <a:rPr lang="pl-PL" sz="2400" b="1" dirty="0" smtClean="0">
                 <a:solidFill>
                   <a:srgbClr val="FFFFFF"/>
                 </a:solidFill>
@@ -20755,9 +21847,75 @@
                 <a:ea typeface="Trebuchet MS" pitchFamily="34" charset="-122"/>
                 <a:cs typeface="Trebuchet MS" pitchFamily="34" charset="-120"/>
               </a:rPr>
-              <a:t>Footstep planning – parametry i ograniczenia</a:t>
-            </a:r>
-            <a:endParaRPr lang="en-US" sz="2800" dirty="0"/>
+              <a:t>P</a:t>
+            </a:r>
+            <a:r>
+              <a:rPr lang="en-US" sz="2400" b="1" dirty="0" err="1" smtClean="0">
+                <a:solidFill>
+                  <a:srgbClr val="FFFFFF"/>
+                </a:solidFill>
+                <a:latin typeface="Trebuchet MS" pitchFamily="34" charset="0"/>
+                <a:ea typeface="Trebuchet MS" pitchFamily="34" charset="-122"/>
+                <a:cs typeface="Trebuchet MS" pitchFamily="34" charset="-120"/>
+              </a:rPr>
+              <a:t>arametry</a:t>
+            </a:r>
+            <a:r>
+              <a:rPr lang="en-US" sz="2400" b="1" dirty="0" smtClean="0">
+                <a:solidFill>
+                  <a:srgbClr val="FFFFFF"/>
+                </a:solidFill>
+                <a:latin typeface="Trebuchet MS" pitchFamily="34" charset="0"/>
+                <a:ea typeface="Trebuchet MS" pitchFamily="34" charset="-122"/>
+                <a:cs typeface="Trebuchet MS" pitchFamily="34" charset="-120"/>
+              </a:rPr>
+              <a:t> </a:t>
+            </a:r>
+            <a:r>
+              <a:rPr lang="en-US" sz="2400" b="1" dirty="0" err="1">
+                <a:solidFill>
+                  <a:srgbClr val="FFFFFF"/>
+                </a:solidFill>
+                <a:latin typeface="Trebuchet MS" pitchFamily="34" charset="0"/>
+                <a:ea typeface="Trebuchet MS" pitchFamily="34" charset="-122"/>
+                <a:cs typeface="Trebuchet MS" pitchFamily="34" charset="-120"/>
+              </a:rPr>
+              <a:t>i</a:t>
+            </a:r>
+            <a:r>
+              <a:rPr lang="en-US" sz="2400" b="1" dirty="0">
+                <a:solidFill>
+                  <a:srgbClr val="FFFFFF"/>
+                </a:solidFill>
+                <a:latin typeface="Trebuchet MS" pitchFamily="34" charset="0"/>
+                <a:ea typeface="Trebuchet MS" pitchFamily="34" charset="-122"/>
+                <a:cs typeface="Trebuchet MS" pitchFamily="34" charset="-120"/>
+              </a:rPr>
+              <a:t> </a:t>
+            </a:r>
+            <a:r>
+              <a:rPr lang="en-US" sz="2400" b="1" dirty="0" err="1" smtClean="0">
+                <a:solidFill>
+                  <a:srgbClr val="FFFFFF"/>
+                </a:solidFill>
+                <a:latin typeface="Trebuchet MS" pitchFamily="34" charset="0"/>
+                <a:ea typeface="Trebuchet MS" pitchFamily="34" charset="-122"/>
+                <a:cs typeface="Trebuchet MS" pitchFamily="34" charset="-120"/>
+              </a:rPr>
+              <a:t>ograniczenia</a:t>
+            </a:r>
+            <a:r>
+              <a:rPr lang="pl-PL" sz="2400" b="1" dirty="0" smtClean="0">
+                <a:solidFill>
+                  <a:srgbClr val="FFFFFF"/>
+                </a:solidFill>
+                <a:latin typeface="Trebuchet MS" pitchFamily="34" charset="0"/>
+                <a:ea typeface="Trebuchet MS" pitchFamily="34" charset="-122"/>
+                <a:cs typeface="Trebuchet MS" pitchFamily="34" charset="-120"/>
+              </a:rPr>
+              <a:t> planowania kroków</a:t>
+            </a:r>
+            <a:endParaRPr lang="en-US" sz="2400" dirty="0"/>
           </a:p>
         </p:txBody>
       </p:sp>
@@ -20770,7 +21928,7 @@
         <p:spPr>
           <a:xfrm>
             <a:off x="274320" y="1097280"/>
-            <a:ext cx="8595360" cy="3749040"/>
+            <a:ext cx="8595360" cy="2723871"/>
           </a:xfrm>
           <a:prstGeom prst="rect">
             <a:avLst/>
@@ -20802,7 +21960,7 @@
         <p:spPr>
           <a:xfrm>
             <a:off x="457200" y="1188720"/>
-            <a:ext cx="8229600" cy="3520440"/>
+            <a:ext cx="8229600" cy="2467786"/>
           </a:xfrm>
           <a:prstGeom prst="rect">
             <a:avLst/>
@@ -20811,7 +21969,9 @@
           <a:ln/>
         </p:spPr>
         <p:txBody>
-          <a:bodyPr wrap="square" lIns="127000" tIns="127000" rIns="127000" bIns="127000" rtlCol="0" anchor="t"/>
+          <a:bodyPr wrap="square" lIns="127000" tIns="36000" rIns="127000" bIns="0" rtlCol="0" anchor="t">
+            <a:spAutoFit/>
+          </a:bodyPr>
           <a:lstStyle/>
           <a:p>
             <a:pPr marL="144000" indent="-144000">
@@ -21186,7 +22346,7 @@
               <a:buNone/>
             </a:pPr>
             <a:r>
-              <a:rPr lang="en-US" sz="2800" b="1" dirty="0">
+              <a:rPr lang="en-US" sz="2400" b="1" dirty="0">
                 <a:solidFill>
                   <a:srgbClr val="FFFFFF"/>
                 </a:solidFill>
@@ -21196,7 +22356,7 @@
               </a:rPr>
               <a:t>Ograniczenia kinematyczne i stabilnościowe</a:t>
             </a:r>
-            <a:endParaRPr lang="en-US" sz="2800" dirty="0"/>
+            <a:endParaRPr lang="en-US" sz="2400" dirty="0"/>
           </a:p>
         </p:txBody>
       </p:sp>
@@ -21208,8 +22368,8 @@
         </p:nvSpPr>
         <p:spPr>
           <a:xfrm>
-            <a:off x="274320" y="1097280"/>
-            <a:ext cx="4160520" cy="3140183"/>
+            <a:off x="281754" y="1097281"/>
+            <a:ext cx="4160520" cy="2545452"/>
           </a:xfrm>
           <a:prstGeom prst="rect">
             <a:avLst/>
@@ -21240,8 +22400,8 @@
         </p:nvSpPr>
         <p:spPr>
           <a:xfrm>
-            <a:off x="4709160" y="1097280"/>
-            <a:ext cx="4160520" cy="3140183"/>
+            <a:off x="4709160" y="1097281"/>
+            <a:ext cx="4160520" cy="2545452"/>
           </a:xfrm>
           <a:prstGeom prst="rect">
             <a:avLst/>
@@ -21400,8 +22560,8 @@
         </p:nvSpPr>
         <p:spPr>
           <a:xfrm>
-            <a:off x="457200" y="1600200"/>
-            <a:ext cx="3794760" cy="2555488"/>
+            <a:off x="345689" y="1600200"/>
+            <a:ext cx="4033023" cy="1980918"/>
           </a:xfrm>
           <a:prstGeom prst="rect">
             <a:avLst/>
@@ -21410,7 +22570,9 @@
           <a:ln/>
         </p:spPr>
         <p:txBody>
-          <a:bodyPr wrap="square" lIns="63500" tIns="101600" rIns="63500" bIns="63500" rtlCol="0" anchor="t"/>
+          <a:bodyPr wrap="square" lIns="63500" tIns="36000" rIns="63500" bIns="0" rtlCol="0" anchor="t">
+            <a:spAutoFit/>
+          </a:bodyPr>
           <a:lstStyle/>
           <a:p>
             <a:pPr marL="144000" indent="-144000">
@@ -21515,7 +22677,73 @@
                 <a:ea typeface="Calibri" pitchFamily="34" charset="-122"/>
                 <a:cs typeface="Calibri" pitchFamily="34" charset="-120"/>
               </a:rPr>
-              <a:t>[q_min, q_max]</a:t>
+              <a:t>[</a:t>
+            </a:r>
+            <a:r>
+              <a:rPr lang="en-US" sz="1400" i="1" spc="-60" dirty="0" err="1" smtClean="0">
+                <a:solidFill>
+                  <a:srgbClr val="0D1B2A"/>
+                </a:solidFill>
+                <a:latin typeface="Calibri" pitchFamily="34" charset="0"/>
+                <a:ea typeface="Calibri" pitchFamily="34" charset="-122"/>
+                <a:cs typeface="Calibri" pitchFamily="34" charset="-120"/>
+              </a:rPr>
+              <a:t>q</a:t>
+            </a:r>
+            <a:r>
+              <a:rPr lang="en-US" sz="1400" i="1" spc="-60" baseline="-25000" dirty="0" err="1" smtClean="0">
+                <a:solidFill>
+                  <a:srgbClr val="0D1B2A"/>
+                </a:solidFill>
+                <a:latin typeface="Calibri" pitchFamily="34" charset="0"/>
+                <a:ea typeface="Calibri" pitchFamily="34" charset="-122"/>
+                <a:cs typeface="Calibri" pitchFamily="34" charset="-120"/>
+              </a:rPr>
+              <a:t>min</a:t>
+            </a:r>
+            <a:r>
+              <a:rPr lang="en-US" sz="1400" i="1" spc="-60" dirty="0">
+                <a:solidFill>
+                  <a:srgbClr val="0D1B2A"/>
+                </a:solidFill>
+                <a:latin typeface="Calibri" pitchFamily="34" charset="0"/>
+                <a:ea typeface="Calibri" pitchFamily="34" charset="-122"/>
+                <a:cs typeface="Calibri" pitchFamily="34" charset="-120"/>
+              </a:rPr>
+              <a:t>, </a:t>
+            </a:r>
+            <a:r>
+              <a:rPr lang="en-US" sz="1400" i="1" spc="-60" dirty="0" err="1" smtClean="0">
+                <a:solidFill>
+                  <a:srgbClr val="0D1B2A"/>
+                </a:solidFill>
+                <a:latin typeface="Calibri" pitchFamily="34" charset="0"/>
+                <a:ea typeface="Calibri" pitchFamily="34" charset="-122"/>
+                <a:cs typeface="Calibri" pitchFamily="34" charset="-120"/>
+              </a:rPr>
+              <a:t>q</a:t>
+            </a:r>
+            <a:r>
+              <a:rPr lang="en-US" sz="1400" i="1" spc="-60" baseline="-25000" dirty="0" err="1" smtClean="0">
+                <a:solidFill>
+                  <a:srgbClr val="0D1B2A"/>
+                </a:solidFill>
+                <a:latin typeface="Calibri" pitchFamily="34" charset="0"/>
+                <a:ea typeface="Calibri" pitchFamily="34" charset="-122"/>
+                <a:cs typeface="Calibri" pitchFamily="34" charset="-120"/>
+              </a:rPr>
+              <a:t>max</a:t>
+            </a:r>
+            <a:r>
+              <a:rPr lang="en-US" sz="1400" i="1" spc="-60" dirty="0">
+                <a:solidFill>
+                  <a:srgbClr val="0D1B2A"/>
+                </a:solidFill>
+                <a:latin typeface="Calibri" pitchFamily="34" charset="0"/>
+                <a:ea typeface="Calibri" pitchFamily="34" charset="-122"/>
+                <a:cs typeface="Calibri" pitchFamily="34" charset="-120"/>
+              </a:rPr>
+              <a:t>]</a:t>
             </a:r>
             <a:endParaRPr lang="en-US" sz="1400" i="1" spc="-60" dirty="0"/>
           </a:p>
@@ -21547,10 +22775,10 @@
                 <a:ea typeface="Calibri" pitchFamily="34" charset="-122"/>
                 <a:cs typeface="Calibri" pitchFamily="34" charset="-120"/>
               </a:rPr>
-              <a:t>: ω_joint ≤ ω_max </a:t>
-            </a:r>
-            <a:r>
-              <a:rPr lang="en-US" sz="1400" i="1" spc="-60" dirty="0">
+              <a:t>: </a:t>
+            </a:r>
+            <a:r>
+              <a:rPr lang="en-US" sz="1400" spc="-60" dirty="0" err="1" smtClean="0">
                 <a:solidFill>
                   <a:srgbClr val="0D1B2A"/>
                 </a:solidFill>
@@ -21558,9 +22786,86 @@
                 <a:ea typeface="Calibri" pitchFamily="34" charset="-122"/>
                 <a:cs typeface="Calibri" pitchFamily="34" charset="-120"/>
               </a:rPr>
+              <a:t>ω</a:t>
+            </a:r>
+            <a:r>
+              <a:rPr lang="en-US" sz="1400" spc="-60" baseline="-25000" dirty="0" err="1" smtClean="0">
+                <a:solidFill>
+                  <a:srgbClr val="0D1B2A"/>
+                </a:solidFill>
+                <a:latin typeface="Calibri" pitchFamily="34" charset="0"/>
+                <a:ea typeface="Calibri" pitchFamily="34" charset="-122"/>
+                <a:cs typeface="Calibri" pitchFamily="34" charset="-120"/>
+              </a:rPr>
+              <a:t>joint</a:t>
+            </a:r>
+            <a:r>
+              <a:rPr lang="en-US" sz="1400" spc="-60" dirty="0" smtClean="0">
+                <a:solidFill>
+                  <a:srgbClr val="0D1B2A"/>
+                </a:solidFill>
+                <a:latin typeface="Calibri" pitchFamily="34" charset="0"/>
+                <a:ea typeface="Calibri" pitchFamily="34" charset="-122"/>
+                <a:cs typeface="Calibri" pitchFamily="34" charset="-120"/>
+              </a:rPr>
+              <a:t> </a:t>
+            </a:r>
+            <a:r>
+              <a:rPr lang="en-US" sz="1400" spc="-60" dirty="0">
+                <a:solidFill>
+                  <a:srgbClr val="0D1B2A"/>
+                </a:solidFill>
+                <a:latin typeface="Calibri" pitchFamily="34" charset="0"/>
+                <a:ea typeface="Calibri" pitchFamily="34" charset="-122"/>
+                <a:cs typeface="Calibri" pitchFamily="34" charset="-120"/>
+              </a:rPr>
+              <a:t>≤ </a:t>
+            </a:r>
+            <a:r>
+              <a:rPr lang="en-US" sz="1400" spc="-60" dirty="0" err="1" smtClean="0">
+                <a:solidFill>
+                  <a:srgbClr val="0D1B2A"/>
+                </a:solidFill>
+                <a:latin typeface="Calibri" pitchFamily="34" charset="0"/>
+                <a:ea typeface="Calibri" pitchFamily="34" charset="-122"/>
+                <a:cs typeface="Calibri" pitchFamily="34" charset="-120"/>
+              </a:rPr>
+              <a:t>ω</a:t>
+            </a:r>
+            <a:r>
+              <a:rPr lang="en-US" sz="1400" spc="-60" baseline="-25000" dirty="0" err="1" smtClean="0">
+                <a:solidFill>
+                  <a:srgbClr val="0D1B2A"/>
+                </a:solidFill>
+                <a:latin typeface="Calibri" pitchFamily="34" charset="0"/>
+                <a:ea typeface="Calibri" pitchFamily="34" charset="-122"/>
+                <a:cs typeface="Calibri" pitchFamily="34" charset="-120"/>
+              </a:rPr>
+              <a:t>max</a:t>
+            </a:r>
+            <a:r>
+              <a:rPr lang="en-US" sz="1400" spc="-60" dirty="0" smtClean="0">
+                <a:solidFill>
+                  <a:srgbClr val="0D1B2A"/>
+                </a:solidFill>
+                <a:latin typeface="Calibri" pitchFamily="34" charset="0"/>
+                <a:ea typeface="Calibri" pitchFamily="34" charset="-122"/>
+                <a:cs typeface="Calibri" pitchFamily="34" charset="-120"/>
+              </a:rPr>
+              <a:t> </a:t>
+            </a:r>
+            <a:r>
+              <a:rPr lang="en-US" sz="1400" i="1" spc="-80" dirty="0">
+                <a:solidFill>
+                  <a:srgbClr val="0D1B2A"/>
+                </a:solidFill>
+                <a:latin typeface="Calibri" pitchFamily="34" charset="0"/>
+                <a:ea typeface="Calibri" pitchFamily="34" charset="-122"/>
+                <a:cs typeface="Calibri" pitchFamily="34" charset="-120"/>
+              </a:rPr>
               <a:t>(przepustowość aktuatora)</a:t>
             </a:r>
-            <a:endParaRPr lang="en-US" sz="1400" i="1" spc="-60" dirty="0"/>
+            <a:endParaRPr lang="en-US" sz="1400" i="1" spc="-80" dirty="0"/>
           </a:p>
           <a:p>
             <a:pPr marL="144000" indent="-144000">
@@ -21605,7 +22910,7 @@
         <p:spPr>
           <a:xfrm>
             <a:off x="4892040" y="1600200"/>
-            <a:ext cx="3794760" cy="2555488"/>
+            <a:ext cx="3794760" cy="1729123"/>
           </a:xfrm>
           <a:prstGeom prst="rect">
             <a:avLst/>
@@ -21614,7 +22919,9 @@
           <a:ln/>
         </p:spPr>
         <p:txBody>
-          <a:bodyPr wrap="square" lIns="63500" tIns="101600" rIns="63500" bIns="63500" rtlCol="0" anchor="t"/>
+          <a:bodyPr wrap="square" lIns="63500" tIns="36000" rIns="63500" bIns="0" rtlCol="0" anchor="t">
+            <a:spAutoFit/>
+          </a:bodyPr>
           <a:lstStyle/>
           <a:p>
             <a:pPr marL="144000" indent="-144000">
@@ -21991,7 +23298,7 @@
               <a:buNone/>
             </a:pPr>
             <a:r>
-              <a:rPr lang="en-US" sz="2800" b="1" dirty="0">
+              <a:rPr lang="en-US" sz="2400" b="1" dirty="0">
                 <a:solidFill>
                   <a:srgbClr val="FFFFFF"/>
                 </a:solidFill>
@@ -22001,7 +23308,7 @@
               </a:rPr>
               <a:t>Planowanie na schodach i nierównościach</a:t>
             </a:r>
-            <a:endParaRPr lang="en-US" sz="2800" dirty="0"/>
+            <a:endParaRPr lang="en-US" sz="2400" dirty="0"/>
           </a:p>
         </p:txBody>
       </p:sp>
@@ -22014,7 +23321,7 @@
         <p:spPr>
           <a:xfrm>
             <a:off x="274320" y="1097280"/>
-            <a:ext cx="8595360" cy="3749040"/>
+            <a:ext cx="8595360" cy="2716437"/>
           </a:xfrm>
           <a:prstGeom prst="rect">
             <a:avLst/>
@@ -22046,7 +23353,7 @@
         <p:spPr>
           <a:xfrm>
             <a:off x="457200" y="1188720"/>
-            <a:ext cx="8229600" cy="3520440"/>
+            <a:ext cx="8229600" cy="2467786"/>
           </a:xfrm>
           <a:prstGeom prst="rect">
             <a:avLst/>
@@ -22055,7 +23362,9 @@
           <a:ln/>
         </p:spPr>
         <p:txBody>
-          <a:bodyPr wrap="square" lIns="127000" tIns="127000" rIns="127000" bIns="127000" rtlCol="0" anchor="t"/>
+          <a:bodyPr wrap="square" lIns="127000" tIns="36000" rIns="127000" bIns="0" rtlCol="0" anchor="t">
+            <a:spAutoFit/>
+          </a:bodyPr>
           <a:lstStyle/>
           <a:p>
             <a:pPr marL="144000" indent="-144000">
@@ -22430,7 +23739,7 @@
               <a:buNone/>
             </a:pPr>
             <a:r>
-              <a:rPr lang="en-US" sz="2800" b="1" dirty="0">
+              <a:rPr lang="en-US" sz="2400" b="1" dirty="0">
                 <a:solidFill>
                   <a:srgbClr val="FFFFFF"/>
                 </a:solidFill>
@@ -22438,9 +23747,20 @@
                 <a:ea typeface="Trebuchet MS" pitchFamily="34" charset="-122"/>
                 <a:cs typeface="Trebuchet MS" pitchFamily="34" charset="-120"/>
               </a:rPr>
-              <a:t>Generacja sekwencji kroków (footstep planner)</a:t>
-            </a:r>
-            <a:endParaRPr lang="en-US" sz="2800" dirty="0"/>
+              <a:t>Generacja sekwencji kroków </a:t>
+            </a:r>
+            <a:r>
+              <a:rPr lang="en-US" sz="2400" dirty="0">
+                <a:solidFill>
+                  <a:srgbClr val="FFFFFF"/>
+                </a:solidFill>
+                <a:latin typeface="Trebuchet MS" pitchFamily="34" charset="0"/>
+                <a:ea typeface="Trebuchet MS" pitchFamily="34" charset="-122"/>
+                <a:cs typeface="Trebuchet MS" pitchFamily="34" charset="-120"/>
+              </a:rPr>
+              <a:t>(footstep planner)</a:t>
+            </a:r>
+            <a:endParaRPr lang="en-US" sz="2400" dirty="0"/>
           </a:p>
         </p:txBody>
       </p:sp>
@@ -25107,6 +26427,13 @@
           </a:prstGeom>
           <a:noFill/>
           <a:ln/>
+          <a:effectLst>
+            <a:outerShdw blurRad="50800" dist="38100" dir="2700000" algn="tl" rotWithShape="0">
+              <a:prstClr val="black">
+                <a:alpha val="40000"/>
+              </a:prstClr>
+            </a:outerShdw>
+          </a:effectLst>
         </p:spPr>
         <p:txBody>
           <a:bodyPr wrap="square" lIns="0" tIns="0" rIns="0" bIns="0" rtlCol="0" anchor="ctr"/>
@@ -25147,14 +26474,21 @@
             <a:avLst/>
           </a:prstGeom>
           <a:solidFill>
-            <a:srgbClr val="0D1B2A"/>
+            <a:schemeClr val="bg1"/>
           </a:solidFill>
-          <a:ln w="25400">
+          <a:ln w="57150">
             <a:solidFill>
               <a:srgbClr val="00B4D8"/>
             </a:solidFill>
             <a:prstDash val="solid"/>
           </a:ln>
+          <a:effectLst>
+            <a:outerShdw blurRad="50800" dist="38100" dir="2700000" algn="tl" rotWithShape="0">
+              <a:prstClr val="black">
+                <a:alpha val="40000"/>
+              </a:prstClr>
+            </a:outerShdw>
+          </a:effectLst>
         </p:spPr>
       </p:sp>
       <p:pic>
@@ -25173,8 +26507,8 @@
         </p:blipFill>
         <p:spPr>
           <a:xfrm>
-            <a:off x="7406640" y="1645920"/>
-            <a:ext cx="1097280" cy="1097280"/>
+            <a:off x="7492876" y="1732156"/>
+            <a:ext cx="924808" cy="924808"/>
           </a:xfrm>
           <a:prstGeom prst="rect">
             <a:avLst/>
@@ -25245,7 +26579,7 @@
               <a:buNone/>
             </a:pPr>
             <a:r>
-              <a:rPr lang="en-US" sz="2600" b="1" dirty="0">
+              <a:rPr lang="en-US" sz="3200" b="1" dirty="0">
                 <a:solidFill>
                   <a:srgbClr val="FFFFFF"/>
                 </a:solidFill>
@@ -25255,7 +26589,7 @@
               </a:rPr>
               <a:t>Planowanie globalne</a:t>
             </a:r>
-            <a:endParaRPr lang="en-US" sz="2600" dirty="0"/>
+            <a:endParaRPr lang="en-US" sz="3200" dirty="0"/>
           </a:p>
         </p:txBody>
       </p:sp>
@@ -25282,6 +26616,13 @@
             </a:solidFill>
             <a:prstDash val="solid"/>
           </a:ln>
+          <a:effectLst>
+            <a:outerShdw blurRad="50800" dist="38100" dir="2700000" algn="tl" rotWithShape="0">
+              <a:prstClr val="black">
+                <a:alpha val="40000"/>
+              </a:prstClr>
+            </a:outerShdw>
+          </a:effectLst>
         </p:spPr>
       </p:sp>
       <p:sp>
@@ -25293,7 +26634,7 @@
         <p:spPr>
           <a:xfrm>
             <a:off x="2926080" y="2834640"/>
-            <a:ext cx="3931920" cy="822960"/>
+            <a:ext cx="4480560" cy="457200"/>
           </a:xfrm>
           <a:prstGeom prst="rect">
             <a:avLst/>
@@ -25470,7 +26811,7 @@
               <a:buNone/>
             </a:pPr>
             <a:r>
-              <a:rPr lang="en-US" sz="2800" b="1" dirty="0">
+              <a:rPr lang="en-US" sz="2400" b="1" dirty="0">
                 <a:solidFill>
                   <a:srgbClr val="FFFFFF"/>
                 </a:solidFill>
@@ -25480,7 +26821,7 @@
               </a:rPr>
               <a:t>Weryfikacja wykonalności kroku</a:t>
             </a:r>
-            <a:endParaRPr lang="en-US" sz="2800" dirty="0"/>
+            <a:endParaRPr lang="en-US" sz="2400" dirty="0"/>
           </a:p>
         </p:txBody>
       </p:sp>
@@ -28208,7 +29549,7 @@
               <a:buNone/>
             </a:pPr>
             <a:r>
-              <a:rPr lang="en-US" sz="2800" b="1" dirty="0">
+              <a:rPr lang="en-US" sz="2400" b="1" dirty="0">
                 <a:solidFill>
                   <a:srgbClr val="FFFFFF"/>
                 </a:solidFill>
@@ -28216,9 +29557,75 @@
                 <a:ea typeface="Trebuchet MS" pitchFamily="34" charset="-122"/>
                 <a:cs typeface="Trebuchet MS" pitchFamily="34" charset="-120"/>
               </a:rPr>
-              <a:t>Trajektoria środka masy a sekwencja kroków</a:t>
-            </a:r>
-            <a:endParaRPr lang="en-US" sz="2800" dirty="0"/>
+              <a:t>Trajektoria </a:t>
+            </a:r>
+            <a:r>
+              <a:rPr lang="en-US" sz="2400" b="1" dirty="0" err="1">
+                <a:solidFill>
+                  <a:srgbClr val="FFFFFF"/>
+                </a:solidFill>
+                <a:latin typeface="Trebuchet MS" pitchFamily="34" charset="0"/>
+                <a:ea typeface="Trebuchet MS" pitchFamily="34" charset="-122"/>
+                <a:cs typeface="Trebuchet MS" pitchFamily="34" charset="-120"/>
+              </a:rPr>
+              <a:t>środka</a:t>
+            </a:r>
+            <a:r>
+              <a:rPr lang="en-US" sz="2400" b="1" dirty="0">
+                <a:solidFill>
+                  <a:srgbClr val="FFFFFF"/>
+                </a:solidFill>
+                <a:latin typeface="Trebuchet MS" pitchFamily="34" charset="0"/>
+                <a:ea typeface="Trebuchet MS" pitchFamily="34" charset="-122"/>
+                <a:cs typeface="Trebuchet MS" pitchFamily="34" charset="-120"/>
+              </a:rPr>
+              <a:t> </a:t>
+            </a:r>
+            <a:r>
+              <a:rPr lang="en-US" sz="2400" b="1" dirty="0" err="1" smtClean="0">
+                <a:solidFill>
+                  <a:srgbClr val="FFFFFF"/>
+                </a:solidFill>
+                <a:latin typeface="Trebuchet MS" pitchFamily="34" charset="0"/>
+                <a:ea typeface="Trebuchet MS" pitchFamily="34" charset="-122"/>
+                <a:cs typeface="Trebuchet MS" pitchFamily="34" charset="-120"/>
+              </a:rPr>
+              <a:t>masy</a:t>
+            </a:r>
+            <a:r>
+              <a:rPr lang="pl-PL" sz="2400" b="1" dirty="0" smtClean="0">
+                <a:solidFill>
+                  <a:srgbClr val="FFFFFF"/>
+                </a:solidFill>
+                <a:latin typeface="Trebuchet MS" pitchFamily="34" charset="0"/>
+                <a:ea typeface="Trebuchet MS" pitchFamily="34" charset="-122"/>
+                <a:cs typeface="Trebuchet MS" pitchFamily="34" charset="-120"/>
+              </a:rPr>
+              <a:t>,</a:t>
+            </a:r>
+            <a:r>
+              <a:rPr lang="en-US" sz="2400" b="1" dirty="0" smtClean="0">
+                <a:solidFill>
+                  <a:srgbClr val="FFFFFF"/>
+                </a:solidFill>
+                <a:latin typeface="Trebuchet MS" pitchFamily="34" charset="0"/>
+                <a:ea typeface="Trebuchet MS" pitchFamily="34" charset="-122"/>
+                <a:cs typeface="Trebuchet MS" pitchFamily="34" charset="-120"/>
+              </a:rPr>
+              <a:t> </a:t>
+            </a:r>
+            <a:r>
+              <a:rPr lang="en-US" sz="2400" b="1" dirty="0">
+                <a:solidFill>
+                  <a:srgbClr val="FFFFFF"/>
+                </a:solidFill>
+                <a:latin typeface="Trebuchet MS" pitchFamily="34" charset="0"/>
+                <a:ea typeface="Trebuchet MS" pitchFamily="34" charset="-122"/>
+                <a:cs typeface="Trebuchet MS" pitchFamily="34" charset="-120"/>
+              </a:rPr>
+              <a:t>a sekwencja kroków</a:t>
+            </a:r>
+            <a:endParaRPr lang="en-US" sz="2400" dirty="0"/>
           </a:p>
         </p:txBody>
       </p:sp>
@@ -28231,7 +29638,7 @@
         <p:spPr>
           <a:xfrm>
             <a:off x="274320" y="1097280"/>
-            <a:ext cx="8595360" cy="3749040"/>
+            <a:ext cx="8595360" cy="2530583"/>
           </a:xfrm>
           <a:prstGeom prst="rect">
             <a:avLst/>
@@ -28263,7 +29670,7 @@
         <p:spPr>
           <a:xfrm>
             <a:off x="457200" y="1188720"/>
-            <a:ext cx="8229600" cy="3520440"/>
+            <a:ext cx="8229600" cy="2290815"/>
           </a:xfrm>
           <a:prstGeom prst="rect">
             <a:avLst/>
@@ -28272,7 +29679,9 @@
           <a:ln/>
         </p:spPr>
         <p:txBody>
-          <a:bodyPr wrap="square" lIns="127000" tIns="127000" rIns="127000" bIns="127000" rtlCol="0" anchor="t"/>
+          <a:bodyPr wrap="square" lIns="127000" tIns="36000" rIns="127000" bIns="0" rtlCol="0" anchor="t">
+            <a:spAutoFit/>
+          </a:bodyPr>
           <a:lstStyle/>
           <a:p>
             <a:pPr marL="342900" indent="-342900">
@@ -28566,7 +29975,7 @@
         </p:nvSpPr>
         <p:spPr>
           <a:xfrm>
-            <a:off x="64008" y="0"/>
+            <a:off x="16727" y="0"/>
             <a:ext cx="9079992" cy="960120"/>
           </a:xfrm>
           <a:prstGeom prst="rect">
@@ -28647,7 +30056,7 @@
               <a:buNone/>
             </a:pPr>
             <a:r>
-              <a:rPr lang="en-US" sz="2800" b="1" dirty="0">
+              <a:rPr lang="en-US" sz="2400" b="1" dirty="0">
                 <a:solidFill>
                   <a:srgbClr val="FFFFFF"/>
                 </a:solidFill>
@@ -28657,7 +30066,7 @@
               </a:rPr>
               <a:t>Dobór planisty do konkretnej aplikacji</a:t>
             </a:r>
-            <a:endParaRPr lang="en-US" sz="2800" dirty="0"/>
+            <a:endParaRPr lang="en-US" sz="2400" dirty="0"/>
           </a:p>
         </p:txBody>
       </p:sp>
@@ -28669,8 +30078,8 @@
         </p:nvSpPr>
         <p:spPr>
           <a:xfrm>
-            <a:off x="274320" y="1143000"/>
-            <a:ext cx="2651760" cy="1691640"/>
+            <a:off x="274319" y="1143000"/>
+            <a:ext cx="2741980" cy="1399478"/>
           </a:xfrm>
           <a:prstGeom prst="rect">
             <a:avLst/>
@@ -28701,8 +30110,8 @@
         </p:nvSpPr>
         <p:spPr>
           <a:xfrm>
-            <a:off x="274320" y="1143000"/>
-            <a:ext cx="2651760" cy="54864"/>
+            <a:off x="274319" y="1143000"/>
+            <a:ext cx="2741980" cy="54864"/>
           </a:xfrm>
           <a:prstGeom prst="rect">
             <a:avLst/>
@@ -28726,8 +30135,8 @@
         </p:nvSpPr>
         <p:spPr>
           <a:xfrm>
-            <a:off x="384048" y="1234441"/>
-            <a:ext cx="2432304" cy="378438"/>
+            <a:off x="387780" y="1234441"/>
+            <a:ext cx="2515057" cy="378438"/>
           </a:xfrm>
           <a:prstGeom prst="rect">
             <a:avLst/>
@@ -28765,8 +30174,8 @@
         </p:nvSpPr>
         <p:spPr>
           <a:xfrm>
-            <a:off x="384048" y="1853489"/>
-            <a:ext cx="2432304" cy="547740"/>
+            <a:off x="349346" y="1853489"/>
+            <a:ext cx="2553492" cy="547740"/>
           </a:xfrm>
           <a:prstGeom prst="rect">
             <a:avLst/>
@@ -28782,7 +30191,7 @@
               <a:buNone/>
             </a:pPr>
             <a:r>
-              <a:rPr lang="en-US" sz="1100" dirty="0">
+              <a:rPr lang="en-US" sz="1100" spc="-30" dirty="0">
                 <a:solidFill>
                   <a:srgbClr val="475569"/>
                 </a:solidFill>
@@ -28792,7 +30201,7 @@
               </a:rPr>
               <a:t>A* + DWA; prosta cost map; footstep planer 2D; iteracyjna weryfikacja ZMP; MuJoCo do testów</a:t>
             </a:r>
-            <a:endParaRPr lang="en-US" sz="1100" dirty="0"/>
+            <a:endParaRPr lang="en-US" sz="1100" spc="-30" dirty="0"/>
           </a:p>
         </p:txBody>
       </p:sp>
@@ -28804,8 +30213,8 @@
         </p:nvSpPr>
         <p:spPr>
           <a:xfrm>
-            <a:off x="3154680" y="1143000"/>
-            <a:ext cx="2651760" cy="1691640"/>
+            <a:off x="3252677" y="1143000"/>
+            <a:ext cx="2741980" cy="1399478"/>
           </a:xfrm>
           <a:prstGeom prst="rect">
             <a:avLst/>
@@ -28836,8 +30245,8 @@
         </p:nvSpPr>
         <p:spPr>
           <a:xfrm>
-            <a:off x="3154680" y="1143000"/>
-            <a:ext cx="2651760" cy="54864"/>
+            <a:off x="3252677" y="1143000"/>
+            <a:ext cx="2741980" cy="54864"/>
           </a:xfrm>
           <a:prstGeom prst="rect">
             <a:avLst/>
@@ -28861,8 +30270,8 @@
         </p:nvSpPr>
         <p:spPr>
           <a:xfrm>
-            <a:off x="3264408" y="1234441"/>
-            <a:ext cx="2432304" cy="378438"/>
+            <a:off x="3366138" y="1234441"/>
+            <a:ext cx="2515057" cy="378438"/>
           </a:xfrm>
           <a:prstGeom prst="rect">
             <a:avLst/>
@@ -28900,8 +30309,8 @@
         </p:nvSpPr>
         <p:spPr>
           <a:xfrm>
-            <a:off x="3264408" y="1853489"/>
-            <a:ext cx="2432304" cy="547740"/>
+            <a:off x="3305401" y="1853489"/>
+            <a:ext cx="2575794" cy="547740"/>
           </a:xfrm>
           <a:prstGeom prst="rect">
             <a:avLst/>
@@ -28917,7 +30326,7 @@
               <a:buNone/>
             </a:pPr>
             <a:r>
-              <a:rPr lang="en-US" sz="1100" dirty="0">
+              <a:rPr lang="en-US" sz="1100" spc="-50" dirty="0">
                 <a:solidFill>
                   <a:srgbClr val="475569"/>
                 </a:solidFill>
@@ -28927,7 +30336,7 @@
               </a:rPr>
               <a:t>A* z cost map + Social DWA; detekcja YOLO; adaptacyjne kroki; zatrzymanie przy ludziach &lt; 1 m</a:t>
             </a:r>
-            <a:endParaRPr lang="en-US" sz="1100" dirty="0"/>
+            <a:endParaRPr lang="en-US" sz="1100" spc="-50" dirty="0"/>
           </a:p>
         </p:txBody>
       </p:sp>
@@ -28939,8 +30348,8 @@
         </p:nvSpPr>
         <p:spPr>
           <a:xfrm>
-            <a:off x="6035040" y="1143000"/>
-            <a:ext cx="2651760" cy="1691640"/>
+            <a:off x="6231034" y="1143000"/>
+            <a:ext cx="2741980" cy="1399478"/>
           </a:xfrm>
           <a:prstGeom prst="rect">
             <a:avLst/>
@@ -28971,8 +30380,8 @@
         </p:nvSpPr>
         <p:spPr>
           <a:xfrm>
-            <a:off x="6035040" y="1143000"/>
-            <a:ext cx="2651760" cy="54864"/>
+            <a:off x="6231034" y="1143000"/>
+            <a:ext cx="2741980" cy="54864"/>
           </a:xfrm>
           <a:prstGeom prst="rect">
             <a:avLst/>
@@ -28996,8 +30405,8 @@
         </p:nvSpPr>
         <p:spPr>
           <a:xfrm>
-            <a:off x="6144768" y="1234441"/>
-            <a:ext cx="2432304" cy="378438"/>
+            <a:off x="6344495" y="1234441"/>
+            <a:ext cx="2515057" cy="378438"/>
           </a:xfrm>
           <a:prstGeom prst="rect">
             <a:avLst/>
@@ -29035,8 +30444,8 @@
         </p:nvSpPr>
         <p:spPr>
           <a:xfrm>
-            <a:off x="6144768" y="1853489"/>
-            <a:ext cx="2432304" cy="547740"/>
+            <a:off x="6306061" y="1853489"/>
+            <a:ext cx="2553492" cy="547740"/>
           </a:xfrm>
           <a:prstGeom prst="rect">
             <a:avLst/>
@@ -29052,7 +30461,7 @@
               <a:buNone/>
             </a:pPr>
             <a:r>
-              <a:rPr lang="en-US" sz="1100" dirty="0">
+              <a:rPr lang="en-US" sz="1100" spc="-30" dirty="0">
                 <a:solidFill>
                   <a:srgbClr val="475569"/>
                 </a:solidFill>
@@ -29062,7 +30471,7 @@
               </a:rPr>
               <a:t>3D A* lub RRT*; footstep w 3D z height map; MPC lokalny; konserwatywne marginesy ZMP</a:t>
             </a:r>
-            <a:endParaRPr lang="en-US" sz="1100" dirty="0"/>
+            <a:endParaRPr lang="en-US" sz="1100" spc="-30" dirty="0"/>
           </a:p>
         </p:txBody>
       </p:sp>
@@ -29074,8 +30483,8 @@
         </p:nvSpPr>
         <p:spPr>
           <a:xfrm>
-            <a:off x="274320" y="2971800"/>
-            <a:ext cx="2651760" cy="1691640"/>
+            <a:off x="274319" y="2704172"/>
+            <a:ext cx="2741980" cy="1399478"/>
           </a:xfrm>
           <a:prstGeom prst="rect">
             <a:avLst/>
@@ -29106,8 +30515,8 @@
         </p:nvSpPr>
         <p:spPr>
           <a:xfrm>
-            <a:off x="274320" y="2971800"/>
-            <a:ext cx="2651760" cy="54864"/>
+            <a:off x="274319" y="2704172"/>
+            <a:ext cx="2741980" cy="54864"/>
           </a:xfrm>
           <a:prstGeom prst="rect">
             <a:avLst/>
@@ -29131,8 +30540,8 @@
         </p:nvSpPr>
         <p:spPr>
           <a:xfrm>
-            <a:off x="384048" y="3063241"/>
-            <a:ext cx="2432304" cy="378438"/>
+            <a:off x="387780" y="2795613"/>
+            <a:ext cx="2515057" cy="378438"/>
           </a:xfrm>
           <a:prstGeom prst="rect">
             <a:avLst/>
@@ -29170,8 +30579,8 @@
         </p:nvSpPr>
         <p:spPr>
           <a:xfrm>
-            <a:off x="384048" y="3682289"/>
-            <a:ext cx="2432304" cy="547740"/>
+            <a:off x="327043" y="3362623"/>
+            <a:ext cx="2689255" cy="547740"/>
           </a:xfrm>
           <a:prstGeom prst="rect">
             <a:avLst/>
@@ -29187,7 +30596,7 @@
               <a:buNone/>
             </a:pPr>
             <a:r>
-              <a:rPr lang="en-US" sz="1100" dirty="0">
+              <a:rPr lang="en-US" sz="1100" spc="-40" dirty="0">
                 <a:solidFill>
                   <a:srgbClr val="475569"/>
                 </a:solidFill>
@@ -29197,7 +30606,7 @@
               </a:rPr>
               <a:t>ORCA lub S-MPC; krótki horyzont predykcji (0,5 s); priority queue stref bezpiecznych; niskie prędkości</a:t>
             </a:r>
-            <a:endParaRPr lang="en-US" sz="1100" dirty="0"/>
+            <a:endParaRPr lang="en-US" sz="1100" spc="-40" dirty="0"/>
           </a:p>
         </p:txBody>
       </p:sp>
@@ -29209,8 +30618,8 @@
         </p:nvSpPr>
         <p:spPr>
           <a:xfrm>
-            <a:off x="3154680" y="2971800"/>
-            <a:ext cx="2651760" cy="1691640"/>
+            <a:off x="3252677" y="2704172"/>
+            <a:ext cx="2741980" cy="1399478"/>
           </a:xfrm>
           <a:prstGeom prst="rect">
             <a:avLst/>
@@ -29241,8 +30650,8 @@
         </p:nvSpPr>
         <p:spPr>
           <a:xfrm>
-            <a:off x="3154680" y="2971800"/>
-            <a:ext cx="2651760" cy="54864"/>
+            <a:off x="3252677" y="2704172"/>
+            <a:ext cx="2741980" cy="54864"/>
           </a:xfrm>
           <a:prstGeom prst="rect">
             <a:avLst/>
@@ -29266,8 +30675,8 @@
         </p:nvSpPr>
         <p:spPr>
           <a:xfrm>
-            <a:off x="3264408" y="3063241"/>
-            <a:ext cx="2432304" cy="378438"/>
+            <a:off x="3366138" y="2795613"/>
+            <a:ext cx="2515057" cy="378438"/>
           </a:xfrm>
           <a:prstGeom prst="rect">
             <a:avLst/>
@@ -29305,8 +30714,8 @@
         </p:nvSpPr>
         <p:spPr>
           <a:xfrm>
-            <a:off x="3264408" y="3682289"/>
-            <a:ext cx="2432304" cy="547740"/>
+            <a:off x="3305401" y="3362623"/>
+            <a:ext cx="2634482" cy="547740"/>
           </a:xfrm>
           <a:prstGeom prst="rect">
             <a:avLst/>
@@ -29322,7 +30731,7 @@
               <a:buNone/>
             </a:pPr>
             <a:r>
-              <a:rPr lang="en-US" sz="1100" dirty="0">
+              <a:rPr lang="en-US" sz="1100" spc="-30" dirty="0">
                 <a:solidFill>
                   <a:srgbClr val="475569"/>
                 </a:solidFill>
@@ -29332,7 +30741,7 @@
               </a:rPr>
               <a:t>Hierarchiczny planer: globalny graf pięter + lokalny 3D footstep; detekcja stopni z point cloud</a:t>
             </a:r>
-            <a:endParaRPr lang="en-US" sz="1100" dirty="0"/>
+            <a:endParaRPr lang="en-US" sz="1100" spc="-30" dirty="0"/>
           </a:p>
         </p:txBody>
       </p:sp>
@@ -29344,8 +30753,8 @@
         </p:nvSpPr>
         <p:spPr>
           <a:xfrm>
-            <a:off x="6035040" y="2971800"/>
-            <a:ext cx="2651760" cy="1691640"/>
+            <a:off x="6231034" y="2704172"/>
+            <a:ext cx="2741980" cy="1399478"/>
           </a:xfrm>
           <a:prstGeom prst="rect">
             <a:avLst/>
@@ -29376,8 +30785,8 @@
         </p:nvSpPr>
         <p:spPr>
           <a:xfrm>
-            <a:off x="6035040" y="2971800"/>
-            <a:ext cx="2651760" cy="54864"/>
+            <a:off x="6231034" y="2704172"/>
+            <a:ext cx="2741980" cy="54864"/>
           </a:xfrm>
           <a:prstGeom prst="rect">
             <a:avLst/>
@@ -29401,8 +30810,8 @@
         </p:nvSpPr>
         <p:spPr>
           <a:xfrm>
-            <a:off x="6144768" y="3063241"/>
-            <a:ext cx="2432304" cy="378438"/>
+            <a:off x="6344495" y="2795613"/>
+            <a:ext cx="2515057" cy="378438"/>
           </a:xfrm>
           <a:prstGeom prst="rect">
             <a:avLst/>
@@ -29440,8 +30849,8 @@
         </p:nvSpPr>
         <p:spPr>
           <a:xfrm>
-            <a:off x="6144768" y="3682289"/>
-            <a:ext cx="2432304" cy="547740"/>
+            <a:off x="6306061" y="3414661"/>
+            <a:ext cx="2553492" cy="547740"/>
           </a:xfrm>
           <a:prstGeom prst="rect">
             <a:avLst/>
@@ -29457,7 +30866,7 @@
               <a:buNone/>
             </a:pPr>
             <a:r>
-              <a:rPr lang="en-US" sz="1100" dirty="0">
+              <a:rPr lang="en-US" sz="1100" spc="-30" dirty="0">
                 <a:solidFill>
                   <a:srgbClr val="475569"/>
                 </a:solidFill>
@@ -29467,7 +30876,7 @@
               </a:rPr>
               <a:t>MPC z agresywnym horyzontem; dynamiczny chód biegowy; uproszczony footstep dla szybkości kosztem marginesu ZMP</a:t>
             </a:r>
-            <a:endParaRPr lang="en-US" sz="1100" dirty="0"/>
+            <a:endParaRPr lang="en-US" sz="1100" spc="-30" dirty="0"/>
           </a:p>
         </p:txBody>
       </p:sp>
@@ -29562,7 +30971,7 @@
         </p:nvSpPr>
         <p:spPr>
           <a:xfrm>
-            <a:off x="320040" y="457200"/>
+            <a:off x="320040" y="356343"/>
             <a:ext cx="8503920" cy="502920"/>
           </a:xfrm>
           <a:prstGeom prst="rect">
@@ -29601,7 +31010,7 @@
         </p:nvSpPr>
         <p:spPr>
           <a:xfrm>
-            <a:off x="2743200" y="1005840"/>
+            <a:off x="2743200" y="904983"/>
             <a:ext cx="3657600" cy="36576"/>
           </a:xfrm>
           <a:prstGeom prst="rect">
@@ -29690,7 +31099,7 @@
         </p:nvSpPr>
         <p:spPr>
           <a:xfrm>
-            <a:off x="1005840" y="1234440"/>
+            <a:off x="1005840" y="1152666"/>
             <a:ext cx="7863840" cy="502920"/>
           </a:xfrm>
           <a:prstGeom prst="rect">
@@ -29700,14 +31109,14 @@
           <a:ln/>
         </p:spPr>
         <p:txBody>
-          <a:bodyPr wrap="square" lIns="0" tIns="0" rIns="0" bIns="0" rtlCol="0" anchor="t"/>
+          <a:bodyPr wrap="square" lIns="0" tIns="0" rIns="0" bIns="0" rtlCol="0" anchor="ctr"/>
           <a:lstStyle/>
           <a:p>
             <a:pPr marL="0" indent="0">
               <a:buNone/>
             </a:pPr>
             <a:r>
-              <a:rPr lang="en-US" sz="1300" dirty="0">
+              <a:rPr lang="en-US" sz="1400" dirty="0">
                 <a:solidFill>
                   <a:srgbClr val="E2EBF3"/>
                 </a:solidFill>
@@ -29715,9 +31124,42 @@
                 <a:ea typeface="Calibri" pitchFamily="34" charset="-122"/>
                 <a:cs typeface="Calibri" pitchFamily="34" charset="-120"/>
               </a:rPr>
-              <a:t>Planowanie globalne (A*, Dijkstra) wyznacza optymalną trasę; heurystyki i cost map sterują wyborem ścieżki.</a:t>
-            </a:r>
-            <a:endParaRPr lang="en-US" sz="1300" dirty="0"/>
+              <a:t>Planowanie globalne (A*, Dijkstra) wyznacza optymalną trasę; heurystyki i cost map sterują </a:t>
+            </a:r>
+            <a:r>
+              <a:rPr lang="en-US" sz="1400" dirty="0" err="1">
+                <a:solidFill>
+                  <a:srgbClr val="E2EBF3"/>
+                </a:solidFill>
+                <a:latin typeface="Calibri" pitchFamily="34" charset="0"/>
+                <a:ea typeface="Calibri" pitchFamily="34" charset="-122"/>
+                <a:cs typeface="Calibri" pitchFamily="34" charset="-120"/>
+              </a:rPr>
+              <a:t>wyborem</a:t>
+            </a:r>
+            <a:r>
+              <a:rPr lang="en-US" sz="1400" dirty="0">
+                <a:solidFill>
+                  <a:srgbClr val="E2EBF3"/>
+                </a:solidFill>
+                <a:latin typeface="Calibri" pitchFamily="34" charset="0"/>
+                <a:ea typeface="Calibri" pitchFamily="34" charset="-122"/>
+                <a:cs typeface="Calibri" pitchFamily="34" charset="-120"/>
+              </a:rPr>
+              <a:t> </a:t>
+            </a:r>
+            <a:r>
+              <a:rPr lang="en-US" sz="1400" dirty="0" err="1" smtClean="0">
+                <a:solidFill>
+                  <a:srgbClr val="E2EBF3"/>
+                </a:solidFill>
+                <a:latin typeface="Calibri" pitchFamily="34" charset="0"/>
+                <a:ea typeface="Calibri" pitchFamily="34" charset="-122"/>
+                <a:cs typeface="Calibri" pitchFamily="34" charset="-120"/>
+              </a:rPr>
+              <a:t>ścieżki</a:t>
+            </a:r>
+            <a:endParaRPr lang="en-US" sz="1400" dirty="0"/>
           </a:p>
         </p:txBody>
       </p:sp>
@@ -29793,7 +31235,7 @@
         </p:nvSpPr>
         <p:spPr>
           <a:xfrm>
-            <a:off x="1005840" y="1993392"/>
+            <a:off x="1005840" y="1911618"/>
             <a:ext cx="7863840" cy="502920"/>
           </a:xfrm>
           <a:prstGeom prst="rect">
@@ -29803,14 +31245,14 @@
           <a:ln/>
         </p:spPr>
         <p:txBody>
-          <a:bodyPr wrap="square" lIns="0" tIns="0" rIns="0" bIns="0" rtlCol="0" anchor="t"/>
+          <a:bodyPr wrap="square" lIns="0" tIns="0" rIns="0" bIns="0" rtlCol="0" anchor="ctr"/>
           <a:lstStyle/>
           <a:p>
             <a:pPr marL="0" indent="0">
               <a:buNone/>
             </a:pPr>
             <a:r>
-              <a:rPr lang="en-US" sz="1300" dirty="0">
+              <a:rPr lang="en-US" sz="1400" dirty="0">
                 <a:solidFill>
                   <a:srgbClr val="E2EBF3"/>
                 </a:solidFill>
@@ -29818,9 +31260,42 @@
                 <a:ea typeface="Calibri" pitchFamily="34" charset="-122"/>
                 <a:cs typeface="Calibri" pitchFamily="34" charset="-120"/>
               </a:rPr>
-              <a:t>Planista lokalny (DWA, MPC, potential fields) reaguje na zmiany środowiska i przeszkody dynamiczne.</a:t>
-            </a:r>
-            <a:endParaRPr lang="en-US" sz="1300" dirty="0"/>
+              <a:t>Planista lokalny (DWA, MPC, potential fields) reaguje na zmiany środowiska i </a:t>
+            </a:r>
+            <a:r>
+              <a:rPr lang="en-US" sz="1400" dirty="0" err="1">
+                <a:solidFill>
+                  <a:srgbClr val="E2EBF3"/>
+                </a:solidFill>
+                <a:latin typeface="Calibri" pitchFamily="34" charset="0"/>
+                <a:ea typeface="Calibri" pitchFamily="34" charset="-122"/>
+                <a:cs typeface="Calibri" pitchFamily="34" charset="-120"/>
+              </a:rPr>
+              <a:t>przeszkody</a:t>
+            </a:r>
+            <a:r>
+              <a:rPr lang="en-US" sz="1400" dirty="0">
+                <a:solidFill>
+                  <a:srgbClr val="E2EBF3"/>
+                </a:solidFill>
+                <a:latin typeface="Calibri" pitchFamily="34" charset="0"/>
+                <a:ea typeface="Calibri" pitchFamily="34" charset="-122"/>
+                <a:cs typeface="Calibri" pitchFamily="34" charset="-120"/>
+              </a:rPr>
+              <a:t> </a:t>
+            </a:r>
+            <a:r>
+              <a:rPr lang="en-US" sz="1400" dirty="0" err="1" smtClean="0">
+                <a:solidFill>
+                  <a:srgbClr val="E2EBF3"/>
+                </a:solidFill>
+                <a:latin typeface="Calibri" pitchFamily="34" charset="0"/>
+                <a:ea typeface="Calibri" pitchFamily="34" charset="-122"/>
+                <a:cs typeface="Calibri" pitchFamily="34" charset="-120"/>
+              </a:rPr>
+              <a:t>dynamiczne</a:t>
+            </a:r>
+            <a:endParaRPr lang="en-US" sz="1400" dirty="0"/>
           </a:p>
         </p:txBody>
       </p:sp>
@@ -29896,7 +31371,7 @@
         </p:nvSpPr>
         <p:spPr>
           <a:xfrm>
-            <a:off x="1005840" y="2752344"/>
+            <a:off x="1005840" y="2670570"/>
             <a:ext cx="7863840" cy="502920"/>
           </a:xfrm>
           <a:prstGeom prst="rect">
@@ -29906,14 +31381,14 @@
           <a:ln/>
         </p:spPr>
         <p:txBody>
-          <a:bodyPr wrap="square" lIns="0" tIns="0" rIns="0" bIns="0" rtlCol="0" anchor="t"/>
+          <a:bodyPr wrap="square" lIns="0" tIns="0" rIns="0" bIns="0" rtlCol="0" anchor="ctr"/>
           <a:lstStyle/>
           <a:p>
             <a:pPr marL="0" indent="0">
               <a:buNone/>
             </a:pPr>
             <a:r>
-              <a:rPr lang="en-US" sz="1300" dirty="0">
+              <a:rPr lang="en-US" sz="1400" dirty="0">
                 <a:solidFill>
                   <a:srgbClr val="E2EBF3"/>
                 </a:solidFill>
@@ -29921,9 +31396,42 @@
                 <a:ea typeface="Calibri" pitchFamily="34" charset="-122"/>
                 <a:cs typeface="Calibri" pitchFamily="34" charset="-120"/>
               </a:rPr>
-              <a:t>Stabilność ma wyższy priorytet niż optymalność trasy – planista musi uwzględniać margines równowagi.</a:t>
-            </a:r>
-            <a:endParaRPr lang="en-US" sz="1300" dirty="0"/>
+              <a:t>Stabilność ma wyższy priorytet niż optymalność trasy – planista musi uwzględniać </a:t>
+            </a:r>
+            <a:r>
+              <a:rPr lang="en-US" sz="1400" dirty="0" err="1">
+                <a:solidFill>
+                  <a:srgbClr val="E2EBF3"/>
+                </a:solidFill>
+                <a:latin typeface="Calibri" pitchFamily="34" charset="0"/>
+                <a:ea typeface="Calibri" pitchFamily="34" charset="-122"/>
+                <a:cs typeface="Calibri" pitchFamily="34" charset="-120"/>
+              </a:rPr>
+              <a:t>margines</a:t>
+            </a:r>
+            <a:r>
+              <a:rPr lang="en-US" sz="1400" dirty="0">
+                <a:solidFill>
+                  <a:srgbClr val="E2EBF3"/>
+                </a:solidFill>
+                <a:latin typeface="Calibri" pitchFamily="34" charset="0"/>
+                <a:ea typeface="Calibri" pitchFamily="34" charset="-122"/>
+                <a:cs typeface="Calibri" pitchFamily="34" charset="-120"/>
+              </a:rPr>
+              <a:t> </a:t>
+            </a:r>
+            <a:r>
+              <a:rPr lang="en-US" sz="1400" dirty="0" err="1" smtClean="0">
+                <a:solidFill>
+                  <a:srgbClr val="E2EBF3"/>
+                </a:solidFill>
+                <a:latin typeface="Calibri" pitchFamily="34" charset="0"/>
+                <a:ea typeface="Calibri" pitchFamily="34" charset="-122"/>
+                <a:cs typeface="Calibri" pitchFamily="34" charset="-120"/>
+              </a:rPr>
+              <a:t>równowagi</a:t>
+            </a:r>
+            <a:endParaRPr lang="en-US" sz="1400" dirty="0"/>
           </a:p>
         </p:txBody>
       </p:sp>
@@ -29999,7 +31507,7 @@
         </p:nvSpPr>
         <p:spPr>
           <a:xfrm>
-            <a:off x="1005840" y="3511296"/>
+            <a:off x="1005840" y="3429522"/>
             <a:ext cx="7863840" cy="502920"/>
           </a:xfrm>
           <a:prstGeom prst="rect">
@@ -30009,14 +31517,14 @@
           <a:ln/>
         </p:spPr>
         <p:txBody>
-          <a:bodyPr wrap="square" lIns="0" tIns="0" rIns="0" bIns="0" rtlCol="0" anchor="t"/>
+          <a:bodyPr wrap="square" lIns="0" tIns="0" rIns="0" bIns="0" rtlCol="0" anchor="ctr"/>
           <a:lstStyle/>
           <a:p>
             <a:pPr marL="0" indent="0">
               <a:buNone/>
             </a:pPr>
             <a:r>
-              <a:rPr lang="en-US" sz="1300" dirty="0">
+              <a:rPr lang="en-US" sz="1400" dirty="0">
                 <a:solidFill>
                   <a:srgbClr val="E2EBF3"/>
                 </a:solidFill>
@@ -30024,9 +31532,42 @@
                 <a:ea typeface="Calibri" pitchFamily="34" charset="-122"/>
                 <a:cs typeface="Calibri" pitchFamily="34" charset="-120"/>
               </a:rPr>
-              <a:t>Footstep planning tłumaczy geometryczną ścieżkę na fizyczną sekwencję kroków z weryfikacją kinematyczną.</a:t>
-            </a:r>
-            <a:endParaRPr lang="en-US" sz="1300" dirty="0"/>
+              <a:t>Footstep planning tłumaczy geometryczną ścieżkę na fizyczną sekwencję kroków z </a:t>
+            </a:r>
+            <a:r>
+              <a:rPr lang="en-US" sz="1400" dirty="0" err="1">
+                <a:solidFill>
+                  <a:srgbClr val="E2EBF3"/>
+                </a:solidFill>
+                <a:latin typeface="Calibri" pitchFamily="34" charset="0"/>
+                <a:ea typeface="Calibri" pitchFamily="34" charset="-122"/>
+                <a:cs typeface="Calibri" pitchFamily="34" charset="-120"/>
+              </a:rPr>
+              <a:t>weryfikacją</a:t>
+            </a:r>
+            <a:r>
+              <a:rPr lang="en-US" sz="1400" dirty="0">
+                <a:solidFill>
+                  <a:srgbClr val="E2EBF3"/>
+                </a:solidFill>
+                <a:latin typeface="Calibri" pitchFamily="34" charset="0"/>
+                <a:ea typeface="Calibri" pitchFamily="34" charset="-122"/>
+                <a:cs typeface="Calibri" pitchFamily="34" charset="-120"/>
+              </a:rPr>
+              <a:t> </a:t>
+            </a:r>
+            <a:r>
+              <a:rPr lang="en-US" sz="1400" dirty="0" err="1" smtClean="0">
+                <a:solidFill>
+                  <a:srgbClr val="E2EBF3"/>
+                </a:solidFill>
+                <a:latin typeface="Calibri" pitchFamily="34" charset="0"/>
+                <a:ea typeface="Calibri" pitchFamily="34" charset="-122"/>
+                <a:cs typeface="Calibri" pitchFamily="34" charset="-120"/>
+              </a:rPr>
+              <a:t>kinematyczną</a:t>
+            </a:r>
+            <a:endParaRPr lang="en-US" sz="1400" dirty="0"/>
           </a:p>
         </p:txBody>
       </p:sp>
@@ -30102,7 +31643,7 @@
         </p:nvSpPr>
         <p:spPr>
           <a:xfrm>
-            <a:off x="1005840" y="4270248"/>
+            <a:off x="1005840" y="4188474"/>
             <a:ext cx="7863840" cy="502920"/>
           </a:xfrm>
           <a:prstGeom prst="rect">
@@ -30112,14 +31653,14 @@
           <a:ln/>
         </p:spPr>
         <p:txBody>
-          <a:bodyPr wrap="square" lIns="0" tIns="0" rIns="0" bIns="0" rtlCol="0" anchor="t"/>
+          <a:bodyPr wrap="square" lIns="0" tIns="0" rIns="0" bIns="0" rtlCol="0" anchor="ctr"/>
           <a:lstStyle/>
           <a:p>
             <a:pPr marL="0" indent="0">
               <a:buNone/>
             </a:pPr>
             <a:r>
-              <a:rPr lang="en-US" sz="1300" dirty="0">
+              <a:rPr lang="en-US" sz="1400" dirty="0">
                 <a:solidFill>
                   <a:srgbClr val="E2EBF3"/>
                 </a:solidFill>
@@ -30127,9 +31668,42 @@
                 <a:ea typeface="Calibri" pitchFamily="34" charset="-122"/>
                 <a:cs typeface="Calibri" pitchFamily="34" charset="-120"/>
               </a:rPr>
-              <a:t>Trzy poziomy decyzji – globalny, lokalny, footstep – są sprzężone i muszą działać w spójnej pętli.</a:t>
-            </a:r>
-            <a:endParaRPr lang="en-US" sz="1300" dirty="0"/>
+              <a:t>Trzy poziomy decyzji – globalny, lokalny, footstep – są sprzężone i muszą działać w </a:t>
+            </a:r>
+            <a:r>
+              <a:rPr lang="en-US" sz="1400" dirty="0" err="1">
+                <a:solidFill>
+                  <a:srgbClr val="E2EBF3"/>
+                </a:solidFill>
+                <a:latin typeface="Calibri" pitchFamily="34" charset="0"/>
+                <a:ea typeface="Calibri" pitchFamily="34" charset="-122"/>
+                <a:cs typeface="Calibri" pitchFamily="34" charset="-120"/>
+              </a:rPr>
+              <a:t>spójnej</a:t>
+            </a:r>
+            <a:r>
+              <a:rPr lang="en-US" sz="1400" dirty="0">
+                <a:solidFill>
+                  <a:srgbClr val="E2EBF3"/>
+                </a:solidFill>
+                <a:latin typeface="Calibri" pitchFamily="34" charset="0"/>
+                <a:ea typeface="Calibri" pitchFamily="34" charset="-122"/>
+                <a:cs typeface="Calibri" pitchFamily="34" charset="-120"/>
+              </a:rPr>
+              <a:t> </a:t>
+            </a:r>
+            <a:r>
+              <a:rPr lang="en-US" sz="1400" dirty="0" err="1" smtClean="0">
+                <a:solidFill>
+                  <a:srgbClr val="E2EBF3"/>
+                </a:solidFill>
+                <a:latin typeface="Calibri" pitchFamily="34" charset="0"/>
+                <a:ea typeface="Calibri" pitchFamily="34" charset="-122"/>
+                <a:cs typeface="Calibri" pitchFamily="34" charset="-120"/>
+              </a:rPr>
+              <a:t>pętli</a:t>
+            </a:r>
+            <a:endParaRPr lang="en-US" sz="1400" dirty="0"/>
           </a:p>
         </p:txBody>
       </p:sp>
@@ -30410,44 +31984,80 @@
             <a:endParaRPr lang="en-US" sz="1450" dirty="0"/>
           </a:p>
           <a:p>
-            <a:pPr marL="342900" indent="-342900">
+            <a:pPr>
               <a:spcAft>
                 <a:spcPts val="900"/>
               </a:spcAft>
               <a:buSzPct val="100000"/>
-              <a:buChar char="•"/>
             </a:pPr>
-            <a:r>
-              <a:rPr lang="en-US" sz="1450" b="1" dirty="0">
-                <a:solidFill>
-                  <a:srgbClr val="0D1B2A"/>
-                </a:solidFill>
-                <a:latin typeface="Calibri" pitchFamily="34" charset="0"/>
-                <a:ea typeface="Calibri" pitchFamily="34" charset="-122"/>
-                <a:cs typeface="Calibri" pitchFamily="34" charset="-120"/>
-              </a:rPr>
-              <a:t>Zadanie projektowe</a:t>
-            </a:r>
-            <a:r>
-              <a:rPr lang="en-US" sz="1450" dirty="0">
-                <a:solidFill>
-                  <a:srgbClr val="0D1B2A"/>
-                </a:solidFill>
-                <a:latin typeface="Calibri" pitchFamily="34" charset="0"/>
-                <a:ea typeface="Calibri" pitchFamily="34" charset="-122"/>
-                <a:cs typeface="Calibri" pitchFamily="34" charset="-120"/>
-              </a:rPr>
-              <a:t>: zaprojektuj planistę kroków dla humanoida poruszającego się w korytarzu 1,5 m szerokości z napotykanymi ludźmi. Opisz: jakie dane wejściowe są potrzebne, jak wyznaczasz miejsca kontaktu stóp, jak weryfikujesz każdy krok, jak reaguje planista gdy droga jest zablokowana przez &gt;3 s.</a:t>
-            </a:r>
-            <a:endParaRPr lang="en-US" sz="1450" dirty="0"/>
-          </a:p>
-          <a:p>
-            <a:pPr marL="342900" indent="-342900">
+            <a:endParaRPr lang="pl-PL" sz="1450" b="1" dirty="0" smtClean="0">
+              <a:solidFill>
+                <a:srgbClr val="0D1B2A"/>
+              </a:solidFill>
+              <a:latin typeface="Calibri" pitchFamily="34" charset="0"/>
+              <a:ea typeface="Calibri" pitchFamily="34" charset="-122"/>
+              <a:cs typeface="Calibri" pitchFamily="34" charset="-120"/>
+            </a:endParaRPr>
+          </a:p>
+          <a:p>
+            <a:pPr>
               <a:spcAft>
                 <a:spcPts val="900"/>
               </a:spcAft>
               <a:buSzPct val="100000"/>
-              <a:buChar char="•"/>
+            </a:pPr>
+            <a:r>
+              <a:rPr lang="en-US" sz="1450" b="1" dirty="0" err="1" smtClean="0">
+                <a:solidFill>
+                  <a:srgbClr val="0D1B2A"/>
+                </a:solidFill>
+                <a:latin typeface="Calibri" pitchFamily="34" charset="0"/>
+                <a:ea typeface="Calibri" pitchFamily="34" charset="-122"/>
+                <a:cs typeface="Calibri" pitchFamily="34" charset="-120"/>
+              </a:rPr>
+              <a:t>Zadanie</a:t>
+            </a:r>
+            <a:r>
+              <a:rPr lang="en-US" sz="1450" b="1" dirty="0" smtClean="0">
+                <a:solidFill>
+                  <a:srgbClr val="0D1B2A"/>
+                </a:solidFill>
+                <a:latin typeface="Calibri" pitchFamily="34" charset="0"/>
+                <a:ea typeface="Calibri" pitchFamily="34" charset="-122"/>
+                <a:cs typeface="Calibri" pitchFamily="34" charset="-120"/>
+              </a:rPr>
+              <a:t> </a:t>
+            </a:r>
+            <a:r>
+              <a:rPr lang="en-US" sz="1450" b="1" dirty="0">
+                <a:solidFill>
+                  <a:srgbClr val="0D1B2A"/>
+                </a:solidFill>
+                <a:latin typeface="Calibri" pitchFamily="34" charset="0"/>
+                <a:ea typeface="Calibri" pitchFamily="34" charset="-122"/>
+                <a:cs typeface="Calibri" pitchFamily="34" charset="-120"/>
+              </a:rPr>
+              <a:t>projektowe</a:t>
+            </a:r>
+            <a:r>
+              <a:rPr lang="en-US" sz="1450" dirty="0">
+                <a:solidFill>
+                  <a:srgbClr val="0D1B2A"/>
+                </a:solidFill>
+                <a:latin typeface="Calibri" pitchFamily="34" charset="0"/>
+                <a:ea typeface="Calibri" pitchFamily="34" charset="-122"/>
+                <a:cs typeface="Calibri" pitchFamily="34" charset="-120"/>
+              </a:rPr>
+              <a:t>: zaprojektuj planistę kroków dla humanoida poruszającego się w korytarzu 1,5 m szerokości z napotykanymi ludźmi. Opisz: jakie dane wejściowe są potrzebne, jak wyznaczasz miejsca kontaktu stóp, jak weryfikujesz każdy krok, jak reaguje planista gdy droga jest zablokowana przez &gt;3 s.</a:t>
+            </a:r>
+            <a:endParaRPr lang="en-US" sz="1450" dirty="0"/>
+          </a:p>
+          <a:p>
+            <a:pPr>
+              <a:spcAft>
+                <a:spcPts val="900"/>
+              </a:spcAft>
+              <a:buSzPct val="100000"/>
             </a:pPr>
             <a:r>
               <a:rPr lang="en-US" sz="1450" b="1" dirty="0">
@@ -30622,7 +32232,7 @@
               <a:buNone/>
             </a:pPr>
             <a:r>
-              <a:rPr lang="en-US" sz="2800" b="1" dirty="0">
+              <a:rPr lang="en-US" sz="2400" b="1" dirty="0">
                 <a:solidFill>
                   <a:srgbClr val="FFFFFF"/>
                 </a:solidFill>
@@ -30632,550 +32242,609 @@
               </a:rPr>
               <a:t>Miejsce planowania w architekturze systemu</a:t>
             </a:r>
-            <a:endParaRPr lang="en-US" sz="2800" dirty="0"/>
+            <a:endParaRPr lang="en-US" sz="2400" dirty="0"/>
           </a:p>
         </p:txBody>
       </p:sp>
-      <p:sp>
-        <p:nvSpPr>
-          <p:cNvPr id="6" name="Shape 4"/>
-          <p:cNvSpPr/>
+      <p:grpSp>
+        <p:nvGrpSpPr>
+          <p:cNvPr id="22" name="Grupa 21"/>
+          <p:cNvGrpSpPr/>
           <p:nvPr/>
-        </p:nvSpPr>
-        <p:spPr>
+        </p:nvGrpSpPr>
+        <p:grpSpPr>
           <a:xfrm>
             <a:off x="274320" y="1143000"/>
-            <a:ext cx="4160520" cy="1691640"/>
+            <a:ext cx="8595360" cy="2796988"/>
+            <a:chOff x="274320" y="1143000"/>
+            <a:chExt cx="8595360" cy="3520440"/>
           </a:xfrm>
-          <a:prstGeom prst="rect">
-            <a:avLst/>
-          </a:prstGeom>
-          <a:solidFill>
-            <a:srgbClr val="FFFFFF"/>
-          </a:solidFill>
-          <a:ln w="12700">
+        </p:grpSpPr>
+        <p:sp>
+          <p:nvSpPr>
+            <p:cNvPr id="6" name="Shape 4"/>
+            <p:cNvSpPr/>
+            <p:nvPr/>
+          </p:nvSpPr>
+          <p:spPr>
+            <a:xfrm>
+              <a:off x="274320" y="1143000"/>
+              <a:ext cx="4160520" cy="1691640"/>
+            </a:xfrm>
+            <a:prstGeom prst="rect">
+              <a:avLst/>
+            </a:prstGeom>
             <a:solidFill>
-              <a:srgbClr val="E2EBF3"/>
+              <a:srgbClr val="FFFFFF"/>
             </a:solidFill>
-            <a:prstDash val="solid"/>
-          </a:ln>
-          <a:effectLst>
-            <a:outerShdw blurRad="76200" dist="25400" dir="8100000" algn="bl" rotWithShape="0">
-              <a:srgbClr val="000000">
-                <a:alpha val="12000"/>
-              </a:srgbClr>
-            </a:outerShdw>
-          </a:effectLst>
-        </p:spPr>
-      </p:sp>
-      <p:sp>
-        <p:nvSpPr>
-          <p:cNvPr id="7" name="Shape 5"/>
-          <p:cNvSpPr/>
-          <p:nvPr/>
-        </p:nvSpPr>
-        <p:spPr>
-          <a:xfrm>
-            <a:off x="274320" y="1143000"/>
-            <a:ext cx="4160520" cy="54864"/>
-          </a:xfrm>
-          <a:prstGeom prst="rect">
-            <a:avLst/>
-          </a:prstGeom>
-          <a:solidFill>
-            <a:srgbClr val="00B4D8"/>
-          </a:solidFill>
-          <a:ln w="12700">
+            <a:ln w="12700">
+              <a:solidFill>
+                <a:srgbClr val="E2EBF3"/>
+              </a:solidFill>
+              <a:prstDash val="solid"/>
+            </a:ln>
+            <a:effectLst>
+              <a:outerShdw blurRad="76200" dist="25400" dir="8100000" algn="bl" rotWithShape="0">
+                <a:srgbClr val="000000">
+                  <a:alpha val="12000"/>
+                </a:srgbClr>
+              </a:outerShdw>
+            </a:effectLst>
+          </p:spPr>
+        </p:sp>
+        <p:sp>
+          <p:nvSpPr>
+            <p:cNvPr id="7" name="Shape 5"/>
+            <p:cNvSpPr/>
+            <p:nvPr/>
+          </p:nvSpPr>
+          <p:spPr>
+            <a:xfrm>
+              <a:off x="274320" y="1143000"/>
+              <a:ext cx="4160520" cy="54864"/>
+            </a:xfrm>
+            <a:prstGeom prst="rect">
+              <a:avLst/>
+            </a:prstGeom>
             <a:solidFill>
               <a:srgbClr val="00B4D8"/>
             </a:solidFill>
-            <a:prstDash val="solid"/>
-          </a:ln>
-        </p:spPr>
-      </p:sp>
-      <p:sp>
-        <p:nvSpPr>
-          <p:cNvPr id="8" name="Text 6"/>
-          <p:cNvSpPr/>
-          <p:nvPr/>
-        </p:nvSpPr>
-        <p:spPr>
-          <a:xfrm>
-            <a:off x="384048" y="1234440"/>
-            <a:ext cx="3941064" cy="642823"/>
-          </a:xfrm>
-          <a:prstGeom prst="rect">
-            <a:avLst/>
-          </a:prstGeom>
-          <a:noFill/>
-          <a:ln/>
-        </p:spPr>
-        <p:txBody>
-          <a:bodyPr wrap="square" lIns="0" tIns="0" rIns="0" bIns="0" rtlCol="0" anchor="ctr"/>
-          <a:lstStyle/>
-          <a:p>
-            <a:pPr marL="0" indent="0">
-              <a:buNone/>
-            </a:pPr>
-            <a:r>
-              <a:rPr lang="en-US" sz="2000" b="1" dirty="0">
-                <a:solidFill>
-                  <a:srgbClr val="0D1B2A"/>
-                </a:solidFill>
-                <a:latin typeface="Trebuchet MS" pitchFamily="34" charset="0"/>
-                <a:ea typeface="Trebuchet MS" pitchFamily="34" charset="-122"/>
-                <a:cs typeface="Trebuchet MS" pitchFamily="34" charset="-120"/>
-              </a:rPr>
-              <a:t>Wejście: mapa + lokalizacja</a:t>
-            </a:r>
-            <a:endParaRPr lang="en-US" sz="2000" dirty="0"/>
-          </a:p>
-        </p:txBody>
-      </p:sp>
-      <p:sp>
-        <p:nvSpPr>
-          <p:cNvPr id="9" name="Text 7"/>
-          <p:cNvSpPr/>
-          <p:nvPr/>
-        </p:nvSpPr>
-        <p:spPr>
-          <a:xfrm>
-            <a:off x="384048" y="1853489"/>
-            <a:ext cx="3941064" cy="930402"/>
-          </a:xfrm>
-          <a:prstGeom prst="rect">
-            <a:avLst/>
-          </a:prstGeom>
-          <a:noFill/>
-          <a:ln/>
-        </p:spPr>
-        <p:txBody>
-          <a:bodyPr wrap="square" lIns="0" tIns="0" rIns="0" bIns="0" rtlCol="0" anchor="ctr"/>
-          <a:lstStyle/>
-          <a:p>
-            <a:pPr marL="0" indent="0">
-              <a:buNone/>
-            </a:pPr>
-            <a:r>
-              <a:rPr lang="en-US" sz="1600" dirty="0">
-                <a:solidFill>
-                  <a:srgbClr val="475569"/>
-                </a:solidFill>
-                <a:latin typeface="Calibri" pitchFamily="34" charset="0"/>
-                <a:ea typeface="Calibri" pitchFamily="34" charset="-122"/>
-                <a:cs typeface="Calibri" pitchFamily="34" charset="-120"/>
-              </a:rPr>
-              <a:t>Planista dostaje mapę kosztów i bieżącą pozycję robota z estymatora stanu</a:t>
-            </a:r>
-            <a:endParaRPr lang="en-US" sz="1600" dirty="0"/>
-          </a:p>
-        </p:txBody>
-      </p:sp>
-      <p:sp>
-        <p:nvSpPr>
-          <p:cNvPr id="10" name="Shape 8"/>
-          <p:cNvSpPr/>
-          <p:nvPr/>
-        </p:nvSpPr>
-        <p:spPr>
-          <a:xfrm>
-            <a:off x="4709160" y="1143000"/>
-            <a:ext cx="4160520" cy="1691640"/>
-          </a:xfrm>
-          <a:prstGeom prst="rect">
-            <a:avLst/>
-          </a:prstGeom>
-          <a:solidFill>
-            <a:srgbClr val="FFFFFF"/>
-          </a:solidFill>
-          <a:ln w="12700">
+            <a:ln w="12700">
+              <a:solidFill>
+                <a:srgbClr val="00B4D8"/>
+              </a:solidFill>
+              <a:prstDash val="solid"/>
+            </a:ln>
+          </p:spPr>
+        </p:sp>
+        <p:sp>
+          <p:nvSpPr>
+            <p:cNvPr id="8" name="Text 6"/>
+            <p:cNvSpPr/>
+            <p:nvPr/>
+          </p:nvSpPr>
+          <p:spPr>
+            <a:xfrm>
+              <a:off x="384048" y="1234440"/>
+              <a:ext cx="3941064" cy="642823"/>
+            </a:xfrm>
+            <a:prstGeom prst="rect">
+              <a:avLst/>
+            </a:prstGeom>
+            <a:noFill/>
+            <a:ln/>
+          </p:spPr>
+          <p:txBody>
+            <a:bodyPr wrap="square" lIns="0" tIns="0" rIns="0" bIns="0" rtlCol="0" anchor="ctr"/>
+            <a:lstStyle/>
+            <a:p>
+              <a:pPr marL="0" indent="0">
+                <a:buNone/>
+              </a:pPr>
+              <a:r>
+                <a:rPr lang="en-US" sz="2000" b="1" dirty="0">
+                  <a:solidFill>
+                    <a:srgbClr val="0D1B2A"/>
+                  </a:solidFill>
+                  <a:latin typeface="Trebuchet MS" pitchFamily="34" charset="0"/>
+                  <a:ea typeface="Trebuchet MS" pitchFamily="34" charset="-122"/>
+                  <a:cs typeface="Trebuchet MS" pitchFamily="34" charset="-120"/>
+                </a:rPr>
+                <a:t>Wejście: </a:t>
+              </a:r>
+              <a:r>
+                <a:rPr lang="en-US" sz="2000" dirty="0">
+                  <a:solidFill>
+                    <a:srgbClr val="0D1B2A"/>
+                  </a:solidFill>
+                  <a:latin typeface="Trebuchet MS" pitchFamily="34" charset="0"/>
+                  <a:ea typeface="Trebuchet MS" pitchFamily="34" charset="-122"/>
+                  <a:cs typeface="Trebuchet MS" pitchFamily="34" charset="-120"/>
+                </a:rPr>
+                <a:t>mapa + lokalizacja</a:t>
+              </a:r>
+              <a:endParaRPr lang="en-US" sz="2000" dirty="0"/>
+            </a:p>
+          </p:txBody>
+        </p:sp>
+        <p:sp>
+          <p:nvSpPr>
+            <p:cNvPr id="9" name="Text 7"/>
+            <p:cNvSpPr/>
+            <p:nvPr/>
+          </p:nvSpPr>
+          <p:spPr>
+            <a:xfrm>
+              <a:off x="384048" y="1853489"/>
+              <a:ext cx="3941064" cy="930402"/>
+            </a:xfrm>
+            <a:prstGeom prst="rect">
+              <a:avLst/>
+            </a:prstGeom>
+            <a:noFill/>
+            <a:ln/>
+          </p:spPr>
+          <p:txBody>
+            <a:bodyPr wrap="square" lIns="0" tIns="0" rIns="0" bIns="0" rtlCol="0" anchor="ctr"/>
+            <a:lstStyle/>
+            <a:p>
+              <a:pPr marL="0" indent="0">
+                <a:buNone/>
+              </a:pPr>
+              <a:r>
+                <a:rPr lang="en-US" sz="1600" dirty="0">
+                  <a:solidFill>
+                    <a:srgbClr val="475569"/>
+                  </a:solidFill>
+                  <a:latin typeface="Calibri" pitchFamily="34" charset="0"/>
+                  <a:ea typeface="Calibri" pitchFamily="34" charset="-122"/>
+                  <a:cs typeface="Calibri" pitchFamily="34" charset="-120"/>
+                </a:rPr>
+                <a:t>Planista dostaje mapę kosztów i bieżącą pozycję robota z estymatora stanu</a:t>
+              </a:r>
+              <a:endParaRPr lang="en-US" sz="1600" dirty="0"/>
+            </a:p>
+          </p:txBody>
+        </p:sp>
+        <p:sp>
+          <p:nvSpPr>
+            <p:cNvPr id="10" name="Shape 8"/>
+            <p:cNvSpPr/>
+            <p:nvPr/>
+          </p:nvSpPr>
+          <p:spPr>
+            <a:xfrm>
+              <a:off x="4709160" y="1143000"/>
+              <a:ext cx="4160520" cy="1691640"/>
+            </a:xfrm>
+            <a:prstGeom prst="rect">
+              <a:avLst/>
+            </a:prstGeom>
             <a:solidFill>
-              <a:srgbClr val="E2EBF3"/>
+              <a:srgbClr val="FFFFFF"/>
             </a:solidFill>
-            <a:prstDash val="solid"/>
-          </a:ln>
-          <a:effectLst>
-            <a:outerShdw blurRad="76200" dist="25400" dir="8100000" algn="bl" rotWithShape="0">
-              <a:srgbClr val="000000">
-                <a:alpha val="12000"/>
-              </a:srgbClr>
-            </a:outerShdw>
-          </a:effectLst>
-        </p:spPr>
-      </p:sp>
-      <p:sp>
-        <p:nvSpPr>
-          <p:cNvPr id="11" name="Shape 9"/>
-          <p:cNvSpPr/>
-          <p:nvPr/>
-        </p:nvSpPr>
-        <p:spPr>
-          <a:xfrm>
-            <a:off x="4709160" y="1143000"/>
-            <a:ext cx="4160520" cy="54864"/>
-          </a:xfrm>
-          <a:prstGeom prst="rect">
-            <a:avLst/>
-          </a:prstGeom>
-          <a:solidFill>
-            <a:srgbClr val="0077A8"/>
-          </a:solidFill>
-          <a:ln w="12700">
+            <a:ln w="12700">
+              <a:solidFill>
+                <a:srgbClr val="E2EBF3"/>
+              </a:solidFill>
+              <a:prstDash val="solid"/>
+            </a:ln>
+            <a:effectLst>
+              <a:outerShdw blurRad="76200" dist="25400" dir="8100000" algn="bl" rotWithShape="0">
+                <a:srgbClr val="000000">
+                  <a:alpha val="12000"/>
+                </a:srgbClr>
+              </a:outerShdw>
+            </a:effectLst>
+          </p:spPr>
+        </p:sp>
+        <p:sp>
+          <p:nvSpPr>
+            <p:cNvPr id="11" name="Shape 9"/>
+            <p:cNvSpPr/>
+            <p:nvPr/>
+          </p:nvSpPr>
+          <p:spPr>
+            <a:xfrm>
+              <a:off x="4709160" y="1143000"/>
+              <a:ext cx="4160520" cy="54864"/>
+            </a:xfrm>
+            <a:prstGeom prst="rect">
+              <a:avLst/>
+            </a:prstGeom>
             <a:solidFill>
               <a:srgbClr val="0077A8"/>
             </a:solidFill>
-            <a:prstDash val="solid"/>
-          </a:ln>
-        </p:spPr>
-      </p:sp>
-      <p:sp>
-        <p:nvSpPr>
-          <p:cNvPr id="12" name="Text 10"/>
-          <p:cNvSpPr/>
-          <p:nvPr/>
-        </p:nvSpPr>
-        <p:spPr>
-          <a:xfrm>
-            <a:off x="4818888" y="1234440"/>
-            <a:ext cx="3941064" cy="642823"/>
-          </a:xfrm>
-          <a:prstGeom prst="rect">
-            <a:avLst/>
-          </a:prstGeom>
-          <a:noFill/>
-          <a:ln/>
-        </p:spPr>
-        <p:txBody>
-          <a:bodyPr wrap="square" lIns="0" tIns="0" rIns="0" bIns="0" rtlCol="0" anchor="ctr"/>
-          <a:lstStyle/>
-          <a:p>
-            <a:pPr marL="0" indent="0">
-              <a:buNone/>
-            </a:pPr>
-            <a:r>
-              <a:rPr lang="en-US" sz="2000" b="1" dirty="0">
-                <a:solidFill>
-                  <a:srgbClr val="0D1B2A"/>
-                </a:solidFill>
-                <a:latin typeface="Trebuchet MS" pitchFamily="34" charset="0"/>
-                <a:ea typeface="Trebuchet MS" pitchFamily="34" charset="-122"/>
-                <a:cs typeface="Trebuchet MS" pitchFamily="34" charset="-120"/>
-              </a:rPr>
-              <a:t>Wejście: cel misji</a:t>
-            </a:r>
-            <a:endParaRPr lang="en-US" sz="2000" dirty="0"/>
-          </a:p>
-        </p:txBody>
-      </p:sp>
-      <p:sp>
-        <p:nvSpPr>
-          <p:cNvPr id="13" name="Text 11"/>
-          <p:cNvSpPr/>
-          <p:nvPr/>
-        </p:nvSpPr>
-        <p:spPr>
-          <a:xfrm>
-            <a:off x="4818888" y="1853489"/>
-            <a:ext cx="3941064" cy="930402"/>
-          </a:xfrm>
-          <a:prstGeom prst="rect">
-            <a:avLst/>
-          </a:prstGeom>
-          <a:noFill/>
-          <a:ln/>
-        </p:spPr>
-        <p:txBody>
-          <a:bodyPr wrap="square" lIns="0" tIns="0" rIns="0" bIns="0" rtlCol="0" anchor="ctr"/>
-          <a:lstStyle/>
-          <a:p>
-            <a:pPr marL="0" indent="0">
-              <a:buNone/>
-            </a:pPr>
-            <a:r>
-              <a:rPr lang="en-US" sz="1600" dirty="0">
-                <a:solidFill>
-                  <a:srgbClr val="475569"/>
-                </a:solidFill>
-                <a:latin typeface="Calibri" pitchFamily="34" charset="0"/>
-                <a:ea typeface="Calibri" pitchFamily="34" charset="-122"/>
-                <a:cs typeface="Calibri" pitchFamily="34" charset="-120"/>
-              </a:rPr>
-              <a:t>Punkt docelowy lub sekwencja celów pośrednich z modułu zarządzania misją</a:t>
-            </a:r>
-            <a:endParaRPr lang="en-US" sz="1600" dirty="0"/>
-          </a:p>
-        </p:txBody>
-      </p:sp>
-      <p:sp>
-        <p:nvSpPr>
-          <p:cNvPr id="14" name="Shape 12"/>
-          <p:cNvSpPr/>
-          <p:nvPr/>
-        </p:nvSpPr>
-        <p:spPr>
-          <a:xfrm>
-            <a:off x="274320" y="2971800"/>
-            <a:ext cx="4160520" cy="1691640"/>
-          </a:xfrm>
-          <a:prstGeom prst="rect">
-            <a:avLst/>
-          </a:prstGeom>
-          <a:solidFill>
-            <a:srgbClr val="FFFFFF"/>
-          </a:solidFill>
-          <a:ln w="12700">
+            <a:ln w="12700">
+              <a:solidFill>
+                <a:srgbClr val="0077A8"/>
+              </a:solidFill>
+              <a:prstDash val="solid"/>
+            </a:ln>
+          </p:spPr>
+        </p:sp>
+        <p:sp>
+          <p:nvSpPr>
+            <p:cNvPr id="12" name="Text 10"/>
+            <p:cNvSpPr/>
+            <p:nvPr/>
+          </p:nvSpPr>
+          <p:spPr>
+            <a:xfrm>
+              <a:off x="4818888" y="1234440"/>
+              <a:ext cx="3941064" cy="642823"/>
+            </a:xfrm>
+            <a:prstGeom prst="rect">
+              <a:avLst/>
+            </a:prstGeom>
+            <a:noFill/>
+            <a:ln/>
+          </p:spPr>
+          <p:txBody>
+            <a:bodyPr wrap="square" lIns="0" tIns="0" rIns="0" bIns="0" rtlCol="0" anchor="ctr"/>
+            <a:lstStyle/>
+            <a:p>
+              <a:pPr marL="0" indent="0">
+                <a:buNone/>
+              </a:pPr>
+              <a:r>
+                <a:rPr lang="en-US" sz="2000" b="1" dirty="0">
+                  <a:solidFill>
+                    <a:srgbClr val="0D1B2A"/>
+                  </a:solidFill>
+                  <a:latin typeface="Trebuchet MS" pitchFamily="34" charset="0"/>
+                  <a:ea typeface="Trebuchet MS" pitchFamily="34" charset="-122"/>
+                  <a:cs typeface="Trebuchet MS" pitchFamily="34" charset="-120"/>
+                </a:rPr>
+                <a:t>Wejście: </a:t>
+              </a:r>
+              <a:r>
+                <a:rPr lang="en-US" sz="2000" dirty="0">
+                  <a:solidFill>
+                    <a:srgbClr val="0D1B2A"/>
+                  </a:solidFill>
+                  <a:latin typeface="Trebuchet MS" pitchFamily="34" charset="0"/>
+                  <a:ea typeface="Trebuchet MS" pitchFamily="34" charset="-122"/>
+                  <a:cs typeface="Trebuchet MS" pitchFamily="34" charset="-120"/>
+                </a:rPr>
+                <a:t>cel misji</a:t>
+              </a:r>
+              <a:endParaRPr lang="en-US" sz="2000" dirty="0"/>
+            </a:p>
+          </p:txBody>
+        </p:sp>
+        <p:sp>
+          <p:nvSpPr>
+            <p:cNvPr id="13" name="Text 11"/>
+            <p:cNvSpPr/>
+            <p:nvPr/>
+          </p:nvSpPr>
+          <p:spPr>
+            <a:xfrm>
+              <a:off x="4818888" y="1853489"/>
+              <a:ext cx="3941064" cy="930402"/>
+            </a:xfrm>
+            <a:prstGeom prst="rect">
+              <a:avLst/>
+            </a:prstGeom>
+            <a:noFill/>
+            <a:ln/>
+          </p:spPr>
+          <p:txBody>
+            <a:bodyPr wrap="square" lIns="0" tIns="0" rIns="0" bIns="0" rtlCol="0" anchor="ctr"/>
+            <a:lstStyle/>
+            <a:p>
+              <a:pPr marL="0" indent="0">
+                <a:buNone/>
+              </a:pPr>
+              <a:r>
+                <a:rPr lang="en-US" sz="1600" dirty="0">
+                  <a:solidFill>
+                    <a:srgbClr val="475569"/>
+                  </a:solidFill>
+                  <a:latin typeface="Calibri" pitchFamily="34" charset="0"/>
+                  <a:ea typeface="Calibri" pitchFamily="34" charset="-122"/>
+                  <a:cs typeface="Calibri" pitchFamily="34" charset="-120"/>
+                </a:rPr>
+                <a:t>Punkt docelowy lub sekwencja celów pośrednich z modułu zarządzania misją</a:t>
+              </a:r>
+              <a:endParaRPr lang="en-US" sz="1600" dirty="0"/>
+            </a:p>
+          </p:txBody>
+        </p:sp>
+        <p:sp>
+          <p:nvSpPr>
+            <p:cNvPr id="14" name="Shape 12"/>
+            <p:cNvSpPr/>
+            <p:nvPr/>
+          </p:nvSpPr>
+          <p:spPr>
+            <a:xfrm>
+              <a:off x="274320" y="2971800"/>
+              <a:ext cx="4160520" cy="1691640"/>
+            </a:xfrm>
+            <a:prstGeom prst="rect">
+              <a:avLst/>
+            </a:prstGeom>
             <a:solidFill>
-              <a:srgbClr val="E2EBF3"/>
+              <a:srgbClr val="FFFFFF"/>
             </a:solidFill>
-            <a:prstDash val="solid"/>
-          </a:ln>
-          <a:effectLst>
-            <a:outerShdw blurRad="76200" dist="25400" dir="8100000" algn="bl" rotWithShape="0">
-              <a:srgbClr val="000000">
-                <a:alpha val="12000"/>
-              </a:srgbClr>
-            </a:outerShdw>
-          </a:effectLst>
-        </p:spPr>
-      </p:sp>
-      <p:sp>
-        <p:nvSpPr>
-          <p:cNvPr id="15" name="Shape 13"/>
-          <p:cNvSpPr/>
-          <p:nvPr/>
-        </p:nvSpPr>
-        <p:spPr>
-          <a:xfrm>
-            <a:off x="274320" y="2971800"/>
-            <a:ext cx="4160520" cy="54864"/>
-          </a:xfrm>
-          <a:prstGeom prst="rect">
-            <a:avLst/>
-          </a:prstGeom>
-          <a:solidFill>
-            <a:srgbClr val="0077A8"/>
-          </a:solidFill>
-          <a:ln w="12700">
+            <a:ln w="12700">
+              <a:solidFill>
+                <a:srgbClr val="E2EBF3"/>
+              </a:solidFill>
+              <a:prstDash val="solid"/>
+            </a:ln>
+            <a:effectLst>
+              <a:outerShdw blurRad="76200" dist="25400" dir="8100000" algn="bl" rotWithShape="0">
+                <a:srgbClr val="000000">
+                  <a:alpha val="12000"/>
+                </a:srgbClr>
+              </a:outerShdw>
+            </a:effectLst>
+          </p:spPr>
+        </p:sp>
+        <p:sp>
+          <p:nvSpPr>
+            <p:cNvPr id="15" name="Shape 13"/>
+            <p:cNvSpPr/>
+            <p:nvPr/>
+          </p:nvSpPr>
+          <p:spPr>
+            <a:xfrm>
+              <a:off x="274320" y="2971800"/>
+              <a:ext cx="4160520" cy="54864"/>
+            </a:xfrm>
+            <a:prstGeom prst="rect">
+              <a:avLst/>
+            </a:prstGeom>
             <a:solidFill>
               <a:srgbClr val="0077A8"/>
             </a:solidFill>
-            <a:prstDash val="solid"/>
-          </a:ln>
-        </p:spPr>
-      </p:sp>
-      <p:sp>
-        <p:nvSpPr>
-          <p:cNvPr id="16" name="Text 14"/>
-          <p:cNvSpPr/>
-          <p:nvPr/>
-        </p:nvSpPr>
-        <p:spPr>
-          <a:xfrm>
-            <a:off x="384048" y="3063240"/>
-            <a:ext cx="3941064" cy="642823"/>
-          </a:xfrm>
-          <a:prstGeom prst="rect">
-            <a:avLst/>
-          </a:prstGeom>
-          <a:noFill/>
-          <a:ln/>
-        </p:spPr>
-        <p:txBody>
-          <a:bodyPr wrap="square" lIns="0" tIns="0" rIns="0" bIns="0" rtlCol="0" anchor="ctr"/>
-          <a:lstStyle/>
-          <a:p>
-            <a:pPr marL="0" indent="0">
-              <a:buNone/>
-            </a:pPr>
-            <a:r>
-              <a:rPr lang="en-US" sz="2000" b="1" dirty="0">
-                <a:solidFill>
-                  <a:srgbClr val="0D1B2A"/>
-                </a:solidFill>
-                <a:latin typeface="Trebuchet MS" pitchFamily="34" charset="0"/>
-                <a:ea typeface="Trebuchet MS" pitchFamily="34" charset="-122"/>
-                <a:cs typeface="Trebuchet MS" pitchFamily="34" charset="-120"/>
-              </a:rPr>
-              <a:t>Wyjście: ścieżka globalna</a:t>
-            </a:r>
-            <a:endParaRPr lang="en-US" sz="2000" dirty="0"/>
-          </a:p>
-        </p:txBody>
-      </p:sp>
-      <p:sp>
-        <p:nvSpPr>
-          <p:cNvPr id="17" name="Text 15"/>
-          <p:cNvSpPr/>
-          <p:nvPr/>
-        </p:nvSpPr>
-        <p:spPr>
-          <a:xfrm>
-            <a:off x="384048" y="3682289"/>
-            <a:ext cx="3941064" cy="930402"/>
-          </a:xfrm>
-          <a:prstGeom prst="rect">
-            <a:avLst/>
-          </a:prstGeom>
-          <a:noFill/>
-          <a:ln/>
-        </p:spPr>
-        <p:txBody>
-          <a:bodyPr wrap="square" lIns="0" tIns="0" rIns="0" bIns="0" rtlCol="0" anchor="ctr"/>
-          <a:lstStyle/>
-          <a:p>
-            <a:pPr marL="0" indent="0">
-              <a:buNone/>
-            </a:pPr>
-            <a:r>
-              <a:rPr lang="en-US" sz="1600" dirty="0">
-                <a:solidFill>
-                  <a:srgbClr val="475569"/>
-                </a:solidFill>
-                <a:latin typeface="Calibri" pitchFamily="34" charset="0"/>
-                <a:ea typeface="Calibri" pitchFamily="34" charset="-122"/>
-                <a:cs typeface="Calibri" pitchFamily="34" charset="-120"/>
-              </a:rPr>
-              <a:t>Ciąg punktów w przestrzeni (x,y) lub (x,y,z) przekazywany do planisty lokalnego</a:t>
-            </a:r>
-            <a:endParaRPr lang="en-US" sz="1600" dirty="0"/>
-          </a:p>
-        </p:txBody>
-      </p:sp>
-      <p:sp>
-        <p:nvSpPr>
-          <p:cNvPr id="18" name="Shape 16"/>
-          <p:cNvSpPr/>
-          <p:nvPr/>
-        </p:nvSpPr>
-        <p:spPr>
-          <a:xfrm>
-            <a:off x="4709160" y="2971800"/>
-            <a:ext cx="4160520" cy="1691640"/>
-          </a:xfrm>
-          <a:prstGeom prst="rect">
-            <a:avLst/>
-          </a:prstGeom>
-          <a:solidFill>
-            <a:srgbClr val="FFFFFF"/>
-          </a:solidFill>
-          <a:ln w="12700">
+            <a:ln w="12700">
+              <a:solidFill>
+                <a:srgbClr val="0077A8"/>
+              </a:solidFill>
+              <a:prstDash val="solid"/>
+            </a:ln>
+          </p:spPr>
+        </p:sp>
+        <p:sp>
+          <p:nvSpPr>
+            <p:cNvPr id="16" name="Text 14"/>
+            <p:cNvSpPr/>
+            <p:nvPr/>
+          </p:nvSpPr>
+          <p:spPr>
+            <a:xfrm>
+              <a:off x="384048" y="3063240"/>
+              <a:ext cx="3941064" cy="642823"/>
+            </a:xfrm>
+            <a:prstGeom prst="rect">
+              <a:avLst/>
+            </a:prstGeom>
+            <a:noFill/>
+            <a:ln/>
+          </p:spPr>
+          <p:txBody>
+            <a:bodyPr wrap="square" lIns="0" tIns="0" rIns="0" bIns="0" rtlCol="0" anchor="ctr"/>
+            <a:lstStyle/>
+            <a:p>
+              <a:pPr marL="0" indent="0">
+                <a:buNone/>
+              </a:pPr>
+              <a:r>
+                <a:rPr lang="en-US" sz="2000" b="1" dirty="0">
+                  <a:solidFill>
+                    <a:srgbClr val="0D1B2A"/>
+                  </a:solidFill>
+                  <a:latin typeface="Trebuchet MS" pitchFamily="34" charset="0"/>
+                  <a:ea typeface="Trebuchet MS" pitchFamily="34" charset="-122"/>
+                  <a:cs typeface="Trebuchet MS" pitchFamily="34" charset="-120"/>
+                </a:rPr>
+                <a:t>Wyjście: </a:t>
+              </a:r>
+              <a:r>
+                <a:rPr lang="en-US" sz="2000" dirty="0">
+                  <a:solidFill>
+                    <a:srgbClr val="0D1B2A"/>
+                  </a:solidFill>
+                  <a:latin typeface="Trebuchet MS" pitchFamily="34" charset="0"/>
+                  <a:ea typeface="Trebuchet MS" pitchFamily="34" charset="-122"/>
+                  <a:cs typeface="Trebuchet MS" pitchFamily="34" charset="-120"/>
+                </a:rPr>
+                <a:t>ścieżka globalna</a:t>
+              </a:r>
+              <a:endParaRPr lang="en-US" sz="2000" dirty="0"/>
+            </a:p>
+          </p:txBody>
+        </p:sp>
+        <p:sp>
+          <p:nvSpPr>
+            <p:cNvPr id="17" name="Text 15"/>
+            <p:cNvSpPr/>
+            <p:nvPr/>
+          </p:nvSpPr>
+          <p:spPr>
+            <a:xfrm>
+              <a:off x="384048" y="3682289"/>
+              <a:ext cx="3941064" cy="930402"/>
+            </a:xfrm>
+            <a:prstGeom prst="rect">
+              <a:avLst/>
+            </a:prstGeom>
+            <a:noFill/>
+            <a:ln/>
+          </p:spPr>
+          <p:txBody>
+            <a:bodyPr wrap="square" lIns="0" tIns="0" rIns="0" bIns="0" rtlCol="0" anchor="ctr"/>
+            <a:lstStyle/>
+            <a:p>
+              <a:pPr marL="0" indent="0">
+                <a:buNone/>
+              </a:pPr>
+              <a:r>
+                <a:rPr lang="en-US" sz="1600" dirty="0">
+                  <a:solidFill>
+                    <a:srgbClr val="475569"/>
+                  </a:solidFill>
+                  <a:latin typeface="Calibri" pitchFamily="34" charset="0"/>
+                  <a:ea typeface="Calibri" pitchFamily="34" charset="-122"/>
+                  <a:cs typeface="Calibri" pitchFamily="34" charset="-120"/>
+                </a:rPr>
+                <a:t>Ciąg punktów w przestrzeni (x,y) lub (x,y,z) przekazywany do planisty lokalnego</a:t>
+              </a:r>
+              <a:endParaRPr lang="en-US" sz="1600" dirty="0"/>
+            </a:p>
+          </p:txBody>
+        </p:sp>
+        <p:sp>
+          <p:nvSpPr>
+            <p:cNvPr id="18" name="Shape 16"/>
+            <p:cNvSpPr/>
+            <p:nvPr/>
+          </p:nvSpPr>
+          <p:spPr>
+            <a:xfrm>
+              <a:off x="4709160" y="2971800"/>
+              <a:ext cx="4160520" cy="1691640"/>
+            </a:xfrm>
+            <a:prstGeom prst="rect">
+              <a:avLst/>
+            </a:prstGeom>
             <a:solidFill>
-              <a:srgbClr val="E2EBF3"/>
+              <a:srgbClr val="FFFFFF"/>
             </a:solidFill>
-            <a:prstDash val="solid"/>
-          </a:ln>
-          <a:effectLst>
-            <a:outerShdw blurRad="76200" dist="25400" dir="8100000" algn="bl" rotWithShape="0">
-              <a:srgbClr val="000000">
-                <a:alpha val="12000"/>
-              </a:srgbClr>
-            </a:outerShdw>
-          </a:effectLst>
-        </p:spPr>
-      </p:sp>
-      <p:sp>
-        <p:nvSpPr>
-          <p:cNvPr id="19" name="Shape 17"/>
-          <p:cNvSpPr/>
-          <p:nvPr/>
-        </p:nvSpPr>
-        <p:spPr>
-          <a:xfrm>
-            <a:off x="4709160" y="2971800"/>
-            <a:ext cx="4160520" cy="54864"/>
-          </a:xfrm>
-          <a:prstGeom prst="rect">
-            <a:avLst/>
-          </a:prstGeom>
-          <a:solidFill>
-            <a:srgbClr val="1A3550"/>
-          </a:solidFill>
-          <a:ln w="12700">
+            <a:ln w="12700">
+              <a:solidFill>
+                <a:srgbClr val="E2EBF3"/>
+              </a:solidFill>
+              <a:prstDash val="solid"/>
+            </a:ln>
+            <a:effectLst>
+              <a:outerShdw blurRad="76200" dist="25400" dir="8100000" algn="bl" rotWithShape="0">
+                <a:srgbClr val="000000">
+                  <a:alpha val="12000"/>
+                </a:srgbClr>
+              </a:outerShdw>
+            </a:effectLst>
+          </p:spPr>
+        </p:sp>
+        <p:sp>
+          <p:nvSpPr>
+            <p:cNvPr id="19" name="Shape 17"/>
+            <p:cNvSpPr/>
+            <p:nvPr/>
+          </p:nvSpPr>
+          <p:spPr>
+            <a:xfrm>
+              <a:off x="4709160" y="2971800"/>
+              <a:ext cx="4160520" cy="54864"/>
+            </a:xfrm>
+            <a:prstGeom prst="rect">
+              <a:avLst/>
+            </a:prstGeom>
             <a:solidFill>
               <a:srgbClr val="1A3550"/>
             </a:solidFill>
-            <a:prstDash val="solid"/>
-          </a:ln>
-        </p:spPr>
-      </p:sp>
-      <p:sp>
-        <p:nvSpPr>
-          <p:cNvPr id="20" name="Text 18"/>
-          <p:cNvSpPr/>
-          <p:nvPr/>
-        </p:nvSpPr>
-        <p:spPr>
-          <a:xfrm>
-            <a:off x="4818888" y="3063240"/>
-            <a:ext cx="3941064" cy="642823"/>
-          </a:xfrm>
-          <a:prstGeom prst="rect">
-            <a:avLst/>
-          </a:prstGeom>
-          <a:noFill/>
-          <a:ln/>
-        </p:spPr>
-        <p:txBody>
-          <a:bodyPr wrap="square" lIns="0" tIns="0" rIns="0" bIns="0" rtlCol="0" anchor="ctr"/>
-          <a:lstStyle/>
-          <a:p>
-            <a:pPr marL="0" indent="0">
-              <a:buNone/>
-            </a:pPr>
-            <a:r>
-              <a:rPr lang="en-US" sz="2000" b="1" dirty="0">
-                <a:solidFill>
-                  <a:srgbClr val="0D1B2A"/>
-                </a:solidFill>
-                <a:latin typeface="Trebuchet MS" pitchFamily="34" charset="0"/>
-                <a:ea typeface="Trebuchet MS" pitchFamily="34" charset="-122"/>
-                <a:cs typeface="Trebuchet MS" pitchFamily="34" charset="-120"/>
-              </a:rPr>
-              <a:t>Wyjście: cost map</a:t>
-            </a:r>
-            <a:endParaRPr lang="en-US" sz="2000" dirty="0"/>
-          </a:p>
-        </p:txBody>
-      </p:sp>
-      <p:sp>
-        <p:nvSpPr>
-          <p:cNvPr id="21" name="Text 19"/>
-          <p:cNvSpPr/>
-          <p:nvPr/>
-        </p:nvSpPr>
-        <p:spPr>
-          <a:xfrm>
-            <a:off x="4818888" y="3682289"/>
-            <a:ext cx="3941064" cy="930402"/>
-          </a:xfrm>
-          <a:prstGeom prst="rect">
-            <a:avLst/>
-          </a:prstGeom>
-          <a:noFill/>
-          <a:ln/>
-        </p:spPr>
-        <p:txBody>
-          <a:bodyPr wrap="square" lIns="0" tIns="0" rIns="0" bIns="0" rtlCol="0" anchor="ctr"/>
-          <a:lstStyle/>
-          <a:p>
-            <a:pPr marL="0" indent="0">
-              <a:buNone/>
-            </a:pPr>
-            <a:r>
-              <a:rPr lang="en-US" sz="1600" dirty="0">
-                <a:solidFill>
-                  <a:srgbClr val="475569"/>
-                </a:solidFill>
-                <a:latin typeface="Calibri" pitchFamily="34" charset="0"/>
-                <a:ea typeface="Calibri" pitchFamily="34" charset="-122"/>
-                <a:cs typeface="Calibri" pitchFamily="34" charset="-120"/>
-              </a:rPr>
-              <a:t>Mapa kosztów przesyłana do lokalnego planisty jako mapa naviagacyjna</a:t>
-            </a:r>
-            <a:endParaRPr lang="en-US" sz="1600" dirty="0"/>
-          </a:p>
-        </p:txBody>
-      </p:sp>
+            <a:ln w="12700">
+              <a:solidFill>
+                <a:srgbClr val="1A3550"/>
+              </a:solidFill>
+              <a:prstDash val="solid"/>
+            </a:ln>
+          </p:spPr>
+        </p:sp>
+        <p:sp>
+          <p:nvSpPr>
+            <p:cNvPr id="20" name="Text 18"/>
+            <p:cNvSpPr/>
+            <p:nvPr/>
+          </p:nvSpPr>
+          <p:spPr>
+            <a:xfrm>
+              <a:off x="4818888" y="3063240"/>
+              <a:ext cx="3941064" cy="642823"/>
+            </a:xfrm>
+            <a:prstGeom prst="rect">
+              <a:avLst/>
+            </a:prstGeom>
+            <a:noFill/>
+            <a:ln/>
+          </p:spPr>
+          <p:txBody>
+            <a:bodyPr wrap="square" lIns="0" tIns="0" rIns="0" bIns="0" rtlCol="0" anchor="ctr"/>
+            <a:lstStyle/>
+            <a:p>
+              <a:pPr marL="0" indent="0">
+                <a:buNone/>
+              </a:pPr>
+              <a:r>
+                <a:rPr lang="en-US" sz="2000" b="1" dirty="0">
+                  <a:solidFill>
+                    <a:srgbClr val="0D1B2A"/>
+                  </a:solidFill>
+                  <a:latin typeface="Trebuchet MS" pitchFamily="34" charset="0"/>
+                  <a:ea typeface="Trebuchet MS" pitchFamily="34" charset="-122"/>
+                  <a:cs typeface="Trebuchet MS" pitchFamily="34" charset="-120"/>
+                </a:rPr>
+                <a:t>Wyjście: </a:t>
+              </a:r>
+              <a:r>
+                <a:rPr lang="en-US" sz="2000" dirty="0">
+                  <a:solidFill>
+                    <a:srgbClr val="0D1B2A"/>
+                  </a:solidFill>
+                  <a:latin typeface="Trebuchet MS" pitchFamily="34" charset="0"/>
+                  <a:ea typeface="Trebuchet MS" pitchFamily="34" charset="-122"/>
+                  <a:cs typeface="Trebuchet MS" pitchFamily="34" charset="-120"/>
+                </a:rPr>
+                <a:t>cost map</a:t>
+              </a:r>
+              <a:endParaRPr lang="en-US" sz="2000" dirty="0"/>
+            </a:p>
+          </p:txBody>
+        </p:sp>
+        <p:sp>
+          <p:nvSpPr>
+            <p:cNvPr id="21" name="Text 19"/>
+            <p:cNvSpPr/>
+            <p:nvPr/>
+          </p:nvSpPr>
+          <p:spPr>
+            <a:xfrm>
+              <a:off x="4818888" y="3682289"/>
+              <a:ext cx="3941064" cy="930402"/>
+            </a:xfrm>
+            <a:prstGeom prst="rect">
+              <a:avLst/>
+            </a:prstGeom>
+            <a:noFill/>
+            <a:ln/>
+          </p:spPr>
+          <p:txBody>
+            <a:bodyPr wrap="square" lIns="0" tIns="0" rIns="0" bIns="0" rtlCol="0" anchor="ctr"/>
+            <a:lstStyle/>
+            <a:p>
+              <a:pPr marL="0" indent="0">
+                <a:buNone/>
+              </a:pPr>
+              <a:r>
+                <a:rPr lang="en-US" sz="1600" dirty="0">
+                  <a:solidFill>
+                    <a:srgbClr val="475569"/>
+                  </a:solidFill>
+                  <a:latin typeface="Calibri" pitchFamily="34" charset="0"/>
+                  <a:ea typeface="Calibri" pitchFamily="34" charset="-122"/>
+                  <a:cs typeface="Calibri" pitchFamily="34" charset="-120"/>
+                </a:rPr>
+                <a:t>Mapa kosztów przesyłana do lokalnego planisty jako mapa naviagacyjna</a:t>
+              </a:r>
+              <a:endParaRPr lang="en-US" sz="1600" dirty="0"/>
+            </a:p>
+          </p:txBody>
+        </p:sp>
+      </p:grpSp>
     </p:spTree>
   </p:cSld>
   <p:clrMapOvr>
@@ -31323,7 +32992,7 @@
               <a:buNone/>
             </a:pPr>
             <a:r>
-              <a:rPr lang="en-US" sz="2800" b="1" dirty="0">
+              <a:rPr lang="en-US" sz="2400" b="1" dirty="0">
                 <a:solidFill>
                   <a:srgbClr val="FFFFFF"/>
                 </a:solidFill>
@@ -31331,9 +33000,42 @@
                 <a:ea typeface="Trebuchet MS" pitchFamily="34" charset="-122"/>
                 <a:cs typeface="Trebuchet MS" pitchFamily="34" charset="-120"/>
               </a:rPr>
-              <a:t>Problem planowania ścieżki – formalizacja</a:t>
-            </a:r>
-            <a:endParaRPr lang="en-US" sz="2800" dirty="0"/>
+              <a:t>Problem </a:t>
+            </a:r>
+            <a:r>
+              <a:rPr lang="en-US" sz="2400" b="1" dirty="0" err="1">
+                <a:solidFill>
+                  <a:srgbClr val="FFFFFF"/>
+                </a:solidFill>
+                <a:latin typeface="Trebuchet MS" pitchFamily="34" charset="0"/>
+                <a:ea typeface="Trebuchet MS" pitchFamily="34" charset="-122"/>
+                <a:cs typeface="Trebuchet MS" pitchFamily="34" charset="-120"/>
+              </a:rPr>
+              <a:t>planowania</a:t>
+            </a:r>
+            <a:r>
+              <a:rPr lang="en-US" sz="2400" b="1" dirty="0">
+                <a:solidFill>
+                  <a:srgbClr val="FFFFFF"/>
+                </a:solidFill>
+                <a:latin typeface="Trebuchet MS" pitchFamily="34" charset="0"/>
+                <a:ea typeface="Trebuchet MS" pitchFamily="34" charset="-122"/>
+                <a:cs typeface="Trebuchet MS" pitchFamily="34" charset="-120"/>
+              </a:rPr>
+              <a:t> </a:t>
+            </a:r>
+            <a:r>
+              <a:rPr lang="en-US" sz="2400" b="1" dirty="0" err="1" smtClean="0">
+                <a:solidFill>
+                  <a:srgbClr val="FFFFFF"/>
+                </a:solidFill>
+                <a:latin typeface="Trebuchet MS" pitchFamily="34" charset="0"/>
+                <a:ea typeface="Trebuchet MS" pitchFamily="34" charset="-122"/>
+                <a:cs typeface="Trebuchet MS" pitchFamily="34" charset="-120"/>
+              </a:rPr>
+              <a:t>ścieżki</a:t>
+            </a:r>
+            <a:endParaRPr lang="en-US" sz="2400" dirty="0"/>
           </a:p>
         </p:txBody>
       </p:sp>
@@ -31346,7 +33048,7 @@
         <p:spPr>
           <a:xfrm>
             <a:off x="274320" y="1097280"/>
-            <a:ext cx="8595360" cy="3749040"/>
+            <a:ext cx="8595360" cy="2847373"/>
           </a:xfrm>
           <a:prstGeom prst="rect">
             <a:avLst/>
@@ -31377,8 +33079,8 @@
         </p:nvSpPr>
         <p:spPr>
           <a:xfrm>
-            <a:off x="457200" y="1188720"/>
-            <a:ext cx="8229600" cy="3520440"/>
+            <a:off x="457200" y="1158984"/>
+            <a:ext cx="8229600" cy="2755933"/>
           </a:xfrm>
           <a:prstGeom prst="rect">
             <a:avLst/>
@@ -31387,7 +33089,9 @@
           <a:ln/>
         </p:spPr>
         <p:txBody>
-          <a:bodyPr wrap="square" lIns="127000" tIns="127000" rIns="127000" bIns="127000" rtlCol="0" anchor="t"/>
+          <a:bodyPr wrap="square" lIns="127000" tIns="0" rIns="127000" bIns="36000" rtlCol="0" anchor="t">
+            <a:spAutoFit/>
+          </a:bodyPr>
           <a:lstStyle/>
           <a:p>
             <a:pPr marL="144000" indent="-144000">
@@ -31417,9 +33121,77 @@
                 <a:ea typeface="Calibri" pitchFamily="34" charset="-122"/>
                 <a:cs typeface="Calibri" pitchFamily="34" charset="-120"/>
               </a:rPr>
-              <a:t>: zbiór wszystkich dopuszczalnych konfiguracji robota C_free ⊆ C</a:t>
-            </a:r>
-            <a:endParaRPr lang="en-US" sz="1600" dirty="0"/>
+              <a:t>: zbiór wszystkich dopuszczalnych konfiguracji </a:t>
+            </a:r>
+            <a:r>
+              <a:rPr lang="en-US" sz="1600" dirty="0" err="1">
+                <a:solidFill>
+                  <a:srgbClr val="0D1B2A"/>
+                </a:solidFill>
+                <a:latin typeface="Calibri" pitchFamily="34" charset="0"/>
+                <a:ea typeface="Calibri" pitchFamily="34" charset="-122"/>
+                <a:cs typeface="Calibri" pitchFamily="34" charset="-120"/>
+              </a:rPr>
+              <a:t>robota</a:t>
+            </a:r>
+            <a:r>
+              <a:rPr lang="en-US" sz="1600" dirty="0">
+                <a:solidFill>
+                  <a:srgbClr val="0D1B2A"/>
+                </a:solidFill>
+                <a:latin typeface="Calibri" pitchFamily="34" charset="0"/>
+                <a:ea typeface="Calibri" pitchFamily="34" charset="-122"/>
+                <a:cs typeface="Calibri" pitchFamily="34" charset="-120"/>
+              </a:rPr>
+              <a:t> </a:t>
+            </a:r>
+            <a:r>
+              <a:rPr lang="en-US" sz="1600" b="1" dirty="0" err="1" smtClean="0">
+                <a:solidFill>
+                  <a:srgbClr val="0D1B2A"/>
+                </a:solidFill>
+                <a:latin typeface="Georgia Pro Cond" panose="02040506050405020303" pitchFamily="18" charset="0"/>
+                <a:ea typeface="Calibri" pitchFamily="34" charset="-122"/>
+                <a:cs typeface="Calibri" pitchFamily="34" charset="-120"/>
+              </a:rPr>
+              <a:t>C</a:t>
+            </a:r>
+            <a:r>
+              <a:rPr lang="en-US" sz="1600" b="1" baseline="-25000" dirty="0" err="1" smtClean="0">
+                <a:solidFill>
+                  <a:srgbClr val="0D1B2A"/>
+                </a:solidFill>
+                <a:latin typeface="Georgia Pro Cond" panose="02040506050405020303" pitchFamily="18" charset="0"/>
+                <a:ea typeface="Calibri" pitchFamily="34" charset="-122"/>
+                <a:cs typeface="Calibri" pitchFamily="34" charset="-120"/>
+              </a:rPr>
+              <a:t>free</a:t>
+            </a:r>
+            <a:r>
+              <a:rPr lang="en-US" sz="1600" b="1" dirty="0" smtClean="0">
+                <a:solidFill>
+                  <a:srgbClr val="0D1B2A"/>
+                </a:solidFill>
+                <a:latin typeface="Georgia Pro Cond" panose="02040506050405020303" pitchFamily="18" charset="0"/>
+                <a:ea typeface="Calibri" pitchFamily="34" charset="-122"/>
+                <a:cs typeface="Calibri" pitchFamily="34" charset="-120"/>
+              </a:rPr>
+              <a:t> </a:t>
+            </a:r>
+            <a:r>
+              <a:rPr lang="en-US" sz="1600" b="1" dirty="0">
+                <a:solidFill>
+                  <a:srgbClr val="0D1B2A"/>
+                </a:solidFill>
+                <a:latin typeface="Georgia Pro Cond" panose="02040506050405020303" pitchFamily="18" charset="0"/>
+                <a:ea typeface="Calibri" pitchFamily="34" charset="-122"/>
+                <a:cs typeface="Calibri" pitchFamily="34" charset="-120"/>
+              </a:rPr>
+              <a:t>⊆ C</a:t>
+            </a:r>
+            <a:endParaRPr lang="en-US" sz="1600" b="1" dirty="0">
+              <a:latin typeface="Georgia Pro Cond" panose="02040506050405020303" pitchFamily="18" charset="0"/>
+            </a:endParaRPr>
           </a:p>
           <a:p>
             <a:pPr marL="601200" lvl="1" indent="-144000">
@@ -31438,10 +33210,10 @@
                 <a:ea typeface="Calibri" pitchFamily="34" charset="-122"/>
                 <a:cs typeface="Calibri" pitchFamily="34" charset="-120"/>
               </a:rPr>
-              <a:t>Stan początkowy </a:t>
-            </a:r>
-            <a:r>
-              <a:rPr lang="en-US" sz="1600" dirty="0">
+              <a:t>Stan </a:t>
+            </a:r>
+            <a:r>
+              <a:rPr lang="en-US" sz="1600" b="1" dirty="0" err="1">
                 <a:solidFill>
                   <a:srgbClr val="0D1B2A"/>
                 </a:solidFill>
@@ -31449,7 +33221,73 @@
                 <a:ea typeface="Calibri" pitchFamily="34" charset="-122"/>
                 <a:cs typeface="Calibri" pitchFamily="34" charset="-120"/>
               </a:rPr>
-              <a:t>q_start: aktualna pozycja i orientacja robota w mapie</a:t>
+              <a:t>początkowy</a:t>
+            </a:r>
+            <a:r>
+              <a:rPr lang="en-US" sz="1600" b="1" dirty="0">
+                <a:solidFill>
+                  <a:srgbClr val="0D1B2A"/>
+                </a:solidFill>
+                <a:latin typeface="Calibri" pitchFamily="34" charset="0"/>
+                <a:ea typeface="Calibri" pitchFamily="34" charset="-122"/>
+                <a:cs typeface="Calibri" pitchFamily="34" charset="-120"/>
+              </a:rPr>
+              <a:t> </a:t>
+            </a:r>
+            <a:r>
+              <a:rPr lang="en-US" sz="1600" b="1" dirty="0" err="1" smtClean="0">
+                <a:solidFill>
+                  <a:srgbClr val="0D1B2A"/>
+                </a:solidFill>
+                <a:latin typeface="Georgia Pro Cond" panose="02040506050405020303" pitchFamily="18" charset="0"/>
+                <a:ea typeface="Calibri" pitchFamily="34" charset="-122"/>
+                <a:cs typeface="Calibri" pitchFamily="34" charset="-120"/>
+              </a:rPr>
+              <a:t>q</a:t>
+            </a:r>
+            <a:r>
+              <a:rPr lang="en-US" sz="1600" b="1" baseline="-25000" dirty="0" err="1" smtClean="0">
+                <a:solidFill>
+                  <a:srgbClr val="0D1B2A"/>
+                </a:solidFill>
+                <a:latin typeface="Georgia Pro Cond" panose="02040506050405020303" pitchFamily="18" charset="0"/>
+                <a:ea typeface="Calibri" pitchFamily="34" charset="-122"/>
+                <a:cs typeface="Calibri" pitchFamily="34" charset="-120"/>
+              </a:rPr>
+              <a:t>start</a:t>
+            </a:r>
+            <a:r>
+              <a:rPr lang="pl-PL" sz="1600" b="1" baseline="-25000" dirty="0" smtClean="0">
+                <a:solidFill>
+                  <a:srgbClr val="0D1B2A"/>
+                </a:solidFill>
+                <a:latin typeface="Georgia Pro Cond" panose="02040506050405020303" pitchFamily="18" charset="0"/>
+                <a:ea typeface="Calibri" pitchFamily="34" charset="-122"/>
+                <a:cs typeface="Calibri" pitchFamily="34" charset="-120"/>
+              </a:rPr>
+              <a:t> </a:t>
+            </a:r>
+            <a:r>
+              <a:rPr lang="en-US" sz="1600" dirty="0" smtClean="0">
+                <a:solidFill>
+                  <a:srgbClr val="0D1B2A"/>
+                </a:solidFill>
+                <a:latin typeface="Calibri" pitchFamily="34" charset="0"/>
+                <a:ea typeface="Calibri" pitchFamily="34" charset="-122"/>
+                <a:cs typeface="Calibri" pitchFamily="34" charset="-120"/>
+              </a:rPr>
+              <a:t>: </a:t>
+            </a:r>
+            <a:r>
+              <a:rPr lang="en-US" sz="1600" dirty="0">
+                <a:solidFill>
+                  <a:srgbClr val="0D1B2A"/>
+                </a:solidFill>
+                <a:latin typeface="Calibri" pitchFamily="34" charset="0"/>
+                <a:ea typeface="Calibri" pitchFamily="34" charset="-122"/>
+                <a:cs typeface="Calibri" pitchFamily="34" charset="-120"/>
+              </a:rPr>
+              <a:t>aktualna pozycja i orientacja robota w mapie</a:t>
             </a:r>
             <a:endParaRPr lang="en-US" sz="1600" dirty="0"/>
           </a:p>
@@ -31470,10 +33308,10 @@
                 <a:ea typeface="Calibri" pitchFamily="34" charset="-122"/>
                 <a:cs typeface="Calibri" pitchFamily="34" charset="-120"/>
               </a:rPr>
-              <a:t>Stan docelowy </a:t>
-            </a:r>
-            <a:r>
-              <a:rPr lang="en-US" sz="1600" dirty="0">
+              <a:t>Stan </a:t>
+            </a:r>
+            <a:r>
+              <a:rPr lang="en-US" sz="1600" b="1" dirty="0" err="1">
                 <a:solidFill>
                   <a:srgbClr val="0D1B2A"/>
                 </a:solidFill>
@@ -31481,7 +33319,73 @@
                 <a:ea typeface="Calibri" pitchFamily="34" charset="-122"/>
                 <a:cs typeface="Calibri" pitchFamily="34" charset="-120"/>
               </a:rPr>
-              <a:t>q_goal: żądana pozycja końcowa misji</a:t>
+              <a:t>docelowy</a:t>
+            </a:r>
+            <a:r>
+              <a:rPr lang="en-US" sz="1600" b="1" dirty="0">
+                <a:solidFill>
+                  <a:srgbClr val="0D1B2A"/>
+                </a:solidFill>
+                <a:latin typeface="Calibri" pitchFamily="34" charset="0"/>
+                <a:ea typeface="Calibri" pitchFamily="34" charset="-122"/>
+                <a:cs typeface="Calibri" pitchFamily="34" charset="-120"/>
+              </a:rPr>
+              <a:t> </a:t>
+            </a:r>
+            <a:r>
+              <a:rPr lang="en-US" sz="1600" b="1" dirty="0" err="1" smtClean="0">
+                <a:solidFill>
+                  <a:srgbClr val="0D1B2A"/>
+                </a:solidFill>
+                <a:latin typeface="Georgia Pro Cond" panose="02040506050405020303" pitchFamily="18" charset="0"/>
+                <a:ea typeface="Calibri" pitchFamily="34" charset="-122"/>
+                <a:cs typeface="Calibri" pitchFamily="34" charset="-120"/>
+              </a:rPr>
+              <a:t>q</a:t>
+            </a:r>
+            <a:r>
+              <a:rPr lang="en-US" sz="1600" b="1" baseline="-25000" dirty="0" err="1" smtClean="0">
+                <a:solidFill>
+                  <a:srgbClr val="0D1B2A"/>
+                </a:solidFill>
+                <a:latin typeface="Georgia Pro Cond" panose="02040506050405020303" pitchFamily="18" charset="0"/>
+                <a:ea typeface="Calibri" pitchFamily="34" charset="-122"/>
+                <a:cs typeface="Calibri" pitchFamily="34" charset="-120"/>
+              </a:rPr>
+              <a:t>goal</a:t>
+            </a:r>
+            <a:r>
+              <a:rPr lang="pl-PL" sz="1600" b="1" baseline="-25000" dirty="0" smtClean="0">
+                <a:solidFill>
+                  <a:srgbClr val="0D1B2A"/>
+                </a:solidFill>
+                <a:latin typeface="Georgia Pro Cond" panose="02040506050405020303" pitchFamily="18" charset="0"/>
+                <a:ea typeface="Calibri" pitchFamily="34" charset="-122"/>
+                <a:cs typeface="Calibri" pitchFamily="34" charset="-120"/>
+              </a:rPr>
+              <a:t> </a:t>
+            </a:r>
+            <a:r>
+              <a:rPr lang="en-US" sz="1600" dirty="0" smtClean="0">
+                <a:solidFill>
+                  <a:srgbClr val="0D1B2A"/>
+                </a:solidFill>
+                <a:latin typeface="Calibri" pitchFamily="34" charset="0"/>
+                <a:ea typeface="Calibri" pitchFamily="34" charset="-122"/>
+                <a:cs typeface="Calibri" pitchFamily="34" charset="-120"/>
+              </a:rPr>
+              <a:t>: </a:t>
+            </a:r>
+            <a:r>
+              <a:rPr lang="en-US" sz="1600" dirty="0">
+                <a:solidFill>
+                  <a:srgbClr val="0D1B2A"/>
+                </a:solidFill>
+                <a:latin typeface="Calibri" pitchFamily="34" charset="0"/>
+                <a:ea typeface="Calibri" pitchFamily="34" charset="-122"/>
+                <a:cs typeface="Calibri" pitchFamily="34" charset="-120"/>
+              </a:rPr>
+              <a:t>żądana pozycja końcowa misji</a:t>
             </a:r>
             <a:endParaRPr lang="en-US" sz="1600" dirty="0"/>
           </a:p>
@@ -31545,7 +33449,106 @@
                 <a:ea typeface="Calibri" pitchFamily="34" charset="-122"/>
                 <a:cs typeface="Calibri" pitchFamily="34" charset="-120"/>
               </a:rPr>
-              <a:t>: c(q_start, q_goal) minimalizowana wzdłuż ścieżki (czas, energia, ryzyko)</a:t>
+              <a:t>: </a:t>
+            </a:r>
+            <a:r>
+              <a:rPr lang="en-US" sz="1600" b="1" dirty="0" smtClean="0">
+                <a:solidFill>
+                  <a:srgbClr val="0D1B2A"/>
+                </a:solidFill>
+                <a:latin typeface="Georgia Pro Cond" panose="02040506050405020303" pitchFamily="18" charset="0"/>
+                <a:ea typeface="Calibri" pitchFamily="34" charset="-122"/>
+                <a:cs typeface="Calibri" pitchFamily="34" charset="-120"/>
+              </a:rPr>
+              <a:t>c(</a:t>
+            </a:r>
+            <a:r>
+              <a:rPr lang="en-US" sz="1600" b="1" dirty="0" err="1" smtClean="0">
+                <a:solidFill>
+                  <a:srgbClr val="0D1B2A"/>
+                </a:solidFill>
+                <a:latin typeface="Georgia Pro Cond" panose="02040506050405020303" pitchFamily="18" charset="0"/>
+                <a:ea typeface="Calibri" pitchFamily="34" charset="-122"/>
+                <a:cs typeface="Calibri" pitchFamily="34" charset="-120"/>
+              </a:rPr>
+              <a:t>q</a:t>
+            </a:r>
+            <a:r>
+              <a:rPr lang="en-US" sz="1600" b="1" baseline="-25000" dirty="0" err="1" smtClean="0">
+                <a:solidFill>
+                  <a:srgbClr val="0D1B2A"/>
+                </a:solidFill>
+                <a:latin typeface="Georgia Pro Cond" panose="02040506050405020303" pitchFamily="18" charset="0"/>
+                <a:ea typeface="Calibri" pitchFamily="34" charset="-122"/>
+                <a:cs typeface="Calibri" pitchFamily="34" charset="-120"/>
+              </a:rPr>
+              <a:t>start</a:t>
+            </a:r>
+            <a:r>
+              <a:rPr lang="en-US" sz="1600" b="1" dirty="0">
+                <a:solidFill>
+                  <a:srgbClr val="0D1B2A"/>
+                </a:solidFill>
+                <a:latin typeface="Georgia Pro Cond" panose="02040506050405020303" pitchFamily="18" charset="0"/>
+                <a:ea typeface="Calibri" pitchFamily="34" charset="-122"/>
+                <a:cs typeface="Calibri" pitchFamily="34" charset="-120"/>
+              </a:rPr>
+              <a:t>, </a:t>
+            </a:r>
+            <a:r>
+              <a:rPr lang="en-US" sz="1600" b="1" dirty="0" err="1" smtClean="0">
+                <a:solidFill>
+                  <a:srgbClr val="0D1B2A"/>
+                </a:solidFill>
+                <a:latin typeface="Georgia Pro Cond" panose="02040506050405020303" pitchFamily="18" charset="0"/>
+                <a:ea typeface="Calibri" pitchFamily="34" charset="-122"/>
+                <a:cs typeface="Calibri" pitchFamily="34" charset="-120"/>
+              </a:rPr>
+              <a:t>q</a:t>
+            </a:r>
+            <a:r>
+              <a:rPr lang="en-US" sz="1600" b="1" baseline="-25000" dirty="0" err="1" smtClean="0">
+                <a:solidFill>
+                  <a:srgbClr val="0D1B2A"/>
+                </a:solidFill>
+                <a:latin typeface="Georgia Pro Cond" panose="02040506050405020303" pitchFamily="18" charset="0"/>
+                <a:ea typeface="Calibri" pitchFamily="34" charset="-122"/>
+                <a:cs typeface="Calibri" pitchFamily="34" charset="-120"/>
+              </a:rPr>
+              <a:t>goal</a:t>
+            </a:r>
+            <a:r>
+              <a:rPr lang="en-US" sz="1600" b="1" dirty="0">
+                <a:solidFill>
+                  <a:srgbClr val="0D1B2A"/>
+                </a:solidFill>
+                <a:latin typeface="Georgia Pro Cond" panose="02040506050405020303" pitchFamily="18" charset="0"/>
+                <a:ea typeface="Calibri" pitchFamily="34" charset="-122"/>
+                <a:cs typeface="Calibri" pitchFamily="34" charset="-120"/>
+              </a:rPr>
+              <a:t>)</a:t>
+            </a:r>
+            <a:r>
+              <a:rPr lang="en-US" sz="1600" dirty="0">
+                <a:solidFill>
+                  <a:srgbClr val="0D1B2A"/>
+                </a:solidFill>
+                <a:latin typeface="Georgia Pro Cond" panose="02040506050405020303" pitchFamily="18" charset="0"/>
+                <a:ea typeface="Calibri" pitchFamily="34" charset="-122"/>
+                <a:cs typeface="Calibri" pitchFamily="34" charset="-120"/>
+              </a:rPr>
+              <a:t> </a:t>
+            </a:r>
+            <a:r>
+              <a:rPr lang="en-US" sz="1600" dirty="0">
+                <a:solidFill>
+                  <a:srgbClr val="0D1B2A"/>
+                </a:solidFill>
+                <a:latin typeface="Calibri" pitchFamily="34" charset="0"/>
+                <a:ea typeface="Calibri" pitchFamily="34" charset="-122"/>
+                <a:cs typeface="Calibri" pitchFamily="34" charset="-120"/>
+              </a:rPr>
+              <a:t>minimalizowana wzdłuż ścieżki (czas, energia, ryzyko)</a:t>
             </a:r>
             <a:endParaRPr lang="en-US" sz="1600" dirty="0"/>
           </a:p>
@@ -31577,9 +33580,121 @@
                 <a:ea typeface="Calibri" pitchFamily="34" charset="-122"/>
                 <a:cs typeface="Calibri" pitchFamily="34" charset="-120"/>
               </a:rPr>
-              <a:t>: ciąg γ : [0,1] → C_free taki, że γ(0)=q_start, γ(1)=q_goal</a:t>
-            </a:r>
-            <a:endParaRPr lang="en-US" sz="1600" dirty="0"/>
+              <a:t>: ciąg </a:t>
+            </a:r>
+            <a:r>
+              <a:rPr lang="en-US" sz="1600" b="1" dirty="0">
+                <a:solidFill>
+                  <a:srgbClr val="0D1B2A"/>
+                </a:solidFill>
+                <a:latin typeface="Georgia Pro Cond" panose="02040506050405020303" pitchFamily="18" charset="0"/>
+                <a:ea typeface="Calibri" pitchFamily="34" charset="-122"/>
+                <a:cs typeface="Calibri" pitchFamily="34" charset="-120"/>
+              </a:rPr>
+              <a:t>γ : [0,1] → </a:t>
+            </a:r>
+            <a:r>
+              <a:rPr lang="en-US" sz="1600" b="1" dirty="0" err="1" smtClean="0">
+                <a:solidFill>
+                  <a:srgbClr val="0D1B2A"/>
+                </a:solidFill>
+                <a:latin typeface="Georgia Pro Cond" panose="02040506050405020303" pitchFamily="18" charset="0"/>
+                <a:ea typeface="Calibri" pitchFamily="34" charset="-122"/>
+                <a:cs typeface="Calibri" pitchFamily="34" charset="-120"/>
+              </a:rPr>
+              <a:t>C</a:t>
+            </a:r>
+            <a:r>
+              <a:rPr lang="en-US" sz="1600" b="1" baseline="-25000" dirty="0" err="1" smtClean="0">
+                <a:solidFill>
+                  <a:srgbClr val="0D1B2A"/>
+                </a:solidFill>
+                <a:latin typeface="Georgia Pro Cond" panose="02040506050405020303" pitchFamily="18" charset="0"/>
+                <a:ea typeface="Calibri" pitchFamily="34" charset="-122"/>
+                <a:cs typeface="Calibri" pitchFamily="34" charset="-120"/>
+              </a:rPr>
+              <a:t>free</a:t>
+            </a:r>
+            <a:r>
+              <a:rPr lang="en-US" sz="1600" b="1" dirty="0" smtClean="0">
+                <a:solidFill>
+                  <a:srgbClr val="0D1B2A"/>
+                </a:solidFill>
+                <a:latin typeface="Georgia Pro Cond" panose="02040506050405020303" pitchFamily="18" charset="0"/>
+                <a:ea typeface="Calibri" pitchFamily="34" charset="-122"/>
+                <a:cs typeface="Calibri" pitchFamily="34" charset="-120"/>
+              </a:rPr>
+              <a:t> </a:t>
+            </a:r>
+            <a:r>
+              <a:rPr lang="en-US" sz="1600" b="1" dirty="0">
+                <a:solidFill>
+                  <a:srgbClr val="0D1B2A"/>
+                </a:solidFill>
+                <a:latin typeface="Georgia Pro Cond" panose="02040506050405020303" pitchFamily="18" charset="0"/>
+                <a:ea typeface="Calibri" pitchFamily="34" charset="-122"/>
+                <a:cs typeface="Calibri" pitchFamily="34" charset="-120"/>
+              </a:rPr>
+              <a:t>taki, że γ(0)=</a:t>
+            </a:r>
+            <a:r>
+              <a:rPr lang="en-US" sz="1600" b="1" dirty="0" err="1" smtClean="0">
+                <a:solidFill>
+                  <a:srgbClr val="0D1B2A"/>
+                </a:solidFill>
+                <a:latin typeface="Georgia Pro Cond" panose="02040506050405020303" pitchFamily="18" charset="0"/>
+                <a:ea typeface="Calibri" pitchFamily="34" charset="-122"/>
+                <a:cs typeface="Calibri" pitchFamily="34" charset="-120"/>
+              </a:rPr>
+              <a:t>q</a:t>
+            </a:r>
+            <a:r>
+              <a:rPr lang="en-US" sz="1600" b="1" baseline="-25000" dirty="0" err="1" smtClean="0">
+                <a:solidFill>
+                  <a:srgbClr val="0D1B2A"/>
+                </a:solidFill>
+                <a:latin typeface="Georgia Pro Cond" panose="02040506050405020303" pitchFamily="18" charset="0"/>
+                <a:ea typeface="Calibri" pitchFamily="34" charset="-122"/>
+                <a:cs typeface="Calibri" pitchFamily="34" charset="-120"/>
+              </a:rPr>
+              <a:t>start</a:t>
+            </a:r>
+            <a:r>
+              <a:rPr lang="en-US" sz="1600" b="1" dirty="0">
+                <a:solidFill>
+                  <a:srgbClr val="0D1B2A"/>
+                </a:solidFill>
+                <a:latin typeface="Georgia Pro Cond" panose="02040506050405020303" pitchFamily="18" charset="0"/>
+                <a:ea typeface="Calibri" pitchFamily="34" charset="-122"/>
+                <a:cs typeface="Calibri" pitchFamily="34" charset="-120"/>
+              </a:rPr>
+              <a:t>, γ(1)=</a:t>
+            </a:r>
+            <a:r>
+              <a:rPr lang="en-US" sz="1600" b="1" dirty="0" err="1" smtClean="0">
+                <a:solidFill>
+                  <a:srgbClr val="0D1B2A"/>
+                </a:solidFill>
+                <a:latin typeface="Georgia Pro Cond" panose="02040506050405020303" pitchFamily="18" charset="0"/>
+                <a:ea typeface="Calibri" pitchFamily="34" charset="-122"/>
+                <a:cs typeface="Calibri" pitchFamily="34" charset="-120"/>
+              </a:rPr>
+              <a:t>q</a:t>
+            </a:r>
+            <a:r>
+              <a:rPr lang="en-US" sz="1600" b="1" baseline="-25000" dirty="0" err="1" smtClean="0">
+                <a:solidFill>
+                  <a:srgbClr val="0D1B2A"/>
+                </a:solidFill>
+                <a:latin typeface="Georgia Pro Cond" panose="02040506050405020303" pitchFamily="18" charset="0"/>
+                <a:ea typeface="Calibri" pitchFamily="34" charset="-122"/>
+                <a:cs typeface="Calibri" pitchFamily="34" charset="-120"/>
+              </a:rPr>
+              <a:t>goal</a:t>
+            </a:r>
+            <a:endParaRPr lang="en-US" sz="1600" b="1" baseline="-25000" dirty="0">
+              <a:latin typeface="Georgia Pro Cond" panose="02040506050405020303" pitchFamily="18" charset="0"/>
+            </a:endParaRPr>
           </a:p>
           <a:p>
             <a:pPr marL="144000" indent="-144000">
@@ -31762,7 +33877,7 @@
               <a:buNone/>
             </a:pPr>
             <a:r>
-              <a:rPr lang="en-US" sz="2800" b="1" dirty="0">
+              <a:rPr lang="en-US" sz="2400" b="1" dirty="0">
                 <a:solidFill>
                   <a:srgbClr val="FFFFFF"/>
                 </a:solidFill>
@@ -31772,7 +33887,7 @@
               </a:rPr>
               <a:t>Reprezentacje grafowe środowiska</a:t>
             </a:r>
-            <a:endParaRPr lang="en-US" sz="2800" dirty="0"/>
+            <a:endParaRPr lang="en-US" sz="2400" dirty="0"/>
           </a:p>
         </p:txBody>
       </p:sp>
@@ -31785,7 +33900,7 @@
         <p:spPr>
           <a:xfrm>
             <a:off x="274320" y="1143000"/>
-            <a:ext cx="2651760" cy="3749040"/>
+            <a:ext cx="2651760" cy="2492298"/>
           </a:xfrm>
           <a:prstGeom prst="rect">
             <a:avLst/>
@@ -31880,8 +33995,8 @@
         </p:nvSpPr>
         <p:spPr>
           <a:xfrm>
-            <a:off x="384048" y="1627632"/>
-            <a:ext cx="2487168" cy="3154680"/>
+            <a:off x="317142" y="1627632"/>
+            <a:ext cx="2579202" cy="1692771"/>
           </a:xfrm>
           <a:prstGeom prst="rect">
             <a:avLst/>
@@ -31890,7 +34005,9 @@
           <a:ln/>
         </p:spPr>
         <p:txBody>
-          <a:bodyPr wrap="square" lIns="50800" tIns="76200" rIns="50800" bIns="50800" rtlCol="0" anchor="t"/>
+          <a:bodyPr wrap="square" lIns="50800" tIns="0" rIns="50800" bIns="0" rtlCol="0" anchor="t">
+            <a:spAutoFit/>
+          </a:bodyPr>
           <a:lstStyle/>
           <a:p>
             <a:pPr marL="144000" indent="-144000">
@@ -32008,7 +34125,7 @@
         <p:spPr>
           <a:xfrm>
             <a:off x="3154680" y="1143000"/>
-            <a:ext cx="2651760" cy="3749040"/>
+            <a:ext cx="2757698" cy="2492298"/>
           </a:xfrm>
           <a:prstGeom prst="rect">
             <a:avLst/>
@@ -32040,7 +34157,7 @@
         <p:spPr>
           <a:xfrm>
             <a:off x="3154680" y="1143000"/>
-            <a:ext cx="2651760" cy="411480"/>
+            <a:ext cx="2757698" cy="411480"/>
           </a:xfrm>
           <a:prstGeom prst="rect">
             <a:avLst/>
@@ -32103,8 +34220,8 @@
         </p:nvSpPr>
         <p:spPr>
           <a:xfrm>
-            <a:off x="3264408" y="1627632"/>
-            <a:ext cx="2487168" cy="3154680"/>
+            <a:off x="3175200" y="1627632"/>
+            <a:ext cx="2737178" cy="1815882"/>
           </a:xfrm>
           <a:prstGeom prst="rect">
             <a:avLst/>
@@ -32113,18 +34230,20 @@
           <a:ln/>
         </p:spPr>
         <p:txBody>
-          <a:bodyPr wrap="square" lIns="50800" tIns="76200" rIns="50800" bIns="50800" rtlCol="0" anchor="t"/>
+          <a:bodyPr wrap="square" lIns="50800" tIns="0" rIns="50800" bIns="0" rtlCol="0" anchor="t">
+            <a:spAutoFit/>
+          </a:bodyPr>
           <a:lstStyle/>
           <a:p>
             <a:pPr marL="144000" indent="-144000">
               <a:spcAft>
-                <a:spcPts val="1200"/>
+                <a:spcPts val="600"/>
               </a:spcAft>
               <a:buSzPct val="100000"/>
               <a:buChar char="•"/>
             </a:pPr>
             <a:r>
-              <a:rPr lang="en-US" sz="1400" dirty="0">
+              <a:rPr lang="en-US" sz="1400" spc="-40" dirty="0">
                 <a:solidFill>
                   <a:srgbClr val="0D1B2A"/>
                 </a:solidFill>
@@ -32134,18 +34253,18 @@
               </a:rPr>
               <a:t>Węzły = charakterystyczne miejsca</a:t>
             </a:r>
-            <a:endParaRPr lang="en-US" sz="1400" dirty="0"/>
+            <a:endParaRPr lang="en-US" sz="1400" spc="-40" dirty="0"/>
           </a:p>
           <a:p>
             <a:pPr marL="144000" indent="-144000">
               <a:spcAft>
-                <a:spcPts val="1200"/>
+                <a:spcPts val="600"/>
               </a:spcAft>
               <a:buSzPct val="100000"/>
               <a:buChar char="•"/>
             </a:pPr>
             <a:r>
-              <a:rPr lang="en-US" sz="1400" dirty="0">
+              <a:rPr lang="en-US" sz="1400" spc="-40" dirty="0">
                 <a:solidFill>
                   <a:srgbClr val="0D1B2A"/>
                 </a:solidFill>
@@ -32155,18 +34274,18 @@
               </a:rPr>
               <a:t>Krawędzie = przejazdy między nimi</a:t>
             </a:r>
-            <a:endParaRPr lang="en-US" sz="1400" dirty="0"/>
+            <a:endParaRPr lang="en-US" sz="1400" spc="-40" dirty="0"/>
           </a:p>
           <a:p>
             <a:pPr marL="144000" indent="-144000">
               <a:spcAft>
-                <a:spcPts val="1200"/>
+                <a:spcPts val="600"/>
               </a:spcAft>
               <a:buSzPct val="100000"/>
               <a:buChar char="•"/>
             </a:pPr>
             <a:r>
-              <a:rPr lang="en-US" sz="1400" dirty="0">
+              <a:rPr lang="en-US" sz="1400" spc="-40" dirty="0">
                 <a:solidFill>
                   <a:srgbClr val="0D1B2A"/>
                 </a:solidFill>
@@ -32176,18 +34295,18 @@
               </a:rPr>
               <a:t>Szybkie planowanie wysokopoziomowe</a:t>
             </a:r>
-            <a:endParaRPr lang="en-US" sz="1400" dirty="0"/>
+            <a:endParaRPr lang="en-US" sz="1400" spc="-40" dirty="0"/>
           </a:p>
           <a:p>
             <a:pPr marL="144000" indent="-144000">
               <a:spcAft>
-                <a:spcPts val="1200"/>
+                <a:spcPts val="600"/>
               </a:spcAft>
               <a:buSzPct val="100000"/>
               <a:buChar char="•"/>
             </a:pPr>
             <a:r>
-              <a:rPr lang="en-US" sz="1400" dirty="0">
+              <a:rPr lang="en-US" sz="1400" spc="-40" dirty="0">
                 <a:solidFill>
                   <a:srgbClr val="0D1B2A"/>
                 </a:solidFill>
@@ -32197,18 +34316,18 @@
               </a:rPr>
               <a:t>Niska rozdzielczość geometryczna</a:t>
             </a:r>
-            <a:endParaRPr lang="en-US" sz="1400" dirty="0"/>
+            <a:endParaRPr lang="en-US" sz="1400" spc="-40" dirty="0"/>
           </a:p>
           <a:p>
             <a:pPr marL="144000" indent="-144000">
               <a:spcAft>
-                <a:spcPts val="1200"/>
+                <a:spcPts val="600"/>
               </a:spcAft>
               <a:buSzPct val="100000"/>
               <a:buChar char="•"/>
             </a:pPr>
             <a:r>
-              <a:rPr lang="en-US" sz="1400" dirty="0">
+              <a:rPr lang="en-US" sz="1400" spc="-40" dirty="0">
                 <a:solidFill>
                   <a:srgbClr val="0D1B2A"/>
                 </a:solidFill>
@@ -32218,7 +34337,7 @@
               </a:rPr>
               <a:t>Wymaga mapowania semantycznego</a:t>
             </a:r>
-            <a:endParaRPr lang="en-US" sz="1400" dirty="0"/>
+            <a:endParaRPr lang="en-US" sz="1400" spc="-40" dirty="0"/>
           </a:p>
         </p:txBody>
       </p:sp>
@@ -32230,8 +34349,8 @@
         </p:nvSpPr>
         <p:spPr>
           <a:xfrm>
-            <a:off x="6035040" y="1143000"/>
-            <a:ext cx="2651760" cy="3749040"/>
+            <a:off x="6101945" y="1143000"/>
+            <a:ext cx="2813455" cy="2492298"/>
           </a:xfrm>
           <a:prstGeom prst="rect">
             <a:avLst/>
@@ -32262,8 +34381,8 @@
         </p:nvSpPr>
         <p:spPr>
           <a:xfrm>
-            <a:off x="6035040" y="1143000"/>
-            <a:ext cx="2651760" cy="411480"/>
+            <a:off x="6101945" y="1143000"/>
+            <a:ext cx="2813455" cy="411480"/>
           </a:xfrm>
           <a:prstGeom prst="rect">
             <a:avLst/>
@@ -32287,7 +34406,7 @@
         </p:nvSpPr>
         <p:spPr>
           <a:xfrm>
-            <a:off x="6144768" y="1161288"/>
+            <a:off x="6211674" y="1161288"/>
             <a:ext cx="2432304" cy="365760"/>
           </a:xfrm>
           <a:prstGeom prst="rect">
@@ -32326,8 +34445,8 @@
         </p:nvSpPr>
         <p:spPr>
           <a:xfrm>
-            <a:off x="6144768" y="1627632"/>
-            <a:ext cx="2487168" cy="3154680"/>
+            <a:off x="6152202" y="1627632"/>
+            <a:ext cx="2740896" cy="1692771"/>
           </a:xfrm>
           <a:prstGeom prst="rect">
             <a:avLst/>
@@ -32336,7 +34455,9 @@
           <a:ln/>
         </p:spPr>
         <p:txBody>
-          <a:bodyPr wrap="square" lIns="50800" tIns="76200" rIns="50800" bIns="50800" rtlCol="0" anchor="t"/>
+          <a:bodyPr wrap="square" lIns="50800" tIns="0" rIns="50800" bIns="0" rtlCol="0" anchor="t">
+            <a:spAutoFit/>
+          </a:bodyPr>
           <a:lstStyle/>
           <a:p>
             <a:pPr marL="144000" indent="-144000">
@@ -32347,7 +34468,7 @@
               <a:buChar char="•"/>
             </a:pPr>
             <a:r>
-              <a:rPr lang="en-US" sz="1400" dirty="0">
+              <a:rPr lang="en-US" sz="1400" spc="-50" dirty="0">
                 <a:solidFill>
                   <a:srgbClr val="0D1B2A"/>
                 </a:solidFill>
@@ -32357,7 +34478,7 @@
               </a:rPr>
               <a:t>Graf widzialności krawędzi przeszkód</a:t>
             </a:r>
-            <a:endParaRPr lang="en-US" sz="1400" dirty="0"/>
+            <a:endParaRPr lang="en-US" sz="1400" spc="-50" dirty="0"/>
           </a:p>
           <a:p>
             <a:pPr marL="144000" indent="-144000">
@@ -32368,7 +34489,7 @@
               <a:buChar char="•"/>
             </a:pPr>
             <a:r>
-              <a:rPr lang="en-US" sz="1400" dirty="0">
+              <a:rPr lang="en-US" sz="1400" spc="-40" dirty="0">
                 <a:solidFill>
                   <a:srgbClr val="0D1B2A"/>
                 </a:solidFill>
@@ -32378,7 +34499,7 @@
               </a:rPr>
               <a:t>Trasy wzdłuż wklęsłości przeszkód</a:t>
             </a:r>
-            <a:endParaRPr lang="en-US" sz="1400" dirty="0"/>
+            <a:endParaRPr lang="en-US" sz="1400" spc="-40" dirty="0"/>
           </a:p>
           <a:p>
             <a:pPr marL="144000" indent="-144000">
@@ -32389,7 +34510,7 @@
               <a:buChar char="•"/>
             </a:pPr>
             <a:r>
-              <a:rPr lang="en-US" sz="1400" dirty="0">
+              <a:rPr lang="en-US" sz="1400" spc="-40" dirty="0">
                 <a:solidFill>
                   <a:srgbClr val="0D1B2A"/>
                 </a:solidFill>
@@ -32399,7 +34520,7 @@
               </a:rPr>
               <a:t>Optymalne w 2D dla znanych map</a:t>
             </a:r>
-            <a:endParaRPr lang="en-US" sz="1400" dirty="0"/>
+            <a:endParaRPr lang="en-US" sz="1400" spc="-40" dirty="0"/>
           </a:p>
           <a:p>
             <a:pPr marL="144000" indent="-144000">
@@ -32410,7 +34531,7 @@
               <a:buChar char="•"/>
             </a:pPr>
             <a:r>
-              <a:rPr lang="en-US" sz="1400" dirty="0">
+              <a:rPr lang="en-US" sz="1400" spc="-40" dirty="0">
                 <a:solidFill>
                   <a:srgbClr val="0D1B2A"/>
                 </a:solidFill>
@@ -32420,7 +34541,7 @@
               </a:rPr>
               <a:t>Trudne do uogólnienia na 3D</a:t>
             </a:r>
-            <a:endParaRPr lang="en-US" sz="1400" dirty="0"/>
+            <a:endParaRPr lang="en-US" sz="1400" spc="-40" dirty="0"/>
           </a:p>
           <a:p>
             <a:pPr marL="144000" indent="-144000">
@@ -32431,7 +34552,7 @@
               <a:buChar char="•"/>
             </a:pPr>
             <a:r>
-              <a:rPr lang="en-US" sz="1400" dirty="0">
+              <a:rPr lang="en-US" sz="1400" spc="-40" dirty="0">
                 <a:solidFill>
                   <a:srgbClr val="0D1B2A"/>
                 </a:solidFill>
@@ -32441,7 +34562,7 @@
               </a:rPr>
               <a:t>Rzadko stosowane dla humanoida</a:t>
             </a:r>
-            <a:endParaRPr lang="en-US" sz="1400" dirty="0"/>
+            <a:endParaRPr lang="en-US" sz="1400" spc="-40" dirty="0"/>
           </a:p>
         </p:txBody>
       </p:sp>
@@ -32592,7 +34713,7 @@
               <a:buNone/>
             </a:pPr>
             <a:r>
-              <a:rPr lang="en-US" sz="2800" b="1" dirty="0">
+              <a:rPr lang="en-US" sz="2400" b="1" dirty="0">
                 <a:solidFill>
                   <a:srgbClr val="FFFFFF"/>
                 </a:solidFill>
@@ -32602,7 +34723,7 @@
               </a:rPr>
               <a:t>Algorytm Dijkstry</a:t>
             </a:r>
-            <a:endParaRPr lang="en-US" sz="2800" dirty="0"/>
+            <a:endParaRPr lang="en-US" sz="2400" dirty="0"/>
           </a:p>
         </p:txBody>
       </p:sp>
@@ -32615,7 +34736,7 @@
         <p:spPr>
           <a:xfrm>
             <a:off x="274320" y="1097280"/>
-            <a:ext cx="5394960" cy="3749040"/>
+            <a:ext cx="5394960" cy="3006281"/>
           </a:xfrm>
           <a:prstGeom prst="rect">
             <a:avLst/>
@@ -32711,7 +34832,7 @@
         <p:spPr>
           <a:xfrm>
             <a:off x="411480" y="1536192"/>
-            <a:ext cx="5166360" cy="2826258"/>
+            <a:ext cx="5166360" cy="2567369"/>
           </a:xfrm>
           <a:prstGeom prst="rect">
             <a:avLst/>
@@ -32720,7 +34841,9 @@
           <a:ln/>
         </p:spPr>
         <p:txBody>
-          <a:bodyPr wrap="square" lIns="63500" tIns="101600" rIns="101600" bIns="63500" rtlCol="0" anchor="t"/>
+          <a:bodyPr wrap="square" lIns="63500" tIns="36000" rIns="101600" bIns="36000" rtlCol="0" anchor="t">
+            <a:spAutoFit/>
+          </a:bodyPr>
           <a:lstStyle/>
           <a:p>
             <a:r>
@@ -33800,7 +35923,7 @@
         <p:spPr>
           <a:xfrm>
             <a:off x="5943600" y="1097280"/>
-            <a:ext cx="2926080" cy="3749040"/>
+            <a:ext cx="2926080" cy="3006281"/>
           </a:xfrm>
           <a:prstGeom prst="rect">
             <a:avLst/>
@@ -33873,7 +35996,7 @@
               <a:buNone/>
             </a:pPr>
             <a:r>
-              <a:rPr lang="en-US" sz="1300" b="1" dirty="0">
+              <a:rPr lang="en-US" sz="1600" b="1" dirty="0">
                 <a:solidFill>
                   <a:srgbClr val="FFFFFF"/>
                 </a:solidFill>
@@ -33883,7 +36006,7 @@
               </a:rPr>
               <a:t>Właściwości</a:t>
             </a:r>
-            <a:endParaRPr lang="en-US" sz="1300" dirty="0"/>
+            <a:endParaRPr lang="en-US" sz="1600" dirty="0"/>
           </a:p>
         </p:txBody>
       </p:sp>
@@ -33896,7 +36019,7 @@
         <p:spPr>
           <a:xfrm>
             <a:off x="6080760" y="1554480"/>
-            <a:ext cx="2651760" cy="3200400"/>
+            <a:ext cx="2651760" cy="1972335"/>
           </a:xfrm>
           <a:prstGeom prst="rect">
             <a:avLst/>
@@ -33905,7 +36028,9 @@
           <a:ln/>
         </p:spPr>
         <p:txBody>
-          <a:bodyPr wrap="square" lIns="63500" tIns="101600" rIns="63500" bIns="63500" rtlCol="0" anchor="t"/>
+          <a:bodyPr wrap="square" lIns="63500" tIns="101600" rIns="63500" bIns="63500" rtlCol="0" anchor="t">
+            <a:spAutoFit/>
+          </a:bodyPr>
           <a:lstStyle/>
           <a:p>
             <a:pPr marL="342900" indent="-342900">
@@ -33937,7 +36062,7 @@
               <a:buChar char="•"/>
             </a:pPr>
             <a:r>
-              <a:rPr lang="en-US" sz="1200" dirty="0">
+              <a:rPr lang="en-US" sz="1200" dirty="0" err="1">
                 <a:solidFill>
                   <a:srgbClr val="90E0EF"/>
                 </a:solidFill>
@@ -33945,7 +36070,62 @@
                 <a:ea typeface="Calibri" pitchFamily="34" charset="-122"/>
                 <a:cs typeface="Calibri" pitchFamily="34" charset="-120"/>
               </a:rPr>
-              <a:t>Brak heurystyki – eksploruje we wszystkich kierunkach</a:t>
+              <a:t>Brak</a:t>
+            </a:r>
+            <a:r>
+              <a:rPr lang="en-US" sz="1200" dirty="0">
+                <a:solidFill>
+                  <a:srgbClr val="90E0EF"/>
+                </a:solidFill>
+                <a:latin typeface="Calibri" pitchFamily="34" charset="0"/>
+                <a:ea typeface="Calibri" pitchFamily="34" charset="-122"/>
+                <a:cs typeface="Calibri" pitchFamily="34" charset="-120"/>
+              </a:rPr>
+              <a:t> </a:t>
+            </a:r>
+            <a:r>
+              <a:rPr lang="en-US" sz="1200" dirty="0" err="1" smtClean="0">
+                <a:solidFill>
+                  <a:srgbClr val="90E0EF"/>
+                </a:solidFill>
+                <a:latin typeface="Calibri" pitchFamily="34" charset="0"/>
+                <a:ea typeface="Calibri" pitchFamily="34" charset="-122"/>
+                <a:cs typeface="Calibri" pitchFamily="34" charset="-120"/>
+              </a:rPr>
+              <a:t>heurystyki</a:t>
+            </a:r>
+            <a:r>
+              <a:rPr lang="pl-PL" sz="1200" dirty="0">
+                <a:solidFill>
+                  <a:srgbClr val="90E0EF"/>
+                </a:solidFill>
+                <a:latin typeface="Calibri" pitchFamily="34" charset="0"/>
+                <a:ea typeface="Calibri" pitchFamily="34" charset="-122"/>
+                <a:cs typeface="Calibri" pitchFamily="34" charset="-120"/>
+              </a:rPr>
+              <a:t>,</a:t>
+            </a:r>
+            <a:r>
+              <a:rPr lang="en-US" sz="1200" dirty="0" smtClean="0">
+                <a:solidFill>
+                  <a:srgbClr val="90E0EF"/>
+                </a:solidFill>
+                <a:latin typeface="Calibri" pitchFamily="34" charset="0"/>
+                <a:ea typeface="Calibri" pitchFamily="34" charset="-122"/>
+                <a:cs typeface="Calibri" pitchFamily="34" charset="-120"/>
+              </a:rPr>
+              <a:t> </a:t>
+            </a:r>
+            <a:r>
+              <a:rPr lang="en-US" sz="1200" dirty="0">
+                <a:solidFill>
+                  <a:srgbClr val="90E0EF"/>
+                </a:solidFill>
+                <a:latin typeface="Calibri" pitchFamily="34" charset="0"/>
+                <a:ea typeface="Calibri" pitchFamily="34" charset="-122"/>
+                <a:cs typeface="Calibri" pitchFamily="34" charset="-120"/>
+              </a:rPr>
+              <a:t>eksploruje we wszystkich kierunkach</a:t>
             </a:r>
             <a:endParaRPr lang="en-US" sz="1200" dirty="0"/>
           </a:p>
@@ -34182,7 +36362,7 @@
               <a:buNone/>
             </a:pPr>
             <a:r>
-              <a:rPr lang="en-US" sz="2800" b="1" dirty="0">
+              <a:rPr lang="en-US" sz="2400" b="1" dirty="0">
                 <a:solidFill>
                   <a:srgbClr val="FFFFFF"/>
                 </a:solidFill>
@@ -34192,7 +36372,7 @@
               </a:rPr>
               <a:t>Algorytm A* – planowanie z heurystyką</a:t>
             </a:r>
-            <a:endParaRPr lang="en-US" sz="2800" dirty="0"/>
+            <a:endParaRPr lang="en-US" sz="2400" dirty="0"/>
           </a:p>
         </p:txBody>
       </p:sp>
@@ -34205,7 +36385,7 @@
         <p:spPr>
           <a:xfrm>
             <a:off x="274320" y="1097280"/>
-            <a:ext cx="5394960" cy="3749040"/>
+            <a:ext cx="5394960" cy="3467286"/>
           </a:xfrm>
           <a:prstGeom prst="rect">
             <a:avLst/>
@@ -34278,7 +36458,7 @@
               <a:buNone/>
             </a:pPr>
             <a:r>
-              <a:rPr lang="en-US" sz="1400" b="1" dirty="0">
+              <a:rPr lang="en-US" sz="1600" b="1" dirty="0">
                 <a:solidFill>
                   <a:srgbClr val="FFFFFF"/>
                 </a:solidFill>
@@ -34288,7 +36468,7 @@
               </a:rPr>
               <a:t>Pseudokod A*</a:t>
             </a:r>
-            <a:endParaRPr lang="en-US" sz="1400" dirty="0"/>
+            <a:endParaRPr lang="en-US" sz="1600" dirty="0"/>
           </a:p>
         </p:txBody>
       </p:sp>
@@ -34301,7 +36481,7 @@
         <p:spPr>
           <a:xfrm>
             <a:off x="411480" y="1536192"/>
-            <a:ext cx="5166360" cy="3154680"/>
+            <a:ext cx="5166360" cy="3028374"/>
           </a:xfrm>
           <a:prstGeom prst="rect">
             <a:avLst/>
@@ -34310,7 +36490,7 @@
           <a:ln/>
         </p:spPr>
         <p:txBody>
-          <a:bodyPr wrap="square" lIns="63500" tIns="101600" rIns="101600" bIns="63500" rtlCol="0" anchor="t"/>
+          <a:bodyPr wrap="square" lIns="63500" tIns="36000" rIns="101600" bIns="0" rtlCol="0" anchor="t"/>
           <a:lstStyle/>
           <a:p>
             <a:r>
@@ -35450,7 +37630,7 @@
         <p:spPr>
           <a:xfrm>
             <a:off x="5943600" y="1097280"/>
-            <a:ext cx="2926080" cy="3749040"/>
+            <a:ext cx="2926080" cy="2374466"/>
           </a:xfrm>
           <a:prstGeom prst="rect">
             <a:avLst/>
@@ -35523,7 +37703,7 @@
               <a:buNone/>
             </a:pPr>
             <a:r>
-              <a:rPr lang="en-US" sz="1300" b="1" dirty="0">
+              <a:rPr lang="en-US" sz="1600" b="1" dirty="0">
                 <a:solidFill>
                   <a:srgbClr val="FFFFFF"/>
                 </a:solidFill>
@@ -35533,7 +37713,7 @@
               </a:rPr>
               <a:t>Właściwości</a:t>
             </a:r>
-            <a:endParaRPr lang="en-US" sz="1300" dirty="0"/>
+            <a:endParaRPr lang="en-US" sz="1600" dirty="0"/>
           </a:p>
         </p:txBody>
       </p:sp>
@@ -35832,7 +38012,7 @@
               <a:buNone/>
             </a:pPr>
             <a:r>
-              <a:rPr lang="en-US" sz="2800" b="1" dirty="0">
+              <a:rPr lang="en-US" sz="2400" b="1" dirty="0">
                 <a:solidFill>
                   <a:srgbClr val="FFFFFF"/>
                 </a:solidFill>
@@ -35840,9 +38020,20 @@
                 <a:ea typeface="Trebuchet MS" pitchFamily="34" charset="-122"/>
                 <a:cs typeface="Trebuchet MS" pitchFamily="34" charset="-120"/>
               </a:rPr>
-              <a:t>A* na mapie zajętości (grid map)</a:t>
-            </a:r>
-            <a:endParaRPr lang="en-US" sz="2800" dirty="0"/>
+              <a:t>A* na mapie zajętości </a:t>
+            </a:r>
+            <a:r>
+              <a:rPr lang="en-US" sz="2400" dirty="0">
+                <a:solidFill>
+                  <a:srgbClr val="FFFFFF"/>
+                </a:solidFill>
+                <a:latin typeface="Trebuchet MS" pitchFamily="34" charset="0"/>
+                <a:ea typeface="Trebuchet MS" pitchFamily="34" charset="-122"/>
+                <a:cs typeface="Trebuchet MS" pitchFamily="34" charset="-120"/>
+              </a:rPr>
+              <a:t>(grid map)</a:t>
+            </a:r>
+            <a:endParaRPr lang="en-US" sz="2400" dirty="0"/>
           </a:p>
         </p:txBody>
       </p:sp>

--- a/zajecia/robo/robo_w3.pptx
+++ b/zajecia/robo/robo_w3.pptx
@@ -4447,7 +4447,7 @@
         <p:spPr>
           <a:xfrm>
             <a:off x="457200" y="1600200"/>
-            <a:ext cx="3794760" cy="3108960"/>
+            <a:ext cx="3794760" cy="2185147"/>
           </a:xfrm>
           <a:prstGeom prst="rect">
             <a:avLst/>
@@ -4530,6 +4530,61 @@
               <a:buChar char="•"/>
             </a:pPr>
             <a:r>
+              <a:rPr lang="en-US" sz="1400" b="1" dirty="0" err="1">
+                <a:solidFill>
+                  <a:srgbClr val="0D1B2A"/>
+                </a:solidFill>
+                <a:latin typeface="Calibri" pitchFamily="34" charset="0"/>
+                <a:ea typeface="Calibri" pitchFamily="34" charset="-122"/>
+                <a:cs typeface="Calibri" pitchFamily="34" charset="-120"/>
+              </a:rPr>
+              <a:t>Bardzo</a:t>
+            </a:r>
+            <a:r>
+              <a:rPr lang="en-US" sz="1400" b="1" dirty="0">
+                <a:solidFill>
+                  <a:srgbClr val="0D1B2A"/>
+                </a:solidFill>
+                <a:latin typeface="Calibri" pitchFamily="34" charset="0"/>
+                <a:ea typeface="Calibri" pitchFamily="34" charset="-122"/>
+                <a:cs typeface="Calibri" pitchFamily="34" charset="-120"/>
+              </a:rPr>
+              <a:t> </a:t>
+            </a:r>
+            <a:r>
+              <a:rPr lang="en-US" sz="1400" b="1" dirty="0" err="1" smtClean="0">
+                <a:solidFill>
+                  <a:srgbClr val="0D1B2A"/>
+                </a:solidFill>
+                <a:latin typeface="Calibri" pitchFamily="34" charset="0"/>
+                <a:ea typeface="Calibri" pitchFamily="34" charset="-122"/>
+                <a:cs typeface="Calibri" pitchFamily="34" charset="-120"/>
+              </a:rPr>
+              <a:t>szybka</a:t>
+            </a:r>
+            <a:r>
+              <a:rPr lang="pl-PL" sz="1400" b="1" dirty="0" smtClean="0">
+                <a:solidFill>
+                  <a:srgbClr val="0D1B2A"/>
+                </a:solidFill>
+                <a:latin typeface="Calibri" pitchFamily="34" charset="0"/>
+                <a:ea typeface="Calibri" pitchFamily="34" charset="-122"/>
+                <a:cs typeface="Calibri" pitchFamily="34" charset="-120"/>
+              </a:rPr>
+              <a:t>:</a:t>
+            </a:r>
+            <a:r>
+              <a:rPr lang="en-US" sz="1400" dirty="0" smtClean="0">
+                <a:solidFill>
+                  <a:srgbClr val="0D1B2A"/>
+                </a:solidFill>
+                <a:latin typeface="Calibri" pitchFamily="34" charset="0"/>
+                <a:ea typeface="Calibri" pitchFamily="34" charset="-122"/>
+                <a:cs typeface="Calibri" pitchFamily="34" charset="-120"/>
+              </a:rPr>
+              <a:t> </a:t>
+            </a:r>
+            <a:r>
               <a:rPr lang="en-US" sz="1400" dirty="0">
                 <a:solidFill>
                   <a:srgbClr val="0D1B2A"/>
@@ -4538,7 +4593,7 @@
                 <a:ea typeface="Calibri" pitchFamily="34" charset="-122"/>
                 <a:cs typeface="Calibri" pitchFamily="34" charset="-120"/>
               </a:rPr>
-              <a:t>Bardzo szybka – prosta operacja arytmetyczna</a:t>
+              <a:t>prosta operacja arytmetyczna</a:t>
             </a:r>
             <a:endParaRPr lang="en-US" sz="1400" dirty="0"/>
           </a:p>
@@ -4551,6 +4606,17 @@
               <a:buChar char="•"/>
             </a:pPr>
             <a:r>
+              <a:rPr lang="en-US" sz="1400" b="1" dirty="0">
+                <a:solidFill>
+                  <a:srgbClr val="0D1B2A"/>
+                </a:solidFill>
+                <a:latin typeface="Calibri" pitchFamily="34" charset="0"/>
+                <a:ea typeface="Calibri" pitchFamily="34" charset="-122"/>
+                <a:cs typeface="Calibri" pitchFamily="34" charset="-120"/>
+              </a:rPr>
+              <a:t>Dla ruchu 8-kierunkowego</a:t>
+            </a:r>
+            <a:r>
               <a:rPr lang="en-US" sz="1400" dirty="0">
                 <a:solidFill>
                   <a:srgbClr val="0D1B2A"/>
@@ -4559,7 +4625,7 @@
                 <a:ea typeface="Calibri" pitchFamily="34" charset="-122"/>
                 <a:cs typeface="Calibri" pitchFamily="34" charset="-120"/>
               </a:rPr>
-              <a:t>Dla ruchu 8-kierunkowego: lekko nieprecyzyjna</a:t>
+              <a:t>: lekko nieprecyzyjna</a:t>
             </a:r>
             <a:endParaRPr lang="en-US" sz="1400" dirty="0"/>
           </a:p>
@@ -4574,7 +4640,7 @@
         <p:spPr>
           <a:xfrm>
             <a:off x="4892040" y="1600200"/>
-            <a:ext cx="3794760" cy="3108960"/>
+            <a:ext cx="3794760" cy="2185147"/>
           </a:xfrm>
           <a:prstGeom prst="rect">
             <a:avLst/>
@@ -4657,6 +4723,17 @@
               <a:buChar char="•"/>
             </a:pPr>
             <a:r>
+              <a:rPr lang="en-US" sz="1400" b="1" dirty="0">
+                <a:solidFill>
+                  <a:srgbClr val="0D1B2A"/>
+                </a:solidFill>
+                <a:latin typeface="Calibri" pitchFamily="34" charset="0"/>
+                <a:ea typeface="Calibri" pitchFamily="34" charset="-122"/>
+                <a:cs typeface="Calibri" pitchFamily="34" charset="-120"/>
+              </a:rPr>
+              <a:t>Droższa obliczeniowo </a:t>
+            </a:r>
+            <a:r>
               <a:rPr lang="en-US" sz="1400" dirty="0">
                 <a:solidFill>
                   <a:srgbClr val="0D1B2A"/>
@@ -4665,7 +4742,7 @@
                 <a:ea typeface="Calibri" pitchFamily="34" charset="-122"/>
                 <a:cs typeface="Calibri" pitchFamily="34" charset="-120"/>
               </a:rPr>
-              <a:t>Droższa obliczeniowo (sqrt), lecz precyzyjniejsza</a:t>
+              <a:t>(sqrt), lecz precyzyjniejsza</a:t>
             </a:r>
             <a:endParaRPr lang="en-US" sz="1400" dirty="0"/>
           </a:p>
@@ -13134,7 +13211,7 @@
         <p:spPr>
           <a:xfrm>
             <a:off x="274320" y="1005840"/>
-            <a:ext cx="8595360" cy="3111108"/>
+            <a:ext cx="8595360" cy="3374062"/>
           </a:xfrm>
           <a:prstGeom prst="rect">
             <a:avLst/>
@@ -13241,7 +13318,7 @@
         <p:spPr>
           <a:xfrm>
             <a:off x="385906" y="1005840"/>
-            <a:ext cx="8321040" cy="3111108"/>
+            <a:ext cx="8321040" cy="3388107"/>
           </a:xfrm>
           <a:prstGeom prst="rect">
             <a:avLst/>
@@ -13256,7 +13333,7 @@
           <a:lstStyle/>
           <a:p>
             <a:r>
-              <a:rPr lang="pl-PL" sz="1100" dirty="0">
+              <a:rPr lang="pl-PL" sz="1200" dirty="0">
                 <a:solidFill>
                   <a:srgbClr val="C586C0"/>
                 </a:solidFill>
@@ -13265,7 +13342,7 @@
               <a:t>import</a:t>
             </a:r>
             <a:r>
-              <a:rPr lang="pl-PL" sz="1100" dirty="0">
+              <a:rPr lang="pl-PL" sz="1200" dirty="0">
                 <a:solidFill>
                   <a:srgbClr val="CCCCCC"/>
                 </a:solidFill>
@@ -13274,7 +13351,7 @@
               <a:t> </a:t>
             </a:r>
             <a:r>
-              <a:rPr lang="pl-PL" sz="1100" dirty="0" err="1">
+              <a:rPr lang="pl-PL" sz="1200" dirty="0" err="1">
                 <a:solidFill>
                   <a:srgbClr val="4EC9B0"/>
                 </a:solidFill>
@@ -13283,7 +13360,7 @@
               <a:t>numpy</a:t>
             </a:r>
             <a:r>
-              <a:rPr lang="pl-PL" sz="1100" dirty="0">
+              <a:rPr lang="pl-PL" sz="1200" dirty="0">
                 <a:solidFill>
                   <a:srgbClr val="CCCCCC"/>
                 </a:solidFill>
@@ -13292,7 +13369,7 @@
               <a:t> </a:t>
             </a:r>
             <a:r>
-              <a:rPr lang="pl-PL" sz="1100" dirty="0">
+              <a:rPr lang="pl-PL" sz="1200" dirty="0">
                 <a:solidFill>
                   <a:srgbClr val="C586C0"/>
                 </a:solidFill>
@@ -13301,7 +13378,7 @@
               <a:t>as</a:t>
             </a:r>
             <a:r>
-              <a:rPr lang="pl-PL" sz="1100" dirty="0">
+              <a:rPr lang="pl-PL" sz="1200" dirty="0">
                 <a:solidFill>
                   <a:srgbClr val="CCCCCC"/>
                 </a:solidFill>
@@ -13310,7 +13387,7 @@
               <a:t> </a:t>
             </a:r>
             <a:r>
-              <a:rPr lang="pl-PL" sz="1100" dirty="0" err="1">
+              <a:rPr lang="pl-PL" sz="1200" dirty="0" err="1">
                 <a:solidFill>
                   <a:srgbClr val="4EC9B0"/>
                 </a:solidFill>
@@ -13318,7 +13395,7 @@
               </a:rPr>
               <a:t>np</a:t>
             </a:r>
-            <a:endParaRPr lang="pl-PL" sz="1100" dirty="0">
+            <a:endParaRPr lang="pl-PL" sz="1200" dirty="0">
               <a:solidFill>
                 <a:srgbClr val="CCCCCC"/>
               </a:solidFill>
@@ -13327,7 +13404,7 @@
           </a:p>
           <a:p>
             <a:r>
-              <a:rPr lang="pl-PL" sz="1100" dirty="0">
+              <a:rPr lang="pl-PL" sz="1200" dirty="0">
                 <a:solidFill>
                   <a:srgbClr val="CCCCCC"/>
                 </a:solidFill>
@@ -13336,7 +13413,7 @@
               <a:t/>
             </a:r>
             <a:br>
-              <a:rPr lang="pl-PL" sz="1100" dirty="0">
+              <a:rPr lang="pl-PL" sz="1200" dirty="0">
                 <a:solidFill>
                   <a:srgbClr val="CCCCCC"/>
                 </a:solidFill>
@@ -13344,7 +13421,7 @@
               </a:rPr>
             </a:br>
             <a:r>
-              <a:rPr lang="pl-PL" sz="1100" dirty="0">
+              <a:rPr lang="pl-PL" sz="1200" dirty="0">
                 <a:solidFill>
                   <a:srgbClr val="569CD6"/>
                 </a:solidFill>
@@ -13353,7 +13430,7 @@
               <a:t>def</a:t>
             </a:r>
             <a:r>
-              <a:rPr lang="pl-PL" sz="1100" dirty="0">
+              <a:rPr lang="pl-PL" sz="1200" dirty="0">
                 <a:solidFill>
                   <a:srgbClr val="CCCCCC"/>
                 </a:solidFill>
@@ -13362,7 +13439,7 @@
               <a:t> </a:t>
             </a:r>
             <a:r>
-              <a:rPr lang="pl-PL" sz="1100" dirty="0" err="1">
+              <a:rPr lang="pl-PL" sz="1200" dirty="0" err="1">
                 <a:solidFill>
                   <a:srgbClr val="DCDCAA"/>
                 </a:solidFill>
@@ -13371,7 +13448,7 @@
               <a:t>potential_field_move</a:t>
             </a:r>
             <a:r>
-              <a:rPr lang="pl-PL" sz="1100" dirty="0">
+              <a:rPr lang="pl-PL" sz="1200" dirty="0">
                 <a:solidFill>
                   <a:srgbClr val="CCCCCC"/>
                 </a:solidFill>
@@ -13380,7 +13457,7 @@
               <a:t>(</a:t>
             </a:r>
             <a:r>
-              <a:rPr lang="pl-PL" sz="1100" dirty="0" err="1">
+              <a:rPr lang="pl-PL" sz="1200" dirty="0" err="1">
                 <a:solidFill>
                   <a:srgbClr val="9CDCFE"/>
                 </a:solidFill>
@@ -13389,7 +13466,7 @@
               <a:t>robot_pos</a:t>
             </a:r>
             <a:r>
-              <a:rPr lang="pl-PL" sz="1100" dirty="0">
+              <a:rPr lang="pl-PL" sz="1200" dirty="0">
                 <a:solidFill>
                   <a:srgbClr val="CCCCCC"/>
                 </a:solidFill>
@@ -13398,7 +13475,7 @@
               <a:t>, </a:t>
             </a:r>
             <a:r>
-              <a:rPr lang="pl-PL" sz="1100" dirty="0" err="1">
+              <a:rPr lang="pl-PL" sz="1200" dirty="0" err="1">
                 <a:solidFill>
                   <a:srgbClr val="9CDCFE"/>
                 </a:solidFill>
@@ -13407,7 +13484,7 @@
               <a:t>goal_pos</a:t>
             </a:r>
             <a:r>
-              <a:rPr lang="pl-PL" sz="1100" dirty="0">
+              <a:rPr lang="pl-PL" sz="1200" dirty="0">
                 <a:solidFill>
                   <a:srgbClr val="CCCCCC"/>
                 </a:solidFill>
@@ -13416,7 +13493,7 @@
               <a:t>, </a:t>
             </a:r>
             <a:r>
-              <a:rPr lang="pl-PL" sz="1100" dirty="0" err="1">
+              <a:rPr lang="pl-PL" sz="1200" dirty="0" err="1">
                 <a:solidFill>
                   <a:srgbClr val="9CDCFE"/>
                 </a:solidFill>
@@ -13425,7 +13502,7 @@
               <a:t>obstacles</a:t>
             </a:r>
             <a:r>
-              <a:rPr lang="pl-PL" sz="1100" dirty="0">
+              <a:rPr lang="pl-PL" sz="1200" dirty="0">
                 <a:solidFill>
                   <a:srgbClr val="CCCCCC"/>
                 </a:solidFill>
@@ -13436,7 +13513,7 @@
           </a:p>
           <a:p>
             <a:r>
-              <a:rPr lang="pl-PL" sz="1100" dirty="0">
+              <a:rPr lang="pl-PL" sz="1200" dirty="0">
                 <a:solidFill>
                   <a:srgbClr val="CCCCCC"/>
                 </a:solidFill>
@@ -13445,7 +13522,7 @@
               <a:t>                         </a:t>
             </a:r>
             <a:r>
-              <a:rPr lang="pl-PL" sz="1100" dirty="0" err="1">
+              <a:rPr lang="pl-PL" sz="1200" dirty="0" err="1">
                 <a:solidFill>
                   <a:srgbClr val="9CDCFE"/>
                 </a:solidFill>
@@ -13454,7 +13531,7 @@
               <a:t>k_att</a:t>
             </a:r>
             <a:r>
-              <a:rPr lang="pl-PL" sz="1100" dirty="0">
+              <a:rPr lang="pl-PL" sz="1200" dirty="0">
                 <a:solidFill>
                   <a:srgbClr val="D4D4D4"/>
                 </a:solidFill>
@@ -13463,7 +13540,7 @@
               <a:t>=</a:t>
             </a:r>
             <a:r>
-              <a:rPr lang="pl-PL" sz="1100" dirty="0">
+              <a:rPr lang="pl-PL" sz="1200" dirty="0">
                 <a:solidFill>
                   <a:srgbClr val="B5CEA8"/>
                 </a:solidFill>
@@ -13472,7 +13549,7 @@
               <a:t>1.0</a:t>
             </a:r>
             <a:r>
-              <a:rPr lang="pl-PL" sz="1100" dirty="0">
+              <a:rPr lang="pl-PL" sz="1200" dirty="0">
                 <a:solidFill>
                   <a:srgbClr val="CCCCCC"/>
                 </a:solidFill>
@@ -13481,7 +13558,7 @@
               <a:t>, </a:t>
             </a:r>
             <a:r>
-              <a:rPr lang="pl-PL" sz="1100" dirty="0" err="1">
+              <a:rPr lang="pl-PL" sz="1200" dirty="0" err="1">
                 <a:solidFill>
                   <a:srgbClr val="9CDCFE"/>
                 </a:solidFill>
@@ -13490,7 +13567,7 @@
               <a:t>k_rep</a:t>
             </a:r>
             <a:r>
-              <a:rPr lang="pl-PL" sz="1100" dirty="0">
+              <a:rPr lang="pl-PL" sz="1200" dirty="0">
                 <a:solidFill>
                   <a:srgbClr val="D4D4D4"/>
                 </a:solidFill>
@@ -13499,7 +13576,7 @@
               <a:t>=</a:t>
             </a:r>
             <a:r>
-              <a:rPr lang="pl-PL" sz="1100" dirty="0">
+              <a:rPr lang="pl-PL" sz="1200" dirty="0">
                 <a:solidFill>
                   <a:srgbClr val="B5CEA8"/>
                 </a:solidFill>
@@ -13508,7 +13585,7 @@
               <a:t>100.0</a:t>
             </a:r>
             <a:r>
-              <a:rPr lang="pl-PL" sz="1100" dirty="0">
+              <a:rPr lang="pl-PL" sz="1200" dirty="0">
                 <a:solidFill>
                   <a:srgbClr val="CCCCCC"/>
                 </a:solidFill>
@@ -13517,7 +13594,7 @@
               <a:t>, </a:t>
             </a:r>
             <a:r>
-              <a:rPr lang="pl-PL" sz="1100" dirty="0">
+              <a:rPr lang="pl-PL" sz="1200" dirty="0">
                 <a:solidFill>
                   <a:srgbClr val="9CDCFE"/>
                 </a:solidFill>
@@ -13526,7 +13603,7 @@
               <a:t>d0</a:t>
             </a:r>
             <a:r>
-              <a:rPr lang="pl-PL" sz="1100" dirty="0">
+              <a:rPr lang="pl-PL" sz="1200" dirty="0">
                 <a:solidFill>
                   <a:srgbClr val="D4D4D4"/>
                 </a:solidFill>
@@ -13535,7 +13612,7 @@
               <a:t>=</a:t>
             </a:r>
             <a:r>
-              <a:rPr lang="pl-PL" sz="1100" dirty="0">
+              <a:rPr lang="pl-PL" sz="1200" dirty="0">
                 <a:solidFill>
                   <a:srgbClr val="B5CEA8"/>
                 </a:solidFill>
@@ -13544,7 +13621,7 @@
               <a:t>1.5</a:t>
             </a:r>
             <a:r>
-              <a:rPr lang="pl-PL" sz="1100" dirty="0">
+              <a:rPr lang="pl-PL" sz="1200" dirty="0">
                 <a:solidFill>
                   <a:srgbClr val="CCCCCC"/>
                 </a:solidFill>
@@ -13555,7 +13632,7 @@
           </a:p>
           <a:p>
             <a:r>
-              <a:rPr lang="pl-PL" sz="1100" dirty="0">
+              <a:rPr lang="pl-PL" sz="1200" dirty="0">
                 <a:solidFill>
                   <a:srgbClr val="CCCCCC"/>
                 </a:solidFill>
@@ -13564,7 +13641,7 @@
               <a:t>    </a:t>
             </a:r>
             <a:r>
-              <a:rPr lang="pl-PL" sz="1100" dirty="0">
+              <a:rPr lang="pl-PL" sz="1200" dirty="0">
                 <a:solidFill>
                   <a:srgbClr val="CE9178"/>
                 </a:solidFill>
@@ -13573,7 +13650,7 @@
               <a:t>"""Wyznacza wektor ruchu z </a:t>
             </a:r>
             <a:r>
-              <a:rPr lang="pl-PL" sz="1100" dirty="0" err="1">
+              <a:rPr lang="pl-PL" sz="1200" dirty="0" err="1">
                 <a:solidFill>
                   <a:srgbClr val="CE9178"/>
                 </a:solidFill>
@@ -13582,7 +13659,7 @@
               <a:t>pol</a:t>
             </a:r>
             <a:r>
-              <a:rPr lang="pl-PL" sz="1100" dirty="0">
+              <a:rPr lang="pl-PL" sz="1200" dirty="0">
                 <a:solidFill>
                   <a:srgbClr val="CE9178"/>
                 </a:solidFill>
@@ -13590,7 +13667,7 @@
               </a:rPr>
               <a:t> potencjalnych."""</a:t>
             </a:r>
-            <a:endParaRPr lang="pl-PL" sz="1100" dirty="0">
+            <a:endParaRPr lang="pl-PL" sz="1200" dirty="0">
               <a:solidFill>
                 <a:srgbClr val="CCCCCC"/>
               </a:solidFill>
@@ -13599,7 +13676,7 @@
           </a:p>
           <a:p>
             <a:r>
-              <a:rPr lang="pl-PL" sz="1100" dirty="0">
+              <a:rPr lang="pl-PL" sz="1200" dirty="0">
                 <a:solidFill>
                   <a:srgbClr val="CCCCCC"/>
                 </a:solidFill>
@@ -13608,7 +13685,7 @@
               <a:t>    </a:t>
             </a:r>
             <a:r>
-              <a:rPr lang="pl-PL" sz="1100" dirty="0">
+              <a:rPr lang="pl-PL" sz="1200" dirty="0">
                 <a:solidFill>
                   <a:srgbClr val="9CDCFE"/>
                 </a:solidFill>
@@ -13617,7 +13694,7 @@
               <a:t>robot</a:t>
             </a:r>
             <a:r>
-              <a:rPr lang="pl-PL" sz="1100" dirty="0">
+              <a:rPr lang="pl-PL" sz="1200" dirty="0">
                 <a:solidFill>
                   <a:srgbClr val="CCCCCC"/>
                 </a:solidFill>
@@ -13626,7 +13703,7 @@
               <a:t> </a:t>
             </a:r>
             <a:r>
-              <a:rPr lang="pl-PL" sz="1100" dirty="0">
+              <a:rPr lang="pl-PL" sz="1200" dirty="0">
                 <a:solidFill>
                   <a:srgbClr val="D4D4D4"/>
                 </a:solidFill>
@@ -13635,7 +13712,7 @@
               <a:t>=</a:t>
             </a:r>
             <a:r>
-              <a:rPr lang="pl-PL" sz="1100" dirty="0">
+              <a:rPr lang="pl-PL" sz="1200" dirty="0">
                 <a:solidFill>
                   <a:srgbClr val="CCCCCC"/>
                 </a:solidFill>
@@ -13644,7 +13721,7 @@
               <a:t> </a:t>
             </a:r>
             <a:r>
-              <a:rPr lang="pl-PL" sz="1100" dirty="0" err="1">
+              <a:rPr lang="pl-PL" sz="1200" dirty="0" err="1">
                 <a:solidFill>
                   <a:srgbClr val="4EC9B0"/>
                 </a:solidFill>
@@ -13653,7 +13730,7 @@
               <a:t>np</a:t>
             </a:r>
             <a:r>
-              <a:rPr lang="pl-PL" sz="1100" dirty="0" err="1">
+              <a:rPr lang="pl-PL" sz="1200" dirty="0" err="1">
                 <a:solidFill>
                   <a:srgbClr val="CCCCCC"/>
                 </a:solidFill>
@@ -13662,7 +13739,7 @@
               <a:t>.</a:t>
             </a:r>
             <a:r>
-              <a:rPr lang="pl-PL" sz="1100" dirty="0" err="1">
+              <a:rPr lang="pl-PL" sz="1200" dirty="0" err="1">
                 <a:solidFill>
                   <a:srgbClr val="DCDCAA"/>
                 </a:solidFill>
@@ -13671,7 +13748,7 @@
               <a:t>array</a:t>
             </a:r>
             <a:r>
-              <a:rPr lang="pl-PL" sz="1100" dirty="0">
+              <a:rPr lang="pl-PL" sz="1200" dirty="0">
                 <a:solidFill>
                   <a:srgbClr val="CCCCCC"/>
                 </a:solidFill>
@@ -13680,7 +13757,7 @@
               <a:t>(</a:t>
             </a:r>
             <a:r>
-              <a:rPr lang="pl-PL" sz="1100" dirty="0" err="1">
+              <a:rPr lang="pl-PL" sz="1200" dirty="0" err="1">
                 <a:solidFill>
                   <a:srgbClr val="9CDCFE"/>
                 </a:solidFill>
@@ -13689,7 +13766,7 @@
               <a:t>robot_pos</a:t>
             </a:r>
             <a:r>
-              <a:rPr lang="pl-PL" sz="1100" dirty="0">
+              <a:rPr lang="pl-PL" sz="1200" dirty="0">
                 <a:solidFill>
                   <a:srgbClr val="CCCCCC"/>
                 </a:solidFill>
@@ -13698,7 +13775,7 @@
               <a:t>, </a:t>
             </a:r>
             <a:r>
-              <a:rPr lang="pl-PL" sz="1100" dirty="0" err="1">
+              <a:rPr lang="pl-PL" sz="1200" dirty="0" err="1">
                 <a:solidFill>
                   <a:srgbClr val="9CDCFE"/>
                 </a:solidFill>
@@ -13707,7 +13784,7 @@
               <a:t>dtype</a:t>
             </a:r>
             <a:r>
-              <a:rPr lang="pl-PL" sz="1100" dirty="0">
+              <a:rPr lang="pl-PL" sz="1200" dirty="0">
                 <a:solidFill>
                   <a:srgbClr val="D4D4D4"/>
                 </a:solidFill>
@@ -13716,7 +13793,7 @@
               <a:t>=</a:t>
             </a:r>
             <a:r>
-              <a:rPr lang="pl-PL" sz="1100" dirty="0" err="1">
+              <a:rPr lang="pl-PL" sz="1200" dirty="0" err="1">
                 <a:solidFill>
                   <a:srgbClr val="4EC9B0"/>
                 </a:solidFill>
@@ -13725,7 +13802,7 @@
               <a:t>float</a:t>
             </a:r>
             <a:r>
-              <a:rPr lang="pl-PL" sz="1100" dirty="0">
+              <a:rPr lang="pl-PL" sz="1200" dirty="0">
                 <a:solidFill>
                   <a:srgbClr val="CCCCCC"/>
                 </a:solidFill>
@@ -13736,7 +13813,7 @@
           </a:p>
           <a:p>
             <a:r>
-              <a:rPr lang="pl-PL" sz="1100" dirty="0">
+              <a:rPr lang="pl-PL" sz="1200" dirty="0">
                 <a:solidFill>
                   <a:srgbClr val="CCCCCC"/>
                 </a:solidFill>
@@ -13745,7 +13822,7 @@
               <a:t>    </a:t>
             </a:r>
             <a:r>
-              <a:rPr lang="pl-PL" sz="1100" dirty="0" err="1">
+              <a:rPr lang="pl-PL" sz="1200" dirty="0" err="1">
                 <a:solidFill>
                   <a:srgbClr val="9CDCFE"/>
                 </a:solidFill>
@@ -13754,7 +13831,7 @@
               <a:t>goal</a:t>
             </a:r>
             <a:r>
-              <a:rPr lang="pl-PL" sz="1100" dirty="0">
+              <a:rPr lang="pl-PL" sz="1200" dirty="0">
                 <a:solidFill>
                   <a:srgbClr val="CCCCCC"/>
                 </a:solidFill>
@@ -13763,7 +13840,7 @@
               <a:t>  </a:t>
             </a:r>
             <a:r>
-              <a:rPr lang="pl-PL" sz="1100" dirty="0">
+              <a:rPr lang="pl-PL" sz="1200" dirty="0">
                 <a:solidFill>
                   <a:srgbClr val="D4D4D4"/>
                 </a:solidFill>
@@ -13772,7 +13849,7 @@
               <a:t>=</a:t>
             </a:r>
             <a:r>
-              <a:rPr lang="pl-PL" sz="1100" dirty="0">
+              <a:rPr lang="pl-PL" sz="1200" dirty="0">
                 <a:solidFill>
                   <a:srgbClr val="CCCCCC"/>
                 </a:solidFill>
@@ -13781,7 +13858,7 @@
               <a:t> </a:t>
             </a:r>
             <a:r>
-              <a:rPr lang="pl-PL" sz="1100" dirty="0" err="1">
+              <a:rPr lang="pl-PL" sz="1200" dirty="0" err="1">
                 <a:solidFill>
                   <a:srgbClr val="4EC9B0"/>
                 </a:solidFill>
@@ -13790,7 +13867,7 @@
               <a:t>np</a:t>
             </a:r>
             <a:r>
-              <a:rPr lang="pl-PL" sz="1100" dirty="0" err="1">
+              <a:rPr lang="pl-PL" sz="1200" dirty="0" err="1">
                 <a:solidFill>
                   <a:srgbClr val="CCCCCC"/>
                 </a:solidFill>
@@ -13799,7 +13876,7 @@
               <a:t>.</a:t>
             </a:r>
             <a:r>
-              <a:rPr lang="pl-PL" sz="1100" dirty="0" err="1">
+              <a:rPr lang="pl-PL" sz="1200" dirty="0" err="1">
                 <a:solidFill>
                   <a:srgbClr val="DCDCAA"/>
                 </a:solidFill>
@@ -13808,7 +13885,7 @@
               <a:t>array</a:t>
             </a:r>
             <a:r>
-              <a:rPr lang="pl-PL" sz="1100" dirty="0">
+              <a:rPr lang="pl-PL" sz="1200" dirty="0">
                 <a:solidFill>
                   <a:srgbClr val="CCCCCC"/>
                 </a:solidFill>
@@ -13817,7 +13894,7 @@
               <a:t>(</a:t>
             </a:r>
             <a:r>
-              <a:rPr lang="pl-PL" sz="1100" dirty="0" err="1">
+              <a:rPr lang="pl-PL" sz="1200" dirty="0" err="1">
                 <a:solidFill>
                   <a:srgbClr val="9CDCFE"/>
                 </a:solidFill>
@@ -13826,7 +13903,7 @@
               <a:t>goal_pos</a:t>
             </a:r>
             <a:r>
-              <a:rPr lang="pl-PL" sz="1100" dirty="0">
+              <a:rPr lang="pl-PL" sz="1200" dirty="0">
                 <a:solidFill>
                   <a:srgbClr val="CCCCCC"/>
                 </a:solidFill>
@@ -13835,7 +13912,7 @@
               <a:t>,  </a:t>
             </a:r>
             <a:r>
-              <a:rPr lang="pl-PL" sz="1100" dirty="0" err="1">
+              <a:rPr lang="pl-PL" sz="1200" dirty="0" err="1">
                 <a:solidFill>
                   <a:srgbClr val="9CDCFE"/>
                 </a:solidFill>
@@ -13844,7 +13921,7 @@
               <a:t>dtype</a:t>
             </a:r>
             <a:r>
-              <a:rPr lang="pl-PL" sz="1100" dirty="0">
+              <a:rPr lang="pl-PL" sz="1200" dirty="0">
                 <a:solidFill>
                   <a:srgbClr val="D4D4D4"/>
                 </a:solidFill>
@@ -13853,7 +13930,7 @@
               <a:t>=</a:t>
             </a:r>
             <a:r>
-              <a:rPr lang="pl-PL" sz="1100" dirty="0" err="1">
+              <a:rPr lang="pl-PL" sz="1200" dirty="0" err="1">
                 <a:solidFill>
                   <a:srgbClr val="4EC9B0"/>
                 </a:solidFill>
@@ -13862,7 +13939,7 @@
               <a:t>float</a:t>
             </a:r>
             <a:r>
-              <a:rPr lang="pl-PL" sz="1100" dirty="0">
+              <a:rPr lang="pl-PL" sz="1200" dirty="0">
                 <a:solidFill>
                   <a:srgbClr val="CCCCCC"/>
                 </a:solidFill>
@@ -13873,7 +13950,7 @@
           </a:p>
           <a:p>
             <a:r>
-              <a:rPr lang="pl-PL" sz="1100" dirty="0">
+              <a:rPr lang="pl-PL" sz="1200" dirty="0">
                 <a:solidFill>
                   <a:srgbClr val="CCCCCC"/>
                 </a:solidFill>
@@ -13882,7 +13959,7 @@
               <a:t>    </a:t>
             </a:r>
             <a:r>
-              <a:rPr lang="pl-PL" sz="1100" dirty="0">
+              <a:rPr lang="pl-PL" sz="1200" dirty="0">
                 <a:solidFill>
                   <a:srgbClr val="6A9955"/>
                 </a:solidFill>
@@ -13891,7 +13968,7 @@
               <a:t># </a:t>
             </a:r>
             <a:r>
-              <a:rPr lang="pl-PL" sz="1100" dirty="0" err="1">
+              <a:rPr lang="pl-PL" sz="1200" dirty="0" err="1">
                 <a:solidFill>
                   <a:srgbClr val="6A9955"/>
                 </a:solidFill>
@@ -13900,7 +13977,7 @@
               <a:t>Sila</a:t>
             </a:r>
             <a:r>
-              <a:rPr lang="pl-PL" sz="1100" dirty="0">
+              <a:rPr lang="pl-PL" sz="1200" dirty="0">
                 <a:solidFill>
                   <a:srgbClr val="6A9955"/>
                 </a:solidFill>
@@ -13908,7 +13985,7 @@
               </a:rPr>
               <a:t> atrakcji do celu</a:t>
             </a:r>
-            <a:endParaRPr lang="pl-PL" sz="1100" dirty="0">
+            <a:endParaRPr lang="pl-PL" sz="1200" dirty="0">
               <a:solidFill>
                 <a:srgbClr val="CCCCCC"/>
               </a:solidFill>
@@ -13917,7 +13994,7 @@
           </a:p>
           <a:p>
             <a:r>
-              <a:rPr lang="pl-PL" sz="1100" dirty="0">
+              <a:rPr lang="pl-PL" sz="1200" dirty="0">
                 <a:solidFill>
                   <a:srgbClr val="CCCCCC"/>
                 </a:solidFill>
@@ -13926,7 +14003,7 @@
               <a:t>    </a:t>
             </a:r>
             <a:r>
-              <a:rPr lang="pl-PL" sz="1100" dirty="0" err="1">
+              <a:rPr lang="pl-PL" sz="1200" dirty="0" err="1">
                 <a:solidFill>
                   <a:srgbClr val="9CDCFE"/>
                 </a:solidFill>
@@ -13935,7 +14012,7 @@
               <a:t>f_att</a:t>
             </a:r>
             <a:r>
-              <a:rPr lang="pl-PL" sz="1100" dirty="0">
+              <a:rPr lang="pl-PL" sz="1200" dirty="0">
                 <a:solidFill>
                   <a:srgbClr val="CCCCCC"/>
                 </a:solidFill>
@@ -13944,7 +14021,7 @@
               <a:t> </a:t>
             </a:r>
             <a:r>
-              <a:rPr lang="pl-PL" sz="1100" dirty="0">
+              <a:rPr lang="pl-PL" sz="1200" dirty="0">
                 <a:solidFill>
                   <a:srgbClr val="D4D4D4"/>
                 </a:solidFill>
@@ -13953,7 +14030,7 @@
               <a:t>=</a:t>
             </a:r>
             <a:r>
-              <a:rPr lang="pl-PL" sz="1100" dirty="0">
+              <a:rPr lang="pl-PL" sz="1200" dirty="0">
                 <a:solidFill>
                   <a:srgbClr val="CCCCCC"/>
                 </a:solidFill>
@@ -13962,7 +14039,7 @@
               <a:t> </a:t>
             </a:r>
             <a:r>
-              <a:rPr lang="pl-PL" sz="1100" dirty="0" err="1">
+              <a:rPr lang="pl-PL" sz="1200" dirty="0" err="1">
                 <a:solidFill>
                   <a:srgbClr val="9CDCFE"/>
                 </a:solidFill>
@@ -13971,7 +14048,7 @@
               <a:t>k_att</a:t>
             </a:r>
             <a:r>
-              <a:rPr lang="pl-PL" sz="1100" dirty="0">
+              <a:rPr lang="pl-PL" sz="1200" dirty="0">
                 <a:solidFill>
                   <a:srgbClr val="CCCCCC"/>
                 </a:solidFill>
@@ -13980,7 +14057,7 @@
               <a:t> </a:t>
             </a:r>
             <a:r>
-              <a:rPr lang="pl-PL" sz="1100" dirty="0">
+              <a:rPr lang="pl-PL" sz="1200" dirty="0">
                 <a:solidFill>
                   <a:srgbClr val="D4D4D4"/>
                 </a:solidFill>
@@ -13989,7 +14066,7 @@
               <a:t>*</a:t>
             </a:r>
             <a:r>
-              <a:rPr lang="pl-PL" sz="1100" dirty="0">
+              <a:rPr lang="pl-PL" sz="1200" dirty="0">
                 <a:solidFill>
                   <a:srgbClr val="CCCCCC"/>
                 </a:solidFill>
@@ -13998,7 +14075,7 @@
               <a:t> (</a:t>
             </a:r>
             <a:r>
-              <a:rPr lang="pl-PL" sz="1100" dirty="0" err="1">
+              <a:rPr lang="pl-PL" sz="1200" dirty="0" err="1">
                 <a:solidFill>
                   <a:srgbClr val="9CDCFE"/>
                 </a:solidFill>
@@ -14007,7 +14084,7 @@
               <a:t>goal</a:t>
             </a:r>
             <a:r>
-              <a:rPr lang="pl-PL" sz="1100" dirty="0">
+              <a:rPr lang="pl-PL" sz="1200" dirty="0">
                 <a:solidFill>
                   <a:srgbClr val="CCCCCC"/>
                 </a:solidFill>
@@ -14016,7 +14093,7 @@
               <a:t> </a:t>
             </a:r>
             <a:r>
-              <a:rPr lang="pl-PL" sz="1100" dirty="0">
+              <a:rPr lang="pl-PL" sz="1200" dirty="0">
                 <a:solidFill>
                   <a:srgbClr val="DCDCAA"/>
                 </a:solidFill>
@@ -14025,7 +14102,7 @@
               <a:t>-</a:t>
             </a:r>
             <a:r>
-              <a:rPr lang="pl-PL" sz="1100" dirty="0">
+              <a:rPr lang="pl-PL" sz="1200" dirty="0">
                 <a:solidFill>
                   <a:srgbClr val="CCCCCC"/>
                 </a:solidFill>
@@ -14034,7 +14111,7 @@
               <a:t> </a:t>
             </a:r>
             <a:r>
-              <a:rPr lang="pl-PL" sz="1100" dirty="0">
+              <a:rPr lang="pl-PL" sz="1200" dirty="0">
                 <a:solidFill>
                   <a:srgbClr val="9CDCFE"/>
                 </a:solidFill>
@@ -14043,7 +14120,7 @@
               <a:t>robot</a:t>
             </a:r>
             <a:r>
-              <a:rPr lang="pl-PL" sz="1100" dirty="0">
+              <a:rPr lang="pl-PL" sz="1200" dirty="0">
                 <a:solidFill>
                   <a:srgbClr val="CCCCCC"/>
                 </a:solidFill>
@@ -14054,7 +14131,7 @@
           </a:p>
           <a:p>
             <a:r>
-              <a:rPr lang="pl-PL" sz="1100" dirty="0">
+              <a:rPr lang="pl-PL" sz="1200" dirty="0">
                 <a:solidFill>
                   <a:srgbClr val="CCCCCC"/>
                 </a:solidFill>
@@ -14063,7 +14140,7 @@
               <a:t>    </a:t>
             </a:r>
             <a:r>
-              <a:rPr lang="pl-PL" sz="1100" dirty="0">
+              <a:rPr lang="pl-PL" sz="1200" dirty="0">
                 <a:solidFill>
                   <a:srgbClr val="6A9955"/>
                 </a:solidFill>
@@ -14072,7 +14149,7 @@
               <a:t># Suma sil odpychania od </a:t>
             </a:r>
             <a:r>
-              <a:rPr lang="pl-PL" sz="1100" dirty="0" smtClean="0">
+              <a:rPr lang="pl-PL" sz="1200" dirty="0" smtClean="0">
                 <a:solidFill>
                   <a:srgbClr val="6A9955"/>
                 </a:solidFill>
@@ -14080,7 +14157,7 @@
               </a:rPr>
               <a:t>przeszkód</a:t>
             </a:r>
-            <a:endParaRPr lang="pl-PL" sz="1100" dirty="0">
+            <a:endParaRPr lang="pl-PL" sz="1200" dirty="0">
               <a:solidFill>
                 <a:srgbClr val="CCCCCC"/>
               </a:solidFill>
@@ -14089,7 +14166,7 @@
           </a:p>
           <a:p>
             <a:r>
-              <a:rPr lang="pl-PL" sz="1100" dirty="0">
+              <a:rPr lang="pl-PL" sz="1200" dirty="0">
                 <a:solidFill>
                   <a:srgbClr val="CCCCCC"/>
                 </a:solidFill>
@@ -14098,7 +14175,7 @@
               <a:t>    </a:t>
             </a:r>
             <a:r>
-              <a:rPr lang="pl-PL" sz="1100" dirty="0" err="1">
+              <a:rPr lang="pl-PL" sz="1200" dirty="0" err="1">
                 <a:solidFill>
                   <a:srgbClr val="9CDCFE"/>
                 </a:solidFill>
@@ -14107,7 +14184,7 @@
               <a:t>f_rep</a:t>
             </a:r>
             <a:r>
-              <a:rPr lang="pl-PL" sz="1100" dirty="0">
+              <a:rPr lang="pl-PL" sz="1200" dirty="0">
                 <a:solidFill>
                   <a:srgbClr val="CCCCCC"/>
                 </a:solidFill>
@@ -14116,7 +14193,7 @@
               <a:t> </a:t>
             </a:r>
             <a:r>
-              <a:rPr lang="pl-PL" sz="1100" dirty="0">
+              <a:rPr lang="pl-PL" sz="1200" dirty="0">
                 <a:solidFill>
                   <a:srgbClr val="D4D4D4"/>
                 </a:solidFill>
@@ -14125,7 +14202,7 @@
               <a:t>=</a:t>
             </a:r>
             <a:r>
-              <a:rPr lang="pl-PL" sz="1100" dirty="0">
+              <a:rPr lang="pl-PL" sz="1200" dirty="0">
                 <a:solidFill>
                   <a:srgbClr val="CCCCCC"/>
                 </a:solidFill>
@@ -14134,7 +14211,7 @@
               <a:t> </a:t>
             </a:r>
             <a:r>
-              <a:rPr lang="pl-PL" sz="1100" dirty="0" err="1">
+              <a:rPr lang="pl-PL" sz="1200" dirty="0" err="1">
                 <a:solidFill>
                   <a:srgbClr val="4EC9B0"/>
                 </a:solidFill>
@@ -14143,7 +14220,7 @@
               <a:t>np</a:t>
             </a:r>
             <a:r>
-              <a:rPr lang="pl-PL" sz="1100" dirty="0" err="1">
+              <a:rPr lang="pl-PL" sz="1200" dirty="0" err="1">
                 <a:solidFill>
                   <a:srgbClr val="CCCCCC"/>
                 </a:solidFill>
@@ -14152,7 +14229,7 @@
               <a:t>.</a:t>
             </a:r>
             <a:r>
-              <a:rPr lang="pl-PL" sz="1100" dirty="0" err="1">
+              <a:rPr lang="pl-PL" sz="1200" dirty="0" err="1">
                 <a:solidFill>
                   <a:srgbClr val="DCDCAA"/>
                 </a:solidFill>
@@ -14161,7 +14238,7 @@
               <a:t>zeros</a:t>
             </a:r>
             <a:r>
-              <a:rPr lang="pl-PL" sz="1100" dirty="0">
+              <a:rPr lang="pl-PL" sz="1200" dirty="0">
                 <a:solidFill>
                   <a:srgbClr val="CCCCCC"/>
                 </a:solidFill>
@@ -14170,7 +14247,7 @@
               <a:t>(</a:t>
             </a:r>
             <a:r>
-              <a:rPr lang="pl-PL" sz="1100" dirty="0">
+              <a:rPr lang="pl-PL" sz="1200" dirty="0">
                 <a:solidFill>
                   <a:srgbClr val="B5CEA8"/>
                 </a:solidFill>
@@ -14179,7 +14256,7 @@
               <a:t>2</a:t>
             </a:r>
             <a:r>
-              <a:rPr lang="pl-PL" sz="1100" dirty="0">
+              <a:rPr lang="pl-PL" sz="1200" dirty="0">
                 <a:solidFill>
                   <a:srgbClr val="CCCCCC"/>
                 </a:solidFill>
@@ -14190,7 +14267,7 @@
           </a:p>
           <a:p>
             <a:r>
-              <a:rPr lang="pl-PL" sz="1100" dirty="0">
+              <a:rPr lang="pl-PL" sz="1200" dirty="0">
                 <a:solidFill>
                   <a:srgbClr val="CCCCCC"/>
                 </a:solidFill>
@@ -14199,7 +14276,7 @@
               <a:t>    </a:t>
             </a:r>
             <a:r>
-              <a:rPr lang="pl-PL" sz="1100" dirty="0">
+              <a:rPr lang="pl-PL" sz="1200" dirty="0">
                 <a:solidFill>
                   <a:srgbClr val="C586C0"/>
                 </a:solidFill>
@@ -14208,7 +14285,7 @@
               <a:t>for</a:t>
             </a:r>
             <a:r>
-              <a:rPr lang="pl-PL" sz="1100" dirty="0">
+              <a:rPr lang="pl-PL" sz="1200" dirty="0">
                 <a:solidFill>
                   <a:srgbClr val="CCCCCC"/>
                 </a:solidFill>
@@ -14217,7 +14294,7 @@
               <a:t> </a:t>
             </a:r>
             <a:r>
-              <a:rPr lang="pl-PL" sz="1100" dirty="0" err="1">
+              <a:rPr lang="pl-PL" sz="1200" dirty="0" err="1">
                 <a:solidFill>
                   <a:srgbClr val="9CDCFE"/>
                 </a:solidFill>
@@ -14226,7 +14303,7 @@
               <a:t>obs</a:t>
             </a:r>
             <a:r>
-              <a:rPr lang="pl-PL" sz="1100" dirty="0">
+              <a:rPr lang="pl-PL" sz="1200" dirty="0">
                 <a:solidFill>
                   <a:srgbClr val="CCCCCC"/>
                 </a:solidFill>
@@ -14235,7 +14312,7 @@
               <a:t> </a:t>
             </a:r>
             <a:r>
-              <a:rPr lang="pl-PL" sz="1100" dirty="0">
+              <a:rPr lang="pl-PL" sz="1200" dirty="0">
                 <a:solidFill>
                   <a:srgbClr val="C586C0"/>
                 </a:solidFill>
@@ -14244,7 +14321,7 @@
               <a:t>in</a:t>
             </a:r>
             <a:r>
-              <a:rPr lang="pl-PL" sz="1100" dirty="0">
+              <a:rPr lang="pl-PL" sz="1200" dirty="0">
                 <a:solidFill>
                   <a:srgbClr val="CCCCCC"/>
                 </a:solidFill>
@@ -14253,7 +14330,7 @@
               <a:t> </a:t>
             </a:r>
             <a:r>
-              <a:rPr lang="pl-PL" sz="1100" dirty="0" err="1">
+              <a:rPr lang="pl-PL" sz="1200" dirty="0" err="1">
                 <a:solidFill>
                   <a:srgbClr val="9CDCFE"/>
                 </a:solidFill>
@@ -14262,7 +14339,7 @@
               <a:t>obstacles</a:t>
             </a:r>
             <a:r>
-              <a:rPr lang="pl-PL" sz="1100" dirty="0">
+              <a:rPr lang="pl-PL" sz="1200" dirty="0">
                 <a:solidFill>
                   <a:srgbClr val="CCCCCC"/>
                 </a:solidFill>
@@ -14273,7 +14350,7 @@
           </a:p>
           <a:p>
             <a:r>
-              <a:rPr lang="pl-PL" sz="1100" dirty="0">
+              <a:rPr lang="pl-PL" sz="1200" dirty="0">
                 <a:solidFill>
                   <a:srgbClr val="CCCCCC"/>
                 </a:solidFill>
@@ -14282,7 +14359,7 @@
               <a:t>        </a:t>
             </a:r>
             <a:r>
-              <a:rPr lang="pl-PL" sz="1100" dirty="0" err="1">
+              <a:rPr lang="pl-PL" sz="1200" dirty="0" err="1">
                 <a:solidFill>
                   <a:srgbClr val="9CDCFE"/>
                 </a:solidFill>
@@ -14291,7 +14368,7 @@
               <a:t>diff</a:t>
             </a:r>
             <a:r>
-              <a:rPr lang="pl-PL" sz="1100" dirty="0">
+              <a:rPr lang="pl-PL" sz="1200" dirty="0">
                 <a:solidFill>
                   <a:srgbClr val="CCCCCC"/>
                 </a:solidFill>
@@ -14300,7 +14377,7 @@
               <a:t> </a:t>
             </a:r>
             <a:r>
-              <a:rPr lang="pl-PL" sz="1100" dirty="0">
+              <a:rPr lang="pl-PL" sz="1200" dirty="0">
                 <a:solidFill>
                   <a:srgbClr val="D4D4D4"/>
                 </a:solidFill>
@@ -14309,7 +14386,7 @@
               <a:t>=</a:t>
             </a:r>
             <a:r>
-              <a:rPr lang="pl-PL" sz="1100" dirty="0">
+              <a:rPr lang="pl-PL" sz="1200" dirty="0">
                 <a:solidFill>
                   <a:srgbClr val="CCCCCC"/>
                 </a:solidFill>
@@ -14318,7 +14395,7 @@
               <a:t> </a:t>
             </a:r>
             <a:r>
-              <a:rPr lang="pl-PL" sz="1100" dirty="0">
+              <a:rPr lang="pl-PL" sz="1200" dirty="0">
                 <a:solidFill>
                   <a:srgbClr val="9CDCFE"/>
                 </a:solidFill>
@@ -14327,7 +14404,7 @@
               <a:t>robot</a:t>
             </a:r>
             <a:r>
-              <a:rPr lang="pl-PL" sz="1100" dirty="0">
+              <a:rPr lang="pl-PL" sz="1200" dirty="0">
                 <a:solidFill>
                   <a:srgbClr val="CCCCCC"/>
                 </a:solidFill>
@@ -14336,7 +14413,7 @@
               <a:t> </a:t>
             </a:r>
             <a:r>
-              <a:rPr lang="pl-PL" sz="1100" dirty="0">
+              <a:rPr lang="pl-PL" sz="1200" dirty="0">
                 <a:solidFill>
                   <a:srgbClr val="DCDCAA"/>
                 </a:solidFill>
@@ -14345,7 +14422,7 @@
               <a:t>-</a:t>
             </a:r>
             <a:r>
-              <a:rPr lang="pl-PL" sz="1100" dirty="0">
+              <a:rPr lang="pl-PL" sz="1200" dirty="0">
                 <a:solidFill>
                   <a:srgbClr val="CCCCCC"/>
                 </a:solidFill>
@@ -14354,7 +14431,7 @@
               <a:t> </a:t>
             </a:r>
             <a:r>
-              <a:rPr lang="pl-PL" sz="1100" dirty="0" err="1">
+              <a:rPr lang="pl-PL" sz="1200" dirty="0" err="1">
                 <a:solidFill>
                   <a:srgbClr val="4EC9B0"/>
                 </a:solidFill>
@@ -14363,7 +14440,7 @@
               <a:t>np</a:t>
             </a:r>
             <a:r>
-              <a:rPr lang="pl-PL" sz="1100" dirty="0" err="1">
+              <a:rPr lang="pl-PL" sz="1200" dirty="0" err="1">
                 <a:solidFill>
                   <a:srgbClr val="CCCCCC"/>
                 </a:solidFill>
@@ -14372,7 +14449,7 @@
               <a:t>.</a:t>
             </a:r>
             <a:r>
-              <a:rPr lang="pl-PL" sz="1100" dirty="0" err="1">
+              <a:rPr lang="pl-PL" sz="1200" dirty="0" err="1">
                 <a:solidFill>
                   <a:srgbClr val="DCDCAA"/>
                 </a:solidFill>
@@ -14381,7 +14458,7 @@
               <a:t>array</a:t>
             </a:r>
             <a:r>
-              <a:rPr lang="pl-PL" sz="1100" dirty="0">
+              <a:rPr lang="pl-PL" sz="1200" dirty="0">
                 <a:solidFill>
                   <a:srgbClr val="CCCCCC"/>
                 </a:solidFill>
@@ -14390,7 +14467,7 @@
               <a:t>(</a:t>
             </a:r>
             <a:r>
-              <a:rPr lang="pl-PL" sz="1100" dirty="0" err="1">
+              <a:rPr lang="pl-PL" sz="1200" dirty="0" err="1">
                 <a:solidFill>
                   <a:srgbClr val="9CDCFE"/>
                 </a:solidFill>
@@ -14399,7 +14476,7 @@
               <a:t>obs</a:t>
             </a:r>
             <a:r>
-              <a:rPr lang="pl-PL" sz="1100" dirty="0">
+              <a:rPr lang="pl-PL" sz="1200" dirty="0">
                 <a:solidFill>
                   <a:srgbClr val="CCCCCC"/>
                 </a:solidFill>
@@ -14410,7 +14487,7 @@
           </a:p>
           <a:p>
             <a:r>
-              <a:rPr lang="pl-PL" sz="1100" dirty="0">
+              <a:rPr lang="pl-PL" sz="1200" dirty="0">
                 <a:solidFill>
                   <a:srgbClr val="CCCCCC"/>
                 </a:solidFill>
@@ -14419,7 +14496,7 @@
               <a:t>        </a:t>
             </a:r>
             <a:r>
-              <a:rPr lang="pl-PL" sz="1100" dirty="0">
+              <a:rPr lang="pl-PL" sz="1200" dirty="0">
                 <a:solidFill>
                   <a:srgbClr val="9CDCFE"/>
                 </a:solidFill>
@@ -14428,7 +14505,7 @@
               <a:t>d</a:t>
             </a:r>
             <a:r>
-              <a:rPr lang="pl-PL" sz="1100" dirty="0">
+              <a:rPr lang="pl-PL" sz="1200" dirty="0">
                 <a:solidFill>
                   <a:srgbClr val="CCCCCC"/>
                 </a:solidFill>
@@ -14437,7 +14514,7 @@
               <a:t>    </a:t>
             </a:r>
             <a:r>
-              <a:rPr lang="pl-PL" sz="1100" dirty="0">
+              <a:rPr lang="pl-PL" sz="1200" dirty="0">
                 <a:solidFill>
                   <a:srgbClr val="D4D4D4"/>
                 </a:solidFill>
@@ -14446,7 +14523,7 @@
               <a:t>=</a:t>
             </a:r>
             <a:r>
-              <a:rPr lang="pl-PL" sz="1100" dirty="0">
+              <a:rPr lang="pl-PL" sz="1200" dirty="0">
                 <a:solidFill>
                   <a:srgbClr val="CCCCCC"/>
                 </a:solidFill>
@@ -14455,7 +14532,7 @@
               <a:t> </a:t>
             </a:r>
             <a:r>
-              <a:rPr lang="pl-PL" sz="1100" dirty="0" err="1">
+              <a:rPr lang="pl-PL" sz="1200" dirty="0" err="1">
                 <a:solidFill>
                   <a:srgbClr val="4EC9B0"/>
                 </a:solidFill>
@@ -14464,7 +14541,7 @@
               <a:t>np</a:t>
             </a:r>
             <a:r>
-              <a:rPr lang="pl-PL" sz="1100" dirty="0" err="1">
+              <a:rPr lang="pl-PL" sz="1200" dirty="0" err="1">
                 <a:solidFill>
                   <a:srgbClr val="CCCCCC"/>
                 </a:solidFill>
@@ -14473,7 +14550,7 @@
               <a:t>.</a:t>
             </a:r>
             <a:r>
-              <a:rPr lang="pl-PL" sz="1100" dirty="0" err="1">
+              <a:rPr lang="pl-PL" sz="1200" dirty="0" err="1">
                 <a:solidFill>
                   <a:srgbClr val="4EC9B0"/>
                 </a:solidFill>
@@ -14482,7 +14559,7 @@
               <a:t>linalg</a:t>
             </a:r>
             <a:r>
-              <a:rPr lang="pl-PL" sz="1100" dirty="0" err="1">
+              <a:rPr lang="pl-PL" sz="1200" dirty="0" err="1">
                 <a:solidFill>
                   <a:srgbClr val="CCCCCC"/>
                 </a:solidFill>
@@ -14491,7 +14568,7 @@
               <a:t>.</a:t>
             </a:r>
             <a:r>
-              <a:rPr lang="pl-PL" sz="1100" dirty="0" err="1">
+              <a:rPr lang="pl-PL" sz="1200" dirty="0" err="1">
                 <a:solidFill>
                   <a:srgbClr val="DCDCAA"/>
                 </a:solidFill>
@@ -14500,7 +14577,7 @@
               <a:t>norm</a:t>
             </a:r>
             <a:r>
-              <a:rPr lang="pl-PL" sz="1100" dirty="0">
+              <a:rPr lang="pl-PL" sz="1200" dirty="0">
                 <a:solidFill>
                   <a:srgbClr val="CCCCCC"/>
                 </a:solidFill>
@@ -14509,7 +14586,7 @@
               <a:t>(</a:t>
             </a:r>
             <a:r>
-              <a:rPr lang="pl-PL" sz="1100" dirty="0" err="1">
+              <a:rPr lang="pl-PL" sz="1200" dirty="0" err="1">
                 <a:solidFill>
                   <a:srgbClr val="9CDCFE"/>
                 </a:solidFill>
@@ -14518,7 +14595,7 @@
               <a:t>diff</a:t>
             </a:r>
             <a:r>
-              <a:rPr lang="pl-PL" sz="1100" dirty="0">
+              <a:rPr lang="pl-PL" sz="1200" dirty="0">
                 <a:solidFill>
                   <a:srgbClr val="CCCCCC"/>
                 </a:solidFill>
@@ -14527,7 +14604,7 @@
               <a:t>) </a:t>
             </a:r>
             <a:r>
-              <a:rPr lang="pl-PL" sz="1100" dirty="0">
+              <a:rPr lang="pl-PL" sz="1200" dirty="0">
                 <a:solidFill>
                   <a:srgbClr val="DCDCAA"/>
                 </a:solidFill>
@@ -14536,7 +14613,7 @@
               <a:t>+</a:t>
             </a:r>
             <a:r>
-              <a:rPr lang="pl-PL" sz="1100" dirty="0">
+              <a:rPr lang="pl-PL" sz="1200" dirty="0">
                 <a:solidFill>
                   <a:srgbClr val="CCCCCC"/>
                 </a:solidFill>
@@ -14545,7 +14622,7 @@
               <a:t> </a:t>
             </a:r>
             <a:r>
-              <a:rPr lang="pl-PL" sz="1100" dirty="0">
+              <a:rPr lang="pl-PL" sz="1200" dirty="0">
                 <a:solidFill>
                   <a:srgbClr val="B5CEA8"/>
                 </a:solidFill>
@@ -14553,7 +14630,7 @@
               </a:rPr>
               <a:t>1e-6</a:t>
             </a:r>
-            <a:endParaRPr lang="pl-PL" sz="1100" dirty="0">
+            <a:endParaRPr lang="pl-PL" sz="1200" dirty="0">
               <a:solidFill>
                 <a:srgbClr val="CCCCCC"/>
               </a:solidFill>
@@ -14562,7 +14639,7 @@
           </a:p>
           <a:p>
             <a:r>
-              <a:rPr lang="pl-PL" sz="1100" dirty="0">
+              <a:rPr lang="pl-PL" sz="1200" dirty="0">
                 <a:solidFill>
                   <a:srgbClr val="CCCCCC"/>
                 </a:solidFill>
@@ -14571,7 +14648,7 @@
               <a:t>        </a:t>
             </a:r>
             <a:r>
-              <a:rPr lang="pl-PL" sz="1100" dirty="0" err="1">
+              <a:rPr lang="pl-PL" sz="1200" dirty="0" err="1">
                 <a:solidFill>
                   <a:srgbClr val="C586C0"/>
                 </a:solidFill>
@@ -14580,7 +14657,7 @@
               <a:t>if</a:t>
             </a:r>
             <a:r>
-              <a:rPr lang="pl-PL" sz="1100" dirty="0">
+              <a:rPr lang="pl-PL" sz="1200" dirty="0">
                 <a:solidFill>
                   <a:srgbClr val="CCCCCC"/>
                 </a:solidFill>
@@ -14589,7 +14666,7 @@
               <a:t> </a:t>
             </a:r>
             <a:r>
-              <a:rPr lang="pl-PL" sz="1100" dirty="0">
+              <a:rPr lang="pl-PL" sz="1200" dirty="0">
                 <a:solidFill>
                   <a:srgbClr val="9CDCFE"/>
                 </a:solidFill>
@@ -14598,7 +14675,7 @@
               <a:t>d</a:t>
             </a:r>
             <a:r>
-              <a:rPr lang="pl-PL" sz="1100" dirty="0">
+              <a:rPr lang="pl-PL" sz="1200" dirty="0">
                 <a:solidFill>
                   <a:srgbClr val="CCCCCC"/>
                 </a:solidFill>
@@ -14607,7 +14684,7 @@
               <a:t> </a:t>
             </a:r>
             <a:r>
-              <a:rPr lang="pl-PL" sz="1100" dirty="0">
+              <a:rPr lang="pl-PL" sz="1200" dirty="0">
                 <a:solidFill>
                   <a:srgbClr val="DCDCAA"/>
                 </a:solidFill>
@@ -14616,7 +14693,7 @@
               <a:t>&lt;</a:t>
             </a:r>
             <a:r>
-              <a:rPr lang="pl-PL" sz="1100" dirty="0">
+              <a:rPr lang="pl-PL" sz="1200" dirty="0">
                 <a:solidFill>
                   <a:srgbClr val="CCCCCC"/>
                 </a:solidFill>
@@ -14625,7 +14702,7 @@
               <a:t> </a:t>
             </a:r>
             <a:r>
-              <a:rPr lang="pl-PL" sz="1100" dirty="0">
+              <a:rPr lang="pl-PL" sz="1200" dirty="0">
                 <a:solidFill>
                   <a:srgbClr val="9CDCFE"/>
                 </a:solidFill>
@@ -14634,7 +14711,7 @@
               <a:t>d0</a:t>
             </a:r>
             <a:r>
-              <a:rPr lang="pl-PL" sz="1100" dirty="0">
+              <a:rPr lang="pl-PL" sz="1200" dirty="0">
                 <a:solidFill>
                   <a:srgbClr val="CCCCCC"/>
                 </a:solidFill>
@@ -14645,7 +14722,7 @@
           </a:p>
           <a:p>
             <a:r>
-              <a:rPr lang="pl-PL" sz="1100" dirty="0">
+              <a:rPr lang="pl-PL" sz="1200" dirty="0">
                 <a:solidFill>
                   <a:srgbClr val="CCCCCC"/>
                 </a:solidFill>
@@ -14654,7 +14731,7 @@
               <a:t>            </a:t>
             </a:r>
             <a:r>
-              <a:rPr lang="pl-PL" sz="1100" dirty="0" err="1">
+              <a:rPr lang="pl-PL" sz="1200" dirty="0" err="1">
                 <a:solidFill>
                   <a:srgbClr val="9CDCFE"/>
                 </a:solidFill>
@@ -14663,7 +14740,7 @@
               <a:t>f_rep</a:t>
             </a:r>
             <a:r>
-              <a:rPr lang="pl-PL" sz="1100" dirty="0">
+              <a:rPr lang="pl-PL" sz="1200" dirty="0">
                 <a:solidFill>
                   <a:srgbClr val="CCCCCC"/>
                 </a:solidFill>
@@ -14672,7 +14749,7 @@
               <a:t> </a:t>
             </a:r>
             <a:r>
-              <a:rPr lang="pl-PL" sz="1100" dirty="0">
+              <a:rPr lang="pl-PL" sz="1200" dirty="0">
                 <a:solidFill>
                   <a:srgbClr val="DCDCAA"/>
                 </a:solidFill>
@@ -14681,7 +14758,7 @@
               <a:t>+=</a:t>
             </a:r>
             <a:r>
-              <a:rPr lang="pl-PL" sz="1100" dirty="0">
+              <a:rPr lang="pl-PL" sz="1200" dirty="0">
                 <a:solidFill>
                   <a:srgbClr val="CCCCCC"/>
                 </a:solidFill>
@@ -14690,7 +14767,7 @@
               <a:t> </a:t>
             </a:r>
             <a:r>
-              <a:rPr lang="pl-PL" sz="1100" dirty="0" err="1">
+              <a:rPr lang="pl-PL" sz="1200" dirty="0" err="1">
                 <a:solidFill>
                   <a:srgbClr val="9CDCFE"/>
                 </a:solidFill>
@@ -14699,7 +14776,7 @@
               <a:t>k_rep</a:t>
             </a:r>
             <a:r>
-              <a:rPr lang="pl-PL" sz="1100" dirty="0">
+              <a:rPr lang="pl-PL" sz="1200" dirty="0">
                 <a:solidFill>
                   <a:srgbClr val="CCCCCC"/>
                 </a:solidFill>
@@ -14708,7 +14785,7 @@
               <a:t> </a:t>
             </a:r>
             <a:r>
-              <a:rPr lang="pl-PL" sz="1100" dirty="0">
+              <a:rPr lang="pl-PL" sz="1200" dirty="0">
                 <a:solidFill>
                   <a:srgbClr val="D4D4D4"/>
                 </a:solidFill>
@@ -14717,7 +14794,7 @@
               <a:t>*</a:t>
             </a:r>
             <a:r>
-              <a:rPr lang="pl-PL" sz="1100" dirty="0">
+              <a:rPr lang="pl-PL" sz="1200" dirty="0">
                 <a:solidFill>
                   <a:srgbClr val="CCCCCC"/>
                 </a:solidFill>
@@ -14726,7 +14803,7 @@
               <a:t> (</a:t>
             </a:r>
             <a:r>
-              <a:rPr lang="pl-PL" sz="1100" dirty="0">
+              <a:rPr lang="pl-PL" sz="1200" dirty="0">
                 <a:solidFill>
                   <a:srgbClr val="B5CEA8"/>
                 </a:solidFill>
@@ -14735,7 +14812,7 @@
               <a:t>1</a:t>
             </a:r>
             <a:r>
-              <a:rPr lang="pl-PL" sz="1100" dirty="0">
+              <a:rPr lang="pl-PL" sz="1200" dirty="0">
                 <a:solidFill>
                   <a:srgbClr val="D4D4D4"/>
                 </a:solidFill>
@@ -14744,7 +14821,7 @@
               <a:t>/</a:t>
             </a:r>
             <a:r>
-              <a:rPr lang="pl-PL" sz="1100" dirty="0">
+              <a:rPr lang="pl-PL" sz="1200" dirty="0">
                 <a:solidFill>
                   <a:srgbClr val="9CDCFE"/>
                 </a:solidFill>
@@ -14753,7 +14830,7 @@
               <a:t>d</a:t>
             </a:r>
             <a:r>
-              <a:rPr lang="pl-PL" sz="1100" dirty="0">
+              <a:rPr lang="pl-PL" sz="1200" dirty="0">
                 <a:solidFill>
                   <a:srgbClr val="CCCCCC"/>
                 </a:solidFill>
@@ -14762,7 +14839,7 @@
               <a:t> </a:t>
             </a:r>
             <a:r>
-              <a:rPr lang="pl-PL" sz="1100" dirty="0">
+              <a:rPr lang="pl-PL" sz="1200" dirty="0">
                 <a:solidFill>
                   <a:srgbClr val="DCDCAA"/>
                 </a:solidFill>
@@ -14771,7 +14848,7 @@
               <a:t>-</a:t>
             </a:r>
             <a:r>
-              <a:rPr lang="pl-PL" sz="1100" dirty="0">
+              <a:rPr lang="pl-PL" sz="1200" dirty="0">
                 <a:solidFill>
                   <a:srgbClr val="CCCCCC"/>
                 </a:solidFill>
@@ -14780,7 +14857,7 @@
               <a:t> </a:t>
             </a:r>
             <a:r>
-              <a:rPr lang="pl-PL" sz="1100" dirty="0">
+              <a:rPr lang="pl-PL" sz="1200" dirty="0">
                 <a:solidFill>
                   <a:srgbClr val="B5CEA8"/>
                 </a:solidFill>
@@ -14789,7 +14866,7 @@
               <a:t>1</a:t>
             </a:r>
             <a:r>
-              <a:rPr lang="pl-PL" sz="1100" dirty="0">
+              <a:rPr lang="pl-PL" sz="1200" dirty="0">
                 <a:solidFill>
                   <a:srgbClr val="D4D4D4"/>
                 </a:solidFill>
@@ -14798,7 +14875,7 @@
               <a:t>/</a:t>
             </a:r>
             <a:r>
-              <a:rPr lang="pl-PL" sz="1100" dirty="0">
+              <a:rPr lang="pl-PL" sz="1200" dirty="0">
                 <a:solidFill>
                   <a:srgbClr val="9CDCFE"/>
                 </a:solidFill>
@@ -14807,7 +14884,7 @@
               <a:t>d0</a:t>
             </a:r>
             <a:r>
-              <a:rPr lang="pl-PL" sz="1100" dirty="0">
+              <a:rPr lang="pl-PL" sz="1200" dirty="0">
                 <a:solidFill>
                   <a:srgbClr val="CCCCCC"/>
                 </a:solidFill>
@@ -14816,7 +14893,7 @@
               <a:t>) </a:t>
             </a:r>
             <a:r>
-              <a:rPr lang="pl-PL" sz="1100" dirty="0">
+              <a:rPr lang="pl-PL" sz="1200" dirty="0">
                 <a:solidFill>
                   <a:srgbClr val="DCDCAA"/>
                 </a:solidFill>
@@ -14825,7 +14902,7 @@
               <a:t>*</a:t>
             </a:r>
             <a:r>
-              <a:rPr lang="pl-PL" sz="1100" dirty="0">
+              <a:rPr lang="pl-PL" sz="1200" dirty="0">
                 <a:solidFill>
                   <a:srgbClr val="CCCCCC"/>
                 </a:solidFill>
@@ -14834,7 +14911,7 @@
               <a:t> </a:t>
             </a:r>
             <a:r>
-              <a:rPr lang="pl-PL" sz="1100" dirty="0" err="1">
+              <a:rPr lang="pl-PL" sz="1200" dirty="0" err="1">
                 <a:solidFill>
                   <a:srgbClr val="9CDCFE"/>
                 </a:solidFill>
@@ -14843,7 +14920,7 @@
               <a:t>diff</a:t>
             </a:r>
             <a:r>
-              <a:rPr lang="pl-PL" sz="1100" dirty="0">
+              <a:rPr lang="pl-PL" sz="1200" dirty="0">
                 <a:solidFill>
                   <a:srgbClr val="CCCCCC"/>
                 </a:solidFill>
@@ -14852,7 +14929,7 @@
               <a:t> </a:t>
             </a:r>
             <a:r>
-              <a:rPr lang="pl-PL" sz="1100" dirty="0">
+              <a:rPr lang="pl-PL" sz="1200" dirty="0">
                 <a:solidFill>
                   <a:srgbClr val="DCDCAA"/>
                 </a:solidFill>
@@ -14861,7 +14938,7 @@
               <a:t>/</a:t>
             </a:r>
             <a:r>
-              <a:rPr lang="pl-PL" sz="1100" dirty="0">
+              <a:rPr lang="pl-PL" sz="1200" dirty="0">
                 <a:solidFill>
                   <a:srgbClr val="CCCCCC"/>
                 </a:solidFill>
@@ -14870,7 +14947,7 @@
               <a:t> </a:t>
             </a:r>
             <a:r>
-              <a:rPr lang="pl-PL" sz="1100" dirty="0">
+              <a:rPr lang="pl-PL" sz="1200" dirty="0">
                 <a:solidFill>
                   <a:srgbClr val="9CDCFE"/>
                 </a:solidFill>
@@ -14879,7 +14956,7 @@
               <a:t>d</a:t>
             </a:r>
             <a:r>
-              <a:rPr lang="pl-PL" sz="1100" dirty="0">
+              <a:rPr lang="pl-PL" sz="1200" dirty="0">
                 <a:solidFill>
                   <a:srgbClr val="DCDCAA"/>
                 </a:solidFill>
@@ -14888,7 +14965,7 @@
               <a:t>**</a:t>
             </a:r>
             <a:r>
-              <a:rPr lang="pl-PL" sz="1100" dirty="0">
+              <a:rPr lang="pl-PL" sz="1200" dirty="0">
                 <a:solidFill>
                   <a:srgbClr val="B5CEA8"/>
                 </a:solidFill>
@@ -14896,7 +14973,7 @@
               </a:rPr>
               <a:t>3</a:t>
             </a:r>
-            <a:endParaRPr lang="pl-PL" sz="1100" dirty="0">
+            <a:endParaRPr lang="pl-PL" sz="1200" dirty="0">
               <a:solidFill>
                 <a:srgbClr val="CCCCCC"/>
               </a:solidFill>
@@ -14905,7 +14982,7 @@
           </a:p>
           <a:p>
             <a:r>
-              <a:rPr lang="pl-PL" sz="1100" dirty="0">
+              <a:rPr lang="pl-PL" sz="1200" dirty="0">
                 <a:solidFill>
                   <a:srgbClr val="CCCCCC"/>
                 </a:solidFill>
@@ -14914,7 +14991,7 @@
               <a:t>    </a:t>
             </a:r>
             <a:r>
-              <a:rPr lang="pl-PL" sz="1100" dirty="0" err="1">
+              <a:rPr lang="pl-PL" sz="1200" dirty="0" err="1">
                 <a:solidFill>
                   <a:srgbClr val="9CDCFE"/>
                 </a:solidFill>
@@ -14923,7 +15000,7 @@
               <a:t>total</a:t>
             </a:r>
             <a:r>
-              <a:rPr lang="pl-PL" sz="1100" dirty="0">
+              <a:rPr lang="pl-PL" sz="1200" dirty="0">
                 <a:solidFill>
                   <a:srgbClr val="CCCCCC"/>
                 </a:solidFill>
@@ -14932,7 +15009,7 @@
               <a:t> </a:t>
             </a:r>
             <a:r>
-              <a:rPr lang="pl-PL" sz="1100" dirty="0">
+              <a:rPr lang="pl-PL" sz="1200" dirty="0">
                 <a:solidFill>
                   <a:srgbClr val="D4D4D4"/>
                 </a:solidFill>
@@ -14941,7 +15018,7 @@
               <a:t>=</a:t>
             </a:r>
             <a:r>
-              <a:rPr lang="pl-PL" sz="1100" dirty="0">
+              <a:rPr lang="pl-PL" sz="1200" dirty="0">
                 <a:solidFill>
                   <a:srgbClr val="CCCCCC"/>
                 </a:solidFill>
@@ -14950,7 +15027,7 @@
               <a:t> </a:t>
             </a:r>
             <a:r>
-              <a:rPr lang="pl-PL" sz="1100" dirty="0" err="1">
+              <a:rPr lang="pl-PL" sz="1200" dirty="0" err="1">
                 <a:solidFill>
                   <a:srgbClr val="9CDCFE"/>
                 </a:solidFill>
@@ -14959,7 +15036,7 @@
               <a:t>f_att</a:t>
             </a:r>
             <a:r>
-              <a:rPr lang="pl-PL" sz="1100" dirty="0">
+              <a:rPr lang="pl-PL" sz="1200" dirty="0">
                 <a:solidFill>
                   <a:srgbClr val="CCCCCC"/>
                 </a:solidFill>
@@ -14968,7 +15045,7 @@
               <a:t> </a:t>
             </a:r>
             <a:r>
-              <a:rPr lang="pl-PL" sz="1100" dirty="0">
+              <a:rPr lang="pl-PL" sz="1200" dirty="0">
                 <a:solidFill>
                   <a:srgbClr val="DCDCAA"/>
                 </a:solidFill>
@@ -14977,7 +15054,7 @@
               <a:t>+</a:t>
             </a:r>
             <a:r>
-              <a:rPr lang="pl-PL" sz="1100" dirty="0">
+              <a:rPr lang="pl-PL" sz="1200" dirty="0">
                 <a:solidFill>
                   <a:srgbClr val="CCCCCC"/>
                 </a:solidFill>
@@ -14986,7 +15063,7 @@
               <a:t> </a:t>
             </a:r>
             <a:r>
-              <a:rPr lang="pl-PL" sz="1100" dirty="0" err="1">
+              <a:rPr lang="pl-PL" sz="1200" dirty="0" err="1">
                 <a:solidFill>
                   <a:srgbClr val="9CDCFE"/>
                 </a:solidFill>
@@ -14994,7 +15071,7 @@
               </a:rPr>
               <a:t>f_rep</a:t>
             </a:r>
-            <a:endParaRPr lang="pl-PL" sz="1100" dirty="0">
+            <a:endParaRPr lang="pl-PL" sz="1200" dirty="0">
               <a:solidFill>
                 <a:srgbClr val="CCCCCC"/>
               </a:solidFill>
@@ -15003,7 +15080,7 @@
           </a:p>
           <a:p>
             <a:r>
-              <a:rPr lang="pl-PL" sz="1100" dirty="0">
+              <a:rPr lang="pl-PL" sz="1200" dirty="0">
                 <a:solidFill>
                   <a:srgbClr val="CCCCCC"/>
                 </a:solidFill>
@@ -15012,7 +15089,7 @@
               <a:t>    </a:t>
             </a:r>
             <a:r>
-              <a:rPr lang="pl-PL" sz="1100" dirty="0">
+              <a:rPr lang="pl-PL" sz="1200" dirty="0">
                 <a:solidFill>
                   <a:srgbClr val="C586C0"/>
                 </a:solidFill>
@@ -15021,7 +15098,7 @@
               <a:t>return</a:t>
             </a:r>
             <a:r>
-              <a:rPr lang="pl-PL" sz="1100" dirty="0">
+              <a:rPr lang="pl-PL" sz="1200" dirty="0">
                 <a:solidFill>
                   <a:srgbClr val="CCCCCC"/>
                 </a:solidFill>
@@ -15030,7 +15107,7 @@
               <a:t> </a:t>
             </a:r>
             <a:r>
-              <a:rPr lang="pl-PL" sz="1100" dirty="0" err="1">
+              <a:rPr lang="pl-PL" sz="1200" dirty="0" err="1">
                 <a:solidFill>
                   <a:srgbClr val="9CDCFE"/>
                 </a:solidFill>
@@ -15039,7 +15116,7 @@
               <a:t>total</a:t>
             </a:r>
             <a:r>
-              <a:rPr lang="pl-PL" sz="1100" dirty="0">
+              <a:rPr lang="pl-PL" sz="1200" dirty="0">
                 <a:solidFill>
                   <a:srgbClr val="CCCCCC"/>
                 </a:solidFill>
@@ -15048,7 +15125,7 @@
               <a:t> </a:t>
             </a:r>
             <a:r>
-              <a:rPr lang="pl-PL" sz="1100" dirty="0">
+              <a:rPr lang="pl-PL" sz="1200" dirty="0">
                 <a:solidFill>
                   <a:srgbClr val="DCDCAA"/>
                 </a:solidFill>
@@ -15057,7 +15134,7 @@
               <a:t>/</a:t>
             </a:r>
             <a:r>
-              <a:rPr lang="pl-PL" sz="1100" dirty="0">
+              <a:rPr lang="pl-PL" sz="1200" dirty="0">
                 <a:solidFill>
                   <a:srgbClr val="CCCCCC"/>
                 </a:solidFill>
@@ -15066,7 +15143,7 @@
               <a:t> (</a:t>
             </a:r>
             <a:r>
-              <a:rPr lang="pl-PL" sz="1100" dirty="0" err="1">
+              <a:rPr lang="pl-PL" sz="1200" dirty="0" err="1">
                 <a:solidFill>
                   <a:srgbClr val="4EC9B0"/>
                 </a:solidFill>
@@ -15075,7 +15152,7 @@
               <a:t>np</a:t>
             </a:r>
             <a:r>
-              <a:rPr lang="pl-PL" sz="1100" dirty="0" err="1">
+              <a:rPr lang="pl-PL" sz="1200" dirty="0" err="1">
                 <a:solidFill>
                   <a:srgbClr val="CCCCCC"/>
                 </a:solidFill>
@@ -15084,7 +15161,7 @@
               <a:t>.</a:t>
             </a:r>
             <a:r>
-              <a:rPr lang="pl-PL" sz="1100" dirty="0" err="1">
+              <a:rPr lang="pl-PL" sz="1200" dirty="0" err="1">
                 <a:solidFill>
                   <a:srgbClr val="4EC9B0"/>
                 </a:solidFill>
@@ -15093,7 +15170,7 @@
               <a:t>linalg</a:t>
             </a:r>
             <a:r>
-              <a:rPr lang="pl-PL" sz="1100" dirty="0" err="1">
+              <a:rPr lang="pl-PL" sz="1200" dirty="0" err="1">
                 <a:solidFill>
                   <a:srgbClr val="CCCCCC"/>
                 </a:solidFill>
@@ -15102,7 +15179,7 @@
               <a:t>.</a:t>
             </a:r>
             <a:r>
-              <a:rPr lang="pl-PL" sz="1100" dirty="0" err="1">
+              <a:rPr lang="pl-PL" sz="1200" dirty="0" err="1">
                 <a:solidFill>
                   <a:srgbClr val="DCDCAA"/>
                 </a:solidFill>
@@ -15111,7 +15188,7 @@
               <a:t>norm</a:t>
             </a:r>
             <a:r>
-              <a:rPr lang="pl-PL" sz="1100" dirty="0">
+              <a:rPr lang="pl-PL" sz="1200" dirty="0">
                 <a:solidFill>
                   <a:srgbClr val="CCCCCC"/>
                 </a:solidFill>
@@ -15120,7 +15197,7 @@
               <a:t>(</a:t>
             </a:r>
             <a:r>
-              <a:rPr lang="pl-PL" sz="1100" dirty="0" err="1">
+              <a:rPr lang="pl-PL" sz="1200" dirty="0" err="1">
                 <a:solidFill>
                   <a:srgbClr val="9CDCFE"/>
                 </a:solidFill>
@@ -15129,7 +15206,7 @@
               <a:t>total</a:t>
             </a:r>
             <a:r>
-              <a:rPr lang="pl-PL" sz="1100" dirty="0">
+              <a:rPr lang="pl-PL" sz="1200" dirty="0">
                 <a:solidFill>
                   <a:srgbClr val="CCCCCC"/>
                 </a:solidFill>
@@ -15138,7 +15215,7 @@
               <a:t>) </a:t>
             </a:r>
             <a:r>
-              <a:rPr lang="pl-PL" sz="1100" dirty="0">
+              <a:rPr lang="pl-PL" sz="1200" dirty="0">
                 <a:solidFill>
                   <a:srgbClr val="DCDCAA"/>
                 </a:solidFill>
@@ -15147,7 +15224,7 @@
               <a:t>+</a:t>
             </a:r>
             <a:r>
-              <a:rPr lang="pl-PL" sz="1100" dirty="0">
+              <a:rPr lang="pl-PL" sz="1200" dirty="0">
                 <a:solidFill>
                   <a:srgbClr val="CCCCCC"/>
                 </a:solidFill>
@@ -15156,7 +15233,7 @@
               <a:t> </a:t>
             </a:r>
             <a:r>
-              <a:rPr lang="pl-PL" sz="1100" dirty="0">
+              <a:rPr lang="pl-PL" sz="1200" dirty="0">
                 <a:solidFill>
                   <a:srgbClr val="B5CEA8"/>
                 </a:solidFill>
@@ -15165,7 +15242,7 @@
               <a:t>1e-6</a:t>
             </a:r>
             <a:r>
-              <a:rPr lang="pl-PL" sz="1100" dirty="0">
+              <a:rPr lang="pl-PL" sz="1200" dirty="0">
                 <a:solidFill>
                   <a:srgbClr val="CCCCCC"/>
                 </a:solidFill>
@@ -15174,7 +15251,7 @@
               <a:t>)  </a:t>
             </a:r>
             <a:r>
-              <a:rPr lang="pl-PL" sz="1100" dirty="0">
+              <a:rPr lang="pl-PL" sz="1200" dirty="0">
                 <a:solidFill>
                   <a:srgbClr val="6A9955"/>
                 </a:solidFill>
@@ -15183,7 +15260,7 @@
               <a:t># wektor </a:t>
             </a:r>
             <a:r>
-              <a:rPr lang="pl-PL" sz="1100" dirty="0" smtClean="0">
+              <a:rPr lang="pl-PL" sz="1200" dirty="0" smtClean="0">
                 <a:solidFill>
                   <a:srgbClr val="6A9955"/>
                 </a:solidFill>
@@ -15191,7 +15268,7 @@
               </a:rPr>
               <a:t>jednostkowy</a:t>
             </a:r>
-            <a:endParaRPr lang="pl-PL" sz="1100" dirty="0">
+            <a:endParaRPr lang="pl-PL" sz="1200" dirty="0">
               <a:solidFill>
                 <a:srgbClr val="CCCCCC"/>
               </a:solidFill>
@@ -26322,7 +26399,40 @@
                 <a:ea typeface="Calibri" pitchFamily="34" charset="-122"/>
                 <a:cs typeface="Calibri" pitchFamily="34" charset="-120"/>
               </a:rPr>
-              <a:t>Offset ±step_width/2 prostopadle do kierunku ruchu; 'left' flaga steruje naprzemlennością L/P.</a:t>
+              <a:t>Offset ±step_width/2 prostopadle do kierunku ruchu; 'left' flaga steruje </a:t>
+            </a:r>
+            <a:r>
+              <a:rPr lang="en-US" sz="1600" dirty="0" err="1">
+                <a:solidFill>
+                  <a:srgbClr val="E2EBF3"/>
+                </a:solidFill>
+                <a:latin typeface="Calibri" pitchFamily="34" charset="0"/>
+                <a:ea typeface="Calibri" pitchFamily="34" charset="-122"/>
+                <a:cs typeface="Calibri" pitchFamily="34" charset="-120"/>
+              </a:rPr>
+              <a:t>naprzemlennością</a:t>
+            </a:r>
+            <a:r>
+              <a:rPr lang="en-US" sz="1600" dirty="0">
+                <a:solidFill>
+                  <a:srgbClr val="E2EBF3"/>
+                </a:solidFill>
+                <a:latin typeface="Calibri" pitchFamily="34" charset="0"/>
+                <a:ea typeface="Calibri" pitchFamily="34" charset="-122"/>
+                <a:cs typeface="Calibri" pitchFamily="34" charset="-120"/>
+              </a:rPr>
+              <a:t> </a:t>
+            </a:r>
+            <a:r>
+              <a:rPr lang="en-US" sz="1600" dirty="0" smtClean="0">
+                <a:solidFill>
+                  <a:srgbClr val="E2EBF3"/>
+                </a:solidFill>
+                <a:latin typeface="Calibri" pitchFamily="34" charset="0"/>
+                <a:ea typeface="Calibri" pitchFamily="34" charset="-122"/>
+                <a:cs typeface="Calibri" pitchFamily="34" charset="-120"/>
+              </a:rPr>
+              <a:t>L/P</a:t>
             </a:r>
             <a:endParaRPr lang="en-US" sz="1600" dirty="0"/>
           </a:p>
@@ -31116,6 +31226,17 @@
               <a:buNone/>
             </a:pPr>
             <a:r>
+              <a:rPr lang="en-US" sz="1400" b="1" dirty="0">
+                <a:solidFill>
+                  <a:srgbClr val="E2EBF3"/>
+                </a:solidFill>
+                <a:latin typeface="Calibri" pitchFamily="34" charset="0"/>
+                <a:ea typeface="Calibri" pitchFamily="34" charset="-122"/>
+                <a:cs typeface="Calibri" pitchFamily="34" charset="-120"/>
+              </a:rPr>
+              <a:t>Planowanie globalne </a:t>
+            </a:r>
+            <a:r>
               <a:rPr lang="en-US" sz="1400" dirty="0">
                 <a:solidFill>
                   <a:srgbClr val="E2EBF3"/>
@@ -31124,7 +31245,7 @@
                 <a:ea typeface="Calibri" pitchFamily="34" charset="-122"/>
                 <a:cs typeface="Calibri" pitchFamily="34" charset="-120"/>
               </a:rPr>
-              <a:t>Planowanie globalne (A*, Dijkstra) wyznacza optymalną trasę; heurystyki i cost map sterują </a:t>
+              <a:t>(A*, Dijkstra) wyznacza optymalną trasę; heurystyki i cost map sterują </a:t>
             </a:r>
             <a:r>
               <a:rPr lang="en-US" sz="1400" dirty="0" err="1">
@@ -31252,6 +31373,17 @@
               <a:buNone/>
             </a:pPr>
             <a:r>
+              <a:rPr lang="en-US" sz="1400" b="1" dirty="0">
+                <a:solidFill>
+                  <a:srgbClr val="E2EBF3"/>
+                </a:solidFill>
+                <a:latin typeface="Calibri" pitchFamily="34" charset="0"/>
+                <a:ea typeface="Calibri" pitchFamily="34" charset="-122"/>
+                <a:cs typeface="Calibri" pitchFamily="34" charset="-120"/>
+              </a:rPr>
+              <a:t>Planista lokalny </a:t>
+            </a:r>
+            <a:r>
               <a:rPr lang="en-US" sz="1400" dirty="0">
                 <a:solidFill>
                   <a:srgbClr val="E2EBF3"/>
@@ -31260,7 +31392,7 @@
                 <a:ea typeface="Calibri" pitchFamily="34" charset="-122"/>
                 <a:cs typeface="Calibri" pitchFamily="34" charset="-120"/>
               </a:rPr>
-              <a:t>Planista lokalny (DWA, MPC, potential fields) reaguje na zmiany środowiska i </a:t>
+              <a:t>(DWA, MPC, potential fields) reaguje na zmiany środowiska i </a:t>
             </a:r>
             <a:r>
               <a:rPr lang="en-US" sz="1400" dirty="0" err="1">
@@ -31388,6 +31520,17 @@
               <a:buNone/>
             </a:pPr>
             <a:r>
+              <a:rPr lang="en-US" sz="1400" b="1" dirty="0">
+                <a:solidFill>
+                  <a:srgbClr val="E2EBF3"/>
+                </a:solidFill>
+                <a:latin typeface="Calibri" pitchFamily="34" charset="0"/>
+                <a:ea typeface="Calibri" pitchFamily="34" charset="-122"/>
+                <a:cs typeface="Calibri" pitchFamily="34" charset="-120"/>
+              </a:rPr>
+              <a:t>Stabilność</a:t>
+            </a:r>
+            <a:r>
               <a:rPr lang="en-US" sz="1400" dirty="0">
                 <a:solidFill>
                   <a:srgbClr val="E2EBF3"/>
@@ -31396,7 +31539,7 @@
                 <a:ea typeface="Calibri" pitchFamily="34" charset="-122"/>
                 <a:cs typeface="Calibri" pitchFamily="34" charset="-120"/>
               </a:rPr>
-              <a:t>Stabilność ma wyższy priorytet niż optymalność trasy – planista musi uwzględniać </a:t>
+              <a:t> ma wyższy priorytet niż optymalność trasy – planista musi uwzględniać </a:t>
             </a:r>
             <a:r>
               <a:rPr lang="en-US" sz="1400" dirty="0" err="1">
@@ -31524,6 +31667,17 @@
               <a:buNone/>
             </a:pPr>
             <a:r>
+              <a:rPr lang="en-US" sz="1400" b="1" dirty="0">
+                <a:solidFill>
+                  <a:srgbClr val="E2EBF3"/>
+                </a:solidFill>
+                <a:latin typeface="Calibri" pitchFamily="34" charset="0"/>
+                <a:ea typeface="Calibri" pitchFamily="34" charset="-122"/>
+                <a:cs typeface="Calibri" pitchFamily="34" charset="-120"/>
+              </a:rPr>
+              <a:t>Footstep planning </a:t>
+            </a:r>
+            <a:r>
               <a:rPr lang="en-US" sz="1400" dirty="0">
                 <a:solidFill>
                   <a:srgbClr val="E2EBF3"/>
@@ -31532,7 +31686,7 @@
                 <a:ea typeface="Calibri" pitchFamily="34" charset="-122"/>
                 <a:cs typeface="Calibri" pitchFamily="34" charset="-120"/>
               </a:rPr>
-              <a:t>Footstep planning tłumaczy geometryczną ścieżkę na fizyczną sekwencję kroków z </a:t>
+              <a:t>tłumaczy geometryczną ścieżkę na fizyczną sekwencję kroków z </a:t>
             </a:r>
             <a:r>
               <a:rPr lang="en-US" sz="1400" dirty="0" err="1">
@@ -31660,6 +31814,17 @@
               <a:buNone/>
             </a:pPr>
             <a:r>
+              <a:rPr lang="en-US" sz="1400" b="1" dirty="0">
+                <a:solidFill>
+                  <a:srgbClr val="E2EBF3"/>
+                </a:solidFill>
+                <a:latin typeface="Calibri" pitchFamily="34" charset="0"/>
+                <a:ea typeface="Calibri" pitchFamily="34" charset="-122"/>
+                <a:cs typeface="Calibri" pitchFamily="34" charset="-120"/>
+              </a:rPr>
+              <a:t>Trzy poziomy decyzji </a:t>
+            </a:r>
+            <a:r>
               <a:rPr lang="en-US" sz="1400" dirty="0">
                 <a:solidFill>
                   <a:srgbClr val="E2EBF3"/>
@@ -31668,7 +31833,7 @@
                 <a:ea typeface="Calibri" pitchFamily="34" charset="-122"/>
                 <a:cs typeface="Calibri" pitchFamily="34" charset="-120"/>
               </a:rPr>
-              <a:t>Trzy poziomy decyzji – globalny, lokalny, footstep – są sprzężone i muszą działać w </a:t>
+              <a:t>– globalny, lokalny, footstep – są sprzężone i muszą działać w </a:t>
             </a:r>
             <a:r>
               <a:rPr lang="en-US" sz="1400" dirty="0" err="1">
@@ -38046,7 +38211,7 @@
         <p:spPr>
           <a:xfrm>
             <a:off x="274320" y="1005839"/>
-            <a:ext cx="8595360" cy="3420527"/>
+            <a:ext cx="8595360" cy="3233951"/>
           </a:xfrm>
           <a:prstGeom prst="rect">
             <a:avLst/>
